--- a/statistics_08_Bayes_Bayesian.pptx
+++ b/statistics_08_Bayes_Bayesian.pptx
@@ -5,7 +5,7 @@
     <p:sldMasterId id="2147483659" r:id="rId1"/>
   </p:sldMasterIdLst>
   <p:notesMasterIdLst>
-    <p:notesMasterId r:id="rId14"/>
+    <p:notesMasterId r:id="rId15"/>
   </p:notesMasterIdLst>
   <p:sldIdLst>
     <p:sldId id="256" r:id="rId2"/>
@@ -20,6 +20,7 @@
     <p:sldId id="293" r:id="rId11"/>
     <p:sldId id="294" r:id="rId12"/>
     <p:sldId id="262" r:id="rId13"/>
+    <p:sldId id="297" r:id="rId14"/>
   </p:sldIdLst>
   <p:sldSz cx="12192000" cy="6858000"/>
   <p:notesSz cx="6858000" cy="9144000"/>
@@ -15929,8 +15930,8 @@
           <a:chExt cx="0" cy="0"/>
         </a:xfrm>
       </p:grpSpPr>
-      <mc:AlternateContent xmlns:mc="http://schemas.openxmlformats.org/markup-compatibility/2006">
-        <mc:Choice xmlns:a14="http://schemas.microsoft.com/office/drawing/2010/main" Requires="a14">
+      <mc:AlternateContent xmlns:mc="http://schemas.openxmlformats.org/markup-compatibility/2006" xmlns:a14="http://schemas.microsoft.com/office/drawing/2010/main">
+        <mc:Choice Requires="a14">
           <p:sp>
             <p:nvSpPr>
               <p:cNvPr id="88" name="Google Shape;88;p13"/>
@@ -16377,7 +16378,7 @@
             </p:txBody>
           </p:sp>
         </mc:Choice>
-        <mc:Fallback>
+        <mc:Fallback xmlns="">
           <p:sp>
             <p:nvSpPr>
               <p:cNvPr id="88" name="Google Shape;88;p13"/>
@@ -19583,6 +19584,275 @@
 </p:sld>
 </file>
 
+<file path=ppt/slides/slide13.xml><?xml version="1.0" encoding="utf-8"?>
+<p:sld xmlns:a="http://schemas.openxmlformats.org/drawingml/2006/main" xmlns:r="http://schemas.openxmlformats.org/officeDocument/2006/relationships" xmlns:p="http://schemas.openxmlformats.org/presentationml/2006/main">
+  <p:cSld>
+    <p:spTree>
+      <p:nvGrpSpPr>
+        <p:cNvPr id="1" name=""/>
+        <p:cNvGrpSpPr/>
+        <p:nvPr/>
+      </p:nvGrpSpPr>
+      <p:grpSpPr>
+        <a:xfrm>
+          <a:off x="0" y="0"/>
+          <a:ext cx="0" cy="0"/>
+          <a:chOff x="0" y="0"/>
+          <a:chExt cx="0" cy="0"/>
+        </a:xfrm>
+      </p:grpSpPr>
+      <p:sp>
+        <p:nvSpPr>
+          <p:cNvPr id="2" name="TextBox 1">
+            <a:extLst>
+              <a:ext uri="{FF2B5EF4-FFF2-40B4-BE49-F238E27FC236}">
+                <a16:creationId xmlns:a16="http://schemas.microsoft.com/office/drawing/2014/main" id="{866E1CEB-F40C-EB46-AE42-94921324FD7D}"/>
+              </a:ext>
+            </a:extLst>
+          </p:cNvPr>
+          <p:cNvSpPr txBox="1"/>
+          <p:nvPr/>
+        </p:nvSpPr>
+        <p:spPr>
+          <a:xfrm>
+            <a:off x="-1" y="37572"/>
+            <a:ext cx="8277101" cy="400110"/>
+          </a:xfrm>
+          <a:prstGeom prst="rect">
+            <a:avLst/>
+          </a:prstGeom>
+          <a:noFill/>
+        </p:spPr>
+        <p:txBody>
+          <a:bodyPr wrap="square" rtlCol="0">
+            <a:spAutoFit/>
+          </a:bodyPr>
+          <a:lstStyle/>
+          <a:p>
+            <a:r>
+              <a:rPr lang="en-US" sz="2000" b="1" dirty="0"/>
+              <a:t>Bayesian Exercise Questions &amp; Conditional Probability Questions</a:t>
+            </a:r>
+          </a:p>
+        </p:txBody>
+      </p:sp>
+      <p:sp>
+        <p:nvSpPr>
+          <p:cNvPr id="3" name="TextBox 2">
+            <a:extLst>
+              <a:ext uri="{FF2B5EF4-FFF2-40B4-BE49-F238E27FC236}">
+                <a16:creationId xmlns:a16="http://schemas.microsoft.com/office/drawing/2014/main" id="{42F87632-23F8-1548-BE7C-6E509D69DC76}"/>
+              </a:ext>
+            </a:extLst>
+          </p:cNvPr>
+          <p:cNvSpPr txBox="1"/>
+          <p:nvPr/>
+        </p:nvSpPr>
+        <p:spPr>
+          <a:xfrm>
+            <a:off x="118753" y="560792"/>
+            <a:ext cx="8906494" cy="4185761"/>
+          </a:xfrm>
+          <a:prstGeom prst="rect">
+            <a:avLst/>
+          </a:prstGeom>
+          <a:noFill/>
+        </p:spPr>
+        <p:txBody>
+          <a:bodyPr wrap="square" rtlCol="0">
+            <a:spAutoFit/>
+          </a:bodyPr>
+          <a:lstStyle/>
+          <a:p>
+            <a:pPr marL="285750" indent="-285750">
+              <a:buFont typeface="Arial" panose="020B0604020202020204" pitchFamily="34" charset="0"/>
+              <a:buChar char="•"/>
+            </a:pPr>
+            <a:r>
+              <a:rPr lang="en-US" dirty="0"/>
+              <a:t>A jar has 1000 coins, of which 999 are fair and 1 is double-headed. </a:t>
+            </a:r>
+            <a:br>
+              <a:rPr lang="en-US" dirty="0"/>
+            </a:br>
+            <a:r>
+              <a:rPr lang="en-US" dirty="0"/>
+              <a:t>Pick a coin at random, and toss it 10 times. </a:t>
+            </a:r>
+            <a:br>
+              <a:rPr lang="en-US" dirty="0"/>
+            </a:br>
+            <a:r>
+              <a:rPr lang="en-US" dirty="0"/>
+              <a:t>Given that you see 10 heads, what is the probability that the next toss of that coin is also a head?</a:t>
+            </a:r>
+          </a:p>
+          <a:p>
+            <a:pPr marL="285750" indent="-285750">
+              <a:buFont typeface="Arial" panose="020B0604020202020204" pitchFamily="34" charset="0"/>
+              <a:buChar char="•"/>
+            </a:pPr>
+            <a:endParaRPr lang="en-US" dirty="0"/>
+          </a:p>
+          <a:p>
+            <a:pPr marL="285750" indent="-285750">
+              <a:buFont typeface="Arial" panose="020B0604020202020204" pitchFamily="34" charset="0"/>
+              <a:buChar char="•"/>
+            </a:pPr>
+            <a:r>
+              <a:rPr lang="en-US" dirty="0"/>
+              <a:t>50% of all people who receive a first interview receive a second interview.</a:t>
+            </a:r>
+            <a:br>
+              <a:rPr lang="en-US" dirty="0"/>
+            </a:br>
+            <a:r>
+              <a:rPr lang="en-US" dirty="0"/>
+              <a:t>95% of those who got a second interview felt they had a good first interview.</a:t>
+            </a:r>
+            <a:br>
+              <a:rPr lang="en-US" dirty="0"/>
+            </a:br>
+            <a:r>
+              <a:rPr lang="en-US" dirty="0"/>
+              <a:t>75% of those who didn't get a second interview felt they had a good first interview.</a:t>
+            </a:r>
+            <a:br>
+              <a:rPr lang="en-US" dirty="0"/>
+            </a:br>
+            <a:r>
+              <a:rPr lang="en-US" dirty="0"/>
+              <a:t>If you feel that you had a good first interview, what is the probability you will receive a second interview?</a:t>
+            </a:r>
+          </a:p>
+          <a:p>
+            <a:pPr marL="285750" indent="-285750">
+              <a:buFont typeface="Arial" panose="020B0604020202020204" pitchFamily="34" charset="0"/>
+              <a:buChar char="•"/>
+            </a:pPr>
+            <a:endParaRPr lang="en-US" dirty="0"/>
+          </a:p>
+          <a:p>
+            <a:pPr marL="285750" indent="-285750">
+              <a:buFont typeface="Arial" panose="020B0604020202020204" pitchFamily="34" charset="0"/>
+              <a:buChar char="•"/>
+            </a:pPr>
+            <a:r>
+              <a:rPr lang="en-US" dirty="0"/>
+              <a:t>You're about to get on a plane to Seattle. You want to know if you should bring an umbrella. You call 3 random friends of yours who live there and ask each independently if it's raining. Each of your friends has a 2/3 chance of telling you the truth and a 1/3 chance of messing with you by lying. All 3 friends tell you that "Yes" it is raining. What is the probability that it's actually raining in Seattle?</a:t>
+            </a:r>
+          </a:p>
+          <a:p>
+            <a:pPr marL="285750" indent="-285750">
+              <a:buFont typeface="Arial" panose="020B0604020202020204" pitchFamily="34" charset="0"/>
+              <a:buChar char="•"/>
+            </a:pPr>
+            <a:endParaRPr lang="en-US" dirty="0"/>
+          </a:p>
+          <a:p>
+            <a:pPr marL="285750" indent="-285750">
+              <a:buFont typeface="Arial" panose="020B0604020202020204" pitchFamily="34" charset="0"/>
+              <a:buChar char="•"/>
+            </a:pPr>
+            <a:r>
+              <a:rPr lang="en-US" dirty="0"/>
+              <a:t>Drawing a pair of (x, y) from a joint Gaussian distribution with 0 covariance. Knowing the </a:t>
+            </a:r>
+            <a:r>
+              <a:rPr lang="en-US" dirty="0" err="1"/>
+              <a:t>stndard</a:t>
+            </a:r>
+            <a:r>
+              <a:rPr lang="en-US" dirty="0"/>
+              <a:t> deviations of x and y and knowing z = x + y, what is your best guess for x? </a:t>
+            </a:r>
+          </a:p>
+          <a:p>
+            <a:pPr marL="285750" indent="-285750">
+              <a:buFont typeface="Arial" panose="020B0604020202020204" pitchFamily="34" charset="0"/>
+              <a:buChar char="•"/>
+            </a:pPr>
+            <a:endParaRPr lang="en-US" dirty="0"/>
+          </a:p>
+          <a:p>
+            <a:pPr marL="285750" indent="-285750">
+              <a:buFont typeface="Arial" panose="020B0604020202020204" pitchFamily="34" charset="0"/>
+              <a:buChar char="•"/>
+            </a:pPr>
+            <a:r>
+              <a:rPr lang="en-US" dirty="0"/>
+              <a:t>5 babies in a room, 2 boys and 3 girls. one baby with unknown sex is added. Randomly choose one baby and the result is a boy. What's the prob that the added baby is a boy?</a:t>
+            </a:r>
+          </a:p>
+        </p:txBody>
+      </p:sp>
+      <p:sp>
+        <p:nvSpPr>
+          <p:cNvPr id="4" name="TextBox 3">
+            <a:extLst>
+              <a:ext uri="{FF2B5EF4-FFF2-40B4-BE49-F238E27FC236}">
+                <a16:creationId xmlns:a16="http://schemas.microsoft.com/office/drawing/2014/main" id="{1233587D-200E-7241-9DB9-3DF608B2814A}"/>
+              </a:ext>
+            </a:extLst>
+          </p:cNvPr>
+          <p:cNvSpPr txBox="1"/>
+          <p:nvPr/>
+        </p:nvSpPr>
+        <p:spPr>
+          <a:xfrm>
+            <a:off x="118753" y="5700156"/>
+            <a:ext cx="9239003" cy="738664"/>
+          </a:xfrm>
+          <a:prstGeom prst="rect">
+            <a:avLst/>
+          </a:prstGeom>
+          <a:noFill/>
+        </p:spPr>
+        <p:txBody>
+          <a:bodyPr wrap="square" rtlCol="0">
+            <a:spAutoFit/>
+          </a:bodyPr>
+          <a:lstStyle/>
+          <a:p>
+            <a:r>
+              <a:rPr lang="en-US" dirty="0"/>
+              <a:t> - </a:t>
+            </a:r>
+            <a:r>
+              <a:rPr lang="en-US" dirty="0">
+                <a:hlinkClick r:id="rId2"/>
+              </a:rPr>
+              <a:t>https://www.glassdoor.com/Interview/bayesian-interview-questions-SRCH_KT0,8.htm</a:t>
+            </a:r>
+            <a:r>
+              <a:rPr lang="en-US" dirty="0"/>
+              <a:t> – </a:t>
+            </a:r>
+          </a:p>
+          <a:p>
+            <a:r>
+              <a:rPr lang="en-US" dirty="0"/>
+              <a:t> - - </a:t>
+            </a:r>
+          </a:p>
+          <a:p>
+            <a:endParaRPr lang="en-US" dirty="0"/>
+          </a:p>
+        </p:txBody>
+      </p:sp>
+    </p:spTree>
+    <p:extLst>
+      <p:ext uri="{BB962C8B-B14F-4D97-AF65-F5344CB8AC3E}">
+        <p14:creationId xmlns:p14="http://schemas.microsoft.com/office/powerpoint/2010/main" val="2196273078"/>
+      </p:ext>
+    </p:extLst>
+  </p:cSld>
+  <p:clrMapOvr>
+    <a:masterClrMapping/>
+  </p:clrMapOvr>
+</p:sld>
+</file>
+
 <file path=ppt/slides/slide2.xml><?xml version="1.0" encoding="utf-8"?>
 <p:sld xmlns:a="http://schemas.openxmlformats.org/drawingml/2006/main" xmlns:r="http://schemas.openxmlformats.org/officeDocument/2006/relationships" xmlns:p="http://schemas.openxmlformats.org/presentationml/2006/main">
   <p:cSld>
@@ -22869,8 +23139,8 @@
         </p:nvSpPr>
         <p:spPr>
           <a:xfrm>
-            <a:off x="6674033" y="2032595"/>
-            <a:ext cx="4287044" cy="2050775"/>
+            <a:off x="4109673" y="2068519"/>
+            <a:ext cx="3347883" cy="2050775"/>
           </a:xfrm>
           <a:prstGeom prst="rect">
             <a:avLst/>
@@ -22904,7 +23174,7 @@
                 <a:cs typeface="Calibri"/>
                 <a:sym typeface="Calibri"/>
               </a:rPr>
-              <a:t>A = Coffee, B = Damaged</a:t>
+              <a:t>A = Coffee, B = Damaged, P = Probability</a:t>
             </a:r>
             <a:endParaRPr lang="en-US" sz="1200" dirty="0">
               <a:solidFill>
@@ -22919,6 +23189,52 @@
           <a:p>
             <a:pPr lvl="0"/>
             <a:r>
+              <a:rPr lang="en-US" sz="1200" b="1" dirty="0">
+                <a:solidFill>
+                  <a:srgbClr val="00B0F0"/>
+                </a:solidFill>
+                <a:latin typeface="Calibri"/>
+                <a:ea typeface="Calibri"/>
+                <a:cs typeface="Calibri"/>
+                <a:sym typeface="Calibri"/>
+              </a:rPr>
+              <a:t>P(A) = 40% = P( </a:t>
+            </a:r>
+            <a:r>
+              <a:rPr lang="en-US" sz="1200" b="1" dirty="0">
+                <a:solidFill>
+                  <a:srgbClr val="00B0F0"/>
+                </a:solidFill>
+                <a:latin typeface="Calibri"/>
+                <a:cs typeface="Calibri"/>
+                <a:sym typeface="Calibri"/>
+              </a:rPr>
+              <a:t>Coffee )    # </a:t>
+            </a:r>
+            <a:r>
+              <a:rPr lang="en-US" sz="1200" b="1" dirty="0">
+                <a:solidFill>
+                  <a:srgbClr val="00B0F0"/>
+                </a:solidFill>
+                <a:latin typeface="Calibri"/>
+                <a:ea typeface="Calibri"/>
+                <a:cs typeface="Calibri"/>
+                <a:sym typeface="Calibri"/>
+              </a:rPr>
+              <a:t>Yellow</a:t>
+            </a:r>
+          </a:p>
+          <a:p>
+            <a:pPr marL="0" marR="0" lvl="0" indent="0" algn="l" rtl="0">
+              <a:spcBef>
+                <a:spcPts val="0"/>
+              </a:spcBef>
+              <a:spcAft>
+                <a:spcPts val="0"/>
+              </a:spcAft>
+              <a:buNone/>
+            </a:pPr>
+            <a:r>
               <a:rPr lang="en-US" sz="1200" dirty="0">
                 <a:solidFill>
                   <a:schemeClr val="dk1"/>
@@ -22928,53 +23244,7 @@
                 <a:cs typeface="Calibri"/>
                 <a:sym typeface="Calibri"/>
               </a:rPr>
-              <a:t>P(A) = 40% = probability of </a:t>
-            </a:r>
-            <a:r>
-              <a:rPr lang="en-US" sz="1200" dirty="0">
-                <a:solidFill>
-                  <a:schemeClr val="dk1"/>
-                </a:solidFill>
-                <a:latin typeface="Calibri"/>
-                <a:cs typeface="Calibri"/>
-                <a:sym typeface="Calibri"/>
-              </a:rPr>
-              <a:t>Coffee</a:t>
-            </a:r>
-            <a:r>
-              <a:rPr lang="en-US" sz="1200" dirty="0">
-                <a:solidFill>
-                  <a:schemeClr val="dk1"/>
-                </a:solidFill>
-                <a:latin typeface="Calibri"/>
-                <a:ea typeface="Calibri"/>
-                <a:cs typeface="Calibri"/>
-                <a:sym typeface="Calibri"/>
-              </a:rPr>
-              <a:t> (Yellow)</a:t>
-            </a:r>
-          </a:p>
-          <a:p>
-            <a:pPr marL="0" marR="0" lvl="0" indent="0" algn="l" rtl="0">
-              <a:spcBef>
-                <a:spcPts val="0"/>
-              </a:spcBef>
-              <a:spcAft>
-                <a:spcPts val="0"/>
-              </a:spcAft>
-              <a:buNone/>
-            </a:pPr>
-            <a:r>
-              <a:rPr lang="en-US" sz="1200" dirty="0">
-                <a:solidFill>
-                  <a:schemeClr val="dk1"/>
-                </a:solidFill>
-                <a:latin typeface="Calibri"/>
-                <a:ea typeface="Calibri"/>
-                <a:cs typeface="Calibri"/>
-                <a:sym typeface="Calibri"/>
-              </a:rPr>
-              <a:t>P(B) = 5% = probability of Damaged (Blue)</a:t>
+              <a:t>P(B) = 5% = P( Damaged  )  # Blue</a:t>
             </a:r>
           </a:p>
           <a:p>
@@ -23009,7 +23279,7 @@
                 <a:cs typeface="Calibri"/>
                 <a:sym typeface="Calibri"/>
               </a:rPr>
-              <a:t>P(B|A) = 10% = probability of Damaged given that Coffee</a:t>
+              <a:t>P(B|A) = 10% = P( Damaged given that Coffee )</a:t>
             </a:r>
           </a:p>
           <a:p>
@@ -23024,7 +23294,7 @@
                 <a:cs typeface="Calibri"/>
                 <a:sym typeface="Calibri"/>
               </a:rPr>
-              <a:t>P(A|B) = 80% = probability of Coffee given that Damaged</a:t>
+              <a:t>P(A|B) = 80% = P( Coffee given that Damaged )</a:t>
             </a:r>
           </a:p>
           <a:p>
@@ -23081,7 +23351,7 @@
                 <a:cs typeface="Calibri"/>
                 <a:sym typeface="Calibri"/>
               </a:rPr>
-              <a:t>P(A &amp; B) = 4% = probability of Coffee &amp; Damaged (Green)</a:t>
+              <a:t>P(A &amp; B) = 4% = P(Coffee &amp; Damaged)  # Green</a:t>
             </a:r>
           </a:p>
           <a:p>
@@ -23127,9 +23397,9 @@
               <a:buNone/>
             </a:pPr>
             <a:r>
-              <a:rPr lang="en-US" sz="1200" dirty="0">
-                <a:solidFill>
-                  <a:schemeClr val="dk1"/>
+              <a:rPr lang="en-US" sz="1200" b="1" dirty="0">
+                <a:solidFill>
+                  <a:srgbClr val="00B0F0"/>
                 </a:solidFill>
                 <a:latin typeface="Calibri"/>
                 <a:ea typeface="Calibri"/>
@@ -23155,8 +23425,8 @@
         </p:nvSpPr>
         <p:spPr>
           <a:xfrm>
-            <a:off x="1531632" y="1974106"/>
-            <a:ext cx="5033285" cy="2229852"/>
+            <a:off x="116387" y="1974106"/>
+            <a:ext cx="3991888" cy="2229852"/>
           </a:xfrm>
           <a:prstGeom prst="rect">
             <a:avLst/>
@@ -23215,7 +23485,7 @@
         </p:nvSpPr>
         <p:spPr>
           <a:xfrm>
-            <a:off x="2175116" y="2278906"/>
+            <a:off x="263208" y="2278906"/>
             <a:ext cx="3224463" cy="1764631"/>
           </a:xfrm>
           <a:prstGeom prst="ellipse">
@@ -23275,7 +23545,7 @@
         </p:nvSpPr>
         <p:spPr>
           <a:xfrm>
-            <a:off x="4351034" y="2710753"/>
+            <a:off x="2439126" y="2710753"/>
             <a:ext cx="1397874" cy="900935"/>
           </a:xfrm>
           <a:prstGeom prst="ellipse">
@@ -23337,7 +23607,7 @@
         </p:nvSpPr>
         <p:spPr>
           <a:xfrm>
-            <a:off x="3076580" y="2710753"/>
+            <a:off x="1164672" y="2710753"/>
             <a:ext cx="971694" cy="647909"/>
           </a:xfrm>
           <a:prstGeom prst="rect">
@@ -23411,8 +23681,8 @@
         </p:nvSpPr>
         <p:spPr>
           <a:xfrm>
-            <a:off x="5399579" y="2985773"/>
-            <a:ext cx="1397874" cy="745778"/>
+            <a:off x="3065807" y="2935014"/>
+            <a:ext cx="1246477" cy="745778"/>
           </a:xfrm>
           <a:prstGeom prst="rect">
             <a:avLst/>
@@ -23447,7 +23717,7 @@
                 <a:cs typeface="Calibri"/>
                 <a:sym typeface="Calibri"/>
               </a:rPr>
-              <a:t>B</a:t>
+              <a:t>        B</a:t>
             </a:r>
           </a:p>
           <a:p>
@@ -23498,7 +23768,7 @@
         </p:nvSpPr>
         <p:spPr>
           <a:xfrm>
-            <a:off x="4701470" y="1956549"/>
+            <a:off x="2679402" y="1974106"/>
             <a:ext cx="1530878" cy="461665"/>
           </a:xfrm>
           <a:prstGeom prst="rect">
@@ -23545,274 +23815,6 @@
               <a:cs typeface="Calibri"/>
               <a:sym typeface="Calibri"/>
             </a:endParaRPr>
-          </a:p>
-        </p:txBody>
-      </p:sp>
-      <p:sp>
-        <p:nvSpPr>
-          <p:cNvPr id="12" name="Google Shape;89;p13">
-            <a:extLst>
-              <a:ext uri="{FF2B5EF4-FFF2-40B4-BE49-F238E27FC236}">
-                <a16:creationId xmlns:a16="http://schemas.microsoft.com/office/drawing/2014/main" id="{3C8C744F-A8AE-1E49-818B-4076BC1271A0}"/>
-              </a:ext>
-            </a:extLst>
-          </p:cNvPr>
-          <p:cNvSpPr txBox="1"/>
-          <p:nvPr/>
-        </p:nvSpPr>
-        <p:spPr>
-          <a:xfrm>
-            <a:off x="6674032" y="4576281"/>
-            <a:ext cx="4287043" cy="2050775"/>
-          </a:xfrm>
-          <a:prstGeom prst="rect">
-            <a:avLst/>
-          </a:prstGeom>
-          <a:noFill/>
-          <a:ln>
-            <a:noFill/>
-          </a:ln>
-        </p:spPr>
-        <p:txBody>
-          <a:bodyPr spcFirstLastPara="1" wrap="square" lIns="91425" tIns="45700" rIns="91425" bIns="45700" anchor="t" anchorCtr="0">
-            <a:noAutofit/>
-          </a:bodyPr>
-          <a:lstStyle/>
-          <a:p>
-            <a:pPr marL="0" marR="0" lvl="0" indent="0" algn="l" rtl="0">
-              <a:spcBef>
-                <a:spcPts val="0"/>
-              </a:spcBef>
-              <a:spcAft>
-                <a:spcPts val="0"/>
-              </a:spcAft>
-              <a:buNone/>
-            </a:pPr>
-            <a:r>
-              <a:rPr lang="en-US" sz="1200" dirty="0">
-                <a:solidFill>
-                  <a:schemeClr val="dk1"/>
-                </a:solidFill>
-                <a:latin typeface="Calibri"/>
-                <a:cs typeface="Calibri"/>
-                <a:sym typeface="Calibri"/>
-              </a:rPr>
-              <a:t>A = Coffee, B = Damaged</a:t>
-            </a:r>
-            <a:endParaRPr lang="en-US" sz="1200" dirty="0">
-              <a:solidFill>
-                <a:schemeClr val="dk1"/>
-              </a:solidFill>
-              <a:latin typeface="Calibri"/>
-              <a:ea typeface="Calibri"/>
-              <a:cs typeface="Calibri"/>
-              <a:sym typeface="Calibri"/>
-            </a:endParaRPr>
-          </a:p>
-          <a:p>
-            <a:pPr lvl="0"/>
-            <a:r>
-              <a:rPr lang="en-US" sz="1200" dirty="0">
-                <a:solidFill>
-                  <a:schemeClr val="dk1"/>
-                </a:solidFill>
-                <a:latin typeface="Calibri"/>
-                <a:ea typeface="Calibri"/>
-                <a:cs typeface="Calibri"/>
-                <a:sym typeface="Calibri"/>
-              </a:rPr>
-              <a:t>P(A) = 5% = probability of </a:t>
-            </a:r>
-            <a:r>
-              <a:rPr lang="en-US" sz="1200" dirty="0">
-                <a:solidFill>
-                  <a:schemeClr val="dk1"/>
-                </a:solidFill>
-                <a:latin typeface="Calibri"/>
-                <a:cs typeface="Calibri"/>
-                <a:sym typeface="Calibri"/>
-              </a:rPr>
-              <a:t>Coffee</a:t>
-            </a:r>
-            <a:r>
-              <a:rPr lang="en-US" sz="1200" dirty="0">
-                <a:solidFill>
-                  <a:schemeClr val="dk1"/>
-                </a:solidFill>
-                <a:latin typeface="Calibri"/>
-                <a:ea typeface="Calibri"/>
-                <a:cs typeface="Calibri"/>
-                <a:sym typeface="Calibri"/>
-              </a:rPr>
-              <a:t> (Yellow)</a:t>
-            </a:r>
-          </a:p>
-          <a:p>
-            <a:pPr marL="0" marR="0" lvl="0" indent="0" algn="l" rtl="0">
-              <a:spcBef>
-                <a:spcPts val="0"/>
-              </a:spcBef>
-              <a:spcAft>
-                <a:spcPts val="0"/>
-              </a:spcAft>
-              <a:buNone/>
-            </a:pPr>
-            <a:r>
-              <a:rPr lang="en-US" sz="1200" dirty="0">
-                <a:solidFill>
-                  <a:schemeClr val="dk1"/>
-                </a:solidFill>
-                <a:latin typeface="Calibri"/>
-                <a:ea typeface="Calibri"/>
-                <a:cs typeface="Calibri"/>
-                <a:sym typeface="Calibri"/>
-              </a:rPr>
-              <a:t>P(B) = 5% = probability of Damaged (Blue)</a:t>
-            </a:r>
-          </a:p>
-          <a:p>
-            <a:pPr lvl="0"/>
-            <a:endParaRPr lang="en-US" sz="1200" dirty="0">
-              <a:solidFill>
-                <a:schemeClr val="dk1"/>
-              </a:solidFill>
-              <a:latin typeface="Calibri"/>
-              <a:ea typeface="Calibri"/>
-              <a:cs typeface="Calibri"/>
-              <a:sym typeface="Calibri"/>
-            </a:endParaRPr>
-          </a:p>
-          <a:p>
-            <a:r>
-              <a:rPr lang="en-US" sz="1200" b="1" dirty="0">
-                <a:solidFill>
-                  <a:srgbClr val="00B0F0"/>
-                </a:solidFill>
-                <a:latin typeface="Calibri"/>
-                <a:cs typeface="Calibri"/>
-                <a:sym typeface="Calibri"/>
-              </a:rPr>
-              <a:t>P(B|A) = 80% = probability of Damaged given that Coffee</a:t>
-            </a:r>
-          </a:p>
-          <a:p>
-            <a:pPr lvl="0"/>
-            <a:r>
-              <a:rPr lang="en-US" sz="1200" dirty="0">
-                <a:solidFill>
-                  <a:schemeClr val="dk1"/>
-                </a:solidFill>
-                <a:latin typeface="Calibri"/>
-                <a:ea typeface="Calibri"/>
-                <a:cs typeface="Calibri"/>
-                <a:sym typeface="Calibri"/>
-              </a:rPr>
-              <a:t>P(A|B) = 80% = probability of Coffee given that Damaged</a:t>
-            </a:r>
-          </a:p>
-          <a:p>
-            <a:pPr lvl="0"/>
-            <a:endParaRPr lang="en-US" sz="1200" dirty="0">
-              <a:solidFill>
-                <a:schemeClr val="dk1"/>
-              </a:solidFill>
-              <a:latin typeface="Calibri"/>
-              <a:ea typeface="Calibri"/>
-              <a:cs typeface="Calibri"/>
-              <a:sym typeface="Calibri"/>
-            </a:endParaRPr>
-          </a:p>
-          <a:p>
-            <a:pPr marL="0" marR="0" lvl="0" indent="0" algn="l" rtl="0">
-              <a:spcBef>
-                <a:spcPts val="0"/>
-              </a:spcBef>
-              <a:spcAft>
-                <a:spcPts val="0"/>
-              </a:spcAft>
-              <a:buNone/>
-            </a:pPr>
-            <a:r>
-              <a:rPr lang="en-US" sz="1200" dirty="0">
-                <a:solidFill>
-                  <a:schemeClr val="dk1"/>
-                </a:solidFill>
-                <a:latin typeface="Calibri"/>
-                <a:ea typeface="Calibri"/>
-                <a:cs typeface="Calibri"/>
-                <a:sym typeface="Calibri"/>
-              </a:rPr>
-              <a:t>Intersection:</a:t>
-            </a:r>
-          </a:p>
-          <a:p>
-            <a:r>
-              <a:rPr lang="en-US" sz="1200" dirty="0">
-                <a:solidFill>
-                  <a:schemeClr val="dk1"/>
-                </a:solidFill>
-                <a:latin typeface="Calibri"/>
-                <a:ea typeface="Calibri"/>
-                <a:cs typeface="Calibri"/>
-                <a:sym typeface="Calibri"/>
-              </a:rPr>
-              <a:t>P(A &amp; B) = 4% = probability of Coffee &amp; Damaged (Green)</a:t>
-            </a:r>
-          </a:p>
-          <a:p>
-            <a:pPr marL="0" marR="0" lvl="0" indent="0" algn="l" rtl="0">
-              <a:spcBef>
-                <a:spcPts val="0"/>
-              </a:spcBef>
-              <a:spcAft>
-                <a:spcPts val="0"/>
-              </a:spcAft>
-              <a:buNone/>
-            </a:pPr>
-            <a:r>
-              <a:rPr lang="en-US" sz="1200" dirty="0">
-                <a:solidFill>
-                  <a:schemeClr val="dk1"/>
-                </a:solidFill>
-                <a:latin typeface="Calibri"/>
-                <a:ea typeface="Calibri"/>
-                <a:cs typeface="Calibri"/>
-                <a:sym typeface="Calibri"/>
-              </a:rPr>
-              <a:t>P(A|B)*P(B) = 80%*5% = 4%</a:t>
-            </a:r>
-            <a:endParaRPr sz="1200" dirty="0">
-              <a:solidFill>
-                <a:schemeClr val="dk1"/>
-              </a:solidFill>
-              <a:latin typeface="Calibri"/>
-              <a:ea typeface="Calibri"/>
-              <a:cs typeface="Calibri"/>
-              <a:sym typeface="Calibri"/>
-            </a:endParaRPr>
-          </a:p>
-          <a:p>
-            <a:pPr marL="0" marR="0" lvl="0" indent="0" algn="l" rtl="0">
-              <a:spcBef>
-                <a:spcPts val="0"/>
-              </a:spcBef>
-              <a:spcAft>
-                <a:spcPts val="0"/>
-              </a:spcAft>
-              <a:buNone/>
-            </a:pPr>
-            <a:r>
-              <a:rPr lang="en-US" sz="1200" dirty="0">
-                <a:solidFill>
-                  <a:schemeClr val="dk1"/>
-                </a:solidFill>
-                <a:latin typeface="Calibri"/>
-                <a:ea typeface="Calibri"/>
-                <a:cs typeface="Calibri"/>
-                <a:sym typeface="Calibri"/>
-              </a:rPr>
-              <a:t>P(B|A)*P(A) = 80%*5% = 4%</a:t>
-            </a:r>
           </a:p>
         </p:txBody>
       </p:sp>
@@ -23830,8 +23832,8 @@
         </p:nvSpPr>
         <p:spPr>
           <a:xfrm>
-            <a:off x="1531632" y="4517792"/>
-            <a:ext cx="5033285" cy="2229852"/>
+            <a:off x="116387" y="4517792"/>
+            <a:ext cx="3991888" cy="2229852"/>
           </a:xfrm>
           <a:prstGeom prst="rect">
             <a:avLst/>
@@ -23890,7 +23892,7 @@
         </p:nvSpPr>
         <p:spPr>
           <a:xfrm>
-            <a:off x="4001705" y="5384791"/>
+            <a:off x="2089797" y="5384791"/>
             <a:ext cx="1397874" cy="900935"/>
           </a:xfrm>
           <a:prstGeom prst="ellipse">
@@ -23950,7 +23952,7 @@
         </p:nvSpPr>
         <p:spPr>
           <a:xfrm>
-            <a:off x="4351034" y="5254439"/>
+            <a:off x="2439126" y="5254439"/>
             <a:ext cx="1397874" cy="900935"/>
           </a:xfrm>
           <a:prstGeom prst="ellipse">
@@ -24012,7 +24014,7 @@
         </p:nvSpPr>
         <p:spPr>
           <a:xfrm>
-            <a:off x="4048274" y="5632718"/>
+            <a:off x="2136366" y="5632718"/>
             <a:ext cx="581015" cy="431253"/>
           </a:xfrm>
           <a:prstGeom prst="rect">
@@ -24076,7 +24078,7 @@
         </p:nvSpPr>
         <p:spPr>
           <a:xfrm>
-            <a:off x="5379642" y="5384791"/>
+            <a:off x="3467734" y="5384791"/>
             <a:ext cx="640540" cy="433753"/>
           </a:xfrm>
           <a:prstGeom prst="rect">
@@ -24131,7 +24133,7 @@
         </p:nvSpPr>
         <p:spPr>
           <a:xfrm>
-            <a:off x="4701470" y="4500235"/>
+            <a:off x="2675922" y="4499611"/>
             <a:ext cx="1530878" cy="461665"/>
           </a:xfrm>
           <a:prstGeom prst="rect">
@@ -24284,6 +24286,381 @@
                 <a:cs typeface="Menlo" panose="020B0609030804020204" pitchFamily="49" charset="0"/>
               </a:rPr>
               <a:t>+-------+----------+------+</a:t>
+            </a:r>
+          </a:p>
+        </p:txBody>
+      </p:sp>
+      <p:sp>
+        <p:nvSpPr>
+          <p:cNvPr id="20" name="Google Shape;89;p13">
+            <a:extLst>
+              <a:ext uri="{FF2B5EF4-FFF2-40B4-BE49-F238E27FC236}">
+                <a16:creationId xmlns:a16="http://schemas.microsoft.com/office/drawing/2014/main" id="{B62C94EF-0889-7846-B479-937B9CC58C28}"/>
+              </a:ext>
+            </a:extLst>
+          </p:cNvPr>
+          <p:cNvSpPr txBox="1"/>
+          <p:nvPr/>
+        </p:nvSpPr>
+        <p:spPr>
+          <a:xfrm>
+            <a:off x="4116279" y="4617542"/>
+            <a:ext cx="3347883" cy="2050775"/>
+          </a:xfrm>
+          <a:prstGeom prst="rect">
+            <a:avLst/>
+          </a:prstGeom>
+          <a:noFill/>
+          <a:ln>
+            <a:noFill/>
+          </a:ln>
+        </p:spPr>
+        <p:txBody>
+          <a:bodyPr spcFirstLastPara="1" wrap="square" lIns="91425" tIns="45700" rIns="91425" bIns="45700" anchor="t" anchorCtr="0">
+            <a:noAutofit/>
+          </a:bodyPr>
+          <a:lstStyle/>
+          <a:p>
+            <a:pPr marL="0" marR="0" lvl="0" indent="0" algn="l" rtl="0">
+              <a:spcBef>
+                <a:spcPts val="0"/>
+              </a:spcBef>
+              <a:spcAft>
+                <a:spcPts val="0"/>
+              </a:spcAft>
+              <a:buNone/>
+            </a:pPr>
+            <a:r>
+              <a:rPr lang="en-US" sz="1200" dirty="0">
+                <a:solidFill>
+                  <a:schemeClr val="dk1"/>
+                </a:solidFill>
+                <a:latin typeface="Calibri"/>
+                <a:cs typeface="Calibri"/>
+                <a:sym typeface="Calibri"/>
+              </a:rPr>
+              <a:t>A = Coffee, B = Damaged, P = Probability</a:t>
+            </a:r>
+            <a:endParaRPr lang="en-US" sz="1200" dirty="0">
+              <a:solidFill>
+                <a:schemeClr val="dk1"/>
+              </a:solidFill>
+              <a:latin typeface="Calibri"/>
+              <a:ea typeface="Calibri"/>
+              <a:cs typeface="Calibri"/>
+              <a:sym typeface="Calibri"/>
+            </a:endParaRPr>
+          </a:p>
+          <a:p>
+            <a:pPr lvl="0"/>
+            <a:r>
+              <a:rPr lang="en-US" sz="1200" b="1" dirty="0">
+                <a:solidFill>
+                  <a:srgbClr val="00B0F0"/>
+                </a:solidFill>
+                <a:latin typeface="Calibri"/>
+                <a:ea typeface="Calibri"/>
+                <a:cs typeface="Calibri"/>
+                <a:sym typeface="Calibri"/>
+              </a:rPr>
+              <a:t>P(A) = 5% = P( </a:t>
+            </a:r>
+            <a:r>
+              <a:rPr lang="en-US" sz="1200" b="1" dirty="0">
+                <a:solidFill>
+                  <a:srgbClr val="00B0F0"/>
+                </a:solidFill>
+                <a:latin typeface="Calibri"/>
+                <a:cs typeface="Calibri"/>
+                <a:sym typeface="Calibri"/>
+              </a:rPr>
+              <a:t>Coffee )    # </a:t>
+            </a:r>
+            <a:r>
+              <a:rPr lang="en-US" sz="1200" b="1" dirty="0">
+                <a:solidFill>
+                  <a:srgbClr val="00B0F0"/>
+                </a:solidFill>
+                <a:latin typeface="Calibri"/>
+                <a:ea typeface="Calibri"/>
+                <a:cs typeface="Calibri"/>
+                <a:sym typeface="Calibri"/>
+              </a:rPr>
+              <a:t>Yellow</a:t>
+            </a:r>
+          </a:p>
+          <a:p>
+            <a:pPr marL="0" marR="0" lvl="0" indent="0" algn="l" rtl="0">
+              <a:spcBef>
+                <a:spcPts val="0"/>
+              </a:spcBef>
+              <a:spcAft>
+                <a:spcPts val="0"/>
+              </a:spcAft>
+              <a:buNone/>
+            </a:pPr>
+            <a:r>
+              <a:rPr lang="en-US" sz="1200" dirty="0">
+                <a:solidFill>
+                  <a:schemeClr val="dk1"/>
+                </a:solidFill>
+                <a:latin typeface="Calibri"/>
+                <a:ea typeface="Calibri"/>
+                <a:cs typeface="Calibri"/>
+                <a:sym typeface="Calibri"/>
+              </a:rPr>
+              <a:t>P(B) = 5% = P( Damaged  )  # Blue</a:t>
+            </a:r>
+          </a:p>
+          <a:p>
+            <a:pPr marL="0" marR="0" lvl="0" indent="0" algn="l" rtl="0">
+              <a:spcBef>
+                <a:spcPts val="0"/>
+              </a:spcBef>
+              <a:spcAft>
+                <a:spcPts val="0"/>
+              </a:spcAft>
+              <a:buNone/>
+            </a:pPr>
+            <a:endParaRPr lang="en-US" sz="1200" dirty="0">
+              <a:solidFill>
+                <a:schemeClr val="dk1"/>
+              </a:solidFill>
+              <a:latin typeface="Calibri"/>
+              <a:ea typeface="Calibri"/>
+              <a:cs typeface="Calibri"/>
+              <a:sym typeface="Calibri"/>
+            </a:endParaRPr>
+          </a:p>
+          <a:p>
+            <a:pPr lvl="0"/>
+            <a:r>
+              <a:rPr lang="en-US" sz="1200" b="1" dirty="0">
+                <a:solidFill>
+                  <a:srgbClr val="00B0F0"/>
+                </a:solidFill>
+                <a:latin typeface="Calibri"/>
+                <a:ea typeface="Calibri"/>
+                <a:cs typeface="Calibri"/>
+                <a:sym typeface="Calibri"/>
+              </a:rPr>
+              <a:t>P(B|A) = 80% = P( Damaged given that Coffee )</a:t>
+            </a:r>
+          </a:p>
+          <a:p>
+            <a:pPr lvl="0"/>
+            <a:r>
+              <a:rPr lang="en-US" sz="1200" dirty="0">
+                <a:solidFill>
+                  <a:schemeClr val="dk1"/>
+                </a:solidFill>
+                <a:latin typeface="Calibri"/>
+                <a:ea typeface="Calibri"/>
+                <a:cs typeface="Calibri"/>
+                <a:sym typeface="Calibri"/>
+              </a:rPr>
+              <a:t>P(A|B) = 80% = P( Coffee given that Damaged )</a:t>
+            </a:r>
+          </a:p>
+          <a:p>
+            <a:pPr marL="0" marR="0" lvl="0" indent="0" algn="l" rtl="0">
+              <a:spcBef>
+                <a:spcPts val="0"/>
+              </a:spcBef>
+              <a:spcAft>
+                <a:spcPts val="0"/>
+              </a:spcAft>
+              <a:buNone/>
+            </a:pPr>
+            <a:endParaRPr lang="en-US" sz="1200" dirty="0">
+              <a:solidFill>
+                <a:schemeClr val="dk1"/>
+              </a:solidFill>
+              <a:latin typeface="Calibri"/>
+              <a:ea typeface="Calibri"/>
+              <a:cs typeface="Calibri"/>
+              <a:sym typeface="Calibri"/>
+            </a:endParaRPr>
+          </a:p>
+          <a:p>
+            <a:r>
+              <a:rPr lang="en-US" sz="1200" dirty="0">
+                <a:solidFill>
+                  <a:schemeClr val="dk1"/>
+                </a:solidFill>
+                <a:latin typeface="Calibri"/>
+                <a:ea typeface="Calibri"/>
+                <a:cs typeface="Calibri"/>
+                <a:sym typeface="Calibri"/>
+              </a:rPr>
+              <a:t>Intersection:</a:t>
+            </a:r>
+          </a:p>
+          <a:p>
+            <a:pPr marL="0" marR="0" lvl="0" indent="0" algn="l" rtl="0">
+              <a:spcBef>
+                <a:spcPts val="0"/>
+              </a:spcBef>
+              <a:spcAft>
+                <a:spcPts val="0"/>
+              </a:spcAft>
+              <a:buNone/>
+            </a:pPr>
+            <a:r>
+              <a:rPr lang="en-US" sz="1200" dirty="0">
+                <a:solidFill>
+                  <a:schemeClr val="dk1"/>
+                </a:solidFill>
+                <a:latin typeface="Calibri"/>
+                <a:ea typeface="Calibri"/>
+                <a:cs typeface="Calibri"/>
+                <a:sym typeface="Calibri"/>
+              </a:rPr>
+              <a:t>P(A &amp; B) = 4% = P(Coffee &amp; Damaged)  # Green</a:t>
+            </a:r>
+          </a:p>
+          <a:p>
+            <a:pPr marL="0" marR="0" lvl="0" indent="0" algn="l" rtl="0">
+              <a:spcBef>
+                <a:spcPts val="0"/>
+              </a:spcBef>
+              <a:spcAft>
+                <a:spcPts val="0"/>
+              </a:spcAft>
+              <a:buNone/>
+            </a:pPr>
+            <a:r>
+              <a:rPr lang="en-US" sz="1200" dirty="0">
+                <a:solidFill>
+                  <a:schemeClr val="dk1"/>
+                </a:solidFill>
+                <a:latin typeface="Calibri"/>
+                <a:ea typeface="Calibri"/>
+                <a:cs typeface="Calibri"/>
+                <a:sym typeface="Calibri"/>
+              </a:rPr>
+              <a:t>P(A|B)*P(B) = 80%*5% = 4%</a:t>
+            </a:r>
+            <a:endParaRPr sz="1200" dirty="0">
+              <a:solidFill>
+                <a:schemeClr val="dk1"/>
+              </a:solidFill>
+              <a:latin typeface="Calibri"/>
+              <a:ea typeface="Calibri"/>
+              <a:cs typeface="Calibri"/>
+              <a:sym typeface="Calibri"/>
+            </a:endParaRPr>
+          </a:p>
+          <a:p>
+            <a:pPr marL="0" marR="0" lvl="0" indent="0" algn="l" rtl="0">
+              <a:spcBef>
+                <a:spcPts val="0"/>
+              </a:spcBef>
+              <a:spcAft>
+                <a:spcPts val="0"/>
+              </a:spcAft>
+              <a:buNone/>
+            </a:pPr>
+            <a:r>
+              <a:rPr lang="en-US" sz="1200" b="1" dirty="0">
+                <a:solidFill>
+                  <a:srgbClr val="00B0F0"/>
+                </a:solidFill>
+                <a:latin typeface="Calibri"/>
+                <a:ea typeface="Calibri"/>
+                <a:cs typeface="Calibri"/>
+                <a:sym typeface="Calibri"/>
+              </a:rPr>
+              <a:t>P(B|A)*P(A) = 80%*5% = 4%</a:t>
+            </a:r>
+          </a:p>
+        </p:txBody>
+      </p:sp>
+      <p:sp>
+        <p:nvSpPr>
+          <p:cNvPr id="4" name="TextBox 3">
+            <a:extLst>
+              <a:ext uri="{FF2B5EF4-FFF2-40B4-BE49-F238E27FC236}">
+                <a16:creationId xmlns:a16="http://schemas.microsoft.com/office/drawing/2014/main" id="{39A90BC2-B4D8-E240-A189-C3C7F0FC7086}"/>
+              </a:ext>
+            </a:extLst>
+          </p:cNvPr>
+          <p:cNvSpPr txBox="1"/>
+          <p:nvPr/>
+        </p:nvSpPr>
+        <p:spPr>
+          <a:xfrm>
+            <a:off x="8930917" y="2068519"/>
+            <a:ext cx="3245613" cy="1569660"/>
+          </a:xfrm>
+          <a:prstGeom prst="rect">
+            <a:avLst/>
+          </a:prstGeom>
+          <a:noFill/>
+        </p:spPr>
+        <p:txBody>
+          <a:bodyPr wrap="square" rtlCol="0">
+            <a:spAutoFit/>
+          </a:bodyPr>
+          <a:lstStyle/>
+          <a:p>
+            <a:r>
+              <a:rPr lang="en-US" sz="1200" dirty="0"/>
+              <a:t>Possible approach to calculating P(B|A):</a:t>
+            </a:r>
+          </a:p>
+          <a:p>
+            <a:endParaRPr lang="en-US" sz="1200" dirty="0"/>
+          </a:p>
+          <a:p>
+            <a:pPr marL="171450" indent="-171450">
+              <a:buFont typeface="Arial" panose="020B0604020202020204" pitchFamily="34" charset="0"/>
+              <a:buChar char="•"/>
+            </a:pPr>
+            <a:r>
+              <a:rPr lang="en-US" sz="1200" dirty="0"/>
+              <a:t>We fix P(A|B)=0.8 and P(B) = 0.05.</a:t>
+            </a:r>
+          </a:p>
+          <a:p>
+            <a:pPr marL="171450" indent="-171450">
+              <a:buFont typeface="Arial" panose="020B0604020202020204" pitchFamily="34" charset="0"/>
+              <a:buChar char="•"/>
+            </a:pPr>
+            <a:r>
+              <a:rPr lang="en-US" sz="1200" dirty="0"/>
+              <a:t>Then we use Bayes formula to </a:t>
+            </a:r>
+            <a:br>
+              <a:rPr lang="en-US" sz="1200" dirty="0"/>
+            </a:br>
+            <a:r>
+              <a:rPr lang="en-US" sz="1200" dirty="0"/>
+              <a:t>express P(B|A) as function of P(A).</a:t>
+            </a:r>
+          </a:p>
+          <a:p>
+            <a:pPr marL="171450" indent="-171450">
+              <a:buFont typeface="Arial" panose="020B0604020202020204" pitchFamily="34" charset="0"/>
+              <a:buChar char="•"/>
+            </a:pPr>
+            <a:r>
+              <a:rPr lang="en-US" sz="1200" dirty="0"/>
+              <a:t>Then presuming that all values of P(A) </a:t>
+            </a:r>
+            <a:br>
+              <a:rPr lang="en-US" sz="1200" dirty="0"/>
+            </a:br>
+            <a:r>
+              <a:rPr lang="en-US" sz="1200" dirty="0"/>
+              <a:t>are equally possible (flat prior), </a:t>
+            </a:r>
+            <a:br>
+              <a:rPr lang="en-US" sz="1200" dirty="0"/>
+            </a:br>
+            <a:r>
+              <a:rPr lang="en-US" sz="1200" dirty="0"/>
+              <a:t>we calculate average P(B|A).</a:t>
             </a:r>
           </a:p>
         </p:txBody>

--- a/statistics_08_Bayes_Bayesian.pptx
+++ b/statistics_08_Bayes_Bayesian.pptx
@@ -5,7 +5,7 @@
     <p:sldMasterId id="2147483659" r:id="rId1"/>
   </p:sldMasterIdLst>
   <p:notesMasterIdLst>
-    <p:notesMasterId r:id="rId15"/>
+    <p:notesMasterId r:id="rId16"/>
   </p:notesMasterIdLst>
   <p:sldIdLst>
     <p:sldId id="256" r:id="rId2"/>
@@ -20,7 +20,8 @@
     <p:sldId id="293" r:id="rId11"/>
     <p:sldId id="294" r:id="rId12"/>
     <p:sldId id="262" r:id="rId13"/>
-    <p:sldId id="297" r:id="rId14"/>
+    <p:sldId id="298" r:id="rId14"/>
+    <p:sldId id="297" r:id="rId15"/>
   </p:sldIdLst>
   <p:sldSz cx="12192000" cy="6858000"/>
   <p:notesSz cx="6858000" cy="9144000"/>
@@ -19606,6 +19607,274 @@
           <p:cNvPr id="2" name="TextBox 1">
             <a:extLst>
               <a:ext uri="{FF2B5EF4-FFF2-40B4-BE49-F238E27FC236}">
+                <a16:creationId xmlns:a16="http://schemas.microsoft.com/office/drawing/2014/main" id="{CD6798AC-3E28-254E-B533-583935E0DBBC}"/>
+              </a:ext>
+            </a:extLst>
+          </p:cNvPr>
+          <p:cNvSpPr txBox="1"/>
+          <p:nvPr/>
+        </p:nvSpPr>
+        <p:spPr>
+          <a:xfrm>
+            <a:off x="0" y="37572"/>
+            <a:ext cx="4572000" cy="523220"/>
+          </a:xfrm>
+          <a:prstGeom prst="rect">
+            <a:avLst/>
+          </a:prstGeom>
+          <a:noFill/>
+        </p:spPr>
+        <p:txBody>
+          <a:bodyPr wrap="square" rtlCol="0">
+            <a:spAutoFit/>
+          </a:bodyPr>
+          <a:lstStyle/>
+          <a:p>
+            <a:r>
+              <a:rPr lang="en-US" sz="2800" b="1" dirty="0"/>
+              <a:t>Bayesian Inference</a:t>
+            </a:r>
+          </a:p>
+        </p:txBody>
+      </p:sp>
+      <p:sp>
+        <p:nvSpPr>
+          <p:cNvPr id="3" name="TextBox 2">
+            <a:extLst>
+              <a:ext uri="{FF2B5EF4-FFF2-40B4-BE49-F238E27FC236}">
+                <a16:creationId xmlns:a16="http://schemas.microsoft.com/office/drawing/2014/main" id="{1B04CBF4-4519-044C-8F82-2F79F39C8DAC}"/>
+              </a:ext>
+            </a:extLst>
+          </p:cNvPr>
+          <p:cNvSpPr txBox="1"/>
+          <p:nvPr/>
+        </p:nvSpPr>
+        <p:spPr>
+          <a:xfrm>
+            <a:off x="130629" y="736270"/>
+            <a:ext cx="7125194" cy="2092881"/>
+          </a:xfrm>
+          <a:prstGeom prst="rect">
+            <a:avLst/>
+          </a:prstGeom>
+          <a:noFill/>
+        </p:spPr>
+        <p:txBody>
+          <a:bodyPr wrap="square" rtlCol="0">
+            <a:spAutoFit/>
+          </a:bodyPr>
+          <a:lstStyle/>
+          <a:p>
+            <a:r>
+              <a:rPr lang="en-US" dirty="0"/>
+              <a:t>Bayesian inference is a method of statistical inference </a:t>
+            </a:r>
+          </a:p>
+          <a:p>
+            <a:r>
+              <a:rPr lang="en-US" dirty="0"/>
+              <a:t>in which Bayes' theorem is used to update the probability</a:t>
+            </a:r>
+          </a:p>
+          <a:p>
+            <a:r>
+              <a:rPr lang="en-US" dirty="0"/>
+              <a:t>for a hypothesis as more evidence or information becomes available. </a:t>
+            </a:r>
+          </a:p>
+          <a:p>
+            <a:endParaRPr lang="en-US" dirty="0"/>
+          </a:p>
+          <a:p>
+            <a:pPr marL="285750" indent="-285750">
+              <a:buFont typeface="Arial" panose="020B0604020202020204" pitchFamily="34" charset="0"/>
+              <a:buChar char="•"/>
+            </a:pPr>
+            <a:r>
+              <a:rPr lang="en-US" sz="1200" dirty="0">
+                <a:hlinkClick r:id="rId2"/>
+              </a:rPr>
+              <a:t>https://en.wikipedia.org/wiki/Bayesian_inference</a:t>
+            </a:r>
+            <a:r>
+              <a:rPr lang="en-US" sz="1200" dirty="0"/>
+              <a:t> </a:t>
+            </a:r>
+          </a:p>
+          <a:p>
+            <a:pPr marL="285750" indent="-285750">
+              <a:buFont typeface="Arial" panose="020B0604020202020204" pitchFamily="34" charset="0"/>
+              <a:buChar char="•"/>
+            </a:pPr>
+            <a:r>
+              <a:rPr lang="en-US" sz="1200" dirty="0">
+                <a:hlinkClick r:id="rId3"/>
+              </a:rPr>
+              <a:t>https://towardsdatascience.com/probability-concepts-explained-bayesian-inference-for-parameter-estimation-90e8930e5348</a:t>
+            </a:r>
+            <a:r>
+              <a:rPr lang="en-US" sz="1200" dirty="0"/>
+              <a:t> </a:t>
+            </a:r>
+          </a:p>
+          <a:p>
+            <a:pPr marL="285750" indent="-285750">
+              <a:buFont typeface="Arial" panose="020B0604020202020204" pitchFamily="34" charset="0"/>
+              <a:buChar char="•"/>
+            </a:pPr>
+            <a:r>
+              <a:rPr lang="en-US" sz="1200" dirty="0">
+                <a:hlinkClick r:id="rId4"/>
+              </a:rPr>
+              <a:t>https://www.probabilitycourse.com/chapter9/9_1_0_bayesian_inference.php</a:t>
+            </a:r>
+            <a:r>
+              <a:rPr lang="en-US" sz="1200" dirty="0"/>
+              <a:t> </a:t>
+            </a:r>
+          </a:p>
+          <a:p>
+            <a:pPr marL="285750" indent="-285750">
+              <a:buFont typeface="Arial" panose="020B0604020202020204" pitchFamily="34" charset="0"/>
+              <a:buChar char="•"/>
+            </a:pPr>
+            <a:r>
+              <a:rPr lang="en-US" sz="1200" dirty="0"/>
+              <a:t>--</a:t>
+            </a:r>
+          </a:p>
+          <a:p>
+            <a:endParaRPr lang="en-US" dirty="0"/>
+          </a:p>
+        </p:txBody>
+      </p:sp>
+      <p:pic>
+        <p:nvPicPr>
+          <p:cNvPr id="1026" name="Picture 2" descr="Example of Bayesian inference with a prior distribution, a posterior... |  Download Scientific Diagram">
+            <a:extLst>
+              <a:ext uri="{FF2B5EF4-FFF2-40B4-BE49-F238E27FC236}">
+                <a16:creationId xmlns:a16="http://schemas.microsoft.com/office/drawing/2014/main" id="{52EBAB0B-4DA4-B648-A32C-113FC45C1799}"/>
+              </a:ext>
+            </a:extLst>
+          </p:cNvPr>
+          <p:cNvPicPr>
+            <a:picLocks noChangeAspect="1" noChangeArrowheads="1"/>
+          </p:cNvPicPr>
+          <p:nvPr/>
+        </p:nvPicPr>
+        <p:blipFill rotWithShape="1">
+          <a:blip r:embed="rId5" cstate="email">
+            <a:extLst>
+              <a:ext uri="{28A0092B-C50C-407E-A947-70E740481C1C}">
+                <a14:useLocalDpi xmlns:a14="http://schemas.microsoft.com/office/drawing/2010/main"/>
+              </a:ext>
+            </a:extLst>
+          </a:blip>
+          <a:srcRect l="15843" r="15195"/>
+          <a:stretch/>
+        </p:blipFill>
+        <p:spPr bwMode="auto">
+          <a:xfrm>
+            <a:off x="1068780" y="3117930"/>
+            <a:ext cx="3503220" cy="1600200"/>
+          </a:xfrm>
+          <a:prstGeom prst="rect">
+            <a:avLst/>
+          </a:prstGeom>
+          <a:noFill/>
+          <a:extLst>
+            <a:ext uri="{909E8E84-426E-40DD-AFC4-6F175D3DCCD1}">
+              <a14:hiddenFill xmlns:a14="http://schemas.microsoft.com/office/drawing/2010/main">
+                <a:solidFill>
+                  <a:srgbClr val="FFFFFF"/>
+                </a:solidFill>
+              </a14:hiddenFill>
+            </a:ext>
+          </a:extLst>
+        </p:spPr>
+      </p:pic>
+      <p:pic>
+        <p:nvPicPr>
+          <p:cNvPr id="1028" name="Picture 4" descr="Bayesian inference - Wikipedia">
+            <a:extLst>
+              <a:ext uri="{FF2B5EF4-FFF2-40B4-BE49-F238E27FC236}">
+                <a16:creationId xmlns:a16="http://schemas.microsoft.com/office/drawing/2014/main" id="{D3002383-224C-B549-AEB2-EB69379DF261}"/>
+              </a:ext>
+            </a:extLst>
+          </p:cNvPr>
+          <p:cNvPicPr>
+            <a:picLocks noChangeAspect="1" noChangeArrowheads="1"/>
+          </p:cNvPicPr>
+          <p:nvPr/>
+        </p:nvPicPr>
+        <p:blipFill>
+          <a:blip r:embed="rId6">
+            <a:extLst>
+              <a:ext uri="{28A0092B-C50C-407E-A947-70E740481C1C}">
+                <a14:useLocalDpi xmlns:a14="http://schemas.microsoft.com/office/drawing/2010/main"/>
+              </a:ext>
+            </a:extLst>
+          </a:blip>
+          <a:srcRect/>
+          <a:stretch>
+            <a:fillRect/>
+          </a:stretch>
+        </p:blipFill>
+        <p:spPr bwMode="auto">
+          <a:xfrm>
+            <a:off x="8703622" y="228514"/>
+            <a:ext cx="2870861" cy="4306292"/>
+          </a:xfrm>
+          <a:prstGeom prst="rect">
+            <a:avLst/>
+          </a:prstGeom>
+          <a:noFill/>
+          <a:extLst>
+            <a:ext uri="{909E8E84-426E-40DD-AFC4-6F175D3DCCD1}">
+              <a14:hiddenFill xmlns:a14="http://schemas.microsoft.com/office/drawing/2010/main">
+                <a:solidFill>
+                  <a:srgbClr val="FFFFFF"/>
+                </a:solidFill>
+              </a14:hiddenFill>
+            </a:ext>
+          </a:extLst>
+        </p:spPr>
+      </p:pic>
+    </p:spTree>
+    <p:extLst>
+      <p:ext uri="{BB962C8B-B14F-4D97-AF65-F5344CB8AC3E}">
+        <p14:creationId xmlns:p14="http://schemas.microsoft.com/office/powerpoint/2010/main" val="4019757108"/>
+      </p:ext>
+    </p:extLst>
+  </p:cSld>
+  <p:clrMapOvr>
+    <a:masterClrMapping/>
+  </p:clrMapOvr>
+</p:sld>
+</file>
+
+<file path=ppt/slides/slide14.xml><?xml version="1.0" encoding="utf-8"?>
+<p:sld xmlns:a="http://schemas.openxmlformats.org/drawingml/2006/main" xmlns:r="http://schemas.openxmlformats.org/officeDocument/2006/relationships" xmlns:p="http://schemas.openxmlformats.org/presentationml/2006/main">
+  <p:cSld>
+    <p:spTree>
+      <p:nvGrpSpPr>
+        <p:cNvPr id="1" name=""/>
+        <p:cNvGrpSpPr/>
+        <p:nvPr/>
+      </p:nvGrpSpPr>
+      <p:grpSpPr>
+        <a:xfrm>
+          <a:off x="0" y="0"/>
+          <a:ext cx="0" cy="0"/>
+          <a:chOff x="0" y="0"/>
+          <a:chExt cx="0" cy="0"/>
+        </a:xfrm>
+      </p:grpSpPr>
+      <p:sp>
+        <p:nvSpPr>
+          <p:cNvPr id="2" name="TextBox 1">
+            <a:extLst>
+              <a:ext uri="{FF2B5EF4-FFF2-40B4-BE49-F238E27FC236}">
                 <a16:creationId xmlns:a16="http://schemas.microsoft.com/office/drawing/2014/main" id="{866E1CEB-F40C-EB46-AE42-94921324FD7D}"/>
               </a:ext>
             </a:extLst>
@@ -24591,7 +24860,7 @@
         <p:spPr>
           <a:xfrm>
             <a:off x="8930917" y="2068519"/>
-            <a:ext cx="3245613" cy="1569660"/>
+            <a:ext cx="3245613" cy="2123658"/>
           </a:xfrm>
           <a:prstGeom prst="rect">
             <a:avLst/>
@@ -24661,6 +24930,16 @@
             <a:r>
               <a:rPr lang="en-US" sz="1200" dirty="0"/>
               <a:t>we calculate average P(B|A).</a:t>
+            </a:r>
+          </a:p>
+          <a:p>
+            <a:pPr marL="171450" indent="-171450">
+              <a:buFont typeface="Arial" panose="020B0604020202020204" pitchFamily="34" charset="0"/>
+              <a:buChar char="•"/>
+            </a:pPr>
+            <a:r>
+              <a:rPr lang="en-US" sz="1200" dirty="0"/>
+              <a:t>Alternatively we use some reasonable guess of the prior (not flat) – to get better posterior.</a:t>
             </a:r>
           </a:p>
         </p:txBody>

--- a/statistics_08_Bayes_Bayesian.pptx
+++ b/statistics_08_Bayes_Bayesian.pptx
@@ -13,14 +13,14 @@
     <p:sldId id="295" r:id="rId4"/>
     <p:sldId id="296" r:id="rId5"/>
     <p:sldId id="291" r:id="rId6"/>
-    <p:sldId id="292" r:id="rId7"/>
-    <p:sldId id="257" r:id="rId8"/>
-    <p:sldId id="258" r:id="rId9"/>
-    <p:sldId id="260" r:id="rId10"/>
-    <p:sldId id="293" r:id="rId11"/>
-    <p:sldId id="294" r:id="rId12"/>
-    <p:sldId id="262" r:id="rId13"/>
-    <p:sldId id="298" r:id="rId14"/>
+    <p:sldId id="257" r:id="rId7"/>
+    <p:sldId id="258" r:id="rId8"/>
+    <p:sldId id="260" r:id="rId9"/>
+    <p:sldId id="293" r:id="rId10"/>
+    <p:sldId id="294" r:id="rId11"/>
+    <p:sldId id="298" r:id="rId12"/>
+    <p:sldId id="292" r:id="rId13"/>
+    <p:sldId id="262" r:id="rId14"/>
     <p:sldId id="297" r:id="rId15"/>
   </p:sldIdLst>
   <p:sldSz cx="12192000" cy="6858000"/>
@@ -17621,688 +17621,6 @@
       </p:grpSpPr>
       <p:sp>
         <p:nvSpPr>
-          <p:cNvPr id="18" name="Google Shape;107;p14">
-            <a:extLst>
-              <a:ext uri="{FF2B5EF4-FFF2-40B4-BE49-F238E27FC236}">
-                <a16:creationId xmlns:a16="http://schemas.microsoft.com/office/drawing/2014/main" id="{C2992640-6531-5D46-B219-A020079806DB}"/>
-              </a:ext>
-            </a:extLst>
-          </p:cNvPr>
-          <p:cNvSpPr txBox="1"/>
-          <p:nvPr/>
-        </p:nvSpPr>
-        <p:spPr>
-          <a:xfrm>
-            <a:off x="91343" y="40387"/>
-            <a:ext cx="5893822" cy="1137250"/>
-          </a:xfrm>
-          <a:prstGeom prst="rect">
-            <a:avLst/>
-          </a:prstGeom>
-          <a:noFill/>
-          <a:ln>
-            <a:noFill/>
-          </a:ln>
-        </p:spPr>
-        <p:txBody>
-          <a:bodyPr spcFirstLastPara="1" wrap="square" lIns="91425" tIns="45700" rIns="91425" bIns="45700" anchor="t" anchorCtr="0">
-            <a:noAutofit/>
-          </a:bodyPr>
-          <a:lstStyle/>
-          <a:p>
-            <a:pPr marL="0" marR="0" lvl="0" indent="0" algn="l" rtl="0">
-              <a:spcBef>
-                <a:spcPts val="0"/>
-              </a:spcBef>
-              <a:spcAft>
-                <a:spcPts val="0"/>
-              </a:spcAft>
-              <a:buNone/>
-            </a:pPr>
-            <a:r>
-              <a:rPr lang="en-US" sz="2800" b="1" dirty="0">
-                <a:solidFill>
-                  <a:schemeClr val="tx1"/>
-                </a:solidFill>
-                <a:latin typeface="Calibri" panose="020F0502020204030204" pitchFamily="34" charset="0"/>
-                <a:cs typeface="Calibri" panose="020F0502020204030204" pitchFamily="34" charset="0"/>
-                <a:sym typeface="Calibri"/>
-              </a:rPr>
-              <a:t>Bayesian network  </a:t>
-            </a:r>
-            <a:br>
-              <a:rPr lang="en-US" sz="2800" b="1" dirty="0">
-                <a:solidFill>
-                  <a:schemeClr val="tx1"/>
-                </a:solidFill>
-                <a:latin typeface="Calibri" panose="020F0502020204030204" pitchFamily="34" charset="0"/>
-                <a:cs typeface="Calibri" panose="020F0502020204030204" pitchFamily="34" charset="0"/>
-                <a:sym typeface="Calibri"/>
-              </a:rPr>
-            </a:br>
-            <a:r>
-              <a:rPr lang="en-US" sz="1800" dirty="0">
-                <a:solidFill>
-                  <a:schemeClr val="dk1"/>
-                </a:solidFill>
-                <a:latin typeface="Calibri"/>
-                <a:cs typeface="Calibri"/>
-                <a:sym typeface="Calibri"/>
-              </a:rPr>
-              <a:t>( a.k.a. Bayes network, belief network, Bayes(</a:t>
-            </a:r>
-            <a:r>
-              <a:rPr lang="en-US" sz="1800" dirty="0" err="1">
-                <a:solidFill>
-                  <a:schemeClr val="dk1"/>
-                </a:solidFill>
-                <a:latin typeface="Calibri"/>
-                <a:cs typeface="Calibri"/>
-                <a:sym typeface="Calibri"/>
-              </a:rPr>
-              <a:t>ian</a:t>
-            </a:r>
-            <a:r>
-              <a:rPr lang="en-US" sz="1800" dirty="0">
-                <a:solidFill>
-                  <a:schemeClr val="dk1"/>
-                </a:solidFill>
-                <a:latin typeface="Calibri"/>
-                <a:cs typeface="Calibri"/>
-                <a:sym typeface="Calibri"/>
-              </a:rPr>
-              <a:t>) model </a:t>
-            </a:r>
-          </a:p>
-          <a:p>
-            <a:pPr marL="0" marR="0" lvl="0" indent="0" algn="l" rtl="0">
-              <a:spcBef>
-                <a:spcPts val="0"/>
-              </a:spcBef>
-              <a:spcAft>
-                <a:spcPts val="0"/>
-              </a:spcAft>
-              <a:buNone/>
-            </a:pPr>
-            <a:r>
-              <a:rPr lang="en-US" sz="1800" dirty="0">
-                <a:solidFill>
-                  <a:schemeClr val="dk1"/>
-                </a:solidFill>
-                <a:latin typeface="Calibri"/>
-                <a:cs typeface="Calibri"/>
-                <a:sym typeface="Calibri"/>
-              </a:rPr>
-              <a:t>  or probabilistic directed acyclic graphical model )</a:t>
-            </a:r>
-            <a:r>
-              <a:rPr lang="en-US" sz="1800" dirty="0">
-                <a:solidFill>
-                  <a:schemeClr val="dk1"/>
-                </a:solidFill>
-                <a:latin typeface="Calibri"/>
-                <a:ea typeface="Calibri"/>
-                <a:cs typeface="Calibri"/>
-                <a:sym typeface="Calibri"/>
-              </a:rPr>
-              <a:t> </a:t>
-            </a:r>
-          </a:p>
-        </p:txBody>
-      </p:sp>
-      <p:pic>
-        <p:nvPicPr>
-          <p:cNvPr id="19" name="Google Shape;114;p14">
-            <a:extLst>
-              <a:ext uri="{FF2B5EF4-FFF2-40B4-BE49-F238E27FC236}">
-                <a16:creationId xmlns:a16="http://schemas.microsoft.com/office/drawing/2014/main" id="{6CEB8B6B-5D31-D04D-8340-CFFC67C74C71}"/>
-              </a:ext>
-            </a:extLst>
-          </p:cNvPr>
-          <p:cNvPicPr preferRelativeResize="0"/>
-          <p:nvPr/>
-        </p:nvPicPr>
-        <p:blipFill rotWithShape="1">
-          <a:blip r:embed="rId3" cstate="email">
-            <a:alphaModFix/>
-            <a:extLst>
-              <a:ext uri="{28A0092B-C50C-407E-A947-70E740481C1C}">
-                <a14:useLocalDpi xmlns:a14="http://schemas.microsoft.com/office/drawing/2010/main"/>
-              </a:ext>
-            </a:extLst>
-          </a:blip>
-          <a:srcRect/>
-          <a:stretch/>
-        </p:blipFill>
-        <p:spPr>
-          <a:xfrm>
-            <a:off x="7021286" y="418578"/>
-            <a:ext cx="1715986" cy="1996320"/>
-          </a:xfrm>
-          <a:prstGeom prst="rect">
-            <a:avLst/>
-          </a:prstGeom>
-          <a:noFill/>
-          <a:ln>
-            <a:noFill/>
-          </a:ln>
-        </p:spPr>
-      </p:pic>
-      <p:pic>
-        <p:nvPicPr>
-          <p:cNvPr id="1026" name="Picture 2" descr="A name for layered directed graph as in a fully-connected neural network -  Mathematics Stack Exchange">
-            <a:extLst>
-              <a:ext uri="{FF2B5EF4-FFF2-40B4-BE49-F238E27FC236}">
-                <a16:creationId xmlns:a16="http://schemas.microsoft.com/office/drawing/2014/main" id="{9F27D678-C094-7546-8A93-B3B6A7DC683E}"/>
-              </a:ext>
-            </a:extLst>
-          </p:cNvPr>
-          <p:cNvPicPr>
-            <a:picLocks noChangeAspect="1" noChangeArrowheads="1"/>
-          </p:cNvPicPr>
-          <p:nvPr/>
-        </p:nvPicPr>
-        <p:blipFill>
-          <a:blip r:embed="rId4" cstate="email">
-            <a:extLst>
-              <a:ext uri="{28A0092B-C50C-407E-A947-70E740481C1C}">
-                <a14:useLocalDpi xmlns:a14="http://schemas.microsoft.com/office/drawing/2010/main"/>
-              </a:ext>
-            </a:extLst>
-          </a:blip>
-          <a:srcRect/>
-          <a:stretch>
-            <a:fillRect/>
-          </a:stretch>
-        </p:blipFill>
-        <p:spPr bwMode="auto">
-          <a:xfrm>
-            <a:off x="7021286" y="3248453"/>
-            <a:ext cx="4388069" cy="2234581"/>
-          </a:xfrm>
-          <a:prstGeom prst="rect">
-            <a:avLst/>
-          </a:prstGeom>
-          <a:noFill/>
-          <a:extLst>
-            <a:ext uri="{909E8E84-426E-40DD-AFC4-6F175D3DCCD1}">
-              <a14:hiddenFill xmlns:a14="http://schemas.microsoft.com/office/drawing/2010/main">
-                <a:solidFill>
-                  <a:srgbClr val="FFFFFF"/>
-                </a:solidFill>
-              </a14:hiddenFill>
-            </a:ext>
-          </a:extLst>
-        </p:spPr>
-      </p:pic>
-      <p:sp>
-        <p:nvSpPr>
-          <p:cNvPr id="5" name="Google Shape;107;p14">
-            <a:extLst>
-              <a:ext uri="{FF2B5EF4-FFF2-40B4-BE49-F238E27FC236}">
-                <a16:creationId xmlns:a16="http://schemas.microsoft.com/office/drawing/2014/main" id="{341F2A09-BD6A-6E40-B245-BD73EC20CC51}"/>
-              </a:ext>
-            </a:extLst>
-          </p:cNvPr>
-          <p:cNvSpPr txBox="1"/>
-          <p:nvPr/>
-        </p:nvSpPr>
-        <p:spPr>
-          <a:xfrm>
-            <a:off x="91342" y="1416738"/>
-            <a:ext cx="6613415" cy="998160"/>
-          </a:xfrm>
-          <a:prstGeom prst="rect">
-            <a:avLst/>
-          </a:prstGeom>
-          <a:noFill/>
-          <a:ln>
-            <a:noFill/>
-          </a:ln>
-        </p:spPr>
-        <p:txBody>
-          <a:bodyPr spcFirstLastPara="1" wrap="square" lIns="91425" tIns="45700" rIns="91425" bIns="45700" anchor="t" anchorCtr="0">
-            <a:noAutofit/>
-          </a:bodyPr>
-          <a:lstStyle/>
-          <a:p>
-            <a:pPr marL="0" marR="0" lvl="0" indent="0" algn="l" rtl="0">
-              <a:spcBef>
-                <a:spcPts val="0"/>
-              </a:spcBef>
-              <a:spcAft>
-                <a:spcPts val="0"/>
-              </a:spcAft>
-              <a:buNone/>
-            </a:pPr>
-            <a:r>
-              <a:rPr lang="en-US" sz="1800" b="1" dirty="0">
-                <a:solidFill>
-                  <a:schemeClr val="accent1"/>
-                </a:solidFill>
-                <a:latin typeface="Calibri" panose="020F0502020204030204" pitchFamily="34" charset="0"/>
-                <a:cs typeface="Calibri" panose="020F0502020204030204" pitchFamily="34" charset="0"/>
-                <a:sym typeface="Calibri"/>
-              </a:rPr>
-              <a:t>Bayesian network </a:t>
-            </a:r>
-            <a:r>
-              <a:rPr lang="en-US" sz="1800" dirty="0">
-                <a:solidFill>
-                  <a:schemeClr val="dk1"/>
-                </a:solidFill>
-                <a:latin typeface="Calibri"/>
-                <a:ea typeface="Calibri"/>
-                <a:cs typeface="Calibri"/>
-                <a:sym typeface="Calibri"/>
-              </a:rPr>
-              <a:t>is a probabilistic graphical model (a type of statistical model) that represents a set of random variables and their conditional dependencies via a directed acyclic graph (DAG). </a:t>
-            </a:r>
-          </a:p>
-        </p:txBody>
-      </p:sp>
-      <p:sp>
-        <p:nvSpPr>
-          <p:cNvPr id="7" name="Google Shape;107;p14">
-            <a:extLst>
-              <a:ext uri="{FF2B5EF4-FFF2-40B4-BE49-F238E27FC236}">
-                <a16:creationId xmlns:a16="http://schemas.microsoft.com/office/drawing/2014/main" id="{4CCE08F0-3501-EE45-BB4D-DD3F87E80562}"/>
-              </a:ext>
-            </a:extLst>
-          </p:cNvPr>
-          <p:cNvSpPr txBox="1"/>
-          <p:nvPr/>
-        </p:nvSpPr>
-        <p:spPr>
-          <a:xfrm>
-            <a:off x="91342" y="2423668"/>
-            <a:ext cx="6428357" cy="1480847"/>
-          </a:xfrm>
-          <a:prstGeom prst="rect">
-            <a:avLst/>
-          </a:prstGeom>
-          <a:noFill/>
-          <a:ln>
-            <a:noFill/>
-          </a:ln>
-        </p:spPr>
-        <p:txBody>
-          <a:bodyPr spcFirstLastPara="1" wrap="square" lIns="91425" tIns="45700" rIns="91425" bIns="45700" anchor="t" anchorCtr="0">
-            <a:noAutofit/>
-          </a:bodyPr>
-          <a:lstStyle/>
-          <a:p>
-            <a:pPr marL="0" marR="0" lvl="0" indent="0" algn="l" rtl="0">
-              <a:spcBef>
-                <a:spcPts val="0"/>
-              </a:spcBef>
-              <a:spcAft>
-                <a:spcPts val="0"/>
-              </a:spcAft>
-              <a:buNone/>
-            </a:pPr>
-            <a:r>
-              <a:rPr lang="en-US" sz="1800" dirty="0">
-                <a:solidFill>
-                  <a:schemeClr val="dk1"/>
-                </a:solidFill>
-                <a:latin typeface="Calibri"/>
-                <a:ea typeface="Calibri"/>
-                <a:cs typeface="Calibri"/>
-                <a:sym typeface="Calibri"/>
-              </a:rPr>
-              <a:t>Example: </a:t>
-            </a:r>
-          </a:p>
-          <a:p>
-            <a:pPr lvl="0"/>
-            <a:r>
-              <a:rPr lang="en-US" sz="1800" b="1" dirty="0">
-                <a:solidFill>
-                  <a:srgbClr val="0070C0"/>
-                </a:solidFill>
-                <a:latin typeface="Calibri"/>
-                <a:ea typeface="Calibri"/>
-                <a:cs typeface="Calibri"/>
-                <a:sym typeface="Calibri"/>
-              </a:rPr>
-              <a:t>Deep Belief Networks </a:t>
-            </a:r>
-            <a:r>
-              <a:rPr lang="en-US" sz="1800" dirty="0">
-                <a:solidFill>
-                  <a:schemeClr val="dk1"/>
-                </a:solidFill>
-                <a:latin typeface="Calibri"/>
-                <a:ea typeface="Calibri"/>
-                <a:cs typeface="Calibri"/>
-                <a:sym typeface="Calibri"/>
-              </a:rPr>
-              <a:t>- made of layers of RBMs, each next layer (“B”) is trained on top of the previous layer (“A”).</a:t>
-            </a:r>
-          </a:p>
-          <a:p>
-            <a:pPr marL="0" marR="0" lvl="0" indent="0" algn="l" rtl="0">
-              <a:spcBef>
-                <a:spcPts val="0"/>
-              </a:spcBef>
-              <a:spcAft>
-                <a:spcPts val="0"/>
-              </a:spcAft>
-              <a:buNone/>
-            </a:pPr>
-            <a:r>
-              <a:rPr lang="en-US" sz="1800" dirty="0">
-                <a:solidFill>
-                  <a:schemeClr val="dk1"/>
-                </a:solidFill>
-                <a:latin typeface="Calibri"/>
-                <a:ea typeface="Calibri"/>
-                <a:cs typeface="Calibri"/>
-                <a:sym typeface="Calibri"/>
-              </a:rPr>
-              <a:t>Here </a:t>
-            </a:r>
-            <a:r>
-              <a:rPr lang="en-US" sz="1800" b="1" dirty="0">
-                <a:solidFill>
-                  <a:srgbClr val="0070C0"/>
-                </a:solidFill>
-                <a:latin typeface="Calibri"/>
-                <a:ea typeface="Calibri"/>
-                <a:cs typeface="Calibri"/>
-                <a:sym typeface="Calibri"/>
-              </a:rPr>
-              <a:t>RBM</a:t>
-            </a:r>
-            <a:r>
-              <a:rPr lang="en-US" sz="1800" dirty="0">
-                <a:solidFill>
-                  <a:schemeClr val="dk1"/>
-                </a:solidFill>
-                <a:latin typeface="Calibri"/>
-                <a:ea typeface="Calibri"/>
-                <a:cs typeface="Calibri"/>
-                <a:sym typeface="Calibri"/>
-              </a:rPr>
-              <a:t> (Restricted Boltzmann Machine) is a two-layered artificial neural network.</a:t>
-            </a:r>
-            <a:endParaRPr lang="en-US" sz="1800" dirty="0">
-              <a:solidFill>
-                <a:schemeClr val="dk1"/>
-              </a:solidFill>
-              <a:latin typeface="Calibri"/>
-              <a:cs typeface="Calibri"/>
-              <a:sym typeface="Calibri"/>
-            </a:endParaRPr>
-          </a:p>
-        </p:txBody>
-      </p:sp>
-      <p:pic>
-        <p:nvPicPr>
-          <p:cNvPr id="3" name="Picture 2">
-            <a:extLst>
-              <a:ext uri="{FF2B5EF4-FFF2-40B4-BE49-F238E27FC236}">
-                <a16:creationId xmlns:a16="http://schemas.microsoft.com/office/drawing/2014/main" id="{221CF74C-2765-1A49-9DE4-312EA056AB81}"/>
-              </a:ext>
-            </a:extLst>
-          </p:cNvPr>
-          <p:cNvPicPr>
-            <a:picLocks noChangeAspect="1"/>
-          </p:cNvPicPr>
-          <p:nvPr/>
-        </p:nvPicPr>
-        <p:blipFill rotWithShape="1">
-          <a:blip r:embed="rId5" cstate="email">
-            <a:extLst>
-              <a:ext uri="{28A0092B-C50C-407E-A947-70E740481C1C}">
-                <a14:useLocalDpi xmlns:a14="http://schemas.microsoft.com/office/drawing/2010/main"/>
-              </a:ext>
-            </a:extLst>
-          </a:blip>
-          <a:srcRect/>
-          <a:stretch/>
-        </p:blipFill>
-        <p:spPr>
-          <a:xfrm>
-            <a:off x="2476501" y="4071018"/>
-            <a:ext cx="1123506" cy="1412016"/>
-          </a:xfrm>
-          <a:prstGeom prst="rect">
-            <a:avLst/>
-          </a:prstGeom>
-        </p:spPr>
-      </p:pic>
-      <p:pic>
-        <p:nvPicPr>
-          <p:cNvPr id="4" name="Picture 3">
-            <a:extLst>
-              <a:ext uri="{FF2B5EF4-FFF2-40B4-BE49-F238E27FC236}">
-                <a16:creationId xmlns:a16="http://schemas.microsoft.com/office/drawing/2014/main" id="{F3F0E989-24F4-954F-8654-A11FAA84E879}"/>
-              </a:ext>
-            </a:extLst>
-          </p:cNvPr>
-          <p:cNvPicPr>
-            <a:picLocks noChangeAspect="1"/>
-          </p:cNvPicPr>
-          <p:nvPr/>
-        </p:nvPicPr>
-        <p:blipFill rotWithShape="1">
-          <a:blip r:embed="rId6" cstate="email">
-            <a:extLst>
-              <a:ext uri="{28A0092B-C50C-407E-A947-70E740481C1C}">
-                <a14:useLocalDpi xmlns:a14="http://schemas.microsoft.com/office/drawing/2010/main"/>
-              </a:ext>
-            </a:extLst>
-          </a:blip>
-          <a:srcRect/>
-          <a:stretch/>
-        </p:blipFill>
-        <p:spPr>
-          <a:xfrm>
-            <a:off x="570314" y="4041266"/>
-            <a:ext cx="1253671" cy="1417842"/>
-          </a:xfrm>
-          <a:prstGeom prst="rect">
-            <a:avLst/>
-          </a:prstGeom>
-        </p:spPr>
-      </p:pic>
-      <p:sp>
-        <p:nvSpPr>
-          <p:cNvPr id="10" name="Google Shape;107;p14">
-            <a:extLst>
-              <a:ext uri="{FF2B5EF4-FFF2-40B4-BE49-F238E27FC236}">
-                <a16:creationId xmlns:a16="http://schemas.microsoft.com/office/drawing/2014/main" id="{BBAA03BF-9CD1-2742-8F30-65CF844C9AE9}"/>
-              </a:ext>
-            </a:extLst>
-          </p:cNvPr>
-          <p:cNvSpPr txBox="1"/>
-          <p:nvPr/>
-        </p:nvSpPr>
-        <p:spPr>
-          <a:xfrm>
-            <a:off x="183869" y="5485948"/>
-            <a:ext cx="6428357" cy="1219839"/>
-          </a:xfrm>
-          <a:prstGeom prst="rect">
-            <a:avLst/>
-          </a:prstGeom>
-          <a:noFill/>
-          <a:ln>
-            <a:noFill/>
-          </a:ln>
-        </p:spPr>
-        <p:txBody>
-          <a:bodyPr spcFirstLastPara="1" wrap="square" lIns="91425" tIns="45700" rIns="91425" bIns="45700" anchor="t" anchorCtr="0">
-            <a:noAutofit/>
-          </a:bodyPr>
-          <a:lstStyle/>
-          <a:p>
-            <a:pPr lvl="0"/>
-            <a:r>
-              <a:rPr lang="en-US" sz="1800" dirty="0">
-                <a:solidFill>
-                  <a:schemeClr val="dk1"/>
-                </a:solidFill>
-                <a:latin typeface="Calibri"/>
-                <a:cs typeface="Calibri"/>
-              </a:rPr>
-              <a:t>Geoffrey Hinton &amp; Ruslan </a:t>
-            </a:r>
-            <a:r>
-              <a:rPr lang="en-US" sz="1800" dirty="0" err="1">
-                <a:solidFill>
-                  <a:schemeClr val="dk1"/>
-                </a:solidFill>
-                <a:latin typeface="Calibri"/>
-                <a:cs typeface="Calibri"/>
-              </a:rPr>
-              <a:t>Salakhutdinov</a:t>
-            </a:r>
-            <a:r>
-              <a:rPr lang="en-US" sz="1800" dirty="0">
-                <a:solidFill>
-                  <a:schemeClr val="dk1"/>
-                </a:solidFill>
-                <a:latin typeface="Calibri"/>
-                <a:cs typeface="Calibri"/>
-              </a:rPr>
-              <a:t> (2006). </a:t>
-            </a:r>
-          </a:p>
-          <a:p>
-            <a:pPr lvl="0"/>
-            <a:r>
-              <a:rPr lang="en-US" sz="1800" dirty="0">
-                <a:solidFill>
-                  <a:schemeClr val="dk1"/>
-                </a:solidFill>
-                <a:latin typeface="Calibri"/>
-                <a:cs typeface="Calibri"/>
-              </a:rPr>
-              <a:t>Reducing the dimensionality of data with neural networks.</a:t>
-            </a:r>
-          </a:p>
-          <a:p>
-            <a:pPr lvl="0"/>
-            <a:r>
-              <a:rPr lang="en-US" sz="1800" dirty="0">
-                <a:solidFill>
-                  <a:schemeClr val="dk1"/>
-                </a:solidFill>
-                <a:latin typeface="Calibri"/>
-                <a:cs typeface="Calibri"/>
-              </a:rPr>
-              <a:t>Science, 313, 504 – 507.</a:t>
-            </a:r>
-          </a:p>
-          <a:p>
-            <a:pPr lvl="0"/>
-            <a:r>
-              <a:rPr lang="en-US" sz="1800" dirty="0">
-                <a:solidFill>
-                  <a:schemeClr val="dk1"/>
-                </a:solidFill>
-                <a:latin typeface="Calibri"/>
-                <a:cs typeface="Calibri"/>
-                <a:sym typeface="Calibri"/>
-              </a:rPr>
-              <a:t> - </a:t>
-            </a:r>
-            <a:r>
-              <a:rPr lang="en-US" sz="1800" dirty="0">
-                <a:solidFill>
-                  <a:schemeClr val="dk1"/>
-                </a:solidFill>
-                <a:latin typeface="Calibri"/>
-                <a:cs typeface="Calibri"/>
-                <a:sym typeface="Calibri"/>
-                <a:hlinkClick r:id="rId7"/>
-              </a:rPr>
-              <a:t>https://www.cs.toronto.edu/~hinton/science.pdf</a:t>
-            </a:r>
-            <a:r>
-              <a:rPr lang="en-US" sz="1800" dirty="0">
-                <a:solidFill>
-                  <a:schemeClr val="dk1"/>
-                </a:solidFill>
-                <a:latin typeface="Calibri"/>
-                <a:cs typeface="Calibri"/>
-                <a:sym typeface="Calibri"/>
-              </a:rPr>
-              <a:t> </a:t>
-            </a:r>
-          </a:p>
-        </p:txBody>
-      </p:sp>
-      <p:sp>
-        <p:nvSpPr>
-          <p:cNvPr id="6" name="TextBox 5">
-            <a:extLst>
-              <a:ext uri="{FF2B5EF4-FFF2-40B4-BE49-F238E27FC236}">
-                <a16:creationId xmlns:a16="http://schemas.microsoft.com/office/drawing/2014/main" id="{AC6499AC-2623-244C-B653-E3602A825F7E}"/>
-              </a:ext>
-            </a:extLst>
-          </p:cNvPr>
-          <p:cNvSpPr txBox="1"/>
-          <p:nvPr/>
-        </p:nvSpPr>
-        <p:spPr>
-          <a:xfrm>
-            <a:off x="8118388" y="5609967"/>
-            <a:ext cx="2001795" cy="307777"/>
-          </a:xfrm>
-          <a:prstGeom prst="rect">
-            <a:avLst/>
-          </a:prstGeom>
-          <a:noFill/>
-        </p:spPr>
-        <p:txBody>
-          <a:bodyPr wrap="square" rtlCol="0">
-            <a:spAutoFit/>
-          </a:bodyPr>
-          <a:lstStyle/>
-          <a:p>
-            <a:r>
-              <a:rPr lang="en-US" dirty="0"/>
-              <a:t>A Deep Belief Network</a:t>
-            </a:r>
-          </a:p>
-        </p:txBody>
-      </p:sp>
-    </p:spTree>
-    <p:extLst>
-      <p:ext uri="{BB962C8B-B14F-4D97-AF65-F5344CB8AC3E}">
-        <p14:creationId xmlns:p14="http://schemas.microsoft.com/office/powerpoint/2010/main" val="4205312314"/>
-      </p:ext>
-    </p:extLst>
-  </p:cSld>
-  <p:clrMapOvr>
-    <a:masterClrMapping/>
-  </p:clrMapOvr>
-</p:sld>
-</file>
-
-<file path=ppt/slides/slide11.xml><?xml version="1.0" encoding="utf-8"?>
-<p:sld xmlns:a="http://schemas.openxmlformats.org/drawingml/2006/main" xmlns:r="http://schemas.openxmlformats.org/officeDocument/2006/relationships" xmlns:p="http://schemas.openxmlformats.org/presentationml/2006/main">
-  <p:cSld>
-    <p:spTree>
-      <p:nvGrpSpPr>
-        <p:cNvPr id="1" name="Shape 87"/>
-        <p:cNvGrpSpPr/>
-        <p:nvPr/>
-      </p:nvGrpSpPr>
-      <p:grpSpPr>
-        <a:xfrm>
-          <a:off x="0" y="0"/>
-          <a:ext cx="0" cy="0"/>
-          <a:chOff x="0" y="0"/>
-          <a:chExt cx="0" cy="0"/>
-        </a:xfrm>
-      </p:grpSpPr>
-      <p:sp>
-        <p:nvSpPr>
           <p:cNvPr id="17" name="Google Shape;113;p14">
             <a:extLst>
               <a:ext uri="{FF2B5EF4-FFF2-40B4-BE49-F238E27FC236}">
@@ -19068,7 +18386,2167 @@
 </p:sld>
 </file>
 
+<file path=ppt/slides/slide11.xml><?xml version="1.0" encoding="utf-8"?>
+<p:sld xmlns:a="http://schemas.openxmlformats.org/drawingml/2006/main" xmlns:r="http://schemas.openxmlformats.org/officeDocument/2006/relationships" xmlns:p="http://schemas.openxmlformats.org/presentationml/2006/main">
+  <p:cSld>
+    <p:spTree>
+      <p:nvGrpSpPr>
+        <p:cNvPr id="1" name=""/>
+        <p:cNvGrpSpPr/>
+        <p:nvPr/>
+      </p:nvGrpSpPr>
+      <p:grpSpPr>
+        <a:xfrm>
+          <a:off x="0" y="0"/>
+          <a:ext cx="0" cy="0"/>
+          <a:chOff x="0" y="0"/>
+          <a:chExt cx="0" cy="0"/>
+        </a:xfrm>
+      </p:grpSpPr>
+      <p:sp>
+        <p:nvSpPr>
+          <p:cNvPr id="2" name="TextBox 1">
+            <a:extLst>
+              <a:ext uri="{FF2B5EF4-FFF2-40B4-BE49-F238E27FC236}">
+                <a16:creationId xmlns:a16="http://schemas.microsoft.com/office/drawing/2014/main" id="{CD6798AC-3E28-254E-B533-583935E0DBBC}"/>
+              </a:ext>
+            </a:extLst>
+          </p:cNvPr>
+          <p:cNvSpPr txBox="1"/>
+          <p:nvPr/>
+        </p:nvSpPr>
+        <p:spPr>
+          <a:xfrm>
+            <a:off x="0" y="37572"/>
+            <a:ext cx="4572000" cy="523220"/>
+          </a:xfrm>
+          <a:prstGeom prst="rect">
+            <a:avLst/>
+          </a:prstGeom>
+          <a:noFill/>
+        </p:spPr>
+        <p:txBody>
+          <a:bodyPr wrap="square" rtlCol="0">
+            <a:spAutoFit/>
+          </a:bodyPr>
+          <a:lstStyle/>
+          <a:p>
+            <a:r>
+              <a:rPr lang="en-US" sz="2800" b="1" dirty="0"/>
+              <a:t>Bayesian Inference</a:t>
+            </a:r>
+          </a:p>
+        </p:txBody>
+      </p:sp>
+      <p:sp>
+        <p:nvSpPr>
+          <p:cNvPr id="3" name="TextBox 2">
+            <a:extLst>
+              <a:ext uri="{FF2B5EF4-FFF2-40B4-BE49-F238E27FC236}">
+                <a16:creationId xmlns:a16="http://schemas.microsoft.com/office/drawing/2014/main" id="{1B04CBF4-4519-044C-8F82-2F79F39C8DAC}"/>
+              </a:ext>
+            </a:extLst>
+          </p:cNvPr>
+          <p:cNvSpPr txBox="1"/>
+          <p:nvPr/>
+        </p:nvSpPr>
+        <p:spPr>
+          <a:xfrm>
+            <a:off x="130629" y="736270"/>
+            <a:ext cx="7125194" cy="5109091"/>
+          </a:xfrm>
+          <a:prstGeom prst="rect">
+            <a:avLst/>
+          </a:prstGeom>
+          <a:noFill/>
+        </p:spPr>
+        <p:txBody>
+          <a:bodyPr wrap="square" rtlCol="0">
+            <a:spAutoFit/>
+          </a:bodyPr>
+          <a:lstStyle/>
+          <a:p>
+            <a:r>
+              <a:rPr lang="en-US" dirty="0"/>
+              <a:t>Bayesian inference is a method of statistical inference </a:t>
+            </a:r>
+          </a:p>
+          <a:p>
+            <a:r>
+              <a:rPr lang="en-US" dirty="0"/>
+              <a:t>in which Bayes' theorem is used to update the probability</a:t>
+            </a:r>
+          </a:p>
+          <a:p>
+            <a:r>
+              <a:rPr lang="en-US" dirty="0"/>
+              <a:t>for a hypothesis as more evidence or information becomes available. </a:t>
+            </a:r>
+          </a:p>
+          <a:p>
+            <a:endParaRPr lang="en-US" dirty="0"/>
+          </a:p>
+          <a:p>
+            <a:r>
+              <a:rPr lang="en-US" dirty="0"/>
+              <a:t>Examples of typical problems:</a:t>
+            </a:r>
+          </a:p>
+          <a:p>
+            <a:pPr marL="285750" indent="-285750">
+              <a:buFont typeface="Arial" panose="020B0604020202020204" pitchFamily="34" charset="0"/>
+              <a:buChar char="•"/>
+            </a:pPr>
+            <a:r>
+              <a:rPr lang="en-US" dirty="0"/>
+              <a:t>Estimate the bias of a coin. We need to estimate P(</a:t>
+            </a:r>
+            <a:r>
+              <a:rPr lang="el-GR" dirty="0"/>
+              <a:t>θ</a:t>
+            </a:r>
+            <a:r>
+              <a:rPr lang="en-US" dirty="0"/>
+              <a:t>), where </a:t>
+            </a:r>
+            <a:r>
+              <a:rPr lang="el-GR" dirty="0"/>
+              <a:t>θ</a:t>
+            </a:r>
+            <a:r>
+              <a:rPr lang="en-US" dirty="0"/>
+              <a:t> is the proportion of heads. - </a:t>
+            </a:r>
+            <a:r>
+              <a:rPr lang="en-US" dirty="0">
+                <a:hlinkClick r:id="rId2"/>
+              </a:rPr>
+              <a:t>https://www.youtube.com/watch?v=Pahyv9i_X2k</a:t>
+            </a:r>
+            <a:r>
+              <a:rPr lang="en-US" dirty="0"/>
+              <a:t> </a:t>
+            </a:r>
+          </a:p>
+          <a:p>
+            <a:pPr marL="285750" indent="-285750">
+              <a:buFont typeface="Arial" panose="020B0604020202020204" pitchFamily="34" charset="0"/>
+              <a:buChar char="•"/>
+            </a:pPr>
+            <a:r>
+              <a:rPr lang="en-US" dirty="0"/>
+              <a:t>We have 50 data samples x</a:t>
+            </a:r>
+            <a:r>
+              <a:rPr lang="en-US" baseline="-25000" dirty="0"/>
+              <a:t>1</a:t>
+            </a:r>
+            <a:r>
+              <a:rPr lang="en-US" dirty="0"/>
+              <a:t> .. x</a:t>
+            </a:r>
+            <a:r>
+              <a:rPr lang="en-US" baseline="-25000" dirty="0"/>
+              <a:t>50</a:t>
+            </a:r>
+            <a:r>
+              <a:rPr lang="en-US" dirty="0"/>
+              <a:t> which presumably follow exponential probability distribution </a:t>
+            </a:r>
+            <a:r>
+              <a:rPr lang="el-GR" b="1" dirty="0"/>
+              <a:t>λ</a:t>
+            </a:r>
+            <a:r>
+              <a:rPr lang="en-US" b="1" dirty="0"/>
+              <a:t>e</a:t>
+            </a:r>
+            <a:r>
+              <a:rPr lang="en-US" b="1" baseline="30000" dirty="0"/>
+              <a:t>-</a:t>
+            </a:r>
+            <a:r>
+              <a:rPr lang="el-GR" b="1" baseline="30000" dirty="0"/>
+              <a:t>λ</a:t>
+            </a:r>
+            <a:r>
+              <a:rPr lang="en-US" b="1" baseline="30000" dirty="0"/>
+              <a:t>x</a:t>
+            </a:r>
+            <a:r>
+              <a:rPr lang="en-US" dirty="0"/>
+              <a:t> . Estimate </a:t>
+            </a:r>
+            <a:r>
+              <a:rPr lang="el-GR" b="1" dirty="0"/>
+              <a:t>λ</a:t>
+            </a:r>
+            <a:r>
+              <a:rPr lang="en-US" dirty="0"/>
+              <a:t> . - </a:t>
+            </a:r>
+            <a:r>
+              <a:rPr lang="en-US" dirty="0">
+                <a:hlinkClick r:id="rId3"/>
+              </a:rPr>
+              <a:t>https://www.youtube.com/watch?v=I4dkEALQv34</a:t>
+            </a:r>
+            <a:r>
+              <a:rPr lang="en-US" dirty="0"/>
+              <a:t> </a:t>
+            </a:r>
+          </a:p>
+          <a:p>
+            <a:pPr marL="285750" indent="-285750">
+              <a:buFont typeface="Arial" panose="020B0604020202020204" pitchFamily="34" charset="0"/>
+              <a:buChar char="•"/>
+            </a:pPr>
+            <a:r>
+              <a:rPr lang="en-US" dirty="0"/>
+              <a:t>We have sample of 10 children, 3 of them are literate (can read). We need to evaluate number of children who can read in the population. We presume that children are independent, that population is uniform, etc. We can use binomial distribution. - </a:t>
+            </a:r>
+            <a:r>
+              <a:rPr lang="en-US" dirty="0">
+                <a:hlinkClick r:id="rId4"/>
+              </a:rPr>
+              <a:t>https://www.youtube.com/watch?v=yvWlpwnT1nw</a:t>
+            </a:r>
+            <a:r>
+              <a:rPr lang="en-US" dirty="0"/>
+              <a:t> </a:t>
+            </a:r>
+          </a:p>
+          <a:p>
+            <a:pPr marL="285750" indent="-285750">
+              <a:buFont typeface="Arial" panose="020B0604020202020204" pitchFamily="34" charset="0"/>
+              <a:buChar char="•"/>
+            </a:pPr>
+            <a:r>
+              <a:rPr lang="en-US" dirty="0"/>
+              <a:t>We have 100 damaged flash drives which is a sample of much bigger set.</a:t>
+            </a:r>
+            <a:br>
+              <a:rPr lang="en-US" dirty="0"/>
+            </a:br>
+            <a:r>
+              <a:rPr lang="en-US" dirty="0"/>
+              <a:t>80% of these damaged drives have coffee stains on them.</a:t>
+            </a:r>
+            <a:br>
+              <a:rPr lang="en-US" dirty="0"/>
+            </a:br>
+            <a:r>
+              <a:rPr lang="en-US" dirty="0"/>
+              <a:t>Estimate probability (and credible interval) that coffee is causing the damage?</a:t>
+            </a:r>
+          </a:p>
+          <a:p>
+            <a:endParaRPr lang="en-US" dirty="0"/>
+          </a:p>
+          <a:p>
+            <a:endParaRPr lang="en-US" dirty="0"/>
+          </a:p>
+          <a:p>
+            <a:pPr marL="285750" indent="-285750">
+              <a:buFont typeface="Arial" panose="020B0604020202020204" pitchFamily="34" charset="0"/>
+              <a:buChar char="•"/>
+            </a:pPr>
+            <a:r>
+              <a:rPr lang="en-US" sz="1200" dirty="0">
+                <a:hlinkClick r:id="rId5"/>
+              </a:rPr>
+              <a:t>https://en.wikipedia.org/wiki/Bayesian_inference</a:t>
+            </a:r>
+            <a:r>
+              <a:rPr lang="en-US" sz="1200" dirty="0"/>
+              <a:t> </a:t>
+            </a:r>
+          </a:p>
+          <a:p>
+            <a:pPr marL="285750" indent="-285750">
+              <a:buFont typeface="Arial" panose="020B0604020202020204" pitchFamily="34" charset="0"/>
+              <a:buChar char="•"/>
+            </a:pPr>
+            <a:r>
+              <a:rPr lang="en-US" sz="1200" dirty="0">
+                <a:hlinkClick r:id="rId6"/>
+              </a:rPr>
+              <a:t>https://towardsdatascience.com/probability-concepts-explained-bayesian-inference-for-parameter-estimation-90e8930e5348</a:t>
+            </a:r>
+            <a:r>
+              <a:rPr lang="en-US" sz="1200" dirty="0"/>
+              <a:t> </a:t>
+            </a:r>
+          </a:p>
+          <a:p>
+            <a:pPr marL="285750" indent="-285750">
+              <a:buFont typeface="Arial" panose="020B0604020202020204" pitchFamily="34" charset="0"/>
+              <a:buChar char="•"/>
+            </a:pPr>
+            <a:r>
+              <a:rPr lang="en-US" sz="1200" dirty="0">
+                <a:hlinkClick r:id="rId7"/>
+              </a:rPr>
+              <a:t>https://www.probabilitycourse.com/chapter9/9_1_0_bayesian_inference.php</a:t>
+            </a:r>
+            <a:r>
+              <a:rPr lang="en-US" sz="1200" dirty="0"/>
+              <a:t> </a:t>
+            </a:r>
+          </a:p>
+          <a:p>
+            <a:pPr marL="285750" indent="-285750">
+              <a:buFont typeface="Arial" panose="020B0604020202020204" pitchFamily="34" charset="0"/>
+              <a:buChar char="•"/>
+            </a:pPr>
+            <a:r>
+              <a:rPr lang="en-US" sz="1200" dirty="0"/>
+              <a:t>--</a:t>
+            </a:r>
+          </a:p>
+          <a:p>
+            <a:endParaRPr lang="en-US" dirty="0"/>
+          </a:p>
+        </p:txBody>
+      </p:sp>
+      <p:pic>
+        <p:nvPicPr>
+          <p:cNvPr id="1026" name="Picture 2" descr="Example of Bayesian inference with a prior distribution, a posterior... |  Download Scientific Diagram">
+            <a:extLst>
+              <a:ext uri="{FF2B5EF4-FFF2-40B4-BE49-F238E27FC236}">
+                <a16:creationId xmlns:a16="http://schemas.microsoft.com/office/drawing/2014/main" id="{52EBAB0B-4DA4-B648-A32C-113FC45C1799}"/>
+              </a:ext>
+            </a:extLst>
+          </p:cNvPr>
+          <p:cNvPicPr>
+            <a:picLocks noChangeAspect="1" noChangeArrowheads="1"/>
+          </p:cNvPicPr>
+          <p:nvPr/>
+        </p:nvPicPr>
+        <p:blipFill rotWithShape="1">
+          <a:blip r:embed="rId8" cstate="email">
+            <a:extLst>
+              <a:ext uri="{28A0092B-C50C-407E-A947-70E740481C1C}">
+                <a14:useLocalDpi xmlns:a14="http://schemas.microsoft.com/office/drawing/2010/main"/>
+              </a:ext>
+            </a:extLst>
+          </a:blip>
+          <a:srcRect l="15843" r="15195"/>
+          <a:stretch/>
+        </p:blipFill>
+        <p:spPr bwMode="auto">
+          <a:xfrm>
+            <a:off x="8407730" y="299182"/>
+            <a:ext cx="3503220" cy="1600200"/>
+          </a:xfrm>
+          <a:prstGeom prst="rect">
+            <a:avLst/>
+          </a:prstGeom>
+          <a:noFill/>
+          <a:extLst>
+            <a:ext uri="{909E8E84-426E-40DD-AFC4-6F175D3DCCD1}">
+              <a14:hiddenFill xmlns:a14="http://schemas.microsoft.com/office/drawing/2010/main">
+                <a:solidFill>
+                  <a:srgbClr val="FFFFFF"/>
+                </a:solidFill>
+              </a14:hiddenFill>
+            </a:ext>
+          </a:extLst>
+        </p:spPr>
+      </p:pic>
+      <p:sp>
+        <p:nvSpPr>
+          <p:cNvPr id="5" name="TextBox 4">
+            <a:extLst>
+              <a:ext uri="{FF2B5EF4-FFF2-40B4-BE49-F238E27FC236}">
+                <a16:creationId xmlns:a16="http://schemas.microsoft.com/office/drawing/2014/main" id="{3F2ED839-B118-9D48-B600-42594516EAD9}"/>
+              </a:ext>
+            </a:extLst>
+          </p:cNvPr>
+          <p:cNvSpPr txBox="1"/>
+          <p:nvPr/>
+        </p:nvSpPr>
+        <p:spPr>
+          <a:xfrm>
+            <a:off x="8704613" y="3711576"/>
+            <a:ext cx="3206337" cy="2031325"/>
+          </a:xfrm>
+          <a:prstGeom prst="rect">
+            <a:avLst/>
+          </a:prstGeom>
+          <a:noFill/>
+        </p:spPr>
+        <p:txBody>
+          <a:bodyPr wrap="square" rtlCol="0">
+            <a:spAutoFit/>
+          </a:bodyPr>
+          <a:lstStyle/>
+          <a:p>
+            <a:r>
+              <a:rPr lang="en-US" dirty="0"/>
+              <a:t>Bayesian Inference for a normal Mean</a:t>
+            </a:r>
+          </a:p>
+          <a:p>
+            <a:r>
+              <a:rPr lang="en-US" dirty="0"/>
+              <a:t>xxx</a:t>
+            </a:r>
+          </a:p>
+          <a:p>
+            <a:endParaRPr lang="en-US" dirty="0"/>
+          </a:p>
+          <a:p>
+            <a:r>
+              <a:rPr lang="en-US" dirty="0"/>
+              <a:t>Conjugate Priors</a:t>
+            </a:r>
+          </a:p>
+          <a:p>
+            <a:r>
+              <a:rPr lang="en-US" dirty="0"/>
+              <a:t>xxx</a:t>
+            </a:r>
+          </a:p>
+          <a:p>
+            <a:endParaRPr lang="en-US" dirty="0"/>
+          </a:p>
+          <a:p>
+            <a:r>
+              <a:rPr lang="en-US" dirty="0"/>
+              <a:t>Credible Intervals</a:t>
+            </a:r>
+          </a:p>
+          <a:p>
+            <a:r>
+              <a:rPr lang="en-US" dirty="0"/>
+              <a:t>xxx</a:t>
+            </a:r>
+          </a:p>
+          <a:p>
+            <a:endParaRPr lang="en-US" dirty="0"/>
+          </a:p>
+        </p:txBody>
+      </p:sp>
+      <p:sp>
+        <p:nvSpPr>
+          <p:cNvPr id="6" name="TextBox 5">
+            <a:extLst>
+              <a:ext uri="{FF2B5EF4-FFF2-40B4-BE49-F238E27FC236}">
+                <a16:creationId xmlns:a16="http://schemas.microsoft.com/office/drawing/2014/main" id="{00B03AF5-0ABE-D24C-BD4E-D703BB877028}"/>
+              </a:ext>
+            </a:extLst>
+          </p:cNvPr>
+          <p:cNvSpPr txBox="1"/>
+          <p:nvPr/>
+        </p:nvSpPr>
+        <p:spPr>
+          <a:xfrm>
+            <a:off x="5522026" y="37572"/>
+            <a:ext cx="2576945" cy="307777"/>
+          </a:xfrm>
+          <a:prstGeom prst="rect">
+            <a:avLst/>
+          </a:prstGeom>
+          <a:noFill/>
+        </p:spPr>
+        <p:txBody>
+          <a:bodyPr wrap="square" rtlCol="0">
+            <a:spAutoFit/>
+          </a:bodyPr>
+          <a:lstStyle/>
+          <a:p>
+            <a:r>
+              <a:rPr lang="en-US" dirty="0"/>
+              <a:t>Page Under Construction</a:t>
+            </a:r>
+          </a:p>
+        </p:txBody>
+      </p:sp>
+    </p:spTree>
+    <p:extLst>
+      <p:ext uri="{BB962C8B-B14F-4D97-AF65-F5344CB8AC3E}">
+        <p14:creationId xmlns:p14="http://schemas.microsoft.com/office/powerpoint/2010/main" val="4019757108"/>
+      </p:ext>
+    </p:extLst>
+  </p:cSld>
+  <p:clrMapOvr>
+    <a:masterClrMapping/>
+  </p:clrMapOvr>
+</p:sld>
+</file>
+
 <file path=ppt/slides/slide12.xml><?xml version="1.0" encoding="utf-8"?>
+<p:sld xmlns:a="http://schemas.openxmlformats.org/drawingml/2006/main" xmlns:r="http://schemas.openxmlformats.org/officeDocument/2006/relationships" xmlns:p="http://schemas.openxmlformats.org/presentationml/2006/main">
+  <p:cSld>
+    <p:spTree>
+      <p:nvGrpSpPr>
+        <p:cNvPr id="1" name=""/>
+        <p:cNvGrpSpPr/>
+        <p:nvPr/>
+      </p:nvGrpSpPr>
+      <p:grpSpPr>
+        <a:xfrm>
+          <a:off x="0" y="0"/>
+          <a:ext cx="0" cy="0"/>
+          <a:chOff x="0" y="0"/>
+          <a:chExt cx="0" cy="0"/>
+        </a:xfrm>
+      </p:grpSpPr>
+      <p:sp>
+        <p:nvSpPr>
+          <p:cNvPr id="2" name="TextBox 1">
+            <a:extLst>
+              <a:ext uri="{FF2B5EF4-FFF2-40B4-BE49-F238E27FC236}">
+                <a16:creationId xmlns:a16="http://schemas.microsoft.com/office/drawing/2014/main" id="{B3B32340-E706-FA41-BDA5-397606042A7E}"/>
+              </a:ext>
+            </a:extLst>
+          </p:cNvPr>
+          <p:cNvSpPr txBox="1"/>
+          <p:nvPr/>
+        </p:nvSpPr>
+        <p:spPr>
+          <a:xfrm>
+            <a:off x="-1" y="37572"/>
+            <a:ext cx="7901355" cy="523220"/>
+          </a:xfrm>
+          <a:prstGeom prst="rect">
+            <a:avLst/>
+          </a:prstGeom>
+          <a:noFill/>
+        </p:spPr>
+        <p:txBody>
+          <a:bodyPr wrap="square" rtlCol="0">
+            <a:spAutoFit/>
+          </a:bodyPr>
+          <a:lstStyle/>
+          <a:p>
+            <a:r>
+              <a:rPr lang="en-US" sz="2800" b="1" dirty="0"/>
+              <a:t>Example – Coffee and Damaged Flash Drives</a:t>
+            </a:r>
+          </a:p>
+        </p:txBody>
+      </p:sp>
+      <p:sp>
+        <p:nvSpPr>
+          <p:cNvPr id="3" name="TextBox 2">
+            <a:extLst>
+              <a:ext uri="{FF2B5EF4-FFF2-40B4-BE49-F238E27FC236}">
+                <a16:creationId xmlns:a16="http://schemas.microsoft.com/office/drawing/2014/main" id="{2443CC5D-9378-E348-8505-A594E821478A}"/>
+              </a:ext>
+            </a:extLst>
+          </p:cNvPr>
+          <p:cNvSpPr txBox="1"/>
+          <p:nvPr/>
+        </p:nvSpPr>
+        <p:spPr>
+          <a:xfrm>
+            <a:off x="141099" y="678252"/>
+            <a:ext cx="6342828" cy="738664"/>
+          </a:xfrm>
+          <a:prstGeom prst="rect">
+            <a:avLst/>
+          </a:prstGeom>
+          <a:noFill/>
+          <a:ln w="63500">
+            <a:solidFill>
+              <a:schemeClr val="accent6">
+                <a:lumMod val="40000"/>
+                <a:lumOff val="60000"/>
+              </a:schemeClr>
+            </a:solidFill>
+          </a:ln>
+        </p:spPr>
+        <p:txBody>
+          <a:bodyPr wrap="square" rtlCol="0">
+            <a:spAutoFit/>
+          </a:bodyPr>
+          <a:lstStyle/>
+          <a:p>
+            <a:r>
+              <a:rPr lang="en-US" dirty="0"/>
+              <a:t>We have 100 damaged flash drives, </a:t>
+            </a:r>
+          </a:p>
+          <a:p>
+            <a:r>
+              <a:rPr lang="en-US" dirty="0"/>
+              <a:t>80 of them have coffee stains on them.</a:t>
+            </a:r>
+          </a:p>
+          <a:p>
+            <a:r>
+              <a:rPr lang="en-US" dirty="0"/>
+              <a:t>Estimate probability (and credible interval) that coffee is causing the damage?</a:t>
+            </a:r>
+          </a:p>
+        </p:txBody>
+      </p:sp>
+      <p:sp>
+        <p:nvSpPr>
+          <p:cNvPr id="5" name="Google Shape;89;p13">
+            <a:extLst>
+              <a:ext uri="{FF2B5EF4-FFF2-40B4-BE49-F238E27FC236}">
+                <a16:creationId xmlns:a16="http://schemas.microsoft.com/office/drawing/2014/main" id="{452FF8D6-C125-B84A-B6C6-3F252EF37ED5}"/>
+              </a:ext>
+            </a:extLst>
+          </p:cNvPr>
+          <p:cNvSpPr txBox="1"/>
+          <p:nvPr/>
+        </p:nvSpPr>
+        <p:spPr>
+          <a:xfrm>
+            <a:off x="4109673" y="2068519"/>
+            <a:ext cx="3347883" cy="2050775"/>
+          </a:xfrm>
+          <a:prstGeom prst="rect">
+            <a:avLst/>
+          </a:prstGeom>
+          <a:noFill/>
+          <a:ln>
+            <a:noFill/>
+          </a:ln>
+        </p:spPr>
+        <p:txBody>
+          <a:bodyPr spcFirstLastPara="1" wrap="square" lIns="91425" tIns="45700" rIns="91425" bIns="45700" anchor="t" anchorCtr="0">
+            <a:noAutofit/>
+          </a:bodyPr>
+          <a:lstStyle/>
+          <a:p>
+            <a:pPr marL="0" marR="0" lvl="0" indent="0" algn="l" rtl="0">
+              <a:spcBef>
+                <a:spcPts val="0"/>
+              </a:spcBef>
+              <a:spcAft>
+                <a:spcPts val="0"/>
+              </a:spcAft>
+              <a:buNone/>
+            </a:pPr>
+            <a:r>
+              <a:rPr lang="en-US" sz="1200" dirty="0">
+                <a:solidFill>
+                  <a:schemeClr val="dk1"/>
+                </a:solidFill>
+                <a:latin typeface="Calibri"/>
+                <a:cs typeface="Calibri"/>
+                <a:sym typeface="Calibri"/>
+              </a:rPr>
+              <a:t>A = Coffee, B = Damaged, P = Probability</a:t>
+            </a:r>
+            <a:endParaRPr lang="en-US" sz="1200" dirty="0">
+              <a:solidFill>
+                <a:schemeClr val="dk1"/>
+              </a:solidFill>
+              <a:latin typeface="Calibri"/>
+              <a:ea typeface="Calibri"/>
+              <a:cs typeface="Calibri"/>
+              <a:sym typeface="Calibri"/>
+            </a:endParaRPr>
+          </a:p>
+          <a:p>
+            <a:pPr lvl="0"/>
+            <a:r>
+              <a:rPr lang="en-US" sz="1200" b="1" dirty="0">
+                <a:solidFill>
+                  <a:srgbClr val="00B0F0"/>
+                </a:solidFill>
+                <a:latin typeface="Calibri"/>
+                <a:ea typeface="Calibri"/>
+                <a:cs typeface="Calibri"/>
+                <a:sym typeface="Calibri"/>
+              </a:rPr>
+              <a:t>P(A) = 40% = P( </a:t>
+            </a:r>
+            <a:r>
+              <a:rPr lang="en-US" sz="1200" b="1" dirty="0">
+                <a:solidFill>
+                  <a:srgbClr val="00B0F0"/>
+                </a:solidFill>
+                <a:latin typeface="Calibri"/>
+                <a:cs typeface="Calibri"/>
+                <a:sym typeface="Calibri"/>
+              </a:rPr>
+              <a:t>Coffee )    # </a:t>
+            </a:r>
+            <a:r>
+              <a:rPr lang="en-US" sz="1200" b="1" dirty="0">
+                <a:solidFill>
+                  <a:srgbClr val="00B0F0"/>
+                </a:solidFill>
+                <a:latin typeface="Calibri"/>
+                <a:ea typeface="Calibri"/>
+                <a:cs typeface="Calibri"/>
+                <a:sym typeface="Calibri"/>
+              </a:rPr>
+              <a:t>Yellow</a:t>
+            </a:r>
+          </a:p>
+          <a:p>
+            <a:pPr marL="0" marR="0" lvl="0" indent="0" algn="l" rtl="0">
+              <a:spcBef>
+                <a:spcPts val="0"/>
+              </a:spcBef>
+              <a:spcAft>
+                <a:spcPts val="0"/>
+              </a:spcAft>
+              <a:buNone/>
+            </a:pPr>
+            <a:r>
+              <a:rPr lang="en-US" sz="1200" dirty="0">
+                <a:solidFill>
+                  <a:schemeClr val="dk1"/>
+                </a:solidFill>
+                <a:latin typeface="Calibri"/>
+                <a:ea typeface="Calibri"/>
+                <a:cs typeface="Calibri"/>
+                <a:sym typeface="Calibri"/>
+              </a:rPr>
+              <a:t>P(B) = 5% = P( Damaged  )  # Blue</a:t>
+            </a:r>
+          </a:p>
+          <a:p>
+            <a:pPr marL="0" marR="0" lvl="0" indent="0" algn="l" rtl="0">
+              <a:spcBef>
+                <a:spcPts val="0"/>
+              </a:spcBef>
+              <a:spcAft>
+                <a:spcPts val="0"/>
+              </a:spcAft>
+              <a:buNone/>
+            </a:pPr>
+            <a:endParaRPr lang="en-US" sz="1200" dirty="0">
+              <a:solidFill>
+                <a:schemeClr val="dk1"/>
+              </a:solidFill>
+              <a:latin typeface="Calibri"/>
+              <a:ea typeface="Calibri"/>
+              <a:cs typeface="Calibri"/>
+              <a:sym typeface="Calibri"/>
+            </a:endParaRPr>
+          </a:p>
+          <a:p>
+            <a:pPr lvl="0"/>
+            <a:r>
+              <a:rPr lang="en-US" sz="1200" b="1" dirty="0">
+                <a:solidFill>
+                  <a:srgbClr val="00B0F0"/>
+                </a:solidFill>
+                <a:latin typeface="Calibri"/>
+                <a:ea typeface="Calibri"/>
+                <a:cs typeface="Calibri"/>
+                <a:sym typeface="Calibri"/>
+              </a:rPr>
+              <a:t>P(B|A) = 10% = P( Damaged given that Coffee )</a:t>
+            </a:r>
+          </a:p>
+          <a:p>
+            <a:pPr lvl="0"/>
+            <a:r>
+              <a:rPr lang="en-US" sz="1200" dirty="0">
+                <a:solidFill>
+                  <a:schemeClr val="dk1"/>
+                </a:solidFill>
+                <a:latin typeface="Calibri"/>
+                <a:ea typeface="Calibri"/>
+                <a:cs typeface="Calibri"/>
+                <a:sym typeface="Calibri"/>
+              </a:rPr>
+              <a:t>P(A|B) = 80% = P( Coffee given that Damaged )</a:t>
+            </a:r>
+          </a:p>
+          <a:p>
+            <a:pPr marL="0" marR="0" lvl="0" indent="0" algn="l" rtl="0">
+              <a:spcBef>
+                <a:spcPts val="0"/>
+              </a:spcBef>
+              <a:spcAft>
+                <a:spcPts val="0"/>
+              </a:spcAft>
+              <a:buNone/>
+            </a:pPr>
+            <a:endParaRPr lang="en-US" sz="1200" dirty="0">
+              <a:solidFill>
+                <a:schemeClr val="dk1"/>
+              </a:solidFill>
+              <a:latin typeface="Calibri"/>
+              <a:ea typeface="Calibri"/>
+              <a:cs typeface="Calibri"/>
+              <a:sym typeface="Calibri"/>
+            </a:endParaRPr>
+          </a:p>
+          <a:p>
+            <a:r>
+              <a:rPr lang="en-US" sz="1200" dirty="0">
+                <a:solidFill>
+                  <a:schemeClr val="dk1"/>
+                </a:solidFill>
+                <a:latin typeface="Calibri"/>
+                <a:ea typeface="Calibri"/>
+                <a:cs typeface="Calibri"/>
+                <a:sym typeface="Calibri"/>
+              </a:rPr>
+              <a:t>Intersection:</a:t>
+            </a:r>
+          </a:p>
+          <a:p>
+            <a:pPr marL="0" marR="0" lvl="0" indent="0" algn="l" rtl="0">
+              <a:spcBef>
+                <a:spcPts val="0"/>
+              </a:spcBef>
+              <a:spcAft>
+                <a:spcPts val="0"/>
+              </a:spcAft>
+              <a:buNone/>
+            </a:pPr>
+            <a:r>
+              <a:rPr lang="en-US" sz="1200" dirty="0">
+                <a:solidFill>
+                  <a:schemeClr val="dk1"/>
+                </a:solidFill>
+                <a:latin typeface="Calibri"/>
+                <a:ea typeface="Calibri"/>
+                <a:cs typeface="Calibri"/>
+                <a:sym typeface="Calibri"/>
+              </a:rPr>
+              <a:t>P(A &amp; B) = 4% = P(Coffee &amp; Damaged)  # Green</a:t>
+            </a:r>
+          </a:p>
+          <a:p>
+            <a:pPr marL="0" marR="0" lvl="0" indent="0" algn="l" rtl="0">
+              <a:spcBef>
+                <a:spcPts val="0"/>
+              </a:spcBef>
+              <a:spcAft>
+                <a:spcPts val="0"/>
+              </a:spcAft>
+              <a:buNone/>
+            </a:pPr>
+            <a:r>
+              <a:rPr lang="en-US" sz="1200" dirty="0">
+                <a:solidFill>
+                  <a:schemeClr val="dk1"/>
+                </a:solidFill>
+                <a:latin typeface="Calibri"/>
+                <a:ea typeface="Calibri"/>
+                <a:cs typeface="Calibri"/>
+                <a:sym typeface="Calibri"/>
+              </a:rPr>
+              <a:t>P(A|B)*P(B) = 80%*5% = 4%</a:t>
+            </a:r>
+            <a:endParaRPr sz="1200" dirty="0">
+              <a:solidFill>
+                <a:schemeClr val="dk1"/>
+              </a:solidFill>
+              <a:latin typeface="Calibri"/>
+              <a:ea typeface="Calibri"/>
+              <a:cs typeface="Calibri"/>
+              <a:sym typeface="Calibri"/>
+            </a:endParaRPr>
+          </a:p>
+          <a:p>
+            <a:pPr marL="0" marR="0" lvl="0" indent="0" algn="l" rtl="0">
+              <a:spcBef>
+                <a:spcPts val="0"/>
+              </a:spcBef>
+              <a:spcAft>
+                <a:spcPts val="0"/>
+              </a:spcAft>
+              <a:buNone/>
+            </a:pPr>
+            <a:r>
+              <a:rPr lang="en-US" sz="1200" b="1" dirty="0">
+                <a:solidFill>
+                  <a:srgbClr val="00B0F0"/>
+                </a:solidFill>
+                <a:latin typeface="Calibri"/>
+                <a:ea typeface="Calibri"/>
+                <a:cs typeface="Calibri"/>
+                <a:sym typeface="Calibri"/>
+              </a:rPr>
+              <a:t>P(B|A)*P(A) = 10%*40% = 4%</a:t>
+            </a:r>
+          </a:p>
+        </p:txBody>
+      </p:sp>
+      <p:sp>
+        <p:nvSpPr>
+          <p:cNvPr id="6" name="Google Shape;96;p13">
+            <a:extLst>
+              <a:ext uri="{FF2B5EF4-FFF2-40B4-BE49-F238E27FC236}">
+                <a16:creationId xmlns:a16="http://schemas.microsoft.com/office/drawing/2014/main" id="{404A001F-C0A0-BE48-A3B1-C838E48FDF8F}"/>
+              </a:ext>
+            </a:extLst>
+          </p:cNvPr>
+          <p:cNvSpPr/>
+          <p:nvPr/>
+        </p:nvSpPr>
+        <p:spPr>
+          <a:xfrm>
+            <a:off x="116387" y="1974106"/>
+            <a:ext cx="3991888" cy="2229852"/>
+          </a:xfrm>
+          <a:prstGeom prst="rect">
+            <a:avLst/>
+          </a:prstGeom>
+          <a:solidFill>
+            <a:srgbClr val="FBE4D4"/>
+          </a:solidFill>
+          <a:ln w="12700" cap="flat" cmpd="sng">
+            <a:solidFill>
+              <a:srgbClr val="31538F"/>
+            </a:solidFill>
+            <a:prstDash val="solid"/>
+            <a:miter lim="800000"/>
+            <a:headEnd type="none" w="sm" len="sm"/>
+            <a:tailEnd type="none" w="sm" len="sm"/>
+          </a:ln>
+        </p:spPr>
+        <p:txBody>
+          <a:bodyPr spcFirstLastPara="1" wrap="square" lIns="91425" tIns="45700" rIns="91425" bIns="45700" anchor="ctr" anchorCtr="0">
+            <a:noAutofit/>
+          </a:bodyPr>
+          <a:lstStyle/>
+          <a:p>
+            <a:pPr marL="0" marR="0" lvl="0" indent="0" algn="ctr" rtl="0">
+              <a:spcBef>
+                <a:spcPts val="0"/>
+              </a:spcBef>
+              <a:spcAft>
+                <a:spcPts val="0"/>
+              </a:spcAft>
+              <a:buNone/>
+            </a:pPr>
+            <a:endParaRPr sz="1800">
+              <a:solidFill>
+                <a:schemeClr val="lt1"/>
+              </a:solidFill>
+              <a:latin typeface="Calibri"/>
+              <a:ea typeface="Calibri"/>
+              <a:cs typeface="Calibri"/>
+              <a:sym typeface="Calibri"/>
+            </a:endParaRPr>
+          </a:p>
+        </p:txBody>
+      </p:sp>
+      <p:sp>
+        <p:nvSpPr>
+          <p:cNvPr id="7" name="Google Shape;97;p13">
+            <a:extLst>
+              <a:ext uri="{FF2B5EF4-FFF2-40B4-BE49-F238E27FC236}">
+                <a16:creationId xmlns:a16="http://schemas.microsoft.com/office/drawing/2014/main" id="{31FE829C-2386-834C-996B-C2F3AE8AE45B}"/>
+              </a:ext>
+            </a:extLst>
+          </p:cNvPr>
+          <p:cNvSpPr/>
+          <p:nvPr/>
+        </p:nvSpPr>
+        <p:spPr>
+          <a:xfrm>
+            <a:off x="263208" y="2278906"/>
+            <a:ext cx="3224463" cy="1764631"/>
+          </a:xfrm>
+          <a:prstGeom prst="ellipse">
+            <a:avLst/>
+          </a:prstGeom>
+          <a:solidFill>
+            <a:srgbClr val="FFC000"/>
+          </a:solidFill>
+          <a:ln w="12700" cap="flat" cmpd="sng">
+            <a:solidFill>
+              <a:srgbClr val="31538F"/>
+            </a:solidFill>
+            <a:prstDash val="solid"/>
+            <a:miter lim="800000"/>
+            <a:headEnd type="none" w="sm" len="sm"/>
+            <a:tailEnd type="none" w="sm" len="sm"/>
+          </a:ln>
+        </p:spPr>
+        <p:txBody>
+          <a:bodyPr spcFirstLastPara="1" wrap="square" lIns="91425" tIns="45700" rIns="91425" bIns="45700" anchor="ctr" anchorCtr="0">
+            <a:noAutofit/>
+          </a:bodyPr>
+          <a:lstStyle/>
+          <a:p>
+            <a:pPr marL="0" marR="0" lvl="0" indent="0" algn="ctr" rtl="0">
+              <a:spcBef>
+                <a:spcPts val="0"/>
+              </a:spcBef>
+              <a:spcAft>
+                <a:spcPts val="0"/>
+              </a:spcAft>
+              <a:buNone/>
+            </a:pPr>
+            <a:endParaRPr sz="1800">
+              <a:solidFill>
+                <a:schemeClr val="lt1"/>
+              </a:solidFill>
+              <a:latin typeface="Calibri"/>
+              <a:ea typeface="Calibri"/>
+              <a:cs typeface="Calibri"/>
+              <a:sym typeface="Calibri"/>
+            </a:endParaRPr>
+          </a:p>
+        </p:txBody>
+      </p:sp>
+      <p:sp>
+        <p:nvSpPr>
+          <p:cNvPr id="8" name="Google Shape;98;p13">
+            <a:extLst>
+              <a:ext uri="{FF2B5EF4-FFF2-40B4-BE49-F238E27FC236}">
+                <a16:creationId xmlns:a16="http://schemas.microsoft.com/office/drawing/2014/main" id="{DDB1E21D-A88D-F84D-A4C7-D15B09894D17}"/>
+              </a:ext>
+            </a:extLst>
+          </p:cNvPr>
+          <p:cNvSpPr/>
+          <p:nvPr/>
+        </p:nvSpPr>
+        <p:spPr>
+          <a:xfrm>
+            <a:off x="2439126" y="2710753"/>
+            <a:ext cx="1397874" cy="900935"/>
+          </a:xfrm>
+          <a:prstGeom prst="ellipse">
+            <a:avLst/>
+          </a:prstGeom>
+          <a:solidFill>
+            <a:srgbClr val="00B0F0">
+              <a:alpha val="40784"/>
+            </a:srgbClr>
+          </a:solidFill>
+          <a:ln w="12700" cap="flat" cmpd="sng">
+            <a:solidFill>
+              <a:srgbClr val="31538F"/>
+            </a:solidFill>
+            <a:prstDash val="solid"/>
+            <a:miter lim="800000"/>
+            <a:headEnd type="none" w="sm" len="sm"/>
+            <a:tailEnd type="none" w="sm" len="sm"/>
+          </a:ln>
+        </p:spPr>
+        <p:txBody>
+          <a:bodyPr spcFirstLastPara="1" wrap="square" lIns="91425" tIns="45700" rIns="91425" bIns="45700" anchor="ctr" anchorCtr="0">
+            <a:noAutofit/>
+          </a:bodyPr>
+          <a:lstStyle/>
+          <a:p>
+            <a:pPr marL="0" marR="0" lvl="0" indent="0" algn="ctr" rtl="0">
+              <a:spcBef>
+                <a:spcPts val="0"/>
+              </a:spcBef>
+              <a:spcAft>
+                <a:spcPts val="0"/>
+              </a:spcAft>
+              <a:buNone/>
+            </a:pPr>
+            <a:endParaRPr sz="1800">
+              <a:solidFill>
+                <a:schemeClr val="lt1"/>
+              </a:solidFill>
+              <a:latin typeface="Calibri"/>
+              <a:ea typeface="Calibri"/>
+              <a:cs typeface="Calibri"/>
+              <a:sym typeface="Calibri"/>
+            </a:endParaRPr>
+          </a:p>
+        </p:txBody>
+      </p:sp>
+      <p:sp>
+        <p:nvSpPr>
+          <p:cNvPr id="9" name="Google Shape;99;p13">
+            <a:extLst>
+              <a:ext uri="{FF2B5EF4-FFF2-40B4-BE49-F238E27FC236}">
+                <a16:creationId xmlns:a16="http://schemas.microsoft.com/office/drawing/2014/main" id="{4B219D50-9096-DC46-8C16-4EC0A06BA7C0}"/>
+              </a:ext>
+            </a:extLst>
+          </p:cNvPr>
+          <p:cNvSpPr txBox="1"/>
+          <p:nvPr/>
+        </p:nvSpPr>
+        <p:spPr>
+          <a:xfrm>
+            <a:off x="1164672" y="2710753"/>
+            <a:ext cx="971694" cy="647909"/>
+          </a:xfrm>
+          <a:prstGeom prst="rect">
+            <a:avLst/>
+          </a:prstGeom>
+          <a:noFill/>
+          <a:ln>
+            <a:noFill/>
+          </a:ln>
+        </p:spPr>
+        <p:txBody>
+          <a:bodyPr spcFirstLastPara="1" wrap="square" lIns="91425" tIns="45700" rIns="91425" bIns="45700" anchor="t" anchorCtr="0">
+            <a:noAutofit/>
+          </a:bodyPr>
+          <a:lstStyle>
+            <a:defPPr marR="0" lvl="0" algn="l" rtl="0">
+              <a:lnSpc>
+                <a:spcPct val="100000"/>
+              </a:lnSpc>
+              <a:spcBef>
+                <a:spcPts val="0"/>
+              </a:spcBef>
+              <a:spcAft>
+                <a:spcPts val="0"/>
+              </a:spcAft>
+            </a:defPPr>
+            <a:lvl1pPr marL="0" indent="0">
+              <a:buNone/>
+              <a:defRPr sz="1800" b="1">
+                <a:solidFill>
+                  <a:srgbClr val="FF0000"/>
+                </a:solidFill>
+                <a:latin typeface="Calibri"/>
+                <a:ea typeface="Calibri"/>
+                <a:cs typeface="Calibri"/>
+              </a:defRPr>
+            </a:lvl1pPr>
+          </a:lstStyle>
+          <a:p>
+            <a:r>
+              <a:rPr lang="en-US" dirty="0">
+                <a:sym typeface="Calibri"/>
+              </a:rPr>
+              <a:t>A</a:t>
+            </a:r>
+          </a:p>
+          <a:p>
+            <a:r>
+              <a:rPr lang="en-US" dirty="0">
+                <a:sym typeface="Calibri"/>
+              </a:rPr>
+              <a:t>Coffee</a:t>
+            </a:r>
+            <a:endParaRPr dirty="0">
+              <a:sym typeface="Calibri"/>
+            </a:endParaRPr>
+          </a:p>
+        </p:txBody>
+      </p:sp>
+      <p:sp>
+        <p:nvSpPr>
+          <p:cNvPr id="10" name="Google Shape;100;p13">
+            <a:extLst>
+              <a:ext uri="{FF2B5EF4-FFF2-40B4-BE49-F238E27FC236}">
+                <a16:creationId xmlns:a16="http://schemas.microsoft.com/office/drawing/2014/main" id="{A8D1023C-103A-914C-952D-A30BFA64F4CA}"/>
+              </a:ext>
+            </a:extLst>
+          </p:cNvPr>
+          <p:cNvSpPr txBox="1"/>
+          <p:nvPr/>
+        </p:nvSpPr>
+        <p:spPr>
+          <a:xfrm>
+            <a:off x="3065807" y="2935014"/>
+            <a:ext cx="1246477" cy="745778"/>
+          </a:xfrm>
+          <a:prstGeom prst="rect">
+            <a:avLst/>
+          </a:prstGeom>
+          <a:noFill/>
+          <a:ln>
+            <a:noFill/>
+          </a:ln>
+        </p:spPr>
+        <p:txBody>
+          <a:bodyPr spcFirstLastPara="1" wrap="square" lIns="91425" tIns="45700" rIns="91425" bIns="45700" anchor="t" anchorCtr="0">
+            <a:noAutofit/>
+          </a:bodyPr>
+          <a:lstStyle/>
+          <a:p>
+            <a:pPr marL="0" marR="0" lvl="0" indent="0" algn="l" rtl="0">
+              <a:spcBef>
+                <a:spcPts val="0"/>
+              </a:spcBef>
+              <a:spcAft>
+                <a:spcPts val="0"/>
+              </a:spcAft>
+              <a:buNone/>
+            </a:pPr>
+            <a:r>
+              <a:rPr lang="en-US" sz="1800" b="1" dirty="0">
+                <a:solidFill>
+                  <a:srgbClr val="FF0000"/>
+                </a:solidFill>
+                <a:latin typeface="Calibri"/>
+                <a:ea typeface="Calibri"/>
+                <a:cs typeface="Calibri"/>
+                <a:sym typeface="Calibri"/>
+              </a:rPr>
+              <a:t>        B</a:t>
+            </a:r>
+          </a:p>
+          <a:p>
+            <a:pPr marL="0" marR="0" lvl="0" indent="0" algn="l" rtl="0">
+              <a:spcBef>
+                <a:spcPts val="0"/>
+              </a:spcBef>
+              <a:spcAft>
+                <a:spcPts val="0"/>
+              </a:spcAft>
+              <a:buNone/>
+            </a:pPr>
+            <a:r>
+              <a:rPr lang="en-US" sz="1800" b="1" dirty="0">
+                <a:solidFill>
+                  <a:srgbClr val="FF0000"/>
+                </a:solidFill>
+                <a:latin typeface="Calibri"/>
+                <a:ea typeface="Calibri"/>
+                <a:cs typeface="Calibri"/>
+                <a:sym typeface="Calibri"/>
+              </a:rPr>
+              <a:t>Damaged</a:t>
+            </a:r>
+            <a:endParaRPr sz="1800" b="1" dirty="0">
+              <a:solidFill>
+                <a:srgbClr val="FF0000"/>
+              </a:solidFill>
+              <a:latin typeface="Calibri"/>
+              <a:ea typeface="Calibri"/>
+              <a:cs typeface="Calibri"/>
+              <a:sym typeface="Calibri"/>
+            </a:endParaRPr>
+          </a:p>
+        </p:txBody>
+      </p:sp>
+      <p:sp>
+        <p:nvSpPr>
+          <p:cNvPr id="11" name="Google Shape;101;p13">
+            <a:extLst>
+              <a:ext uri="{FF2B5EF4-FFF2-40B4-BE49-F238E27FC236}">
+                <a16:creationId xmlns:a16="http://schemas.microsoft.com/office/drawing/2014/main" id="{7B123850-E879-7745-BC69-FED970CB58A9}"/>
+              </a:ext>
+            </a:extLst>
+          </p:cNvPr>
+          <p:cNvSpPr txBox="1"/>
+          <p:nvPr/>
+        </p:nvSpPr>
+        <p:spPr>
+          <a:xfrm>
+            <a:off x="2679402" y="1974106"/>
+            <a:ext cx="1530878" cy="461665"/>
+          </a:xfrm>
+          <a:prstGeom prst="rect">
+            <a:avLst/>
+          </a:prstGeom>
+          <a:noFill/>
+          <a:ln>
+            <a:noFill/>
+          </a:ln>
+        </p:spPr>
+        <p:txBody>
+          <a:bodyPr spcFirstLastPara="1" wrap="square" lIns="91425" tIns="45700" rIns="91425" bIns="45700" anchor="t" anchorCtr="0">
+            <a:noAutofit/>
+          </a:bodyPr>
+          <a:lstStyle/>
+          <a:p>
+            <a:pPr marL="0" marR="0" lvl="0" indent="0" algn="l" rtl="0">
+              <a:spcBef>
+                <a:spcPts val="0"/>
+              </a:spcBef>
+              <a:spcAft>
+                <a:spcPts val="0"/>
+              </a:spcAft>
+              <a:buNone/>
+            </a:pPr>
+            <a:r>
+              <a:rPr lang="en-US" sz="2400" b="1" dirty="0">
+                <a:solidFill>
+                  <a:srgbClr val="FF0000"/>
+                </a:solidFill>
+                <a:latin typeface="Calibri"/>
+                <a:ea typeface="Calibri"/>
+                <a:cs typeface="Calibri"/>
+                <a:sym typeface="Calibri"/>
+              </a:rPr>
+              <a:t>All Drives</a:t>
+            </a:r>
+            <a:endParaRPr sz="2400" b="1" dirty="0">
+              <a:solidFill>
+                <a:srgbClr val="FF0000"/>
+              </a:solidFill>
+              <a:latin typeface="Calibri"/>
+              <a:ea typeface="Calibri"/>
+              <a:cs typeface="Calibri"/>
+              <a:sym typeface="Calibri"/>
+            </a:endParaRPr>
+          </a:p>
+        </p:txBody>
+      </p:sp>
+      <p:sp>
+        <p:nvSpPr>
+          <p:cNvPr id="13" name="Google Shape;96;p13">
+            <a:extLst>
+              <a:ext uri="{FF2B5EF4-FFF2-40B4-BE49-F238E27FC236}">
+                <a16:creationId xmlns:a16="http://schemas.microsoft.com/office/drawing/2014/main" id="{569DD241-518F-8F46-AE6A-34E80876D3BC}"/>
+              </a:ext>
+            </a:extLst>
+          </p:cNvPr>
+          <p:cNvSpPr/>
+          <p:nvPr/>
+        </p:nvSpPr>
+        <p:spPr>
+          <a:xfrm>
+            <a:off x="116387" y="4517792"/>
+            <a:ext cx="3991888" cy="2229852"/>
+          </a:xfrm>
+          <a:prstGeom prst="rect">
+            <a:avLst/>
+          </a:prstGeom>
+          <a:solidFill>
+            <a:srgbClr val="FBE4D4"/>
+          </a:solidFill>
+          <a:ln w="12700" cap="flat" cmpd="sng">
+            <a:solidFill>
+              <a:srgbClr val="31538F"/>
+            </a:solidFill>
+            <a:prstDash val="solid"/>
+            <a:miter lim="800000"/>
+            <a:headEnd type="none" w="sm" len="sm"/>
+            <a:tailEnd type="none" w="sm" len="sm"/>
+          </a:ln>
+        </p:spPr>
+        <p:txBody>
+          <a:bodyPr spcFirstLastPara="1" wrap="square" lIns="91425" tIns="45700" rIns="91425" bIns="45700" anchor="ctr" anchorCtr="0">
+            <a:noAutofit/>
+          </a:bodyPr>
+          <a:lstStyle/>
+          <a:p>
+            <a:pPr marL="0" marR="0" lvl="0" indent="0" algn="ctr" rtl="0">
+              <a:spcBef>
+                <a:spcPts val="0"/>
+              </a:spcBef>
+              <a:spcAft>
+                <a:spcPts val="0"/>
+              </a:spcAft>
+              <a:buNone/>
+            </a:pPr>
+            <a:endParaRPr sz="1800">
+              <a:solidFill>
+                <a:schemeClr val="lt1"/>
+              </a:solidFill>
+              <a:latin typeface="Calibri"/>
+              <a:ea typeface="Calibri"/>
+              <a:cs typeface="Calibri"/>
+              <a:sym typeface="Calibri"/>
+            </a:endParaRPr>
+          </a:p>
+        </p:txBody>
+      </p:sp>
+      <p:sp>
+        <p:nvSpPr>
+          <p:cNvPr id="14" name="Google Shape;97;p13">
+            <a:extLst>
+              <a:ext uri="{FF2B5EF4-FFF2-40B4-BE49-F238E27FC236}">
+                <a16:creationId xmlns:a16="http://schemas.microsoft.com/office/drawing/2014/main" id="{30AA5D0A-2560-CE4A-B38C-91AD69134962}"/>
+              </a:ext>
+            </a:extLst>
+          </p:cNvPr>
+          <p:cNvSpPr/>
+          <p:nvPr/>
+        </p:nvSpPr>
+        <p:spPr>
+          <a:xfrm>
+            <a:off x="2089797" y="5384791"/>
+            <a:ext cx="1397874" cy="900935"/>
+          </a:xfrm>
+          <a:prstGeom prst="ellipse">
+            <a:avLst/>
+          </a:prstGeom>
+          <a:solidFill>
+            <a:srgbClr val="FFC000"/>
+          </a:solidFill>
+          <a:ln w="12700" cap="flat" cmpd="sng">
+            <a:solidFill>
+              <a:srgbClr val="31538F"/>
+            </a:solidFill>
+            <a:prstDash val="solid"/>
+            <a:miter lim="800000"/>
+            <a:headEnd type="none" w="sm" len="sm"/>
+            <a:tailEnd type="none" w="sm" len="sm"/>
+          </a:ln>
+        </p:spPr>
+        <p:txBody>
+          <a:bodyPr spcFirstLastPara="1" wrap="square" lIns="91425" tIns="45700" rIns="91425" bIns="45700" anchor="ctr" anchorCtr="0">
+            <a:noAutofit/>
+          </a:bodyPr>
+          <a:lstStyle/>
+          <a:p>
+            <a:pPr marL="0" marR="0" lvl="0" indent="0" algn="ctr" rtl="0">
+              <a:spcBef>
+                <a:spcPts val="0"/>
+              </a:spcBef>
+              <a:spcAft>
+                <a:spcPts val="0"/>
+              </a:spcAft>
+              <a:buNone/>
+            </a:pPr>
+            <a:endParaRPr sz="1800">
+              <a:solidFill>
+                <a:schemeClr val="lt1"/>
+              </a:solidFill>
+              <a:latin typeface="Calibri"/>
+              <a:ea typeface="Calibri"/>
+              <a:cs typeface="Calibri"/>
+              <a:sym typeface="Calibri"/>
+            </a:endParaRPr>
+          </a:p>
+        </p:txBody>
+      </p:sp>
+      <p:sp>
+        <p:nvSpPr>
+          <p:cNvPr id="15" name="Google Shape;98;p13">
+            <a:extLst>
+              <a:ext uri="{FF2B5EF4-FFF2-40B4-BE49-F238E27FC236}">
+                <a16:creationId xmlns:a16="http://schemas.microsoft.com/office/drawing/2014/main" id="{655DB671-3DA8-B149-8288-4F8B78A39734}"/>
+              </a:ext>
+            </a:extLst>
+          </p:cNvPr>
+          <p:cNvSpPr/>
+          <p:nvPr/>
+        </p:nvSpPr>
+        <p:spPr>
+          <a:xfrm>
+            <a:off x="2439126" y="5254439"/>
+            <a:ext cx="1397874" cy="900935"/>
+          </a:xfrm>
+          <a:prstGeom prst="ellipse">
+            <a:avLst/>
+          </a:prstGeom>
+          <a:solidFill>
+            <a:srgbClr val="00B0F0">
+              <a:alpha val="40784"/>
+            </a:srgbClr>
+          </a:solidFill>
+          <a:ln w="12700" cap="flat" cmpd="sng">
+            <a:solidFill>
+              <a:srgbClr val="31538F"/>
+            </a:solidFill>
+            <a:prstDash val="solid"/>
+            <a:miter lim="800000"/>
+            <a:headEnd type="none" w="sm" len="sm"/>
+            <a:tailEnd type="none" w="sm" len="sm"/>
+          </a:ln>
+        </p:spPr>
+        <p:txBody>
+          <a:bodyPr spcFirstLastPara="1" wrap="square" lIns="91425" tIns="45700" rIns="91425" bIns="45700" anchor="ctr" anchorCtr="0">
+            <a:noAutofit/>
+          </a:bodyPr>
+          <a:lstStyle/>
+          <a:p>
+            <a:pPr marL="0" marR="0" lvl="0" indent="0" algn="ctr" rtl="0">
+              <a:spcBef>
+                <a:spcPts val="0"/>
+              </a:spcBef>
+              <a:spcAft>
+                <a:spcPts val="0"/>
+              </a:spcAft>
+              <a:buNone/>
+            </a:pPr>
+            <a:endParaRPr sz="1800">
+              <a:solidFill>
+                <a:schemeClr val="lt1"/>
+              </a:solidFill>
+              <a:latin typeface="Calibri"/>
+              <a:ea typeface="Calibri"/>
+              <a:cs typeface="Calibri"/>
+              <a:sym typeface="Calibri"/>
+            </a:endParaRPr>
+          </a:p>
+        </p:txBody>
+      </p:sp>
+      <p:sp>
+        <p:nvSpPr>
+          <p:cNvPr id="16" name="Google Shape;99;p13">
+            <a:extLst>
+              <a:ext uri="{FF2B5EF4-FFF2-40B4-BE49-F238E27FC236}">
+                <a16:creationId xmlns:a16="http://schemas.microsoft.com/office/drawing/2014/main" id="{E19F1E77-6C1D-CF40-A056-B5F0A0067705}"/>
+              </a:ext>
+            </a:extLst>
+          </p:cNvPr>
+          <p:cNvSpPr txBox="1"/>
+          <p:nvPr/>
+        </p:nvSpPr>
+        <p:spPr>
+          <a:xfrm>
+            <a:off x="2136366" y="5632718"/>
+            <a:ext cx="581015" cy="431253"/>
+          </a:xfrm>
+          <a:prstGeom prst="rect">
+            <a:avLst/>
+          </a:prstGeom>
+          <a:noFill/>
+          <a:ln>
+            <a:noFill/>
+          </a:ln>
+        </p:spPr>
+        <p:txBody>
+          <a:bodyPr spcFirstLastPara="1" wrap="square" lIns="91425" tIns="45700" rIns="91425" bIns="45700" anchor="t" anchorCtr="0">
+            <a:noAutofit/>
+          </a:bodyPr>
+          <a:lstStyle/>
+          <a:p>
+            <a:pPr marL="0" marR="0" lvl="0" indent="0" algn="l" rtl="0">
+              <a:spcBef>
+                <a:spcPts val="0"/>
+              </a:spcBef>
+              <a:spcAft>
+                <a:spcPts val="0"/>
+              </a:spcAft>
+              <a:buNone/>
+            </a:pPr>
+            <a:r>
+              <a:rPr lang="en-US" sz="2400" b="1" dirty="0">
+                <a:solidFill>
+                  <a:srgbClr val="FF0000"/>
+                </a:solidFill>
+                <a:latin typeface="Calibri"/>
+                <a:ea typeface="Calibri"/>
+                <a:cs typeface="Calibri"/>
+                <a:sym typeface="Calibri"/>
+              </a:rPr>
+              <a:t>A</a:t>
+            </a:r>
+            <a:endParaRPr sz="2400" b="1" dirty="0">
+              <a:solidFill>
+                <a:srgbClr val="FF0000"/>
+              </a:solidFill>
+              <a:latin typeface="Calibri"/>
+              <a:ea typeface="Calibri"/>
+              <a:cs typeface="Calibri"/>
+              <a:sym typeface="Calibri"/>
+            </a:endParaRPr>
+          </a:p>
+        </p:txBody>
+      </p:sp>
+      <p:sp>
+        <p:nvSpPr>
+          <p:cNvPr id="17" name="Google Shape;100;p13">
+            <a:extLst>
+              <a:ext uri="{FF2B5EF4-FFF2-40B4-BE49-F238E27FC236}">
+                <a16:creationId xmlns:a16="http://schemas.microsoft.com/office/drawing/2014/main" id="{61C18CBF-01D4-C848-A7B2-E04510A0F7B8}"/>
+              </a:ext>
+            </a:extLst>
+          </p:cNvPr>
+          <p:cNvSpPr txBox="1"/>
+          <p:nvPr/>
+        </p:nvSpPr>
+        <p:spPr>
+          <a:xfrm>
+            <a:off x="3467734" y="5384791"/>
+            <a:ext cx="640540" cy="433753"/>
+          </a:xfrm>
+          <a:prstGeom prst="rect">
+            <a:avLst/>
+          </a:prstGeom>
+          <a:noFill/>
+          <a:ln>
+            <a:noFill/>
+          </a:ln>
+        </p:spPr>
+        <p:txBody>
+          <a:bodyPr spcFirstLastPara="1" wrap="square" lIns="91425" tIns="45700" rIns="91425" bIns="45700" anchor="t" anchorCtr="0">
+            <a:noAutofit/>
+          </a:bodyPr>
+          <a:lstStyle/>
+          <a:p>
+            <a:pPr marL="0" marR="0" lvl="0" indent="0" algn="l" rtl="0">
+              <a:spcBef>
+                <a:spcPts val="0"/>
+              </a:spcBef>
+              <a:spcAft>
+                <a:spcPts val="0"/>
+              </a:spcAft>
+              <a:buNone/>
+            </a:pPr>
+            <a:r>
+              <a:rPr lang="en-US" sz="2400" b="1" dirty="0">
+                <a:solidFill>
+                  <a:srgbClr val="FF0000"/>
+                </a:solidFill>
+                <a:latin typeface="Calibri"/>
+                <a:ea typeface="Calibri"/>
+                <a:cs typeface="Calibri"/>
+                <a:sym typeface="Calibri"/>
+              </a:rPr>
+              <a:t>B</a:t>
+            </a:r>
+          </a:p>
+        </p:txBody>
+      </p:sp>
+      <p:sp>
+        <p:nvSpPr>
+          <p:cNvPr id="18" name="Google Shape;101;p13">
+            <a:extLst>
+              <a:ext uri="{FF2B5EF4-FFF2-40B4-BE49-F238E27FC236}">
+                <a16:creationId xmlns:a16="http://schemas.microsoft.com/office/drawing/2014/main" id="{C254AE81-7BEC-E24E-A3FD-EA1283594849}"/>
+              </a:ext>
+            </a:extLst>
+          </p:cNvPr>
+          <p:cNvSpPr txBox="1"/>
+          <p:nvPr/>
+        </p:nvSpPr>
+        <p:spPr>
+          <a:xfrm>
+            <a:off x="2675922" y="4499611"/>
+            <a:ext cx="1530878" cy="461665"/>
+          </a:xfrm>
+          <a:prstGeom prst="rect">
+            <a:avLst/>
+          </a:prstGeom>
+          <a:noFill/>
+          <a:ln>
+            <a:noFill/>
+          </a:ln>
+        </p:spPr>
+        <p:txBody>
+          <a:bodyPr spcFirstLastPara="1" wrap="square" lIns="91425" tIns="45700" rIns="91425" bIns="45700" anchor="t" anchorCtr="0">
+            <a:noAutofit/>
+          </a:bodyPr>
+          <a:lstStyle/>
+          <a:p>
+            <a:pPr marL="0" marR="0" lvl="0" indent="0" algn="l" rtl="0">
+              <a:spcBef>
+                <a:spcPts val="0"/>
+              </a:spcBef>
+              <a:spcAft>
+                <a:spcPts val="0"/>
+              </a:spcAft>
+              <a:buNone/>
+            </a:pPr>
+            <a:r>
+              <a:rPr lang="en-US" sz="2400" b="1" dirty="0">
+                <a:solidFill>
+                  <a:srgbClr val="FF0000"/>
+                </a:solidFill>
+                <a:latin typeface="Calibri"/>
+                <a:ea typeface="Calibri"/>
+                <a:cs typeface="Calibri"/>
+                <a:sym typeface="Calibri"/>
+              </a:rPr>
+              <a:t>All Drives</a:t>
+            </a:r>
+            <a:endParaRPr sz="2400" b="1" dirty="0">
+              <a:solidFill>
+                <a:srgbClr val="FF0000"/>
+              </a:solidFill>
+              <a:latin typeface="Calibri"/>
+              <a:ea typeface="Calibri"/>
+              <a:cs typeface="Calibri"/>
+              <a:sym typeface="Calibri"/>
+            </a:endParaRPr>
+          </a:p>
+        </p:txBody>
+      </p:sp>
+      <p:sp>
+        <p:nvSpPr>
+          <p:cNvPr id="19" name="TextBox 18">
+            <a:extLst>
+              <a:ext uri="{FF2B5EF4-FFF2-40B4-BE49-F238E27FC236}">
+                <a16:creationId xmlns:a16="http://schemas.microsoft.com/office/drawing/2014/main" id="{6E6E4C8B-2E60-5C46-9FFF-EB63ACF4895B}"/>
+              </a:ext>
+            </a:extLst>
+          </p:cNvPr>
+          <p:cNvSpPr txBox="1"/>
+          <p:nvPr/>
+        </p:nvSpPr>
+        <p:spPr>
+          <a:xfrm>
+            <a:off x="8930917" y="462807"/>
+            <a:ext cx="3119984" cy="1384995"/>
+          </a:xfrm>
+          <a:prstGeom prst="rect">
+            <a:avLst/>
+          </a:prstGeom>
+          <a:noFill/>
+        </p:spPr>
+        <p:txBody>
+          <a:bodyPr wrap="square" rtlCol="0">
+            <a:spAutoFit/>
+          </a:bodyPr>
+          <a:lstStyle/>
+          <a:p>
+            <a:r>
+              <a:rPr lang="en-US" b="1" dirty="0">
+                <a:solidFill>
+                  <a:srgbClr val="00B050"/>
+                </a:solidFill>
+                <a:latin typeface="Menlo" panose="020B0609030804020204" pitchFamily="49" charset="0"/>
+                <a:ea typeface="Menlo" panose="020B0609030804020204" pitchFamily="49" charset="0"/>
+                <a:cs typeface="Menlo" panose="020B0609030804020204" pitchFamily="49" charset="0"/>
+              </a:rPr>
+              <a:t>+-------+----------+------+</a:t>
+            </a:r>
+          </a:p>
+          <a:p>
+            <a:r>
+              <a:rPr lang="en-US" b="1" dirty="0">
+                <a:solidFill>
+                  <a:srgbClr val="00B050"/>
+                </a:solidFill>
+                <a:latin typeface="Menlo" panose="020B0609030804020204" pitchFamily="49" charset="0"/>
+                <a:ea typeface="Menlo" panose="020B0609030804020204" pitchFamily="49" charset="0"/>
+                <a:cs typeface="Menlo" panose="020B0609030804020204" pitchFamily="49" charset="0"/>
+              </a:rPr>
+              <a:t>|       | Damaged  |      |</a:t>
+            </a:r>
+          </a:p>
+          <a:p>
+            <a:r>
+              <a:rPr lang="en-US" b="1" dirty="0">
+                <a:solidFill>
+                  <a:srgbClr val="00B050"/>
+                </a:solidFill>
+                <a:latin typeface="Menlo" panose="020B0609030804020204" pitchFamily="49" charset="0"/>
+                <a:ea typeface="Menlo" panose="020B0609030804020204" pitchFamily="49" charset="0"/>
+                <a:cs typeface="Menlo" panose="020B0609030804020204" pitchFamily="49" charset="0"/>
+              </a:rPr>
+              <a:t>+-------+----------+------+</a:t>
+            </a:r>
+          </a:p>
+          <a:p>
+            <a:r>
+              <a:rPr lang="en-US" b="1" dirty="0">
+                <a:solidFill>
+                  <a:srgbClr val="00B050"/>
+                </a:solidFill>
+                <a:latin typeface="Menlo" panose="020B0609030804020204" pitchFamily="49" charset="0"/>
+                <a:ea typeface="Menlo" panose="020B0609030804020204" pitchFamily="49" charset="0"/>
+                <a:cs typeface="Menlo" panose="020B0609030804020204" pitchFamily="49" charset="0"/>
+              </a:rPr>
+              <a:t>|Coffee |  80      |  -   |</a:t>
+            </a:r>
+          </a:p>
+          <a:p>
+            <a:r>
+              <a:rPr lang="en-US" b="1" dirty="0">
+                <a:solidFill>
+                  <a:srgbClr val="00B050"/>
+                </a:solidFill>
+                <a:latin typeface="Menlo" panose="020B0609030804020204" pitchFamily="49" charset="0"/>
+                <a:ea typeface="Menlo" panose="020B0609030804020204" pitchFamily="49" charset="0"/>
+                <a:cs typeface="Menlo" panose="020B0609030804020204" pitchFamily="49" charset="0"/>
+              </a:rPr>
+              <a:t>|       |  20      |  -   |</a:t>
+            </a:r>
+          </a:p>
+          <a:p>
+            <a:r>
+              <a:rPr lang="en-US" b="1" dirty="0">
+                <a:solidFill>
+                  <a:srgbClr val="00B050"/>
+                </a:solidFill>
+                <a:latin typeface="Menlo" panose="020B0609030804020204" pitchFamily="49" charset="0"/>
+                <a:ea typeface="Menlo" panose="020B0609030804020204" pitchFamily="49" charset="0"/>
+                <a:cs typeface="Menlo" panose="020B0609030804020204" pitchFamily="49" charset="0"/>
+              </a:rPr>
+              <a:t>+-------+----------+------+</a:t>
+            </a:r>
+          </a:p>
+        </p:txBody>
+      </p:sp>
+      <p:sp>
+        <p:nvSpPr>
+          <p:cNvPr id="20" name="Google Shape;89;p13">
+            <a:extLst>
+              <a:ext uri="{FF2B5EF4-FFF2-40B4-BE49-F238E27FC236}">
+                <a16:creationId xmlns:a16="http://schemas.microsoft.com/office/drawing/2014/main" id="{B62C94EF-0889-7846-B479-937B9CC58C28}"/>
+              </a:ext>
+            </a:extLst>
+          </p:cNvPr>
+          <p:cNvSpPr txBox="1"/>
+          <p:nvPr/>
+        </p:nvSpPr>
+        <p:spPr>
+          <a:xfrm>
+            <a:off x="4116279" y="4617542"/>
+            <a:ext cx="3347883" cy="2050775"/>
+          </a:xfrm>
+          <a:prstGeom prst="rect">
+            <a:avLst/>
+          </a:prstGeom>
+          <a:noFill/>
+          <a:ln>
+            <a:noFill/>
+          </a:ln>
+        </p:spPr>
+        <p:txBody>
+          <a:bodyPr spcFirstLastPara="1" wrap="square" lIns="91425" tIns="45700" rIns="91425" bIns="45700" anchor="t" anchorCtr="0">
+            <a:noAutofit/>
+          </a:bodyPr>
+          <a:lstStyle/>
+          <a:p>
+            <a:pPr marL="0" marR="0" lvl="0" indent="0" algn="l" rtl="0">
+              <a:spcBef>
+                <a:spcPts val="0"/>
+              </a:spcBef>
+              <a:spcAft>
+                <a:spcPts val="0"/>
+              </a:spcAft>
+              <a:buNone/>
+            </a:pPr>
+            <a:r>
+              <a:rPr lang="en-US" sz="1200" dirty="0">
+                <a:solidFill>
+                  <a:schemeClr val="dk1"/>
+                </a:solidFill>
+                <a:latin typeface="Calibri"/>
+                <a:cs typeface="Calibri"/>
+                <a:sym typeface="Calibri"/>
+              </a:rPr>
+              <a:t>A = Coffee, B = Damaged, P = Probability</a:t>
+            </a:r>
+            <a:endParaRPr lang="en-US" sz="1200" dirty="0">
+              <a:solidFill>
+                <a:schemeClr val="dk1"/>
+              </a:solidFill>
+              <a:latin typeface="Calibri"/>
+              <a:ea typeface="Calibri"/>
+              <a:cs typeface="Calibri"/>
+              <a:sym typeface="Calibri"/>
+            </a:endParaRPr>
+          </a:p>
+          <a:p>
+            <a:pPr lvl="0"/>
+            <a:r>
+              <a:rPr lang="en-US" sz="1200" b="1" dirty="0">
+                <a:solidFill>
+                  <a:srgbClr val="00B0F0"/>
+                </a:solidFill>
+                <a:latin typeface="Calibri"/>
+                <a:ea typeface="Calibri"/>
+                <a:cs typeface="Calibri"/>
+                <a:sym typeface="Calibri"/>
+              </a:rPr>
+              <a:t>P(A) = 5% = P( </a:t>
+            </a:r>
+            <a:r>
+              <a:rPr lang="en-US" sz="1200" b="1" dirty="0">
+                <a:solidFill>
+                  <a:srgbClr val="00B0F0"/>
+                </a:solidFill>
+                <a:latin typeface="Calibri"/>
+                <a:cs typeface="Calibri"/>
+                <a:sym typeface="Calibri"/>
+              </a:rPr>
+              <a:t>Coffee )    # </a:t>
+            </a:r>
+            <a:r>
+              <a:rPr lang="en-US" sz="1200" b="1" dirty="0">
+                <a:solidFill>
+                  <a:srgbClr val="00B0F0"/>
+                </a:solidFill>
+                <a:latin typeface="Calibri"/>
+                <a:ea typeface="Calibri"/>
+                <a:cs typeface="Calibri"/>
+                <a:sym typeface="Calibri"/>
+              </a:rPr>
+              <a:t>Yellow</a:t>
+            </a:r>
+          </a:p>
+          <a:p>
+            <a:pPr marL="0" marR="0" lvl="0" indent="0" algn="l" rtl="0">
+              <a:spcBef>
+                <a:spcPts val="0"/>
+              </a:spcBef>
+              <a:spcAft>
+                <a:spcPts val="0"/>
+              </a:spcAft>
+              <a:buNone/>
+            </a:pPr>
+            <a:r>
+              <a:rPr lang="en-US" sz="1200" dirty="0">
+                <a:solidFill>
+                  <a:schemeClr val="dk1"/>
+                </a:solidFill>
+                <a:latin typeface="Calibri"/>
+                <a:ea typeface="Calibri"/>
+                <a:cs typeface="Calibri"/>
+                <a:sym typeface="Calibri"/>
+              </a:rPr>
+              <a:t>P(B) = 5% = P( Damaged  )  # Blue</a:t>
+            </a:r>
+          </a:p>
+          <a:p>
+            <a:pPr marL="0" marR="0" lvl="0" indent="0" algn="l" rtl="0">
+              <a:spcBef>
+                <a:spcPts val="0"/>
+              </a:spcBef>
+              <a:spcAft>
+                <a:spcPts val="0"/>
+              </a:spcAft>
+              <a:buNone/>
+            </a:pPr>
+            <a:endParaRPr lang="en-US" sz="1200" dirty="0">
+              <a:solidFill>
+                <a:schemeClr val="dk1"/>
+              </a:solidFill>
+              <a:latin typeface="Calibri"/>
+              <a:ea typeface="Calibri"/>
+              <a:cs typeface="Calibri"/>
+              <a:sym typeface="Calibri"/>
+            </a:endParaRPr>
+          </a:p>
+          <a:p>
+            <a:pPr lvl="0"/>
+            <a:r>
+              <a:rPr lang="en-US" sz="1200" b="1" dirty="0">
+                <a:solidFill>
+                  <a:srgbClr val="00B0F0"/>
+                </a:solidFill>
+                <a:latin typeface="Calibri"/>
+                <a:ea typeface="Calibri"/>
+                <a:cs typeface="Calibri"/>
+                <a:sym typeface="Calibri"/>
+              </a:rPr>
+              <a:t>P(B|A) = 80% = P( Damaged given that Coffee )</a:t>
+            </a:r>
+          </a:p>
+          <a:p>
+            <a:pPr lvl="0"/>
+            <a:r>
+              <a:rPr lang="en-US" sz="1200" dirty="0">
+                <a:solidFill>
+                  <a:schemeClr val="dk1"/>
+                </a:solidFill>
+                <a:latin typeface="Calibri"/>
+                <a:ea typeface="Calibri"/>
+                <a:cs typeface="Calibri"/>
+                <a:sym typeface="Calibri"/>
+              </a:rPr>
+              <a:t>P(A|B) = 80% = P( Coffee given that Damaged )</a:t>
+            </a:r>
+          </a:p>
+          <a:p>
+            <a:pPr marL="0" marR="0" lvl="0" indent="0" algn="l" rtl="0">
+              <a:spcBef>
+                <a:spcPts val="0"/>
+              </a:spcBef>
+              <a:spcAft>
+                <a:spcPts val="0"/>
+              </a:spcAft>
+              <a:buNone/>
+            </a:pPr>
+            <a:endParaRPr lang="en-US" sz="1200" dirty="0">
+              <a:solidFill>
+                <a:schemeClr val="dk1"/>
+              </a:solidFill>
+              <a:latin typeface="Calibri"/>
+              <a:ea typeface="Calibri"/>
+              <a:cs typeface="Calibri"/>
+              <a:sym typeface="Calibri"/>
+            </a:endParaRPr>
+          </a:p>
+          <a:p>
+            <a:r>
+              <a:rPr lang="en-US" sz="1200" dirty="0">
+                <a:solidFill>
+                  <a:schemeClr val="dk1"/>
+                </a:solidFill>
+                <a:latin typeface="Calibri"/>
+                <a:ea typeface="Calibri"/>
+                <a:cs typeface="Calibri"/>
+                <a:sym typeface="Calibri"/>
+              </a:rPr>
+              <a:t>Intersection:</a:t>
+            </a:r>
+          </a:p>
+          <a:p>
+            <a:pPr marL="0" marR="0" lvl="0" indent="0" algn="l" rtl="0">
+              <a:spcBef>
+                <a:spcPts val="0"/>
+              </a:spcBef>
+              <a:spcAft>
+                <a:spcPts val="0"/>
+              </a:spcAft>
+              <a:buNone/>
+            </a:pPr>
+            <a:r>
+              <a:rPr lang="en-US" sz="1200" dirty="0">
+                <a:solidFill>
+                  <a:schemeClr val="dk1"/>
+                </a:solidFill>
+                <a:latin typeface="Calibri"/>
+                <a:ea typeface="Calibri"/>
+                <a:cs typeface="Calibri"/>
+                <a:sym typeface="Calibri"/>
+              </a:rPr>
+              <a:t>P(A &amp; B) = 4% = P(Coffee &amp; Damaged)  # Green</a:t>
+            </a:r>
+          </a:p>
+          <a:p>
+            <a:pPr marL="0" marR="0" lvl="0" indent="0" algn="l" rtl="0">
+              <a:spcBef>
+                <a:spcPts val="0"/>
+              </a:spcBef>
+              <a:spcAft>
+                <a:spcPts val="0"/>
+              </a:spcAft>
+              <a:buNone/>
+            </a:pPr>
+            <a:r>
+              <a:rPr lang="en-US" sz="1200" dirty="0">
+                <a:solidFill>
+                  <a:schemeClr val="dk1"/>
+                </a:solidFill>
+                <a:latin typeface="Calibri"/>
+                <a:ea typeface="Calibri"/>
+                <a:cs typeface="Calibri"/>
+                <a:sym typeface="Calibri"/>
+              </a:rPr>
+              <a:t>P(A|B)*P(B) = 80%*5% = 4%</a:t>
+            </a:r>
+            <a:endParaRPr sz="1200" dirty="0">
+              <a:solidFill>
+                <a:schemeClr val="dk1"/>
+              </a:solidFill>
+              <a:latin typeface="Calibri"/>
+              <a:ea typeface="Calibri"/>
+              <a:cs typeface="Calibri"/>
+              <a:sym typeface="Calibri"/>
+            </a:endParaRPr>
+          </a:p>
+          <a:p>
+            <a:pPr marL="0" marR="0" lvl="0" indent="0" algn="l" rtl="0">
+              <a:spcBef>
+                <a:spcPts val="0"/>
+              </a:spcBef>
+              <a:spcAft>
+                <a:spcPts val="0"/>
+              </a:spcAft>
+              <a:buNone/>
+            </a:pPr>
+            <a:r>
+              <a:rPr lang="en-US" sz="1200" b="1" dirty="0">
+                <a:solidFill>
+                  <a:srgbClr val="00B0F0"/>
+                </a:solidFill>
+                <a:latin typeface="Calibri"/>
+                <a:ea typeface="Calibri"/>
+                <a:cs typeface="Calibri"/>
+                <a:sym typeface="Calibri"/>
+              </a:rPr>
+              <a:t>P(B|A)*P(A) = 80%*5% = 4%</a:t>
+            </a:r>
+          </a:p>
+        </p:txBody>
+      </p:sp>
+      <p:sp>
+        <p:nvSpPr>
+          <p:cNvPr id="4" name="TextBox 3">
+            <a:extLst>
+              <a:ext uri="{FF2B5EF4-FFF2-40B4-BE49-F238E27FC236}">
+                <a16:creationId xmlns:a16="http://schemas.microsoft.com/office/drawing/2014/main" id="{39A90BC2-B4D8-E240-A189-C3C7F0FC7086}"/>
+              </a:ext>
+            </a:extLst>
+          </p:cNvPr>
+          <p:cNvSpPr txBox="1"/>
+          <p:nvPr/>
+        </p:nvSpPr>
+        <p:spPr>
+          <a:xfrm>
+            <a:off x="8930917" y="2068519"/>
+            <a:ext cx="3245613" cy="2123658"/>
+          </a:xfrm>
+          <a:prstGeom prst="rect">
+            <a:avLst/>
+          </a:prstGeom>
+          <a:noFill/>
+        </p:spPr>
+        <p:txBody>
+          <a:bodyPr wrap="square" rtlCol="0">
+            <a:spAutoFit/>
+          </a:bodyPr>
+          <a:lstStyle/>
+          <a:p>
+            <a:r>
+              <a:rPr lang="en-US" sz="1200" dirty="0"/>
+              <a:t>Possible approach to calculating P(B|A):</a:t>
+            </a:r>
+          </a:p>
+          <a:p>
+            <a:endParaRPr lang="en-US" sz="1200" dirty="0"/>
+          </a:p>
+          <a:p>
+            <a:pPr marL="171450" indent="-171450">
+              <a:buFont typeface="Arial" panose="020B0604020202020204" pitchFamily="34" charset="0"/>
+              <a:buChar char="•"/>
+            </a:pPr>
+            <a:r>
+              <a:rPr lang="en-US" sz="1200" dirty="0"/>
+              <a:t>We fix P(A|B)=0.8 and P(B) = 0.05.</a:t>
+            </a:r>
+          </a:p>
+          <a:p>
+            <a:pPr marL="171450" indent="-171450">
+              <a:buFont typeface="Arial" panose="020B0604020202020204" pitchFamily="34" charset="0"/>
+              <a:buChar char="•"/>
+            </a:pPr>
+            <a:r>
+              <a:rPr lang="en-US" sz="1200" dirty="0"/>
+              <a:t>Then we use Bayes formula to </a:t>
+            </a:r>
+            <a:br>
+              <a:rPr lang="en-US" sz="1200" dirty="0"/>
+            </a:br>
+            <a:r>
+              <a:rPr lang="en-US" sz="1200" dirty="0"/>
+              <a:t>express P(B|A) as function of P(A).</a:t>
+            </a:r>
+          </a:p>
+          <a:p>
+            <a:pPr marL="171450" indent="-171450">
+              <a:buFont typeface="Arial" panose="020B0604020202020204" pitchFamily="34" charset="0"/>
+              <a:buChar char="•"/>
+            </a:pPr>
+            <a:r>
+              <a:rPr lang="en-US" sz="1200" dirty="0"/>
+              <a:t>Then presuming that all values of P(A) </a:t>
+            </a:r>
+            <a:br>
+              <a:rPr lang="en-US" sz="1200" dirty="0"/>
+            </a:br>
+            <a:r>
+              <a:rPr lang="en-US" sz="1200" dirty="0"/>
+              <a:t>are equally possible (flat prior), </a:t>
+            </a:r>
+            <a:br>
+              <a:rPr lang="en-US" sz="1200" dirty="0"/>
+            </a:br>
+            <a:r>
+              <a:rPr lang="en-US" sz="1200" dirty="0"/>
+              <a:t>we calculate average P(B|A).</a:t>
+            </a:r>
+          </a:p>
+          <a:p>
+            <a:pPr marL="171450" indent="-171450">
+              <a:buFont typeface="Arial" panose="020B0604020202020204" pitchFamily="34" charset="0"/>
+              <a:buChar char="•"/>
+            </a:pPr>
+            <a:r>
+              <a:rPr lang="en-US" sz="1200" dirty="0"/>
+              <a:t>Alternatively we use some reasonable guess of the prior (not flat) – to get better posterior.</a:t>
+            </a:r>
+          </a:p>
+        </p:txBody>
+      </p:sp>
+    </p:spTree>
+    <p:extLst>
+      <p:ext uri="{BB962C8B-B14F-4D97-AF65-F5344CB8AC3E}">
+        <p14:creationId xmlns:p14="http://schemas.microsoft.com/office/powerpoint/2010/main" val="418091737"/>
+      </p:ext>
+    </p:extLst>
+  </p:cSld>
+  <p:clrMapOvr>
+    <a:masterClrMapping/>
+  </p:clrMapOvr>
+</p:sld>
+</file>
+
+<file path=ppt/slides/slide13.xml><?xml version="1.0" encoding="utf-8"?>
 <p:sld xmlns:a="http://schemas.openxmlformats.org/drawingml/2006/main" xmlns:r="http://schemas.openxmlformats.org/officeDocument/2006/relationships" xmlns:p="http://schemas.openxmlformats.org/presentationml/2006/main">
   <p:cSld>
     <p:spTree>
@@ -19585,274 +21063,6 @@
 </p:sld>
 </file>
 
-<file path=ppt/slides/slide13.xml><?xml version="1.0" encoding="utf-8"?>
-<p:sld xmlns:a="http://schemas.openxmlformats.org/drawingml/2006/main" xmlns:r="http://schemas.openxmlformats.org/officeDocument/2006/relationships" xmlns:p="http://schemas.openxmlformats.org/presentationml/2006/main">
-  <p:cSld>
-    <p:spTree>
-      <p:nvGrpSpPr>
-        <p:cNvPr id="1" name=""/>
-        <p:cNvGrpSpPr/>
-        <p:nvPr/>
-      </p:nvGrpSpPr>
-      <p:grpSpPr>
-        <a:xfrm>
-          <a:off x="0" y="0"/>
-          <a:ext cx="0" cy="0"/>
-          <a:chOff x="0" y="0"/>
-          <a:chExt cx="0" cy="0"/>
-        </a:xfrm>
-      </p:grpSpPr>
-      <p:sp>
-        <p:nvSpPr>
-          <p:cNvPr id="2" name="TextBox 1">
-            <a:extLst>
-              <a:ext uri="{FF2B5EF4-FFF2-40B4-BE49-F238E27FC236}">
-                <a16:creationId xmlns:a16="http://schemas.microsoft.com/office/drawing/2014/main" id="{CD6798AC-3E28-254E-B533-583935E0DBBC}"/>
-              </a:ext>
-            </a:extLst>
-          </p:cNvPr>
-          <p:cNvSpPr txBox="1"/>
-          <p:nvPr/>
-        </p:nvSpPr>
-        <p:spPr>
-          <a:xfrm>
-            <a:off x="0" y="37572"/>
-            <a:ext cx="4572000" cy="523220"/>
-          </a:xfrm>
-          <a:prstGeom prst="rect">
-            <a:avLst/>
-          </a:prstGeom>
-          <a:noFill/>
-        </p:spPr>
-        <p:txBody>
-          <a:bodyPr wrap="square" rtlCol="0">
-            <a:spAutoFit/>
-          </a:bodyPr>
-          <a:lstStyle/>
-          <a:p>
-            <a:r>
-              <a:rPr lang="en-US" sz="2800" b="1" dirty="0"/>
-              <a:t>Bayesian Inference</a:t>
-            </a:r>
-          </a:p>
-        </p:txBody>
-      </p:sp>
-      <p:sp>
-        <p:nvSpPr>
-          <p:cNvPr id="3" name="TextBox 2">
-            <a:extLst>
-              <a:ext uri="{FF2B5EF4-FFF2-40B4-BE49-F238E27FC236}">
-                <a16:creationId xmlns:a16="http://schemas.microsoft.com/office/drawing/2014/main" id="{1B04CBF4-4519-044C-8F82-2F79F39C8DAC}"/>
-              </a:ext>
-            </a:extLst>
-          </p:cNvPr>
-          <p:cNvSpPr txBox="1"/>
-          <p:nvPr/>
-        </p:nvSpPr>
-        <p:spPr>
-          <a:xfrm>
-            <a:off x="130629" y="736270"/>
-            <a:ext cx="7125194" cy="2092881"/>
-          </a:xfrm>
-          <a:prstGeom prst="rect">
-            <a:avLst/>
-          </a:prstGeom>
-          <a:noFill/>
-        </p:spPr>
-        <p:txBody>
-          <a:bodyPr wrap="square" rtlCol="0">
-            <a:spAutoFit/>
-          </a:bodyPr>
-          <a:lstStyle/>
-          <a:p>
-            <a:r>
-              <a:rPr lang="en-US" dirty="0"/>
-              <a:t>Bayesian inference is a method of statistical inference </a:t>
-            </a:r>
-          </a:p>
-          <a:p>
-            <a:r>
-              <a:rPr lang="en-US" dirty="0"/>
-              <a:t>in which Bayes' theorem is used to update the probability</a:t>
-            </a:r>
-          </a:p>
-          <a:p>
-            <a:r>
-              <a:rPr lang="en-US" dirty="0"/>
-              <a:t>for a hypothesis as more evidence or information becomes available. </a:t>
-            </a:r>
-          </a:p>
-          <a:p>
-            <a:endParaRPr lang="en-US" dirty="0"/>
-          </a:p>
-          <a:p>
-            <a:pPr marL="285750" indent="-285750">
-              <a:buFont typeface="Arial" panose="020B0604020202020204" pitchFamily="34" charset="0"/>
-              <a:buChar char="•"/>
-            </a:pPr>
-            <a:r>
-              <a:rPr lang="en-US" sz="1200" dirty="0">
-                <a:hlinkClick r:id="rId2"/>
-              </a:rPr>
-              <a:t>https://en.wikipedia.org/wiki/Bayesian_inference</a:t>
-            </a:r>
-            <a:r>
-              <a:rPr lang="en-US" sz="1200" dirty="0"/>
-              <a:t> </a:t>
-            </a:r>
-          </a:p>
-          <a:p>
-            <a:pPr marL="285750" indent="-285750">
-              <a:buFont typeface="Arial" panose="020B0604020202020204" pitchFamily="34" charset="0"/>
-              <a:buChar char="•"/>
-            </a:pPr>
-            <a:r>
-              <a:rPr lang="en-US" sz="1200" dirty="0">
-                <a:hlinkClick r:id="rId3"/>
-              </a:rPr>
-              <a:t>https://towardsdatascience.com/probability-concepts-explained-bayesian-inference-for-parameter-estimation-90e8930e5348</a:t>
-            </a:r>
-            <a:r>
-              <a:rPr lang="en-US" sz="1200" dirty="0"/>
-              <a:t> </a:t>
-            </a:r>
-          </a:p>
-          <a:p>
-            <a:pPr marL="285750" indent="-285750">
-              <a:buFont typeface="Arial" panose="020B0604020202020204" pitchFamily="34" charset="0"/>
-              <a:buChar char="•"/>
-            </a:pPr>
-            <a:r>
-              <a:rPr lang="en-US" sz="1200" dirty="0">
-                <a:hlinkClick r:id="rId4"/>
-              </a:rPr>
-              <a:t>https://www.probabilitycourse.com/chapter9/9_1_0_bayesian_inference.php</a:t>
-            </a:r>
-            <a:r>
-              <a:rPr lang="en-US" sz="1200" dirty="0"/>
-              <a:t> </a:t>
-            </a:r>
-          </a:p>
-          <a:p>
-            <a:pPr marL="285750" indent="-285750">
-              <a:buFont typeface="Arial" panose="020B0604020202020204" pitchFamily="34" charset="0"/>
-              <a:buChar char="•"/>
-            </a:pPr>
-            <a:r>
-              <a:rPr lang="en-US" sz="1200" dirty="0"/>
-              <a:t>--</a:t>
-            </a:r>
-          </a:p>
-          <a:p>
-            <a:endParaRPr lang="en-US" dirty="0"/>
-          </a:p>
-        </p:txBody>
-      </p:sp>
-      <p:pic>
-        <p:nvPicPr>
-          <p:cNvPr id="1026" name="Picture 2" descr="Example of Bayesian inference with a prior distribution, a posterior... |  Download Scientific Diagram">
-            <a:extLst>
-              <a:ext uri="{FF2B5EF4-FFF2-40B4-BE49-F238E27FC236}">
-                <a16:creationId xmlns:a16="http://schemas.microsoft.com/office/drawing/2014/main" id="{52EBAB0B-4DA4-B648-A32C-113FC45C1799}"/>
-              </a:ext>
-            </a:extLst>
-          </p:cNvPr>
-          <p:cNvPicPr>
-            <a:picLocks noChangeAspect="1" noChangeArrowheads="1"/>
-          </p:cNvPicPr>
-          <p:nvPr/>
-        </p:nvPicPr>
-        <p:blipFill rotWithShape="1">
-          <a:blip r:embed="rId5" cstate="email">
-            <a:extLst>
-              <a:ext uri="{28A0092B-C50C-407E-A947-70E740481C1C}">
-                <a14:useLocalDpi xmlns:a14="http://schemas.microsoft.com/office/drawing/2010/main"/>
-              </a:ext>
-            </a:extLst>
-          </a:blip>
-          <a:srcRect l="15843" r="15195"/>
-          <a:stretch/>
-        </p:blipFill>
-        <p:spPr bwMode="auto">
-          <a:xfrm>
-            <a:off x="1068780" y="3117930"/>
-            <a:ext cx="3503220" cy="1600200"/>
-          </a:xfrm>
-          <a:prstGeom prst="rect">
-            <a:avLst/>
-          </a:prstGeom>
-          <a:noFill/>
-          <a:extLst>
-            <a:ext uri="{909E8E84-426E-40DD-AFC4-6F175D3DCCD1}">
-              <a14:hiddenFill xmlns:a14="http://schemas.microsoft.com/office/drawing/2010/main">
-                <a:solidFill>
-                  <a:srgbClr val="FFFFFF"/>
-                </a:solidFill>
-              </a14:hiddenFill>
-            </a:ext>
-          </a:extLst>
-        </p:spPr>
-      </p:pic>
-      <p:pic>
-        <p:nvPicPr>
-          <p:cNvPr id="1028" name="Picture 4" descr="Bayesian inference - Wikipedia">
-            <a:extLst>
-              <a:ext uri="{FF2B5EF4-FFF2-40B4-BE49-F238E27FC236}">
-                <a16:creationId xmlns:a16="http://schemas.microsoft.com/office/drawing/2014/main" id="{D3002383-224C-B549-AEB2-EB69379DF261}"/>
-              </a:ext>
-            </a:extLst>
-          </p:cNvPr>
-          <p:cNvPicPr>
-            <a:picLocks noChangeAspect="1" noChangeArrowheads="1"/>
-          </p:cNvPicPr>
-          <p:nvPr/>
-        </p:nvPicPr>
-        <p:blipFill>
-          <a:blip r:embed="rId6">
-            <a:extLst>
-              <a:ext uri="{28A0092B-C50C-407E-A947-70E740481C1C}">
-                <a14:useLocalDpi xmlns:a14="http://schemas.microsoft.com/office/drawing/2010/main"/>
-              </a:ext>
-            </a:extLst>
-          </a:blip>
-          <a:srcRect/>
-          <a:stretch>
-            <a:fillRect/>
-          </a:stretch>
-        </p:blipFill>
-        <p:spPr bwMode="auto">
-          <a:xfrm>
-            <a:off x="8703622" y="228514"/>
-            <a:ext cx="2870861" cy="4306292"/>
-          </a:xfrm>
-          <a:prstGeom prst="rect">
-            <a:avLst/>
-          </a:prstGeom>
-          <a:noFill/>
-          <a:extLst>
-            <a:ext uri="{909E8E84-426E-40DD-AFC4-6F175D3DCCD1}">
-              <a14:hiddenFill xmlns:a14="http://schemas.microsoft.com/office/drawing/2010/main">
-                <a:solidFill>
-                  <a:srgbClr val="FFFFFF"/>
-                </a:solidFill>
-              </a14:hiddenFill>
-            </a:ext>
-          </a:extLst>
-        </p:spPr>
-      </p:pic>
-    </p:spTree>
-    <p:extLst>
-      <p:ext uri="{BB962C8B-B14F-4D97-AF65-F5344CB8AC3E}">
-        <p14:creationId xmlns:p14="http://schemas.microsoft.com/office/powerpoint/2010/main" val="4019757108"/>
-      </p:ext>
-    </p:extLst>
-  </p:cSld>
-  <p:clrMapOvr>
-    <a:masterClrMapping/>
-  </p:clrMapOvr>
-</p:sld>
-</file>
-
 <file path=ppt/slides/slide14.xml><?xml version="1.0" encoding="utf-8"?>
 <p:sld xmlns:a="http://schemas.openxmlformats.org/drawingml/2006/main" xmlns:r="http://schemas.openxmlformats.org/officeDocument/2006/relationships" xmlns:p="http://schemas.openxmlformats.org/presentationml/2006/main">
   <p:cSld>
@@ -23285,1679 +24495,6 @@
 </file>
 
 <file path=ppt/slides/slide6.xml><?xml version="1.0" encoding="utf-8"?>
-<p:sld xmlns:a="http://schemas.openxmlformats.org/drawingml/2006/main" xmlns:r="http://schemas.openxmlformats.org/officeDocument/2006/relationships" xmlns:p="http://schemas.openxmlformats.org/presentationml/2006/main">
-  <p:cSld>
-    <p:spTree>
-      <p:nvGrpSpPr>
-        <p:cNvPr id="1" name=""/>
-        <p:cNvGrpSpPr/>
-        <p:nvPr/>
-      </p:nvGrpSpPr>
-      <p:grpSpPr>
-        <a:xfrm>
-          <a:off x="0" y="0"/>
-          <a:ext cx="0" cy="0"/>
-          <a:chOff x="0" y="0"/>
-          <a:chExt cx="0" cy="0"/>
-        </a:xfrm>
-      </p:grpSpPr>
-      <p:sp>
-        <p:nvSpPr>
-          <p:cNvPr id="2" name="TextBox 1">
-            <a:extLst>
-              <a:ext uri="{FF2B5EF4-FFF2-40B4-BE49-F238E27FC236}">
-                <a16:creationId xmlns:a16="http://schemas.microsoft.com/office/drawing/2014/main" id="{B3B32340-E706-FA41-BDA5-397606042A7E}"/>
-              </a:ext>
-            </a:extLst>
-          </p:cNvPr>
-          <p:cNvSpPr txBox="1"/>
-          <p:nvPr/>
-        </p:nvSpPr>
-        <p:spPr>
-          <a:xfrm>
-            <a:off x="-1" y="37572"/>
-            <a:ext cx="7901355" cy="523220"/>
-          </a:xfrm>
-          <a:prstGeom prst="rect">
-            <a:avLst/>
-          </a:prstGeom>
-          <a:noFill/>
-        </p:spPr>
-        <p:txBody>
-          <a:bodyPr wrap="square" rtlCol="0">
-            <a:spAutoFit/>
-          </a:bodyPr>
-          <a:lstStyle/>
-          <a:p>
-            <a:r>
-              <a:rPr lang="en-US" sz="2800" b="1" dirty="0"/>
-              <a:t>Example – Coffee and Damaged Flash Drives</a:t>
-            </a:r>
-          </a:p>
-        </p:txBody>
-      </p:sp>
-      <p:sp>
-        <p:nvSpPr>
-          <p:cNvPr id="3" name="TextBox 2">
-            <a:extLst>
-              <a:ext uri="{FF2B5EF4-FFF2-40B4-BE49-F238E27FC236}">
-                <a16:creationId xmlns:a16="http://schemas.microsoft.com/office/drawing/2014/main" id="{2443CC5D-9378-E348-8505-A594E821478A}"/>
-              </a:ext>
-            </a:extLst>
-          </p:cNvPr>
-          <p:cNvSpPr txBox="1"/>
-          <p:nvPr/>
-        </p:nvSpPr>
-        <p:spPr>
-          <a:xfrm>
-            <a:off x="141099" y="678252"/>
-            <a:ext cx="4325394" cy="954107"/>
-          </a:xfrm>
-          <a:prstGeom prst="rect">
-            <a:avLst/>
-          </a:prstGeom>
-          <a:noFill/>
-          <a:ln w="63500">
-            <a:solidFill>
-              <a:schemeClr val="accent6">
-                <a:lumMod val="40000"/>
-                <a:lumOff val="60000"/>
-              </a:schemeClr>
-            </a:solidFill>
-          </a:ln>
-        </p:spPr>
-        <p:txBody>
-          <a:bodyPr wrap="square" rtlCol="0">
-            <a:spAutoFit/>
-          </a:bodyPr>
-          <a:lstStyle/>
-          <a:p>
-            <a:r>
-              <a:rPr lang="en-US" dirty="0"/>
-              <a:t>We have 100 damaged flash drives, </a:t>
-            </a:r>
-          </a:p>
-          <a:p>
-            <a:r>
-              <a:rPr lang="en-US" dirty="0"/>
-              <a:t>80 of them have coffee stains on them.</a:t>
-            </a:r>
-          </a:p>
-          <a:p>
-            <a:endParaRPr lang="en-US" dirty="0"/>
-          </a:p>
-          <a:p>
-            <a:r>
-              <a:rPr lang="en-US" dirty="0"/>
-              <a:t>What can we say about coffee causing the damage?</a:t>
-            </a:r>
-          </a:p>
-        </p:txBody>
-      </p:sp>
-      <p:sp>
-        <p:nvSpPr>
-          <p:cNvPr id="5" name="Google Shape;89;p13">
-            <a:extLst>
-              <a:ext uri="{FF2B5EF4-FFF2-40B4-BE49-F238E27FC236}">
-                <a16:creationId xmlns:a16="http://schemas.microsoft.com/office/drawing/2014/main" id="{452FF8D6-C125-B84A-B6C6-3F252EF37ED5}"/>
-              </a:ext>
-            </a:extLst>
-          </p:cNvPr>
-          <p:cNvSpPr txBox="1"/>
-          <p:nvPr/>
-        </p:nvSpPr>
-        <p:spPr>
-          <a:xfrm>
-            <a:off x="4109673" y="2068519"/>
-            <a:ext cx="3347883" cy="2050775"/>
-          </a:xfrm>
-          <a:prstGeom prst="rect">
-            <a:avLst/>
-          </a:prstGeom>
-          <a:noFill/>
-          <a:ln>
-            <a:noFill/>
-          </a:ln>
-        </p:spPr>
-        <p:txBody>
-          <a:bodyPr spcFirstLastPara="1" wrap="square" lIns="91425" tIns="45700" rIns="91425" bIns="45700" anchor="t" anchorCtr="0">
-            <a:noAutofit/>
-          </a:bodyPr>
-          <a:lstStyle/>
-          <a:p>
-            <a:pPr marL="0" marR="0" lvl="0" indent="0" algn="l" rtl="0">
-              <a:spcBef>
-                <a:spcPts val="0"/>
-              </a:spcBef>
-              <a:spcAft>
-                <a:spcPts val="0"/>
-              </a:spcAft>
-              <a:buNone/>
-            </a:pPr>
-            <a:r>
-              <a:rPr lang="en-US" sz="1200" dirty="0">
-                <a:solidFill>
-                  <a:schemeClr val="dk1"/>
-                </a:solidFill>
-                <a:latin typeface="Calibri"/>
-                <a:cs typeface="Calibri"/>
-                <a:sym typeface="Calibri"/>
-              </a:rPr>
-              <a:t>A = Coffee, B = Damaged, P = Probability</a:t>
-            </a:r>
-            <a:endParaRPr lang="en-US" sz="1200" dirty="0">
-              <a:solidFill>
-                <a:schemeClr val="dk1"/>
-              </a:solidFill>
-              <a:latin typeface="Calibri"/>
-              <a:ea typeface="Calibri"/>
-              <a:cs typeface="Calibri"/>
-              <a:sym typeface="Calibri"/>
-            </a:endParaRPr>
-          </a:p>
-          <a:p>
-            <a:pPr lvl="0"/>
-            <a:r>
-              <a:rPr lang="en-US" sz="1200" b="1" dirty="0">
-                <a:solidFill>
-                  <a:srgbClr val="00B0F0"/>
-                </a:solidFill>
-                <a:latin typeface="Calibri"/>
-                <a:ea typeface="Calibri"/>
-                <a:cs typeface="Calibri"/>
-                <a:sym typeface="Calibri"/>
-              </a:rPr>
-              <a:t>P(A) = 40% = P( </a:t>
-            </a:r>
-            <a:r>
-              <a:rPr lang="en-US" sz="1200" b="1" dirty="0">
-                <a:solidFill>
-                  <a:srgbClr val="00B0F0"/>
-                </a:solidFill>
-                <a:latin typeface="Calibri"/>
-                <a:cs typeface="Calibri"/>
-                <a:sym typeface="Calibri"/>
-              </a:rPr>
-              <a:t>Coffee )    # </a:t>
-            </a:r>
-            <a:r>
-              <a:rPr lang="en-US" sz="1200" b="1" dirty="0">
-                <a:solidFill>
-                  <a:srgbClr val="00B0F0"/>
-                </a:solidFill>
-                <a:latin typeface="Calibri"/>
-                <a:ea typeface="Calibri"/>
-                <a:cs typeface="Calibri"/>
-                <a:sym typeface="Calibri"/>
-              </a:rPr>
-              <a:t>Yellow</a:t>
-            </a:r>
-          </a:p>
-          <a:p>
-            <a:pPr marL="0" marR="0" lvl="0" indent="0" algn="l" rtl="0">
-              <a:spcBef>
-                <a:spcPts val="0"/>
-              </a:spcBef>
-              <a:spcAft>
-                <a:spcPts val="0"/>
-              </a:spcAft>
-              <a:buNone/>
-            </a:pPr>
-            <a:r>
-              <a:rPr lang="en-US" sz="1200" dirty="0">
-                <a:solidFill>
-                  <a:schemeClr val="dk1"/>
-                </a:solidFill>
-                <a:latin typeface="Calibri"/>
-                <a:ea typeface="Calibri"/>
-                <a:cs typeface="Calibri"/>
-                <a:sym typeface="Calibri"/>
-              </a:rPr>
-              <a:t>P(B) = 5% = P( Damaged  )  # Blue</a:t>
-            </a:r>
-          </a:p>
-          <a:p>
-            <a:pPr marL="0" marR="0" lvl="0" indent="0" algn="l" rtl="0">
-              <a:spcBef>
-                <a:spcPts val="0"/>
-              </a:spcBef>
-              <a:spcAft>
-                <a:spcPts val="0"/>
-              </a:spcAft>
-              <a:buNone/>
-            </a:pPr>
-            <a:endParaRPr lang="en-US" sz="1200" dirty="0">
-              <a:solidFill>
-                <a:schemeClr val="dk1"/>
-              </a:solidFill>
-              <a:latin typeface="Calibri"/>
-              <a:ea typeface="Calibri"/>
-              <a:cs typeface="Calibri"/>
-              <a:sym typeface="Calibri"/>
-            </a:endParaRPr>
-          </a:p>
-          <a:p>
-            <a:pPr lvl="0"/>
-            <a:r>
-              <a:rPr lang="en-US" sz="1200" b="1" dirty="0">
-                <a:solidFill>
-                  <a:srgbClr val="00B0F0"/>
-                </a:solidFill>
-                <a:latin typeface="Calibri"/>
-                <a:ea typeface="Calibri"/>
-                <a:cs typeface="Calibri"/>
-                <a:sym typeface="Calibri"/>
-              </a:rPr>
-              <a:t>P(B|A) = 10% = P( Damaged given that Coffee )</a:t>
-            </a:r>
-          </a:p>
-          <a:p>
-            <a:pPr lvl="0"/>
-            <a:r>
-              <a:rPr lang="en-US" sz="1200" dirty="0">
-                <a:solidFill>
-                  <a:schemeClr val="dk1"/>
-                </a:solidFill>
-                <a:latin typeface="Calibri"/>
-                <a:ea typeface="Calibri"/>
-                <a:cs typeface="Calibri"/>
-                <a:sym typeface="Calibri"/>
-              </a:rPr>
-              <a:t>P(A|B) = 80% = P( Coffee given that Damaged )</a:t>
-            </a:r>
-          </a:p>
-          <a:p>
-            <a:pPr marL="0" marR="0" lvl="0" indent="0" algn="l" rtl="0">
-              <a:spcBef>
-                <a:spcPts val="0"/>
-              </a:spcBef>
-              <a:spcAft>
-                <a:spcPts val="0"/>
-              </a:spcAft>
-              <a:buNone/>
-            </a:pPr>
-            <a:endParaRPr lang="en-US" sz="1200" dirty="0">
-              <a:solidFill>
-                <a:schemeClr val="dk1"/>
-              </a:solidFill>
-              <a:latin typeface="Calibri"/>
-              <a:ea typeface="Calibri"/>
-              <a:cs typeface="Calibri"/>
-              <a:sym typeface="Calibri"/>
-            </a:endParaRPr>
-          </a:p>
-          <a:p>
-            <a:r>
-              <a:rPr lang="en-US" sz="1200" dirty="0">
-                <a:solidFill>
-                  <a:schemeClr val="dk1"/>
-                </a:solidFill>
-                <a:latin typeface="Calibri"/>
-                <a:ea typeface="Calibri"/>
-                <a:cs typeface="Calibri"/>
-                <a:sym typeface="Calibri"/>
-              </a:rPr>
-              <a:t>Intersection:</a:t>
-            </a:r>
-          </a:p>
-          <a:p>
-            <a:pPr marL="0" marR="0" lvl="0" indent="0" algn="l" rtl="0">
-              <a:spcBef>
-                <a:spcPts val="0"/>
-              </a:spcBef>
-              <a:spcAft>
-                <a:spcPts val="0"/>
-              </a:spcAft>
-              <a:buNone/>
-            </a:pPr>
-            <a:r>
-              <a:rPr lang="en-US" sz="1200" dirty="0">
-                <a:solidFill>
-                  <a:schemeClr val="dk1"/>
-                </a:solidFill>
-                <a:latin typeface="Calibri"/>
-                <a:ea typeface="Calibri"/>
-                <a:cs typeface="Calibri"/>
-                <a:sym typeface="Calibri"/>
-              </a:rPr>
-              <a:t>P(A &amp; B) = 4% = P(Coffee &amp; Damaged)  # Green</a:t>
-            </a:r>
-          </a:p>
-          <a:p>
-            <a:pPr marL="0" marR="0" lvl="0" indent="0" algn="l" rtl="0">
-              <a:spcBef>
-                <a:spcPts val="0"/>
-              </a:spcBef>
-              <a:spcAft>
-                <a:spcPts val="0"/>
-              </a:spcAft>
-              <a:buNone/>
-            </a:pPr>
-            <a:r>
-              <a:rPr lang="en-US" sz="1200" dirty="0">
-                <a:solidFill>
-                  <a:schemeClr val="dk1"/>
-                </a:solidFill>
-                <a:latin typeface="Calibri"/>
-                <a:ea typeface="Calibri"/>
-                <a:cs typeface="Calibri"/>
-                <a:sym typeface="Calibri"/>
-              </a:rPr>
-              <a:t>P(A|B)*P(B) = 80%*5% = 4%</a:t>
-            </a:r>
-            <a:endParaRPr sz="1200" dirty="0">
-              <a:solidFill>
-                <a:schemeClr val="dk1"/>
-              </a:solidFill>
-              <a:latin typeface="Calibri"/>
-              <a:ea typeface="Calibri"/>
-              <a:cs typeface="Calibri"/>
-              <a:sym typeface="Calibri"/>
-            </a:endParaRPr>
-          </a:p>
-          <a:p>
-            <a:pPr marL="0" marR="0" lvl="0" indent="0" algn="l" rtl="0">
-              <a:spcBef>
-                <a:spcPts val="0"/>
-              </a:spcBef>
-              <a:spcAft>
-                <a:spcPts val="0"/>
-              </a:spcAft>
-              <a:buNone/>
-            </a:pPr>
-            <a:r>
-              <a:rPr lang="en-US" sz="1200" b="1" dirty="0">
-                <a:solidFill>
-                  <a:srgbClr val="00B0F0"/>
-                </a:solidFill>
-                <a:latin typeface="Calibri"/>
-                <a:ea typeface="Calibri"/>
-                <a:cs typeface="Calibri"/>
-                <a:sym typeface="Calibri"/>
-              </a:rPr>
-              <a:t>P(B|A)*P(A) = 10%*40% = 4%</a:t>
-            </a:r>
-          </a:p>
-        </p:txBody>
-      </p:sp>
-      <p:sp>
-        <p:nvSpPr>
-          <p:cNvPr id="6" name="Google Shape;96;p13">
-            <a:extLst>
-              <a:ext uri="{FF2B5EF4-FFF2-40B4-BE49-F238E27FC236}">
-                <a16:creationId xmlns:a16="http://schemas.microsoft.com/office/drawing/2014/main" id="{404A001F-C0A0-BE48-A3B1-C838E48FDF8F}"/>
-              </a:ext>
-            </a:extLst>
-          </p:cNvPr>
-          <p:cNvSpPr/>
-          <p:nvPr/>
-        </p:nvSpPr>
-        <p:spPr>
-          <a:xfrm>
-            <a:off x="116387" y="1974106"/>
-            <a:ext cx="3991888" cy="2229852"/>
-          </a:xfrm>
-          <a:prstGeom prst="rect">
-            <a:avLst/>
-          </a:prstGeom>
-          <a:solidFill>
-            <a:srgbClr val="FBE4D4"/>
-          </a:solidFill>
-          <a:ln w="12700" cap="flat" cmpd="sng">
-            <a:solidFill>
-              <a:srgbClr val="31538F"/>
-            </a:solidFill>
-            <a:prstDash val="solid"/>
-            <a:miter lim="800000"/>
-            <a:headEnd type="none" w="sm" len="sm"/>
-            <a:tailEnd type="none" w="sm" len="sm"/>
-          </a:ln>
-        </p:spPr>
-        <p:txBody>
-          <a:bodyPr spcFirstLastPara="1" wrap="square" lIns="91425" tIns="45700" rIns="91425" bIns="45700" anchor="ctr" anchorCtr="0">
-            <a:noAutofit/>
-          </a:bodyPr>
-          <a:lstStyle/>
-          <a:p>
-            <a:pPr marL="0" marR="0" lvl="0" indent="0" algn="ctr" rtl="0">
-              <a:spcBef>
-                <a:spcPts val="0"/>
-              </a:spcBef>
-              <a:spcAft>
-                <a:spcPts val="0"/>
-              </a:spcAft>
-              <a:buNone/>
-            </a:pPr>
-            <a:endParaRPr sz="1800">
-              <a:solidFill>
-                <a:schemeClr val="lt1"/>
-              </a:solidFill>
-              <a:latin typeface="Calibri"/>
-              <a:ea typeface="Calibri"/>
-              <a:cs typeface="Calibri"/>
-              <a:sym typeface="Calibri"/>
-            </a:endParaRPr>
-          </a:p>
-        </p:txBody>
-      </p:sp>
-      <p:sp>
-        <p:nvSpPr>
-          <p:cNvPr id="7" name="Google Shape;97;p13">
-            <a:extLst>
-              <a:ext uri="{FF2B5EF4-FFF2-40B4-BE49-F238E27FC236}">
-                <a16:creationId xmlns:a16="http://schemas.microsoft.com/office/drawing/2014/main" id="{31FE829C-2386-834C-996B-C2F3AE8AE45B}"/>
-              </a:ext>
-            </a:extLst>
-          </p:cNvPr>
-          <p:cNvSpPr/>
-          <p:nvPr/>
-        </p:nvSpPr>
-        <p:spPr>
-          <a:xfrm>
-            <a:off x="263208" y="2278906"/>
-            <a:ext cx="3224463" cy="1764631"/>
-          </a:xfrm>
-          <a:prstGeom prst="ellipse">
-            <a:avLst/>
-          </a:prstGeom>
-          <a:solidFill>
-            <a:srgbClr val="FFC000"/>
-          </a:solidFill>
-          <a:ln w="12700" cap="flat" cmpd="sng">
-            <a:solidFill>
-              <a:srgbClr val="31538F"/>
-            </a:solidFill>
-            <a:prstDash val="solid"/>
-            <a:miter lim="800000"/>
-            <a:headEnd type="none" w="sm" len="sm"/>
-            <a:tailEnd type="none" w="sm" len="sm"/>
-          </a:ln>
-        </p:spPr>
-        <p:txBody>
-          <a:bodyPr spcFirstLastPara="1" wrap="square" lIns="91425" tIns="45700" rIns="91425" bIns="45700" anchor="ctr" anchorCtr="0">
-            <a:noAutofit/>
-          </a:bodyPr>
-          <a:lstStyle/>
-          <a:p>
-            <a:pPr marL="0" marR="0" lvl="0" indent="0" algn="ctr" rtl="0">
-              <a:spcBef>
-                <a:spcPts val="0"/>
-              </a:spcBef>
-              <a:spcAft>
-                <a:spcPts val="0"/>
-              </a:spcAft>
-              <a:buNone/>
-            </a:pPr>
-            <a:endParaRPr sz="1800">
-              <a:solidFill>
-                <a:schemeClr val="lt1"/>
-              </a:solidFill>
-              <a:latin typeface="Calibri"/>
-              <a:ea typeface="Calibri"/>
-              <a:cs typeface="Calibri"/>
-              <a:sym typeface="Calibri"/>
-            </a:endParaRPr>
-          </a:p>
-        </p:txBody>
-      </p:sp>
-      <p:sp>
-        <p:nvSpPr>
-          <p:cNvPr id="8" name="Google Shape;98;p13">
-            <a:extLst>
-              <a:ext uri="{FF2B5EF4-FFF2-40B4-BE49-F238E27FC236}">
-                <a16:creationId xmlns:a16="http://schemas.microsoft.com/office/drawing/2014/main" id="{DDB1E21D-A88D-F84D-A4C7-D15B09894D17}"/>
-              </a:ext>
-            </a:extLst>
-          </p:cNvPr>
-          <p:cNvSpPr/>
-          <p:nvPr/>
-        </p:nvSpPr>
-        <p:spPr>
-          <a:xfrm>
-            <a:off x="2439126" y="2710753"/>
-            <a:ext cx="1397874" cy="900935"/>
-          </a:xfrm>
-          <a:prstGeom prst="ellipse">
-            <a:avLst/>
-          </a:prstGeom>
-          <a:solidFill>
-            <a:srgbClr val="00B0F0">
-              <a:alpha val="40784"/>
-            </a:srgbClr>
-          </a:solidFill>
-          <a:ln w="12700" cap="flat" cmpd="sng">
-            <a:solidFill>
-              <a:srgbClr val="31538F"/>
-            </a:solidFill>
-            <a:prstDash val="solid"/>
-            <a:miter lim="800000"/>
-            <a:headEnd type="none" w="sm" len="sm"/>
-            <a:tailEnd type="none" w="sm" len="sm"/>
-          </a:ln>
-        </p:spPr>
-        <p:txBody>
-          <a:bodyPr spcFirstLastPara="1" wrap="square" lIns="91425" tIns="45700" rIns="91425" bIns="45700" anchor="ctr" anchorCtr="0">
-            <a:noAutofit/>
-          </a:bodyPr>
-          <a:lstStyle/>
-          <a:p>
-            <a:pPr marL="0" marR="0" lvl="0" indent="0" algn="ctr" rtl="0">
-              <a:spcBef>
-                <a:spcPts val="0"/>
-              </a:spcBef>
-              <a:spcAft>
-                <a:spcPts val="0"/>
-              </a:spcAft>
-              <a:buNone/>
-            </a:pPr>
-            <a:endParaRPr sz="1800">
-              <a:solidFill>
-                <a:schemeClr val="lt1"/>
-              </a:solidFill>
-              <a:latin typeface="Calibri"/>
-              <a:ea typeface="Calibri"/>
-              <a:cs typeface="Calibri"/>
-              <a:sym typeface="Calibri"/>
-            </a:endParaRPr>
-          </a:p>
-        </p:txBody>
-      </p:sp>
-      <p:sp>
-        <p:nvSpPr>
-          <p:cNvPr id="9" name="Google Shape;99;p13">
-            <a:extLst>
-              <a:ext uri="{FF2B5EF4-FFF2-40B4-BE49-F238E27FC236}">
-                <a16:creationId xmlns:a16="http://schemas.microsoft.com/office/drawing/2014/main" id="{4B219D50-9096-DC46-8C16-4EC0A06BA7C0}"/>
-              </a:ext>
-            </a:extLst>
-          </p:cNvPr>
-          <p:cNvSpPr txBox="1"/>
-          <p:nvPr/>
-        </p:nvSpPr>
-        <p:spPr>
-          <a:xfrm>
-            <a:off x="1164672" y="2710753"/>
-            <a:ext cx="971694" cy="647909"/>
-          </a:xfrm>
-          <a:prstGeom prst="rect">
-            <a:avLst/>
-          </a:prstGeom>
-          <a:noFill/>
-          <a:ln>
-            <a:noFill/>
-          </a:ln>
-        </p:spPr>
-        <p:txBody>
-          <a:bodyPr spcFirstLastPara="1" wrap="square" lIns="91425" tIns="45700" rIns="91425" bIns="45700" anchor="t" anchorCtr="0">
-            <a:noAutofit/>
-          </a:bodyPr>
-          <a:lstStyle>
-            <a:defPPr marR="0" lvl="0" algn="l" rtl="0">
-              <a:lnSpc>
-                <a:spcPct val="100000"/>
-              </a:lnSpc>
-              <a:spcBef>
-                <a:spcPts val="0"/>
-              </a:spcBef>
-              <a:spcAft>
-                <a:spcPts val="0"/>
-              </a:spcAft>
-            </a:defPPr>
-            <a:lvl1pPr marL="0" indent="0">
-              <a:buNone/>
-              <a:defRPr sz="1800" b="1">
-                <a:solidFill>
-                  <a:srgbClr val="FF0000"/>
-                </a:solidFill>
-                <a:latin typeface="Calibri"/>
-                <a:ea typeface="Calibri"/>
-                <a:cs typeface="Calibri"/>
-              </a:defRPr>
-            </a:lvl1pPr>
-          </a:lstStyle>
-          <a:p>
-            <a:r>
-              <a:rPr lang="en-US" dirty="0">
-                <a:sym typeface="Calibri"/>
-              </a:rPr>
-              <a:t>A</a:t>
-            </a:r>
-          </a:p>
-          <a:p>
-            <a:r>
-              <a:rPr lang="en-US" dirty="0">
-                <a:sym typeface="Calibri"/>
-              </a:rPr>
-              <a:t>Coffee</a:t>
-            </a:r>
-            <a:endParaRPr dirty="0">
-              <a:sym typeface="Calibri"/>
-            </a:endParaRPr>
-          </a:p>
-        </p:txBody>
-      </p:sp>
-      <p:sp>
-        <p:nvSpPr>
-          <p:cNvPr id="10" name="Google Shape;100;p13">
-            <a:extLst>
-              <a:ext uri="{FF2B5EF4-FFF2-40B4-BE49-F238E27FC236}">
-                <a16:creationId xmlns:a16="http://schemas.microsoft.com/office/drawing/2014/main" id="{A8D1023C-103A-914C-952D-A30BFA64F4CA}"/>
-              </a:ext>
-            </a:extLst>
-          </p:cNvPr>
-          <p:cNvSpPr txBox="1"/>
-          <p:nvPr/>
-        </p:nvSpPr>
-        <p:spPr>
-          <a:xfrm>
-            <a:off x="3065807" y="2935014"/>
-            <a:ext cx="1246477" cy="745778"/>
-          </a:xfrm>
-          <a:prstGeom prst="rect">
-            <a:avLst/>
-          </a:prstGeom>
-          <a:noFill/>
-          <a:ln>
-            <a:noFill/>
-          </a:ln>
-        </p:spPr>
-        <p:txBody>
-          <a:bodyPr spcFirstLastPara="1" wrap="square" lIns="91425" tIns="45700" rIns="91425" bIns="45700" anchor="t" anchorCtr="0">
-            <a:noAutofit/>
-          </a:bodyPr>
-          <a:lstStyle/>
-          <a:p>
-            <a:pPr marL="0" marR="0" lvl="0" indent="0" algn="l" rtl="0">
-              <a:spcBef>
-                <a:spcPts val="0"/>
-              </a:spcBef>
-              <a:spcAft>
-                <a:spcPts val="0"/>
-              </a:spcAft>
-              <a:buNone/>
-            </a:pPr>
-            <a:r>
-              <a:rPr lang="en-US" sz="1800" b="1" dirty="0">
-                <a:solidFill>
-                  <a:srgbClr val="FF0000"/>
-                </a:solidFill>
-                <a:latin typeface="Calibri"/>
-                <a:ea typeface="Calibri"/>
-                <a:cs typeface="Calibri"/>
-                <a:sym typeface="Calibri"/>
-              </a:rPr>
-              <a:t>        B</a:t>
-            </a:r>
-          </a:p>
-          <a:p>
-            <a:pPr marL="0" marR="0" lvl="0" indent="0" algn="l" rtl="0">
-              <a:spcBef>
-                <a:spcPts val="0"/>
-              </a:spcBef>
-              <a:spcAft>
-                <a:spcPts val="0"/>
-              </a:spcAft>
-              <a:buNone/>
-            </a:pPr>
-            <a:r>
-              <a:rPr lang="en-US" sz="1800" b="1" dirty="0">
-                <a:solidFill>
-                  <a:srgbClr val="FF0000"/>
-                </a:solidFill>
-                <a:latin typeface="Calibri"/>
-                <a:ea typeface="Calibri"/>
-                <a:cs typeface="Calibri"/>
-                <a:sym typeface="Calibri"/>
-              </a:rPr>
-              <a:t>Damaged</a:t>
-            </a:r>
-            <a:endParaRPr sz="1800" b="1" dirty="0">
-              <a:solidFill>
-                <a:srgbClr val="FF0000"/>
-              </a:solidFill>
-              <a:latin typeface="Calibri"/>
-              <a:ea typeface="Calibri"/>
-              <a:cs typeface="Calibri"/>
-              <a:sym typeface="Calibri"/>
-            </a:endParaRPr>
-          </a:p>
-        </p:txBody>
-      </p:sp>
-      <p:sp>
-        <p:nvSpPr>
-          <p:cNvPr id="11" name="Google Shape;101;p13">
-            <a:extLst>
-              <a:ext uri="{FF2B5EF4-FFF2-40B4-BE49-F238E27FC236}">
-                <a16:creationId xmlns:a16="http://schemas.microsoft.com/office/drawing/2014/main" id="{7B123850-E879-7745-BC69-FED970CB58A9}"/>
-              </a:ext>
-            </a:extLst>
-          </p:cNvPr>
-          <p:cNvSpPr txBox="1"/>
-          <p:nvPr/>
-        </p:nvSpPr>
-        <p:spPr>
-          <a:xfrm>
-            <a:off x="2679402" y="1974106"/>
-            <a:ext cx="1530878" cy="461665"/>
-          </a:xfrm>
-          <a:prstGeom prst="rect">
-            <a:avLst/>
-          </a:prstGeom>
-          <a:noFill/>
-          <a:ln>
-            <a:noFill/>
-          </a:ln>
-        </p:spPr>
-        <p:txBody>
-          <a:bodyPr spcFirstLastPara="1" wrap="square" lIns="91425" tIns="45700" rIns="91425" bIns="45700" anchor="t" anchorCtr="0">
-            <a:noAutofit/>
-          </a:bodyPr>
-          <a:lstStyle/>
-          <a:p>
-            <a:pPr marL="0" marR="0" lvl="0" indent="0" algn="l" rtl="0">
-              <a:spcBef>
-                <a:spcPts val="0"/>
-              </a:spcBef>
-              <a:spcAft>
-                <a:spcPts val="0"/>
-              </a:spcAft>
-              <a:buNone/>
-            </a:pPr>
-            <a:r>
-              <a:rPr lang="en-US" sz="2400" b="1" dirty="0">
-                <a:solidFill>
-                  <a:srgbClr val="FF0000"/>
-                </a:solidFill>
-                <a:latin typeface="Calibri"/>
-                <a:ea typeface="Calibri"/>
-                <a:cs typeface="Calibri"/>
-                <a:sym typeface="Calibri"/>
-              </a:rPr>
-              <a:t>All Drives</a:t>
-            </a:r>
-            <a:endParaRPr sz="2400" b="1" dirty="0">
-              <a:solidFill>
-                <a:srgbClr val="FF0000"/>
-              </a:solidFill>
-              <a:latin typeface="Calibri"/>
-              <a:ea typeface="Calibri"/>
-              <a:cs typeface="Calibri"/>
-              <a:sym typeface="Calibri"/>
-            </a:endParaRPr>
-          </a:p>
-        </p:txBody>
-      </p:sp>
-      <p:sp>
-        <p:nvSpPr>
-          <p:cNvPr id="13" name="Google Shape;96;p13">
-            <a:extLst>
-              <a:ext uri="{FF2B5EF4-FFF2-40B4-BE49-F238E27FC236}">
-                <a16:creationId xmlns:a16="http://schemas.microsoft.com/office/drawing/2014/main" id="{569DD241-518F-8F46-AE6A-34E80876D3BC}"/>
-              </a:ext>
-            </a:extLst>
-          </p:cNvPr>
-          <p:cNvSpPr/>
-          <p:nvPr/>
-        </p:nvSpPr>
-        <p:spPr>
-          <a:xfrm>
-            <a:off x="116387" y="4517792"/>
-            <a:ext cx="3991888" cy="2229852"/>
-          </a:xfrm>
-          <a:prstGeom prst="rect">
-            <a:avLst/>
-          </a:prstGeom>
-          <a:solidFill>
-            <a:srgbClr val="FBE4D4"/>
-          </a:solidFill>
-          <a:ln w="12700" cap="flat" cmpd="sng">
-            <a:solidFill>
-              <a:srgbClr val="31538F"/>
-            </a:solidFill>
-            <a:prstDash val="solid"/>
-            <a:miter lim="800000"/>
-            <a:headEnd type="none" w="sm" len="sm"/>
-            <a:tailEnd type="none" w="sm" len="sm"/>
-          </a:ln>
-        </p:spPr>
-        <p:txBody>
-          <a:bodyPr spcFirstLastPara="1" wrap="square" lIns="91425" tIns="45700" rIns="91425" bIns="45700" anchor="ctr" anchorCtr="0">
-            <a:noAutofit/>
-          </a:bodyPr>
-          <a:lstStyle/>
-          <a:p>
-            <a:pPr marL="0" marR="0" lvl="0" indent="0" algn="ctr" rtl="0">
-              <a:spcBef>
-                <a:spcPts val="0"/>
-              </a:spcBef>
-              <a:spcAft>
-                <a:spcPts val="0"/>
-              </a:spcAft>
-              <a:buNone/>
-            </a:pPr>
-            <a:endParaRPr sz="1800">
-              <a:solidFill>
-                <a:schemeClr val="lt1"/>
-              </a:solidFill>
-              <a:latin typeface="Calibri"/>
-              <a:ea typeface="Calibri"/>
-              <a:cs typeface="Calibri"/>
-              <a:sym typeface="Calibri"/>
-            </a:endParaRPr>
-          </a:p>
-        </p:txBody>
-      </p:sp>
-      <p:sp>
-        <p:nvSpPr>
-          <p:cNvPr id="14" name="Google Shape;97;p13">
-            <a:extLst>
-              <a:ext uri="{FF2B5EF4-FFF2-40B4-BE49-F238E27FC236}">
-                <a16:creationId xmlns:a16="http://schemas.microsoft.com/office/drawing/2014/main" id="{30AA5D0A-2560-CE4A-B38C-91AD69134962}"/>
-              </a:ext>
-            </a:extLst>
-          </p:cNvPr>
-          <p:cNvSpPr/>
-          <p:nvPr/>
-        </p:nvSpPr>
-        <p:spPr>
-          <a:xfrm>
-            <a:off x="2089797" y="5384791"/>
-            <a:ext cx="1397874" cy="900935"/>
-          </a:xfrm>
-          <a:prstGeom prst="ellipse">
-            <a:avLst/>
-          </a:prstGeom>
-          <a:solidFill>
-            <a:srgbClr val="FFC000"/>
-          </a:solidFill>
-          <a:ln w="12700" cap="flat" cmpd="sng">
-            <a:solidFill>
-              <a:srgbClr val="31538F"/>
-            </a:solidFill>
-            <a:prstDash val="solid"/>
-            <a:miter lim="800000"/>
-            <a:headEnd type="none" w="sm" len="sm"/>
-            <a:tailEnd type="none" w="sm" len="sm"/>
-          </a:ln>
-        </p:spPr>
-        <p:txBody>
-          <a:bodyPr spcFirstLastPara="1" wrap="square" lIns="91425" tIns="45700" rIns="91425" bIns="45700" anchor="ctr" anchorCtr="0">
-            <a:noAutofit/>
-          </a:bodyPr>
-          <a:lstStyle/>
-          <a:p>
-            <a:pPr marL="0" marR="0" lvl="0" indent="0" algn="ctr" rtl="0">
-              <a:spcBef>
-                <a:spcPts val="0"/>
-              </a:spcBef>
-              <a:spcAft>
-                <a:spcPts val="0"/>
-              </a:spcAft>
-              <a:buNone/>
-            </a:pPr>
-            <a:endParaRPr sz="1800">
-              <a:solidFill>
-                <a:schemeClr val="lt1"/>
-              </a:solidFill>
-              <a:latin typeface="Calibri"/>
-              <a:ea typeface="Calibri"/>
-              <a:cs typeface="Calibri"/>
-              <a:sym typeface="Calibri"/>
-            </a:endParaRPr>
-          </a:p>
-        </p:txBody>
-      </p:sp>
-      <p:sp>
-        <p:nvSpPr>
-          <p:cNvPr id="15" name="Google Shape;98;p13">
-            <a:extLst>
-              <a:ext uri="{FF2B5EF4-FFF2-40B4-BE49-F238E27FC236}">
-                <a16:creationId xmlns:a16="http://schemas.microsoft.com/office/drawing/2014/main" id="{655DB671-3DA8-B149-8288-4F8B78A39734}"/>
-              </a:ext>
-            </a:extLst>
-          </p:cNvPr>
-          <p:cNvSpPr/>
-          <p:nvPr/>
-        </p:nvSpPr>
-        <p:spPr>
-          <a:xfrm>
-            <a:off x="2439126" y="5254439"/>
-            <a:ext cx="1397874" cy="900935"/>
-          </a:xfrm>
-          <a:prstGeom prst="ellipse">
-            <a:avLst/>
-          </a:prstGeom>
-          <a:solidFill>
-            <a:srgbClr val="00B0F0">
-              <a:alpha val="40784"/>
-            </a:srgbClr>
-          </a:solidFill>
-          <a:ln w="12700" cap="flat" cmpd="sng">
-            <a:solidFill>
-              <a:srgbClr val="31538F"/>
-            </a:solidFill>
-            <a:prstDash val="solid"/>
-            <a:miter lim="800000"/>
-            <a:headEnd type="none" w="sm" len="sm"/>
-            <a:tailEnd type="none" w="sm" len="sm"/>
-          </a:ln>
-        </p:spPr>
-        <p:txBody>
-          <a:bodyPr spcFirstLastPara="1" wrap="square" lIns="91425" tIns="45700" rIns="91425" bIns="45700" anchor="ctr" anchorCtr="0">
-            <a:noAutofit/>
-          </a:bodyPr>
-          <a:lstStyle/>
-          <a:p>
-            <a:pPr marL="0" marR="0" lvl="0" indent="0" algn="ctr" rtl="0">
-              <a:spcBef>
-                <a:spcPts val="0"/>
-              </a:spcBef>
-              <a:spcAft>
-                <a:spcPts val="0"/>
-              </a:spcAft>
-              <a:buNone/>
-            </a:pPr>
-            <a:endParaRPr sz="1800">
-              <a:solidFill>
-                <a:schemeClr val="lt1"/>
-              </a:solidFill>
-              <a:latin typeface="Calibri"/>
-              <a:ea typeface="Calibri"/>
-              <a:cs typeface="Calibri"/>
-              <a:sym typeface="Calibri"/>
-            </a:endParaRPr>
-          </a:p>
-        </p:txBody>
-      </p:sp>
-      <p:sp>
-        <p:nvSpPr>
-          <p:cNvPr id="16" name="Google Shape;99;p13">
-            <a:extLst>
-              <a:ext uri="{FF2B5EF4-FFF2-40B4-BE49-F238E27FC236}">
-                <a16:creationId xmlns:a16="http://schemas.microsoft.com/office/drawing/2014/main" id="{E19F1E77-6C1D-CF40-A056-B5F0A0067705}"/>
-              </a:ext>
-            </a:extLst>
-          </p:cNvPr>
-          <p:cNvSpPr txBox="1"/>
-          <p:nvPr/>
-        </p:nvSpPr>
-        <p:spPr>
-          <a:xfrm>
-            <a:off x="2136366" y="5632718"/>
-            <a:ext cx="581015" cy="431253"/>
-          </a:xfrm>
-          <a:prstGeom prst="rect">
-            <a:avLst/>
-          </a:prstGeom>
-          <a:noFill/>
-          <a:ln>
-            <a:noFill/>
-          </a:ln>
-        </p:spPr>
-        <p:txBody>
-          <a:bodyPr spcFirstLastPara="1" wrap="square" lIns="91425" tIns="45700" rIns="91425" bIns="45700" anchor="t" anchorCtr="0">
-            <a:noAutofit/>
-          </a:bodyPr>
-          <a:lstStyle/>
-          <a:p>
-            <a:pPr marL="0" marR="0" lvl="0" indent="0" algn="l" rtl="0">
-              <a:spcBef>
-                <a:spcPts val="0"/>
-              </a:spcBef>
-              <a:spcAft>
-                <a:spcPts val="0"/>
-              </a:spcAft>
-              <a:buNone/>
-            </a:pPr>
-            <a:r>
-              <a:rPr lang="en-US" sz="2400" b="1" dirty="0">
-                <a:solidFill>
-                  <a:srgbClr val="FF0000"/>
-                </a:solidFill>
-                <a:latin typeface="Calibri"/>
-                <a:ea typeface="Calibri"/>
-                <a:cs typeface="Calibri"/>
-                <a:sym typeface="Calibri"/>
-              </a:rPr>
-              <a:t>A</a:t>
-            </a:r>
-            <a:endParaRPr sz="2400" b="1" dirty="0">
-              <a:solidFill>
-                <a:srgbClr val="FF0000"/>
-              </a:solidFill>
-              <a:latin typeface="Calibri"/>
-              <a:ea typeface="Calibri"/>
-              <a:cs typeface="Calibri"/>
-              <a:sym typeface="Calibri"/>
-            </a:endParaRPr>
-          </a:p>
-        </p:txBody>
-      </p:sp>
-      <p:sp>
-        <p:nvSpPr>
-          <p:cNvPr id="17" name="Google Shape;100;p13">
-            <a:extLst>
-              <a:ext uri="{FF2B5EF4-FFF2-40B4-BE49-F238E27FC236}">
-                <a16:creationId xmlns:a16="http://schemas.microsoft.com/office/drawing/2014/main" id="{61C18CBF-01D4-C848-A7B2-E04510A0F7B8}"/>
-              </a:ext>
-            </a:extLst>
-          </p:cNvPr>
-          <p:cNvSpPr txBox="1"/>
-          <p:nvPr/>
-        </p:nvSpPr>
-        <p:spPr>
-          <a:xfrm>
-            <a:off x="3467734" y="5384791"/>
-            <a:ext cx="640540" cy="433753"/>
-          </a:xfrm>
-          <a:prstGeom prst="rect">
-            <a:avLst/>
-          </a:prstGeom>
-          <a:noFill/>
-          <a:ln>
-            <a:noFill/>
-          </a:ln>
-        </p:spPr>
-        <p:txBody>
-          <a:bodyPr spcFirstLastPara="1" wrap="square" lIns="91425" tIns="45700" rIns="91425" bIns="45700" anchor="t" anchorCtr="0">
-            <a:noAutofit/>
-          </a:bodyPr>
-          <a:lstStyle/>
-          <a:p>
-            <a:pPr marL="0" marR="0" lvl="0" indent="0" algn="l" rtl="0">
-              <a:spcBef>
-                <a:spcPts val="0"/>
-              </a:spcBef>
-              <a:spcAft>
-                <a:spcPts val="0"/>
-              </a:spcAft>
-              <a:buNone/>
-            </a:pPr>
-            <a:r>
-              <a:rPr lang="en-US" sz="2400" b="1" dirty="0">
-                <a:solidFill>
-                  <a:srgbClr val="FF0000"/>
-                </a:solidFill>
-                <a:latin typeface="Calibri"/>
-                <a:ea typeface="Calibri"/>
-                <a:cs typeface="Calibri"/>
-                <a:sym typeface="Calibri"/>
-              </a:rPr>
-              <a:t>B</a:t>
-            </a:r>
-          </a:p>
-        </p:txBody>
-      </p:sp>
-      <p:sp>
-        <p:nvSpPr>
-          <p:cNvPr id="18" name="Google Shape;101;p13">
-            <a:extLst>
-              <a:ext uri="{FF2B5EF4-FFF2-40B4-BE49-F238E27FC236}">
-                <a16:creationId xmlns:a16="http://schemas.microsoft.com/office/drawing/2014/main" id="{C254AE81-7BEC-E24E-A3FD-EA1283594849}"/>
-              </a:ext>
-            </a:extLst>
-          </p:cNvPr>
-          <p:cNvSpPr txBox="1"/>
-          <p:nvPr/>
-        </p:nvSpPr>
-        <p:spPr>
-          <a:xfrm>
-            <a:off x="2675922" y="4499611"/>
-            <a:ext cx="1530878" cy="461665"/>
-          </a:xfrm>
-          <a:prstGeom prst="rect">
-            <a:avLst/>
-          </a:prstGeom>
-          <a:noFill/>
-          <a:ln>
-            <a:noFill/>
-          </a:ln>
-        </p:spPr>
-        <p:txBody>
-          <a:bodyPr spcFirstLastPara="1" wrap="square" lIns="91425" tIns="45700" rIns="91425" bIns="45700" anchor="t" anchorCtr="0">
-            <a:noAutofit/>
-          </a:bodyPr>
-          <a:lstStyle/>
-          <a:p>
-            <a:pPr marL="0" marR="0" lvl="0" indent="0" algn="l" rtl="0">
-              <a:spcBef>
-                <a:spcPts val="0"/>
-              </a:spcBef>
-              <a:spcAft>
-                <a:spcPts val="0"/>
-              </a:spcAft>
-              <a:buNone/>
-            </a:pPr>
-            <a:r>
-              <a:rPr lang="en-US" sz="2400" b="1" dirty="0">
-                <a:solidFill>
-                  <a:srgbClr val="FF0000"/>
-                </a:solidFill>
-                <a:latin typeface="Calibri"/>
-                <a:ea typeface="Calibri"/>
-                <a:cs typeface="Calibri"/>
-                <a:sym typeface="Calibri"/>
-              </a:rPr>
-              <a:t>All Drives</a:t>
-            </a:r>
-            <a:endParaRPr sz="2400" b="1" dirty="0">
-              <a:solidFill>
-                <a:srgbClr val="FF0000"/>
-              </a:solidFill>
-              <a:latin typeface="Calibri"/>
-              <a:ea typeface="Calibri"/>
-              <a:cs typeface="Calibri"/>
-              <a:sym typeface="Calibri"/>
-            </a:endParaRPr>
-          </a:p>
-        </p:txBody>
-      </p:sp>
-      <p:sp>
-        <p:nvSpPr>
-          <p:cNvPr id="19" name="TextBox 18">
-            <a:extLst>
-              <a:ext uri="{FF2B5EF4-FFF2-40B4-BE49-F238E27FC236}">
-                <a16:creationId xmlns:a16="http://schemas.microsoft.com/office/drawing/2014/main" id="{6E6E4C8B-2E60-5C46-9FFF-EB63ACF4895B}"/>
-              </a:ext>
-            </a:extLst>
-          </p:cNvPr>
-          <p:cNvSpPr txBox="1"/>
-          <p:nvPr/>
-        </p:nvSpPr>
-        <p:spPr>
-          <a:xfrm>
-            <a:off x="8930917" y="462807"/>
-            <a:ext cx="3119984" cy="1384995"/>
-          </a:xfrm>
-          <a:prstGeom prst="rect">
-            <a:avLst/>
-          </a:prstGeom>
-          <a:noFill/>
-        </p:spPr>
-        <p:txBody>
-          <a:bodyPr wrap="square" rtlCol="0">
-            <a:spAutoFit/>
-          </a:bodyPr>
-          <a:lstStyle/>
-          <a:p>
-            <a:r>
-              <a:rPr lang="en-US" b="1" dirty="0">
-                <a:solidFill>
-                  <a:srgbClr val="00B050"/>
-                </a:solidFill>
-                <a:latin typeface="Menlo" panose="020B0609030804020204" pitchFamily="49" charset="0"/>
-                <a:ea typeface="Menlo" panose="020B0609030804020204" pitchFamily="49" charset="0"/>
-                <a:cs typeface="Menlo" panose="020B0609030804020204" pitchFamily="49" charset="0"/>
-              </a:rPr>
-              <a:t>+-------+----------+------+</a:t>
-            </a:r>
-          </a:p>
-          <a:p>
-            <a:r>
-              <a:rPr lang="en-US" b="1" dirty="0">
-                <a:solidFill>
-                  <a:srgbClr val="00B050"/>
-                </a:solidFill>
-                <a:latin typeface="Menlo" panose="020B0609030804020204" pitchFamily="49" charset="0"/>
-                <a:ea typeface="Menlo" panose="020B0609030804020204" pitchFamily="49" charset="0"/>
-                <a:cs typeface="Menlo" panose="020B0609030804020204" pitchFamily="49" charset="0"/>
-              </a:rPr>
-              <a:t>|       | Damaged  |      |</a:t>
-            </a:r>
-          </a:p>
-          <a:p>
-            <a:r>
-              <a:rPr lang="en-US" b="1" dirty="0">
-                <a:solidFill>
-                  <a:srgbClr val="00B050"/>
-                </a:solidFill>
-                <a:latin typeface="Menlo" panose="020B0609030804020204" pitchFamily="49" charset="0"/>
-                <a:ea typeface="Menlo" panose="020B0609030804020204" pitchFamily="49" charset="0"/>
-                <a:cs typeface="Menlo" panose="020B0609030804020204" pitchFamily="49" charset="0"/>
-              </a:rPr>
-              <a:t>+-------+----------+------+</a:t>
-            </a:r>
-          </a:p>
-          <a:p>
-            <a:r>
-              <a:rPr lang="en-US" b="1" dirty="0">
-                <a:solidFill>
-                  <a:srgbClr val="00B050"/>
-                </a:solidFill>
-                <a:latin typeface="Menlo" panose="020B0609030804020204" pitchFamily="49" charset="0"/>
-                <a:ea typeface="Menlo" panose="020B0609030804020204" pitchFamily="49" charset="0"/>
-                <a:cs typeface="Menlo" panose="020B0609030804020204" pitchFamily="49" charset="0"/>
-              </a:rPr>
-              <a:t>|Coffee |  80      |  -   |</a:t>
-            </a:r>
-          </a:p>
-          <a:p>
-            <a:r>
-              <a:rPr lang="en-US" b="1" dirty="0">
-                <a:solidFill>
-                  <a:srgbClr val="00B050"/>
-                </a:solidFill>
-                <a:latin typeface="Menlo" panose="020B0609030804020204" pitchFamily="49" charset="0"/>
-                <a:ea typeface="Menlo" panose="020B0609030804020204" pitchFamily="49" charset="0"/>
-                <a:cs typeface="Menlo" panose="020B0609030804020204" pitchFamily="49" charset="0"/>
-              </a:rPr>
-              <a:t>|       |  20      |  -   |</a:t>
-            </a:r>
-          </a:p>
-          <a:p>
-            <a:r>
-              <a:rPr lang="en-US" b="1" dirty="0">
-                <a:solidFill>
-                  <a:srgbClr val="00B050"/>
-                </a:solidFill>
-                <a:latin typeface="Menlo" panose="020B0609030804020204" pitchFamily="49" charset="0"/>
-                <a:ea typeface="Menlo" panose="020B0609030804020204" pitchFamily="49" charset="0"/>
-                <a:cs typeface="Menlo" panose="020B0609030804020204" pitchFamily="49" charset="0"/>
-              </a:rPr>
-              <a:t>+-------+----------+------+</a:t>
-            </a:r>
-          </a:p>
-        </p:txBody>
-      </p:sp>
-      <p:sp>
-        <p:nvSpPr>
-          <p:cNvPr id="20" name="Google Shape;89;p13">
-            <a:extLst>
-              <a:ext uri="{FF2B5EF4-FFF2-40B4-BE49-F238E27FC236}">
-                <a16:creationId xmlns:a16="http://schemas.microsoft.com/office/drawing/2014/main" id="{B62C94EF-0889-7846-B479-937B9CC58C28}"/>
-              </a:ext>
-            </a:extLst>
-          </p:cNvPr>
-          <p:cNvSpPr txBox="1"/>
-          <p:nvPr/>
-        </p:nvSpPr>
-        <p:spPr>
-          <a:xfrm>
-            <a:off x="4116279" y="4617542"/>
-            <a:ext cx="3347883" cy="2050775"/>
-          </a:xfrm>
-          <a:prstGeom prst="rect">
-            <a:avLst/>
-          </a:prstGeom>
-          <a:noFill/>
-          <a:ln>
-            <a:noFill/>
-          </a:ln>
-        </p:spPr>
-        <p:txBody>
-          <a:bodyPr spcFirstLastPara="1" wrap="square" lIns="91425" tIns="45700" rIns="91425" bIns="45700" anchor="t" anchorCtr="0">
-            <a:noAutofit/>
-          </a:bodyPr>
-          <a:lstStyle/>
-          <a:p>
-            <a:pPr marL="0" marR="0" lvl="0" indent="0" algn="l" rtl="0">
-              <a:spcBef>
-                <a:spcPts val="0"/>
-              </a:spcBef>
-              <a:spcAft>
-                <a:spcPts val="0"/>
-              </a:spcAft>
-              <a:buNone/>
-            </a:pPr>
-            <a:r>
-              <a:rPr lang="en-US" sz="1200" dirty="0">
-                <a:solidFill>
-                  <a:schemeClr val="dk1"/>
-                </a:solidFill>
-                <a:latin typeface="Calibri"/>
-                <a:cs typeface="Calibri"/>
-                <a:sym typeface="Calibri"/>
-              </a:rPr>
-              <a:t>A = Coffee, B = Damaged, P = Probability</a:t>
-            </a:r>
-            <a:endParaRPr lang="en-US" sz="1200" dirty="0">
-              <a:solidFill>
-                <a:schemeClr val="dk1"/>
-              </a:solidFill>
-              <a:latin typeface="Calibri"/>
-              <a:ea typeface="Calibri"/>
-              <a:cs typeface="Calibri"/>
-              <a:sym typeface="Calibri"/>
-            </a:endParaRPr>
-          </a:p>
-          <a:p>
-            <a:pPr lvl="0"/>
-            <a:r>
-              <a:rPr lang="en-US" sz="1200" b="1" dirty="0">
-                <a:solidFill>
-                  <a:srgbClr val="00B0F0"/>
-                </a:solidFill>
-                <a:latin typeface="Calibri"/>
-                <a:ea typeface="Calibri"/>
-                <a:cs typeface="Calibri"/>
-                <a:sym typeface="Calibri"/>
-              </a:rPr>
-              <a:t>P(A) = 5% = P( </a:t>
-            </a:r>
-            <a:r>
-              <a:rPr lang="en-US" sz="1200" b="1" dirty="0">
-                <a:solidFill>
-                  <a:srgbClr val="00B0F0"/>
-                </a:solidFill>
-                <a:latin typeface="Calibri"/>
-                <a:cs typeface="Calibri"/>
-                <a:sym typeface="Calibri"/>
-              </a:rPr>
-              <a:t>Coffee )    # </a:t>
-            </a:r>
-            <a:r>
-              <a:rPr lang="en-US" sz="1200" b="1" dirty="0">
-                <a:solidFill>
-                  <a:srgbClr val="00B0F0"/>
-                </a:solidFill>
-                <a:latin typeface="Calibri"/>
-                <a:ea typeface="Calibri"/>
-                <a:cs typeface="Calibri"/>
-                <a:sym typeface="Calibri"/>
-              </a:rPr>
-              <a:t>Yellow</a:t>
-            </a:r>
-          </a:p>
-          <a:p>
-            <a:pPr marL="0" marR="0" lvl="0" indent="0" algn="l" rtl="0">
-              <a:spcBef>
-                <a:spcPts val="0"/>
-              </a:spcBef>
-              <a:spcAft>
-                <a:spcPts val="0"/>
-              </a:spcAft>
-              <a:buNone/>
-            </a:pPr>
-            <a:r>
-              <a:rPr lang="en-US" sz="1200" dirty="0">
-                <a:solidFill>
-                  <a:schemeClr val="dk1"/>
-                </a:solidFill>
-                <a:latin typeface="Calibri"/>
-                <a:ea typeface="Calibri"/>
-                <a:cs typeface="Calibri"/>
-                <a:sym typeface="Calibri"/>
-              </a:rPr>
-              <a:t>P(B) = 5% = P( Damaged  )  # Blue</a:t>
-            </a:r>
-          </a:p>
-          <a:p>
-            <a:pPr marL="0" marR="0" lvl="0" indent="0" algn="l" rtl="0">
-              <a:spcBef>
-                <a:spcPts val="0"/>
-              </a:spcBef>
-              <a:spcAft>
-                <a:spcPts val="0"/>
-              </a:spcAft>
-              <a:buNone/>
-            </a:pPr>
-            <a:endParaRPr lang="en-US" sz="1200" dirty="0">
-              <a:solidFill>
-                <a:schemeClr val="dk1"/>
-              </a:solidFill>
-              <a:latin typeface="Calibri"/>
-              <a:ea typeface="Calibri"/>
-              <a:cs typeface="Calibri"/>
-              <a:sym typeface="Calibri"/>
-            </a:endParaRPr>
-          </a:p>
-          <a:p>
-            <a:pPr lvl="0"/>
-            <a:r>
-              <a:rPr lang="en-US" sz="1200" b="1" dirty="0">
-                <a:solidFill>
-                  <a:srgbClr val="00B0F0"/>
-                </a:solidFill>
-                <a:latin typeface="Calibri"/>
-                <a:ea typeface="Calibri"/>
-                <a:cs typeface="Calibri"/>
-                <a:sym typeface="Calibri"/>
-              </a:rPr>
-              <a:t>P(B|A) = 80% = P( Damaged given that Coffee )</a:t>
-            </a:r>
-          </a:p>
-          <a:p>
-            <a:pPr lvl="0"/>
-            <a:r>
-              <a:rPr lang="en-US" sz="1200" dirty="0">
-                <a:solidFill>
-                  <a:schemeClr val="dk1"/>
-                </a:solidFill>
-                <a:latin typeface="Calibri"/>
-                <a:ea typeface="Calibri"/>
-                <a:cs typeface="Calibri"/>
-                <a:sym typeface="Calibri"/>
-              </a:rPr>
-              <a:t>P(A|B) = 80% = P( Coffee given that Damaged )</a:t>
-            </a:r>
-          </a:p>
-          <a:p>
-            <a:pPr marL="0" marR="0" lvl="0" indent="0" algn="l" rtl="0">
-              <a:spcBef>
-                <a:spcPts val="0"/>
-              </a:spcBef>
-              <a:spcAft>
-                <a:spcPts val="0"/>
-              </a:spcAft>
-              <a:buNone/>
-            </a:pPr>
-            <a:endParaRPr lang="en-US" sz="1200" dirty="0">
-              <a:solidFill>
-                <a:schemeClr val="dk1"/>
-              </a:solidFill>
-              <a:latin typeface="Calibri"/>
-              <a:ea typeface="Calibri"/>
-              <a:cs typeface="Calibri"/>
-              <a:sym typeface="Calibri"/>
-            </a:endParaRPr>
-          </a:p>
-          <a:p>
-            <a:r>
-              <a:rPr lang="en-US" sz="1200" dirty="0">
-                <a:solidFill>
-                  <a:schemeClr val="dk1"/>
-                </a:solidFill>
-                <a:latin typeface="Calibri"/>
-                <a:ea typeface="Calibri"/>
-                <a:cs typeface="Calibri"/>
-                <a:sym typeface="Calibri"/>
-              </a:rPr>
-              <a:t>Intersection:</a:t>
-            </a:r>
-          </a:p>
-          <a:p>
-            <a:pPr marL="0" marR="0" lvl="0" indent="0" algn="l" rtl="0">
-              <a:spcBef>
-                <a:spcPts val="0"/>
-              </a:spcBef>
-              <a:spcAft>
-                <a:spcPts val="0"/>
-              </a:spcAft>
-              <a:buNone/>
-            </a:pPr>
-            <a:r>
-              <a:rPr lang="en-US" sz="1200" dirty="0">
-                <a:solidFill>
-                  <a:schemeClr val="dk1"/>
-                </a:solidFill>
-                <a:latin typeface="Calibri"/>
-                <a:ea typeface="Calibri"/>
-                <a:cs typeface="Calibri"/>
-                <a:sym typeface="Calibri"/>
-              </a:rPr>
-              <a:t>P(A &amp; B) = 4% = P(Coffee &amp; Damaged)  # Green</a:t>
-            </a:r>
-          </a:p>
-          <a:p>
-            <a:pPr marL="0" marR="0" lvl="0" indent="0" algn="l" rtl="0">
-              <a:spcBef>
-                <a:spcPts val="0"/>
-              </a:spcBef>
-              <a:spcAft>
-                <a:spcPts val="0"/>
-              </a:spcAft>
-              <a:buNone/>
-            </a:pPr>
-            <a:r>
-              <a:rPr lang="en-US" sz="1200" dirty="0">
-                <a:solidFill>
-                  <a:schemeClr val="dk1"/>
-                </a:solidFill>
-                <a:latin typeface="Calibri"/>
-                <a:ea typeface="Calibri"/>
-                <a:cs typeface="Calibri"/>
-                <a:sym typeface="Calibri"/>
-              </a:rPr>
-              <a:t>P(A|B)*P(B) = 80%*5% = 4%</a:t>
-            </a:r>
-            <a:endParaRPr sz="1200" dirty="0">
-              <a:solidFill>
-                <a:schemeClr val="dk1"/>
-              </a:solidFill>
-              <a:latin typeface="Calibri"/>
-              <a:ea typeface="Calibri"/>
-              <a:cs typeface="Calibri"/>
-              <a:sym typeface="Calibri"/>
-            </a:endParaRPr>
-          </a:p>
-          <a:p>
-            <a:pPr marL="0" marR="0" lvl="0" indent="0" algn="l" rtl="0">
-              <a:spcBef>
-                <a:spcPts val="0"/>
-              </a:spcBef>
-              <a:spcAft>
-                <a:spcPts val="0"/>
-              </a:spcAft>
-              <a:buNone/>
-            </a:pPr>
-            <a:r>
-              <a:rPr lang="en-US" sz="1200" b="1" dirty="0">
-                <a:solidFill>
-                  <a:srgbClr val="00B0F0"/>
-                </a:solidFill>
-                <a:latin typeface="Calibri"/>
-                <a:ea typeface="Calibri"/>
-                <a:cs typeface="Calibri"/>
-                <a:sym typeface="Calibri"/>
-              </a:rPr>
-              <a:t>P(B|A)*P(A) = 80%*5% = 4%</a:t>
-            </a:r>
-          </a:p>
-        </p:txBody>
-      </p:sp>
-      <p:sp>
-        <p:nvSpPr>
-          <p:cNvPr id="4" name="TextBox 3">
-            <a:extLst>
-              <a:ext uri="{FF2B5EF4-FFF2-40B4-BE49-F238E27FC236}">
-                <a16:creationId xmlns:a16="http://schemas.microsoft.com/office/drawing/2014/main" id="{39A90BC2-B4D8-E240-A189-C3C7F0FC7086}"/>
-              </a:ext>
-            </a:extLst>
-          </p:cNvPr>
-          <p:cNvSpPr txBox="1"/>
-          <p:nvPr/>
-        </p:nvSpPr>
-        <p:spPr>
-          <a:xfrm>
-            <a:off x="8930917" y="2068519"/>
-            <a:ext cx="3245613" cy="2123658"/>
-          </a:xfrm>
-          <a:prstGeom prst="rect">
-            <a:avLst/>
-          </a:prstGeom>
-          <a:noFill/>
-        </p:spPr>
-        <p:txBody>
-          <a:bodyPr wrap="square" rtlCol="0">
-            <a:spAutoFit/>
-          </a:bodyPr>
-          <a:lstStyle/>
-          <a:p>
-            <a:r>
-              <a:rPr lang="en-US" sz="1200" dirty="0"/>
-              <a:t>Possible approach to calculating P(B|A):</a:t>
-            </a:r>
-          </a:p>
-          <a:p>
-            <a:endParaRPr lang="en-US" sz="1200" dirty="0"/>
-          </a:p>
-          <a:p>
-            <a:pPr marL="171450" indent="-171450">
-              <a:buFont typeface="Arial" panose="020B0604020202020204" pitchFamily="34" charset="0"/>
-              <a:buChar char="•"/>
-            </a:pPr>
-            <a:r>
-              <a:rPr lang="en-US" sz="1200" dirty="0"/>
-              <a:t>We fix P(A|B)=0.8 and P(B) = 0.05.</a:t>
-            </a:r>
-          </a:p>
-          <a:p>
-            <a:pPr marL="171450" indent="-171450">
-              <a:buFont typeface="Arial" panose="020B0604020202020204" pitchFamily="34" charset="0"/>
-              <a:buChar char="•"/>
-            </a:pPr>
-            <a:r>
-              <a:rPr lang="en-US" sz="1200" dirty="0"/>
-              <a:t>Then we use Bayes formula to </a:t>
-            </a:r>
-            <a:br>
-              <a:rPr lang="en-US" sz="1200" dirty="0"/>
-            </a:br>
-            <a:r>
-              <a:rPr lang="en-US" sz="1200" dirty="0"/>
-              <a:t>express P(B|A) as function of P(A).</a:t>
-            </a:r>
-          </a:p>
-          <a:p>
-            <a:pPr marL="171450" indent="-171450">
-              <a:buFont typeface="Arial" panose="020B0604020202020204" pitchFamily="34" charset="0"/>
-              <a:buChar char="•"/>
-            </a:pPr>
-            <a:r>
-              <a:rPr lang="en-US" sz="1200" dirty="0"/>
-              <a:t>Then presuming that all values of P(A) </a:t>
-            </a:r>
-            <a:br>
-              <a:rPr lang="en-US" sz="1200" dirty="0"/>
-            </a:br>
-            <a:r>
-              <a:rPr lang="en-US" sz="1200" dirty="0"/>
-              <a:t>are equally possible (flat prior), </a:t>
-            </a:r>
-            <a:br>
-              <a:rPr lang="en-US" sz="1200" dirty="0"/>
-            </a:br>
-            <a:r>
-              <a:rPr lang="en-US" sz="1200" dirty="0"/>
-              <a:t>we calculate average P(B|A).</a:t>
-            </a:r>
-          </a:p>
-          <a:p>
-            <a:pPr marL="171450" indent="-171450">
-              <a:buFont typeface="Arial" panose="020B0604020202020204" pitchFamily="34" charset="0"/>
-              <a:buChar char="•"/>
-            </a:pPr>
-            <a:r>
-              <a:rPr lang="en-US" sz="1200" dirty="0"/>
-              <a:t>Alternatively we use some reasonable guess of the prior (not flat) – to get better posterior.</a:t>
-            </a:r>
-          </a:p>
-        </p:txBody>
-      </p:sp>
-    </p:spTree>
-    <p:extLst>
-      <p:ext uri="{BB962C8B-B14F-4D97-AF65-F5344CB8AC3E}">
-        <p14:creationId xmlns:p14="http://schemas.microsoft.com/office/powerpoint/2010/main" val="418091737"/>
-      </p:ext>
-    </p:extLst>
-  </p:cSld>
-  <p:clrMapOvr>
-    <a:masterClrMapping/>
-  </p:clrMapOvr>
-</p:sld>
-</file>
-
-<file path=ppt/slides/slide7.xml><?xml version="1.0" encoding="utf-8"?>
 <p:sld xmlns:a="http://schemas.openxmlformats.org/drawingml/2006/main" xmlns:r="http://schemas.openxmlformats.org/officeDocument/2006/relationships" xmlns:p="http://schemas.openxmlformats.org/presentationml/2006/main">
   <p:cSld>
     <p:spTree>
@@ -26969,7 +26506,7 @@
 </p:sld>
 </file>
 
-<file path=ppt/slides/slide8.xml><?xml version="1.0" encoding="utf-8"?>
+<file path=ppt/slides/slide7.xml><?xml version="1.0" encoding="utf-8"?>
 <p:sld xmlns:a="http://schemas.openxmlformats.org/drawingml/2006/main" xmlns:r="http://schemas.openxmlformats.org/officeDocument/2006/relationships" xmlns:p="http://schemas.openxmlformats.org/presentationml/2006/main">
   <p:cSld>
     <p:spTree>
@@ -28536,7 +28073,7 @@
 </p:sld>
 </file>
 
-<file path=ppt/slides/slide9.xml><?xml version="1.0" encoding="utf-8"?>
+<file path=ppt/slides/slide8.xml><?xml version="1.0" encoding="utf-8"?>
 <p:sld xmlns:a="http://schemas.openxmlformats.org/drawingml/2006/main" xmlns:r="http://schemas.openxmlformats.org/officeDocument/2006/relationships" xmlns:p="http://schemas.openxmlformats.org/presentationml/2006/main">
   <p:cSld>
     <p:spTree>
@@ -29485,6 +29022,688 @@
     <p:extLst>
       <p:ext uri="{BB962C8B-B14F-4D97-AF65-F5344CB8AC3E}">
         <p14:creationId xmlns:p14="http://schemas.microsoft.com/office/powerpoint/2010/main" val="2024227266"/>
+      </p:ext>
+    </p:extLst>
+  </p:cSld>
+  <p:clrMapOvr>
+    <a:masterClrMapping/>
+  </p:clrMapOvr>
+</p:sld>
+</file>
+
+<file path=ppt/slides/slide9.xml><?xml version="1.0" encoding="utf-8"?>
+<p:sld xmlns:a="http://schemas.openxmlformats.org/drawingml/2006/main" xmlns:r="http://schemas.openxmlformats.org/officeDocument/2006/relationships" xmlns:p="http://schemas.openxmlformats.org/presentationml/2006/main">
+  <p:cSld>
+    <p:spTree>
+      <p:nvGrpSpPr>
+        <p:cNvPr id="1" name="Shape 87"/>
+        <p:cNvGrpSpPr/>
+        <p:nvPr/>
+      </p:nvGrpSpPr>
+      <p:grpSpPr>
+        <a:xfrm>
+          <a:off x="0" y="0"/>
+          <a:ext cx="0" cy="0"/>
+          <a:chOff x="0" y="0"/>
+          <a:chExt cx="0" cy="0"/>
+        </a:xfrm>
+      </p:grpSpPr>
+      <p:sp>
+        <p:nvSpPr>
+          <p:cNvPr id="18" name="Google Shape;107;p14">
+            <a:extLst>
+              <a:ext uri="{FF2B5EF4-FFF2-40B4-BE49-F238E27FC236}">
+                <a16:creationId xmlns:a16="http://schemas.microsoft.com/office/drawing/2014/main" id="{C2992640-6531-5D46-B219-A020079806DB}"/>
+              </a:ext>
+            </a:extLst>
+          </p:cNvPr>
+          <p:cNvSpPr txBox="1"/>
+          <p:nvPr/>
+        </p:nvSpPr>
+        <p:spPr>
+          <a:xfrm>
+            <a:off x="91343" y="40387"/>
+            <a:ext cx="5893822" cy="1137250"/>
+          </a:xfrm>
+          <a:prstGeom prst="rect">
+            <a:avLst/>
+          </a:prstGeom>
+          <a:noFill/>
+          <a:ln>
+            <a:noFill/>
+          </a:ln>
+        </p:spPr>
+        <p:txBody>
+          <a:bodyPr spcFirstLastPara="1" wrap="square" lIns="91425" tIns="45700" rIns="91425" bIns="45700" anchor="t" anchorCtr="0">
+            <a:noAutofit/>
+          </a:bodyPr>
+          <a:lstStyle/>
+          <a:p>
+            <a:pPr marL="0" marR="0" lvl="0" indent="0" algn="l" rtl="0">
+              <a:spcBef>
+                <a:spcPts val="0"/>
+              </a:spcBef>
+              <a:spcAft>
+                <a:spcPts val="0"/>
+              </a:spcAft>
+              <a:buNone/>
+            </a:pPr>
+            <a:r>
+              <a:rPr lang="en-US" sz="2800" b="1" dirty="0">
+                <a:solidFill>
+                  <a:schemeClr val="tx1"/>
+                </a:solidFill>
+                <a:latin typeface="Calibri" panose="020F0502020204030204" pitchFamily="34" charset="0"/>
+                <a:cs typeface="Calibri" panose="020F0502020204030204" pitchFamily="34" charset="0"/>
+                <a:sym typeface="Calibri"/>
+              </a:rPr>
+              <a:t>Bayesian network  </a:t>
+            </a:r>
+            <a:br>
+              <a:rPr lang="en-US" sz="2800" b="1" dirty="0">
+                <a:solidFill>
+                  <a:schemeClr val="tx1"/>
+                </a:solidFill>
+                <a:latin typeface="Calibri" panose="020F0502020204030204" pitchFamily="34" charset="0"/>
+                <a:cs typeface="Calibri" panose="020F0502020204030204" pitchFamily="34" charset="0"/>
+                <a:sym typeface="Calibri"/>
+              </a:rPr>
+            </a:br>
+            <a:r>
+              <a:rPr lang="en-US" sz="1800" dirty="0">
+                <a:solidFill>
+                  <a:schemeClr val="dk1"/>
+                </a:solidFill>
+                <a:latin typeface="Calibri"/>
+                <a:cs typeface="Calibri"/>
+                <a:sym typeface="Calibri"/>
+              </a:rPr>
+              <a:t>( a.k.a. Bayes network, belief network, Bayes(</a:t>
+            </a:r>
+            <a:r>
+              <a:rPr lang="en-US" sz="1800" dirty="0" err="1">
+                <a:solidFill>
+                  <a:schemeClr val="dk1"/>
+                </a:solidFill>
+                <a:latin typeface="Calibri"/>
+                <a:cs typeface="Calibri"/>
+                <a:sym typeface="Calibri"/>
+              </a:rPr>
+              <a:t>ian</a:t>
+            </a:r>
+            <a:r>
+              <a:rPr lang="en-US" sz="1800" dirty="0">
+                <a:solidFill>
+                  <a:schemeClr val="dk1"/>
+                </a:solidFill>
+                <a:latin typeface="Calibri"/>
+                <a:cs typeface="Calibri"/>
+                <a:sym typeface="Calibri"/>
+              </a:rPr>
+              <a:t>) model </a:t>
+            </a:r>
+          </a:p>
+          <a:p>
+            <a:pPr marL="0" marR="0" lvl="0" indent="0" algn="l" rtl="0">
+              <a:spcBef>
+                <a:spcPts val="0"/>
+              </a:spcBef>
+              <a:spcAft>
+                <a:spcPts val="0"/>
+              </a:spcAft>
+              <a:buNone/>
+            </a:pPr>
+            <a:r>
+              <a:rPr lang="en-US" sz="1800" dirty="0">
+                <a:solidFill>
+                  <a:schemeClr val="dk1"/>
+                </a:solidFill>
+                <a:latin typeface="Calibri"/>
+                <a:cs typeface="Calibri"/>
+                <a:sym typeface="Calibri"/>
+              </a:rPr>
+              <a:t>  or probabilistic directed acyclic graphical model )</a:t>
+            </a:r>
+            <a:r>
+              <a:rPr lang="en-US" sz="1800" dirty="0">
+                <a:solidFill>
+                  <a:schemeClr val="dk1"/>
+                </a:solidFill>
+                <a:latin typeface="Calibri"/>
+                <a:ea typeface="Calibri"/>
+                <a:cs typeface="Calibri"/>
+                <a:sym typeface="Calibri"/>
+              </a:rPr>
+              <a:t> </a:t>
+            </a:r>
+          </a:p>
+        </p:txBody>
+      </p:sp>
+      <p:pic>
+        <p:nvPicPr>
+          <p:cNvPr id="19" name="Google Shape;114;p14">
+            <a:extLst>
+              <a:ext uri="{FF2B5EF4-FFF2-40B4-BE49-F238E27FC236}">
+                <a16:creationId xmlns:a16="http://schemas.microsoft.com/office/drawing/2014/main" id="{6CEB8B6B-5D31-D04D-8340-CFFC67C74C71}"/>
+              </a:ext>
+            </a:extLst>
+          </p:cNvPr>
+          <p:cNvPicPr preferRelativeResize="0"/>
+          <p:nvPr/>
+        </p:nvPicPr>
+        <p:blipFill rotWithShape="1">
+          <a:blip r:embed="rId3" cstate="email">
+            <a:alphaModFix/>
+            <a:extLst>
+              <a:ext uri="{28A0092B-C50C-407E-A947-70E740481C1C}">
+                <a14:useLocalDpi xmlns:a14="http://schemas.microsoft.com/office/drawing/2010/main"/>
+              </a:ext>
+            </a:extLst>
+          </a:blip>
+          <a:srcRect/>
+          <a:stretch/>
+        </p:blipFill>
+        <p:spPr>
+          <a:xfrm>
+            <a:off x="7021286" y="418578"/>
+            <a:ext cx="1715986" cy="1996320"/>
+          </a:xfrm>
+          <a:prstGeom prst="rect">
+            <a:avLst/>
+          </a:prstGeom>
+          <a:noFill/>
+          <a:ln>
+            <a:noFill/>
+          </a:ln>
+        </p:spPr>
+      </p:pic>
+      <p:pic>
+        <p:nvPicPr>
+          <p:cNvPr id="1026" name="Picture 2" descr="A name for layered directed graph as in a fully-connected neural network -  Mathematics Stack Exchange">
+            <a:extLst>
+              <a:ext uri="{FF2B5EF4-FFF2-40B4-BE49-F238E27FC236}">
+                <a16:creationId xmlns:a16="http://schemas.microsoft.com/office/drawing/2014/main" id="{9F27D678-C094-7546-8A93-B3B6A7DC683E}"/>
+              </a:ext>
+            </a:extLst>
+          </p:cNvPr>
+          <p:cNvPicPr>
+            <a:picLocks noChangeAspect="1" noChangeArrowheads="1"/>
+          </p:cNvPicPr>
+          <p:nvPr/>
+        </p:nvPicPr>
+        <p:blipFill>
+          <a:blip r:embed="rId4" cstate="email">
+            <a:extLst>
+              <a:ext uri="{28A0092B-C50C-407E-A947-70E740481C1C}">
+                <a14:useLocalDpi xmlns:a14="http://schemas.microsoft.com/office/drawing/2010/main"/>
+              </a:ext>
+            </a:extLst>
+          </a:blip>
+          <a:srcRect/>
+          <a:stretch>
+            <a:fillRect/>
+          </a:stretch>
+        </p:blipFill>
+        <p:spPr bwMode="auto">
+          <a:xfrm>
+            <a:off x="7021286" y="3248453"/>
+            <a:ext cx="4388069" cy="2234581"/>
+          </a:xfrm>
+          <a:prstGeom prst="rect">
+            <a:avLst/>
+          </a:prstGeom>
+          <a:noFill/>
+          <a:extLst>
+            <a:ext uri="{909E8E84-426E-40DD-AFC4-6F175D3DCCD1}">
+              <a14:hiddenFill xmlns:a14="http://schemas.microsoft.com/office/drawing/2010/main">
+                <a:solidFill>
+                  <a:srgbClr val="FFFFFF"/>
+                </a:solidFill>
+              </a14:hiddenFill>
+            </a:ext>
+          </a:extLst>
+        </p:spPr>
+      </p:pic>
+      <p:sp>
+        <p:nvSpPr>
+          <p:cNvPr id="5" name="Google Shape;107;p14">
+            <a:extLst>
+              <a:ext uri="{FF2B5EF4-FFF2-40B4-BE49-F238E27FC236}">
+                <a16:creationId xmlns:a16="http://schemas.microsoft.com/office/drawing/2014/main" id="{341F2A09-BD6A-6E40-B245-BD73EC20CC51}"/>
+              </a:ext>
+            </a:extLst>
+          </p:cNvPr>
+          <p:cNvSpPr txBox="1"/>
+          <p:nvPr/>
+        </p:nvSpPr>
+        <p:spPr>
+          <a:xfrm>
+            <a:off x="91342" y="1416738"/>
+            <a:ext cx="6613415" cy="998160"/>
+          </a:xfrm>
+          <a:prstGeom prst="rect">
+            <a:avLst/>
+          </a:prstGeom>
+          <a:noFill/>
+          <a:ln>
+            <a:noFill/>
+          </a:ln>
+        </p:spPr>
+        <p:txBody>
+          <a:bodyPr spcFirstLastPara="1" wrap="square" lIns="91425" tIns="45700" rIns="91425" bIns="45700" anchor="t" anchorCtr="0">
+            <a:noAutofit/>
+          </a:bodyPr>
+          <a:lstStyle/>
+          <a:p>
+            <a:pPr marL="0" marR="0" lvl="0" indent="0" algn="l" rtl="0">
+              <a:spcBef>
+                <a:spcPts val="0"/>
+              </a:spcBef>
+              <a:spcAft>
+                <a:spcPts val="0"/>
+              </a:spcAft>
+              <a:buNone/>
+            </a:pPr>
+            <a:r>
+              <a:rPr lang="en-US" sz="1800" b="1" dirty="0">
+                <a:solidFill>
+                  <a:schemeClr val="accent1"/>
+                </a:solidFill>
+                <a:latin typeface="Calibri" panose="020F0502020204030204" pitchFamily="34" charset="0"/>
+                <a:cs typeface="Calibri" panose="020F0502020204030204" pitchFamily="34" charset="0"/>
+                <a:sym typeface="Calibri"/>
+              </a:rPr>
+              <a:t>Bayesian network </a:t>
+            </a:r>
+            <a:r>
+              <a:rPr lang="en-US" sz="1800" dirty="0">
+                <a:solidFill>
+                  <a:schemeClr val="dk1"/>
+                </a:solidFill>
+                <a:latin typeface="Calibri"/>
+                <a:ea typeface="Calibri"/>
+                <a:cs typeface="Calibri"/>
+                <a:sym typeface="Calibri"/>
+              </a:rPr>
+              <a:t>is a probabilistic graphical model (a type of statistical model) that represents a set of random variables and their conditional dependencies via a directed acyclic graph (DAG). </a:t>
+            </a:r>
+          </a:p>
+        </p:txBody>
+      </p:sp>
+      <p:sp>
+        <p:nvSpPr>
+          <p:cNvPr id="7" name="Google Shape;107;p14">
+            <a:extLst>
+              <a:ext uri="{FF2B5EF4-FFF2-40B4-BE49-F238E27FC236}">
+                <a16:creationId xmlns:a16="http://schemas.microsoft.com/office/drawing/2014/main" id="{4CCE08F0-3501-EE45-BB4D-DD3F87E80562}"/>
+              </a:ext>
+            </a:extLst>
+          </p:cNvPr>
+          <p:cNvSpPr txBox="1"/>
+          <p:nvPr/>
+        </p:nvSpPr>
+        <p:spPr>
+          <a:xfrm>
+            <a:off x="91342" y="2423668"/>
+            <a:ext cx="6428357" cy="1480847"/>
+          </a:xfrm>
+          <a:prstGeom prst="rect">
+            <a:avLst/>
+          </a:prstGeom>
+          <a:noFill/>
+          <a:ln>
+            <a:noFill/>
+          </a:ln>
+        </p:spPr>
+        <p:txBody>
+          <a:bodyPr spcFirstLastPara="1" wrap="square" lIns="91425" tIns="45700" rIns="91425" bIns="45700" anchor="t" anchorCtr="0">
+            <a:noAutofit/>
+          </a:bodyPr>
+          <a:lstStyle/>
+          <a:p>
+            <a:pPr marL="0" marR="0" lvl="0" indent="0" algn="l" rtl="0">
+              <a:spcBef>
+                <a:spcPts val="0"/>
+              </a:spcBef>
+              <a:spcAft>
+                <a:spcPts val="0"/>
+              </a:spcAft>
+              <a:buNone/>
+            </a:pPr>
+            <a:r>
+              <a:rPr lang="en-US" sz="1800" dirty="0">
+                <a:solidFill>
+                  <a:schemeClr val="dk1"/>
+                </a:solidFill>
+                <a:latin typeface="Calibri"/>
+                <a:ea typeface="Calibri"/>
+                <a:cs typeface="Calibri"/>
+                <a:sym typeface="Calibri"/>
+              </a:rPr>
+              <a:t>Example: </a:t>
+            </a:r>
+          </a:p>
+          <a:p>
+            <a:pPr lvl="0"/>
+            <a:r>
+              <a:rPr lang="en-US" sz="1800" b="1" dirty="0">
+                <a:solidFill>
+                  <a:srgbClr val="0070C0"/>
+                </a:solidFill>
+                <a:latin typeface="Calibri"/>
+                <a:ea typeface="Calibri"/>
+                <a:cs typeface="Calibri"/>
+                <a:sym typeface="Calibri"/>
+              </a:rPr>
+              <a:t>Deep Belief Networks </a:t>
+            </a:r>
+            <a:r>
+              <a:rPr lang="en-US" sz="1800" dirty="0">
+                <a:solidFill>
+                  <a:schemeClr val="dk1"/>
+                </a:solidFill>
+                <a:latin typeface="Calibri"/>
+                <a:ea typeface="Calibri"/>
+                <a:cs typeface="Calibri"/>
+                <a:sym typeface="Calibri"/>
+              </a:rPr>
+              <a:t>- made of layers of RBMs, each next layer (“B”) is trained on top of the previous layer (“A”).</a:t>
+            </a:r>
+          </a:p>
+          <a:p>
+            <a:pPr marL="0" marR="0" lvl="0" indent="0" algn="l" rtl="0">
+              <a:spcBef>
+                <a:spcPts val="0"/>
+              </a:spcBef>
+              <a:spcAft>
+                <a:spcPts val="0"/>
+              </a:spcAft>
+              <a:buNone/>
+            </a:pPr>
+            <a:r>
+              <a:rPr lang="en-US" sz="1800" dirty="0">
+                <a:solidFill>
+                  <a:schemeClr val="dk1"/>
+                </a:solidFill>
+                <a:latin typeface="Calibri"/>
+                <a:ea typeface="Calibri"/>
+                <a:cs typeface="Calibri"/>
+                <a:sym typeface="Calibri"/>
+              </a:rPr>
+              <a:t>Here </a:t>
+            </a:r>
+            <a:r>
+              <a:rPr lang="en-US" sz="1800" b="1" dirty="0">
+                <a:solidFill>
+                  <a:srgbClr val="0070C0"/>
+                </a:solidFill>
+                <a:latin typeface="Calibri"/>
+                <a:ea typeface="Calibri"/>
+                <a:cs typeface="Calibri"/>
+                <a:sym typeface="Calibri"/>
+              </a:rPr>
+              <a:t>RBM</a:t>
+            </a:r>
+            <a:r>
+              <a:rPr lang="en-US" sz="1800" dirty="0">
+                <a:solidFill>
+                  <a:schemeClr val="dk1"/>
+                </a:solidFill>
+                <a:latin typeface="Calibri"/>
+                <a:ea typeface="Calibri"/>
+                <a:cs typeface="Calibri"/>
+                <a:sym typeface="Calibri"/>
+              </a:rPr>
+              <a:t> (Restricted Boltzmann Machine) is a two-layered artificial neural network.</a:t>
+            </a:r>
+            <a:endParaRPr lang="en-US" sz="1800" dirty="0">
+              <a:solidFill>
+                <a:schemeClr val="dk1"/>
+              </a:solidFill>
+              <a:latin typeface="Calibri"/>
+              <a:cs typeface="Calibri"/>
+              <a:sym typeface="Calibri"/>
+            </a:endParaRPr>
+          </a:p>
+        </p:txBody>
+      </p:sp>
+      <p:pic>
+        <p:nvPicPr>
+          <p:cNvPr id="3" name="Picture 2">
+            <a:extLst>
+              <a:ext uri="{FF2B5EF4-FFF2-40B4-BE49-F238E27FC236}">
+                <a16:creationId xmlns:a16="http://schemas.microsoft.com/office/drawing/2014/main" id="{221CF74C-2765-1A49-9DE4-312EA056AB81}"/>
+              </a:ext>
+            </a:extLst>
+          </p:cNvPr>
+          <p:cNvPicPr>
+            <a:picLocks noChangeAspect="1"/>
+          </p:cNvPicPr>
+          <p:nvPr/>
+        </p:nvPicPr>
+        <p:blipFill rotWithShape="1">
+          <a:blip r:embed="rId5" cstate="email">
+            <a:extLst>
+              <a:ext uri="{28A0092B-C50C-407E-A947-70E740481C1C}">
+                <a14:useLocalDpi xmlns:a14="http://schemas.microsoft.com/office/drawing/2010/main"/>
+              </a:ext>
+            </a:extLst>
+          </a:blip>
+          <a:srcRect/>
+          <a:stretch/>
+        </p:blipFill>
+        <p:spPr>
+          <a:xfrm>
+            <a:off x="2476501" y="4071018"/>
+            <a:ext cx="1123506" cy="1412016"/>
+          </a:xfrm>
+          <a:prstGeom prst="rect">
+            <a:avLst/>
+          </a:prstGeom>
+        </p:spPr>
+      </p:pic>
+      <p:pic>
+        <p:nvPicPr>
+          <p:cNvPr id="4" name="Picture 3">
+            <a:extLst>
+              <a:ext uri="{FF2B5EF4-FFF2-40B4-BE49-F238E27FC236}">
+                <a16:creationId xmlns:a16="http://schemas.microsoft.com/office/drawing/2014/main" id="{F3F0E989-24F4-954F-8654-A11FAA84E879}"/>
+              </a:ext>
+            </a:extLst>
+          </p:cNvPr>
+          <p:cNvPicPr>
+            <a:picLocks noChangeAspect="1"/>
+          </p:cNvPicPr>
+          <p:nvPr/>
+        </p:nvPicPr>
+        <p:blipFill rotWithShape="1">
+          <a:blip r:embed="rId6" cstate="email">
+            <a:extLst>
+              <a:ext uri="{28A0092B-C50C-407E-A947-70E740481C1C}">
+                <a14:useLocalDpi xmlns:a14="http://schemas.microsoft.com/office/drawing/2010/main"/>
+              </a:ext>
+            </a:extLst>
+          </a:blip>
+          <a:srcRect/>
+          <a:stretch/>
+        </p:blipFill>
+        <p:spPr>
+          <a:xfrm>
+            <a:off x="570314" y="4041266"/>
+            <a:ext cx="1253671" cy="1417842"/>
+          </a:xfrm>
+          <a:prstGeom prst="rect">
+            <a:avLst/>
+          </a:prstGeom>
+        </p:spPr>
+      </p:pic>
+      <p:sp>
+        <p:nvSpPr>
+          <p:cNvPr id="10" name="Google Shape;107;p14">
+            <a:extLst>
+              <a:ext uri="{FF2B5EF4-FFF2-40B4-BE49-F238E27FC236}">
+                <a16:creationId xmlns:a16="http://schemas.microsoft.com/office/drawing/2014/main" id="{BBAA03BF-9CD1-2742-8F30-65CF844C9AE9}"/>
+              </a:ext>
+            </a:extLst>
+          </p:cNvPr>
+          <p:cNvSpPr txBox="1"/>
+          <p:nvPr/>
+        </p:nvSpPr>
+        <p:spPr>
+          <a:xfrm>
+            <a:off x="183869" y="5485948"/>
+            <a:ext cx="6428357" cy="1219839"/>
+          </a:xfrm>
+          <a:prstGeom prst="rect">
+            <a:avLst/>
+          </a:prstGeom>
+          <a:noFill/>
+          <a:ln>
+            <a:noFill/>
+          </a:ln>
+        </p:spPr>
+        <p:txBody>
+          <a:bodyPr spcFirstLastPara="1" wrap="square" lIns="91425" tIns="45700" rIns="91425" bIns="45700" anchor="t" anchorCtr="0">
+            <a:noAutofit/>
+          </a:bodyPr>
+          <a:lstStyle/>
+          <a:p>
+            <a:pPr lvl="0"/>
+            <a:r>
+              <a:rPr lang="en-US" sz="1800" dirty="0">
+                <a:solidFill>
+                  <a:schemeClr val="dk1"/>
+                </a:solidFill>
+                <a:latin typeface="Calibri"/>
+                <a:cs typeface="Calibri"/>
+              </a:rPr>
+              <a:t>Geoffrey Hinton &amp; Ruslan </a:t>
+            </a:r>
+            <a:r>
+              <a:rPr lang="en-US" sz="1800" dirty="0" err="1">
+                <a:solidFill>
+                  <a:schemeClr val="dk1"/>
+                </a:solidFill>
+                <a:latin typeface="Calibri"/>
+                <a:cs typeface="Calibri"/>
+              </a:rPr>
+              <a:t>Salakhutdinov</a:t>
+            </a:r>
+            <a:r>
+              <a:rPr lang="en-US" sz="1800" dirty="0">
+                <a:solidFill>
+                  <a:schemeClr val="dk1"/>
+                </a:solidFill>
+                <a:latin typeface="Calibri"/>
+                <a:cs typeface="Calibri"/>
+              </a:rPr>
+              <a:t> (2006). </a:t>
+            </a:r>
+          </a:p>
+          <a:p>
+            <a:pPr lvl="0"/>
+            <a:r>
+              <a:rPr lang="en-US" sz="1800" dirty="0">
+                <a:solidFill>
+                  <a:schemeClr val="dk1"/>
+                </a:solidFill>
+                <a:latin typeface="Calibri"/>
+                <a:cs typeface="Calibri"/>
+              </a:rPr>
+              <a:t>Reducing the dimensionality of data with neural networks.</a:t>
+            </a:r>
+          </a:p>
+          <a:p>
+            <a:pPr lvl="0"/>
+            <a:r>
+              <a:rPr lang="en-US" sz="1800" dirty="0">
+                <a:solidFill>
+                  <a:schemeClr val="dk1"/>
+                </a:solidFill>
+                <a:latin typeface="Calibri"/>
+                <a:cs typeface="Calibri"/>
+              </a:rPr>
+              <a:t>Science, 313, 504 – 507.</a:t>
+            </a:r>
+          </a:p>
+          <a:p>
+            <a:pPr lvl="0"/>
+            <a:r>
+              <a:rPr lang="en-US" sz="1800" dirty="0">
+                <a:solidFill>
+                  <a:schemeClr val="dk1"/>
+                </a:solidFill>
+                <a:latin typeface="Calibri"/>
+                <a:cs typeface="Calibri"/>
+                <a:sym typeface="Calibri"/>
+              </a:rPr>
+              <a:t> - </a:t>
+            </a:r>
+            <a:r>
+              <a:rPr lang="en-US" sz="1800" dirty="0">
+                <a:solidFill>
+                  <a:schemeClr val="dk1"/>
+                </a:solidFill>
+                <a:latin typeface="Calibri"/>
+                <a:cs typeface="Calibri"/>
+                <a:sym typeface="Calibri"/>
+                <a:hlinkClick r:id="rId7"/>
+              </a:rPr>
+              <a:t>https://www.cs.toronto.edu/~hinton/science.pdf</a:t>
+            </a:r>
+            <a:r>
+              <a:rPr lang="en-US" sz="1800" dirty="0">
+                <a:solidFill>
+                  <a:schemeClr val="dk1"/>
+                </a:solidFill>
+                <a:latin typeface="Calibri"/>
+                <a:cs typeface="Calibri"/>
+                <a:sym typeface="Calibri"/>
+              </a:rPr>
+              <a:t> </a:t>
+            </a:r>
+          </a:p>
+        </p:txBody>
+      </p:sp>
+      <p:sp>
+        <p:nvSpPr>
+          <p:cNvPr id="6" name="TextBox 5">
+            <a:extLst>
+              <a:ext uri="{FF2B5EF4-FFF2-40B4-BE49-F238E27FC236}">
+                <a16:creationId xmlns:a16="http://schemas.microsoft.com/office/drawing/2014/main" id="{AC6499AC-2623-244C-B653-E3602A825F7E}"/>
+              </a:ext>
+            </a:extLst>
+          </p:cNvPr>
+          <p:cNvSpPr txBox="1"/>
+          <p:nvPr/>
+        </p:nvSpPr>
+        <p:spPr>
+          <a:xfrm>
+            <a:off x="8118388" y="5609967"/>
+            <a:ext cx="2001795" cy="307777"/>
+          </a:xfrm>
+          <a:prstGeom prst="rect">
+            <a:avLst/>
+          </a:prstGeom>
+          <a:noFill/>
+        </p:spPr>
+        <p:txBody>
+          <a:bodyPr wrap="square" rtlCol="0">
+            <a:spAutoFit/>
+          </a:bodyPr>
+          <a:lstStyle/>
+          <a:p>
+            <a:r>
+              <a:rPr lang="en-US" dirty="0"/>
+              <a:t>A Deep Belief Network</a:t>
+            </a:r>
+          </a:p>
+        </p:txBody>
+      </p:sp>
+    </p:spTree>
+    <p:extLst>
+      <p:ext uri="{BB962C8B-B14F-4D97-AF65-F5344CB8AC3E}">
+        <p14:creationId xmlns:p14="http://schemas.microsoft.com/office/powerpoint/2010/main" val="4205312314"/>
       </p:ext>
     </p:extLst>
   </p:cSld>

--- a/statistics_08_Bayes_Bayesian.pptx
+++ b/statistics_08_Bayes_Bayesian.pptx
@@ -5,7 +5,7 @@
     <p:sldMasterId id="2147483659" r:id="rId1"/>
   </p:sldMasterIdLst>
   <p:notesMasterIdLst>
-    <p:notesMasterId r:id="rId16"/>
+    <p:notesMasterId r:id="rId22"/>
   </p:notesMasterIdLst>
   <p:sldIdLst>
     <p:sldId id="256" r:id="rId2"/>
@@ -19,9 +19,15 @@
     <p:sldId id="293" r:id="rId10"/>
     <p:sldId id="294" r:id="rId11"/>
     <p:sldId id="298" r:id="rId12"/>
-    <p:sldId id="292" r:id="rId13"/>
-    <p:sldId id="262" r:id="rId14"/>
-    <p:sldId id="297" r:id="rId15"/>
+    <p:sldId id="299" r:id="rId13"/>
+    <p:sldId id="301" r:id="rId14"/>
+    <p:sldId id="302" r:id="rId15"/>
+    <p:sldId id="303" r:id="rId16"/>
+    <p:sldId id="304" r:id="rId17"/>
+    <p:sldId id="300" r:id="rId18"/>
+    <p:sldId id="292" r:id="rId19"/>
+    <p:sldId id="262" r:id="rId20"/>
+    <p:sldId id="297" r:id="rId21"/>
   </p:sldIdLst>
   <p:sldSz cx="12192000" cy="6858000"/>
   <p:notesSz cx="6858000" cy="9144000"/>
@@ -17427,8 +17433,8 @@
         </p:nvSpPr>
         <p:spPr>
           <a:xfrm>
-            <a:off x="9849491" y="2860142"/>
-            <a:ext cx="2217637" cy="1384995"/>
+            <a:off x="9860056" y="2848755"/>
+            <a:ext cx="2180460" cy="1015663"/>
           </a:xfrm>
           <a:prstGeom prst="rect">
             <a:avLst/>
@@ -17443,8 +17449,8 @@
           <a:p>
             <a:pPr algn="ctr"/>
             <a:r>
-              <a:rPr lang="en-US" dirty="0"/>
-              <a:t>Bayes "solution" to a problem of inverse probability, was presented by Richard Price in 1763, two years after Bayes' death.</a:t>
+              <a:rPr lang="en-US" sz="1200" dirty="0"/>
+              <a:t>"An Essay towards solving a Problem in the Doctrine of Chances", presented by Richard Price in 1763, two years after Bayes' death.</a:t>
             </a:r>
           </a:p>
         </p:txBody>
@@ -18453,7 +18459,7 @@
         <p:spPr>
           <a:xfrm>
             <a:off x="130629" y="736270"/>
-            <a:ext cx="7125194" cy="5109091"/>
+            <a:ext cx="7125194" cy="5970865"/>
           </a:xfrm>
           <a:prstGeom prst="rect">
             <a:avLst/>
@@ -18493,6 +18499,9 @@
             </a:r>
           </a:p>
           <a:p>
+            <a:endParaRPr lang="en-US" dirty="0"/>
+          </a:p>
+          <a:p>
             <a:pPr marL="285750" indent="-285750">
               <a:buFont typeface="Arial" panose="020B0604020202020204" pitchFamily="34" charset="0"/>
               <a:buChar char="•"/>
@@ -18529,6 +18538,9 @@
             </a:r>
           </a:p>
           <a:p>
+            <a:endParaRPr lang="en-US" dirty="0"/>
+          </a:p>
+          <a:p>
             <a:pPr marL="285750" indent="-285750">
               <a:buFont typeface="Arial" panose="020B0604020202020204" pitchFamily="34" charset="0"/>
               <a:buChar char="•"/>
@@ -18597,6 +18609,9 @@
             </a:r>
           </a:p>
           <a:p>
+            <a:endParaRPr lang="en-US" dirty="0"/>
+          </a:p>
+          <a:p>
             <a:pPr marL="285750" indent="-285750">
               <a:buFont typeface="Arial" panose="020B0604020202020204" pitchFamily="34" charset="0"/>
               <a:buChar char="•"/>
@@ -18615,6 +18630,9 @@
               <a:rPr lang="en-US" dirty="0"/>
               <a:t> </a:t>
             </a:r>
+          </a:p>
+          <a:p>
+            <a:endParaRPr lang="en-US" dirty="0"/>
           </a:p>
           <a:p>
             <a:pPr marL="285750" indent="-285750">
@@ -18756,80 +18774,6 @@
       </p:pic>
       <p:sp>
         <p:nvSpPr>
-          <p:cNvPr id="5" name="TextBox 4">
-            <a:extLst>
-              <a:ext uri="{FF2B5EF4-FFF2-40B4-BE49-F238E27FC236}">
-                <a16:creationId xmlns:a16="http://schemas.microsoft.com/office/drawing/2014/main" id="{3F2ED839-B118-9D48-B600-42594516EAD9}"/>
-              </a:ext>
-            </a:extLst>
-          </p:cNvPr>
-          <p:cNvSpPr txBox="1"/>
-          <p:nvPr/>
-        </p:nvSpPr>
-        <p:spPr>
-          <a:xfrm>
-            <a:off x="8704613" y="3711576"/>
-            <a:ext cx="3206337" cy="2031325"/>
-          </a:xfrm>
-          <a:prstGeom prst="rect">
-            <a:avLst/>
-          </a:prstGeom>
-          <a:noFill/>
-        </p:spPr>
-        <p:txBody>
-          <a:bodyPr wrap="square" rtlCol="0">
-            <a:spAutoFit/>
-          </a:bodyPr>
-          <a:lstStyle/>
-          <a:p>
-            <a:r>
-              <a:rPr lang="en-US" dirty="0"/>
-              <a:t>Bayesian Inference for a normal Mean</a:t>
-            </a:r>
-          </a:p>
-          <a:p>
-            <a:r>
-              <a:rPr lang="en-US" dirty="0"/>
-              <a:t>xxx</a:t>
-            </a:r>
-          </a:p>
-          <a:p>
-            <a:endParaRPr lang="en-US" dirty="0"/>
-          </a:p>
-          <a:p>
-            <a:r>
-              <a:rPr lang="en-US" dirty="0"/>
-              <a:t>Conjugate Priors</a:t>
-            </a:r>
-          </a:p>
-          <a:p>
-            <a:r>
-              <a:rPr lang="en-US" dirty="0"/>
-              <a:t>xxx</a:t>
-            </a:r>
-          </a:p>
-          <a:p>
-            <a:endParaRPr lang="en-US" dirty="0"/>
-          </a:p>
-          <a:p>
-            <a:r>
-              <a:rPr lang="en-US" dirty="0"/>
-              <a:t>Credible Intervals</a:t>
-            </a:r>
-          </a:p>
-          <a:p>
-            <a:r>
-              <a:rPr lang="en-US" dirty="0"/>
-              <a:t>xxx</a:t>
-            </a:r>
-          </a:p>
-          <a:p>
-            <a:endParaRPr lang="en-US" dirty="0"/>
-          </a:p>
-        </p:txBody>
-      </p:sp>
-      <p:sp>
-        <p:nvSpPr>
           <p:cNvPr id="6" name="TextBox 5">
             <a:extLst>
               <a:ext uri="{FF2B5EF4-FFF2-40B4-BE49-F238E27FC236}">
@@ -18877,6 +18821,2131 @@
 </file>
 
 <file path=ppt/slides/slide12.xml><?xml version="1.0" encoding="utf-8"?>
+<p:sld xmlns:a="http://schemas.openxmlformats.org/drawingml/2006/main" xmlns:r="http://schemas.openxmlformats.org/officeDocument/2006/relationships" xmlns:p="http://schemas.openxmlformats.org/presentationml/2006/main">
+  <p:cSld>
+    <p:spTree>
+      <p:nvGrpSpPr>
+        <p:cNvPr id="1" name=""/>
+        <p:cNvGrpSpPr/>
+        <p:nvPr/>
+      </p:nvGrpSpPr>
+      <p:grpSpPr>
+        <a:xfrm>
+          <a:off x="0" y="0"/>
+          <a:ext cx="0" cy="0"/>
+          <a:chOff x="0" y="0"/>
+          <a:chExt cx="0" cy="0"/>
+        </a:xfrm>
+      </p:grpSpPr>
+      <p:sp>
+        <p:nvSpPr>
+          <p:cNvPr id="2" name="TextBox 1">
+            <a:extLst>
+              <a:ext uri="{FF2B5EF4-FFF2-40B4-BE49-F238E27FC236}">
+                <a16:creationId xmlns:a16="http://schemas.microsoft.com/office/drawing/2014/main" id="{CD6798AC-3E28-254E-B533-583935E0DBBC}"/>
+              </a:ext>
+            </a:extLst>
+          </p:cNvPr>
+          <p:cNvSpPr txBox="1"/>
+          <p:nvPr/>
+        </p:nvSpPr>
+        <p:spPr>
+          <a:xfrm>
+            <a:off x="0" y="37572"/>
+            <a:ext cx="4572000" cy="523220"/>
+          </a:xfrm>
+          <a:prstGeom prst="rect">
+            <a:avLst/>
+          </a:prstGeom>
+          <a:noFill/>
+        </p:spPr>
+        <p:txBody>
+          <a:bodyPr wrap="square" rtlCol="0">
+            <a:spAutoFit/>
+          </a:bodyPr>
+          <a:lstStyle/>
+          <a:p>
+            <a:r>
+              <a:rPr lang="en-US" sz="2800" b="1" dirty="0"/>
+              <a:t>Exercise 1 - exponential</a:t>
+            </a:r>
+          </a:p>
+        </p:txBody>
+      </p:sp>
+      <p:pic>
+        <p:nvPicPr>
+          <p:cNvPr id="4" name="Picture 3">
+            <a:extLst>
+              <a:ext uri="{FF2B5EF4-FFF2-40B4-BE49-F238E27FC236}">
+                <a16:creationId xmlns:a16="http://schemas.microsoft.com/office/drawing/2014/main" id="{F89887AE-03E3-D84A-896C-B4E9A7411A95}"/>
+              </a:ext>
+            </a:extLst>
+          </p:cNvPr>
+          <p:cNvPicPr>
+            <a:picLocks noChangeAspect="1"/>
+          </p:cNvPicPr>
+          <p:nvPr/>
+        </p:nvPicPr>
+        <p:blipFill>
+          <a:blip r:embed="rId2" cstate="email">
+            <a:extLst>
+              <a:ext uri="{28A0092B-C50C-407E-A947-70E740481C1C}">
+                <a14:useLocalDpi xmlns:a14="http://schemas.microsoft.com/office/drawing/2010/main"/>
+              </a:ext>
+            </a:extLst>
+          </a:blip>
+          <a:stretch>
+            <a:fillRect/>
+          </a:stretch>
+        </p:blipFill>
+        <p:spPr>
+          <a:xfrm>
+            <a:off x="5721927" y="37572"/>
+            <a:ext cx="3500526" cy="2804236"/>
+          </a:xfrm>
+          <a:prstGeom prst="rect">
+            <a:avLst/>
+          </a:prstGeom>
+        </p:spPr>
+      </p:pic>
+      <p:pic>
+        <p:nvPicPr>
+          <p:cNvPr id="7" name="Picture 6">
+            <a:extLst>
+              <a:ext uri="{FF2B5EF4-FFF2-40B4-BE49-F238E27FC236}">
+                <a16:creationId xmlns:a16="http://schemas.microsoft.com/office/drawing/2014/main" id="{DF32C525-381C-F041-BE86-097D87477266}"/>
+              </a:ext>
+            </a:extLst>
+          </p:cNvPr>
+          <p:cNvPicPr>
+            <a:picLocks noChangeAspect="1"/>
+          </p:cNvPicPr>
+          <p:nvPr/>
+        </p:nvPicPr>
+        <p:blipFill>
+          <a:blip r:embed="rId3" cstate="email">
+            <a:extLst>
+              <a:ext uri="{28A0092B-C50C-407E-A947-70E740481C1C}">
+                <a14:useLocalDpi xmlns:a14="http://schemas.microsoft.com/office/drawing/2010/main"/>
+              </a:ext>
+            </a:extLst>
+          </a:blip>
+          <a:stretch>
+            <a:fillRect/>
+          </a:stretch>
+        </p:blipFill>
+        <p:spPr>
+          <a:xfrm>
+            <a:off x="5721927" y="3336799"/>
+            <a:ext cx="1604817" cy="1214914"/>
+          </a:xfrm>
+          <a:prstGeom prst="rect">
+            <a:avLst/>
+          </a:prstGeom>
+        </p:spPr>
+      </p:pic>
+      <p:sp>
+        <p:nvSpPr>
+          <p:cNvPr id="8" name="TextBox 7">
+            <a:extLst>
+              <a:ext uri="{FF2B5EF4-FFF2-40B4-BE49-F238E27FC236}">
+                <a16:creationId xmlns:a16="http://schemas.microsoft.com/office/drawing/2014/main" id="{8F80D991-C076-6145-9149-D86D17FCC03E}"/>
+              </a:ext>
+            </a:extLst>
+          </p:cNvPr>
+          <p:cNvSpPr txBox="1"/>
+          <p:nvPr/>
+        </p:nvSpPr>
+        <p:spPr>
+          <a:xfrm>
+            <a:off x="7472190" y="3663788"/>
+            <a:ext cx="2322974" cy="461665"/>
+          </a:xfrm>
+          <a:prstGeom prst="rect">
+            <a:avLst/>
+          </a:prstGeom>
+          <a:noFill/>
+        </p:spPr>
+        <p:txBody>
+          <a:bodyPr wrap="square" rtlCol="0">
+            <a:spAutoFit/>
+          </a:bodyPr>
+          <a:lstStyle/>
+          <a:p>
+            <a:r>
+              <a:rPr lang="en-US" sz="1200" dirty="0"/>
+              <a:t>Step 2 – generated 1000 values (prior distribution)</a:t>
+            </a:r>
+          </a:p>
+        </p:txBody>
+      </p:sp>
+      <p:pic>
+        <p:nvPicPr>
+          <p:cNvPr id="10" name="Picture 9">
+            <a:extLst>
+              <a:ext uri="{FF2B5EF4-FFF2-40B4-BE49-F238E27FC236}">
+                <a16:creationId xmlns:a16="http://schemas.microsoft.com/office/drawing/2014/main" id="{584CDA89-CD45-1C4C-85D6-A9B5DD35AF32}"/>
+              </a:ext>
+            </a:extLst>
+          </p:cNvPr>
+          <p:cNvPicPr>
+            <a:picLocks noChangeAspect="1"/>
+          </p:cNvPicPr>
+          <p:nvPr/>
+        </p:nvPicPr>
+        <p:blipFill>
+          <a:blip r:embed="rId4" cstate="email">
+            <a:extLst>
+              <a:ext uri="{28A0092B-C50C-407E-A947-70E740481C1C}">
+                <a14:useLocalDpi xmlns:a14="http://schemas.microsoft.com/office/drawing/2010/main"/>
+              </a:ext>
+            </a:extLst>
+          </a:blip>
+          <a:stretch>
+            <a:fillRect/>
+          </a:stretch>
+        </p:blipFill>
+        <p:spPr>
+          <a:xfrm>
+            <a:off x="5721927" y="4925286"/>
+            <a:ext cx="1518644" cy="1214915"/>
+          </a:xfrm>
+          <a:prstGeom prst="rect">
+            <a:avLst/>
+          </a:prstGeom>
+        </p:spPr>
+      </p:pic>
+      <p:sp>
+        <p:nvSpPr>
+          <p:cNvPr id="12" name="TextBox 11">
+            <a:extLst>
+              <a:ext uri="{FF2B5EF4-FFF2-40B4-BE49-F238E27FC236}">
+                <a16:creationId xmlns:a16="http://schemas.microsoft.com/office/drawing/2014/main" id="{346D33D7-2EFA-7746-AAAE-40E0D7749D75}"/>
+              </a:ext>
+            </a:extLst>
+          </p:cNvPr>
+          <p:cNvSpPr txBox="1"/>
+          <p:nvPr/>
+        </p:nvSpPr>
+        <p:spPr>
+          <a:xfrm>
+            <a:off x="7588964" y="5205612"/>
+            <a:ext cx="2322974" cy="461665"/>
+          </a:xfrm>
+          <a:prstGeom prst="rect">
+            <a:avLst/>
+          </a:prstGeom>
+          <a:noFill/>
+        </p:spPr>
+        <p:txBody>
+          <a:bodyPr wrap="square" rtlCol="0">
+            <a:spAutoFit/>
+          </a:bodyPr>
+          <a:lstStyle/>
+          <a:p>
+            <a:r>
+              <a:rPr lang="en-US" sz="1200" dirty="0"/>
+              <a:t>Step 4 – posterior distribution,</a:t>
+            </a:r>
+          </a:p>
+          <a:p>
+            <a:r>
+              <a:rPr lang="en-US" sz="1200" dirty="0"/>
+              <a:t>confidence interval</a:t>
+            </a:r>
+          </a:p>
+        </p:txBody>
+      </p:sp>
+      <p:pic>
+        <p:nvPicPr>
+          <p:cNvPr id="11" name="Picture 10">
+            <a:extLst>
+              <a:ext uri="{FF2B5EF4-FFF2-40B4-BE49-F238E27FC236}">
+                <a16:creationId xmlns:a16="http://schemas.microsoft.com/office/drawing/2014/main" id="{F8103F5D-D3A6-0E4D-8566-DB6C456E59D2}"/>
+              </a:ext>
+            </a:extLst>
+          </p:cNvPr>
+          <p:cNvPicPr>
+            <a:picLocks noChangeAspect="1"/>
+          </p:cNvPicPr>
+          <p:nvPr/>
+        </p:nvPicPr>
+        <p:blipFill>
+          <a:blip r:embed="rId5" cstate="email">
+            <a:extLst>
+              <a:ext uri="{28A0092B-C50C-407E-A947-70E740481C1C}">
+                <a14:useLocalDpi xmlns:a14="http://schemas.microsoft.com/office/drawing/2010/main"/>
+              </a:ext>
+            </a:extLst>
+          </a:blip>
+          <a:stretch>
+            <a:fillRect/>
+          </a:stretch>
+        </p:blipFill>
+        <p:spPr>
+          <a:xfrm>
+            <a:off x="9911938" y="4925286"/>
+            <a:ext cx="1518644" cy="1264781"/>
+          </a:xfrm>
+          <a:prstGeom prst="rect">
+            <a:avLst/>
+          </a:prstGeom>
+        </p:spPr>
+      </p:pic>
+      <p:sp>
+        <p:nvSpPr>
+          <p:cNvPr id="14" name="TextBox 13">
+            <a:extLst>
+              <a:ext uri="{FF2B5EF4-FFF2-40B4-BE49-F238E27FC236}">
+                <a16:creationId xmlns:a16="http://schemas.microsoft.com/office/drawing/2014/main" id="{DED664E5-2E16-1C45-BDD3-190F3A074F5D}"/>
+              </a:ext>
+            </a:extLst>
+          </p:cNvPr>
+          <p:cNvSpPr txBox="1"/>
+          <p:nvPr/>
+        </p:nvSpPr>
+        <p:spPr>
+          <a:xfrm>
+            <a:off x="-14817" y="680867"/>
+            <a:ext cx="5591298" cy="5509200"/>
+          </a:xfrm>
+          <a:prstGeom prst="rect">
+            <a:avLst/>
+          </a:prstGeom>
+          <a:noFill/>
+        </p:spPr>
+        <p:txBody>
+          <a:bodyPr wrap="square" rtlCol="0">
+            <a:spAutoFit/>
+          </a:bodyPr>
+          <a:lstStyle/>
+          <a:p>
+            <a:r>
+              <a:rPr lang="en-US" sz="1200" dirty="0"/>
+              <a:t>We have a sample of 50 data data points  x</a:t>
+            </a:r>
+            <a:r>
+              <a:rPr lang="en-US" sz="1200" baseline="-25000" dirty="0"/>
+              <a:t>1</a:t>
+            </a:r>
+            <a:r>
+              <a:rPr lang="en-US" sz="1200" dirty="0"/>
+              <a:t> .. x</a:t>
+            </a:r>
+            <a:r>
+              <a:rPr lang="en-US" sz="1200" baseline="-25000" dirty="0"/>
+              <a:t>50</a:t>
+            </a:r>
+            <a:r>
+              <a:rPr lang="en-US" sz="1200" dirty="0"/>
+              <a:t> .</a:t>
+            </a:r>
+          </a:p>
+          <a:p>
+            <a:r>
+              <a:rPr lang="en-US" sz="1200" dirty="0"/>
+              <a:t>The distribution of the values presumably follows exponential </a:t>
+            </a:r>
+          </a:p>
+          <a:p>
+            <a:r>
+              <a:rPr lang="en-US" sz="1200" dirty="0"/>
+              <a:t>probability distribution </a:t>
+            </a:r>
+            <a:r>
+              <a:rPr lang="el-GR" sz="1200" b="1" dirty="0">
+                <a:solidFill>
+                  <a:srgbClr val="00B050"/>
+                </a:solidFill>
+              </a:rPr>
+              <a:t>λ</a:t>
+            </a:r>
+            <a:r>
+              <a:rPr lang="en-US" sz="1200" b="1" dirty="0">
+                <a:solidFill>
+                  <a:srgbClr val="00B050"/>
+                </a:solidFill>
+              </a:rPr>
+              <a:t>e</a:t>
+            </a:r>
+            <a:r>
+              <a:rPr lang="en-US" sz="1200" b="1" baseline="30000" dirty="0">
+                <a:solidFill>
+                  <a:srgbClr val="00B050"/>
+                </a:solidFill>
+              </a:rPr>
+              <a:t>-</a:t>
+            </a:r>
+            <a:r>
+              <a:rPr lang="el-GR" sz="1200" b="1" baseline="30000" dirty="0">
+                <a:solidFill>
+                  <a:srgbClr val="00B050"/>
+                </a:solidFill>
+              </a:rPr>
+              <a:t>λ</a:t>
+            </a:r>
+            <a:r>
+              <a:rPr lang="en-US" sz="1200" b="1" baseline="30000" dirty="0">
+                <a:solidFill>
+                  <a:srgbClr val="00B050"/>
+                </a:solidFill>
+              </a:rPr>
+              <a:t>x</a:t>
+            </a:r>
+            <a:r>
+              <a:rPr lang="en-US" sz="1200" dirty="0"/>
+              <a:t> . </a:t>
+            </a:r>
+          </a:p>
+          <a:p>
+            <a:r>
+              <a:rPr lang="en-US" sz="1200" dirty="0"/>
+              <a:t>Please estimate the value of </a:t>
+            </a:r>
+            <a:r>
+              <a:rPr lang="el-GR" sz="1200" b="1" dirty="0">
+                <a:solidFill>
+                  <a:srgbClr val="00B050"/>
+                </a:solidFill>
+              </a:rPr>
+              <a:t>λ</a:t>
+            </a:r>
+            <a:r>
+              <a:rPr lang="en-US" sz="1200" dirty="0"/>
+              <a:t> . </a:t>
+            </a:r>
+          </a:p>
+          <a:p>
+            <a:endParaRPr lang="en-US" sz="1200" dirty="0"/>
+          </a:p>
+          <a:p>
+            <a:r>
+              <a:rPr lang="en-US" sz="1200" dirty="0"/>
+              <a:t>- </a:t>
+            </a:r>
+            <a:r>
+              <a:rPr lang="en-US" sz="1200" dirty="0">
+                <a:hlinkClick r:id="rId6"/>
+              </a:rPr>
+              <a:t>https://www.youtube.com/watch?v=I4dkEALQv34</a:t>
+            </a:r>
+            <a:r>
+              <a:rPr lang="en-US" sz="1200" dirty="0"/>
+              <a:t> </a:t>
+            </a:r>
+          </a:p>
+          <a:p>
+            <a:endParaRPr lang="en-US" sz="1200" dirty="0"/>
+          </a:p>
+          <a:p>
+            <a:r>
+              <a:rPr lang="en-US" sz="1200" dirty="0"/>
+              <a:t>Method 1: "Point Estimation" = "Maximum Likelihood Estimation".</a:t>
+            </a:r>
+          </a:p>
+          <a:p>
+            <a:r>
+              <a:rPr lang="el-GR" sz="1200" b="1" dirty="0">
+                <a:solidFill>
+                  <a:srgbClr val="00B050"/>
+                </a:solidFill>
+              </a:rPr>
+              <a:t>λ</a:t>
+            </a:r>
+            <a:r>
+              <a:rPr lang="en-US" sz="1200" b="1" dirty="0">
+                <a:solidFill>
+                  <a:srgbClr val="00B050"/>
+                </a:solidFill>
+              </a:rPr>
+              <a:t> = 1/m, </a:t>
+            </a:r>
+          </a:p>
+          <a:p>
+            <a:r>
+              <a:rPr lang="en-US" sz="1200" dirty="0"/>
+              <a:t>where m = mean(x</a:t>
+            </a:r>
+            <a:r>
+              <a:rPr lang="en-US" sz="1200" baseline="-25000" dirty="0"/>
+              <a:t>i</a:t>
+            </a:r>
+            <a:r>
+              <a:rPr lang="en-US" sz="1200" dirty="0"/>
+              <a:t>) = (x</a:t>
+            </a:r>
+            <a:r>
+              <a:rPr lang="en-US" sz="1200" baseline="-25000" dirty="0"/>
+              <a:t>1</a:t>
+            </a:r>
+            <a:r>
+              <a:rPr lang="en-US" sz="1200" dirty="0"/>
+              <a:t> + ...+ x</a:t>
+            </a:r>
+            <a:r>
+              <a:rPr lang="en-US" sz="1200" baseline="-25000" dirty="0"/>
+              <a:t>50</a:t>
+            </a:r>
+            <a:r>
+              <a:rPr lang="en-US" sz="1200" dirty="0"/>
+              <a:t>)/50</a:t>
+            </a:r>
+          </a:p>
+          <a:p>
+            <a:endParaRPr lang="en-US" sz="1200" dirty="0"/>
+          </a:p>
+          <a:p>
+            <a:r>
+              <a:rPr lang="en-US" sz="1200" dirty="0"/>
+              <a:t>Method 2: Interval Estimation = "Bayesian Inference".</a:t>
+            </a:r>
+          </a:p>
+          <a:p>
+            <a:r>
+              <a:rPr lang="en-US" sz="1200" dirty="0"/>
+              <a:t>  Estimate a distribution of possible values of  </a:t>
+            </a:r>
+            <a:r>
+              <a:rPr lang="el-GR" sz="1200" b="1" dirty="0">
+                <a:solidFill>
+                  <a:srgbClr val="00B050"/>
+                </a:solidFill>
+              </a:rPr>
+              <a:t>λ</a:t>
+            </a:r>
+            <a:r>
+              <a:rPr lang="en-US" sz="1200" dirty="0"/>
+              <a:t> .</a:t>
+            </a:r>
+          </a:p>
+          <a:p>
+            <a:endParaRPr lang="en-US" sz="1200" dirty="0"/>
+          </a:p>
+          <a:p>
+            <a:r>
+              <a:rPr lang="en-US" sz="1200" dirty="0"/>
+              <a:t>Step 1 – assume a </a:t>
+            </a:r>
+            <a:r>
+              <a:rPr lang="en-US" sz="1200" dirty="0">
+                <a:solidFill>
+                  <a:srgbClr val="FF0000"/>
+                </a:solidFill>
+              </a:rPr>
+              <a:t>prior distribution</a:t>
+            </a:r>
+            <a:r>
+              <a:rPr lang="en-US" sz="1200" dirty="0"/>
+              <a:t> of </a:t>
+            </a:r>
+            <a:r>
+              <a:rPr lang="el-GR" sz="1200" b="1" dirty="0">
+                <a:solidFill>
+                  <a:srgbClr val="00B050"/>
+                </a:solidFill>
+              </a:rPr>
+              <a:t>λ</a:t>
+            </a:r>
+            <a:r>
+              <a:rPr lang="en-US" sz="1200" b="1" dirty="0">
+                <a:solidFill>
+                  <a:srgbClr val="00B050"/>
+                </a:solidFill>
+              </a:rPr>
+              <a:t> </a:t>
+            </a:r>
+            <a:r>
+              <a:rPr lang="en-US" sz="1200" dirty="0"/>
+              <a:t>without accounting for observed data. For example, make it flat uniform in range (1,6).</a:t>
+            </a:r>
+          </a:p>
+          <a:p>
+            <a:endParaRPr lang="en-US" sz="1200" dirty="0"/>
+          </a:p>
+          <a:p>
+            <a:r>
+              <a:rPr lang="en-US" sz="1200" dirty="0"/>
+              <a:t>Step2 – generate random </a:t>
+            </a:r>
+            <a:r>
+              <a:rPr lang="el-GR" sz="1200" b="1" dirty="0">
+                <a:solidFill>
+                  <a:srgbClr val="00B050"/>
+                </a:solidFill>
+              </a:rPr>
+              <a:t>λ</a:t>
+            </a:r>
+            <a:r>
+              <a:rPr lang="en-US" sz="1200" b="1" dirty="0">
+                <a:solidFill>
+                  <a:srgbClr val="00B050"/>
+                </a:solidFill>
+              </a:rPr>
+              <a:t> </a:t>
+            </a:r>
+            <a:r>
+              <a:rPr lang="en-US" sz="1200" dirty="0"/>
+              <a:t>values following the </a:t>
+            </a:r>
+            <a:r>
+              <a:rPr lang="en-US" sz="1200" dirty="0">
+                <a:solidFill>
+                  <a:srgbClr val="FF0000"/>
+                </a:solidFill>
+              </a:rPr>
+              <a:t>prior distribution</a:t>
+            </a:r>
+            <a:r>
+              <a:rPr lang="en-US" sz="1200" dirty="0"/>
+              <a:t> .</a:t>
+            </a:r>
+          </a:p>
+          <a:p>
+            <a:r>
+              <a:rPr lang="en-US" sz="1200" dirty="0"/>
+              <a:t>  generate thousand random values </a:t>
+            </a:r>
+            <a:r>
+              <a:rPr lang="el-GR" sz="1200" b="1" dirty="0">
+                <a:solidFill>
+                  <a:srgbClr val="00B050"/>
+                </a:solidFill>
+              </a:rPr>
+              <a:t>λ</a:t>
+            </a:r>
+            <a:r>
+              <a:rPr lang="en-US" sz="1200" b="1" dirty="0">
+                <a:solidFill>
+                  <a:srgbClr val="00B050"/>
+                </a:solidFill>
+              </a:rPr>
+              <a:t> </a:t>
+            </a:r>
+            <a:r>
+              <a:rPr lang="en-US" sz="1200" dirty="0"/>
+              <a:t>in range (1,6)</a:t>
+            </a:r>
+          </a:p>
+          <a:p>
+            <a:endParaRPr lang="en-US" sz="1200" dirty="0"/>
+          </a:p>
+          <a:p>
+            <a:r>
+              <a:rPr lang="en-US" sz="1200" dirty="0"/>
+              <a:t>Step 3 – compute the likelihood of each generated </a:t>
+            </a:r>
+            <a:r>
+              <a:rPr lang="el-GR" sz="1200" b="1" dirty="0">
+                <a:solidFill>
+                  <a:srgbClr val="00B050"/>
+                </a:solidFill>
+              </a:rPr>
+              <a:t>λ</a:t>
+            </a:r>
+            <a:r>
+              <a:rPr lang="en-US" sz="1200" dirty="0"/>
+              <a:t> . </a:t>
+            </a:r>
+          </a:p>
+          <a:p>
+            <a:r>
+              <a:rPr lang="en-US" sz="1200" dirty="0"/>
+              <a:t>      L(</a:t>
+            </a:r>
+            <a:r>
+              <a:rPr lang="el-GR" sz="1200" b="1" dirty="0">
+                <a:solidFill>
+                  <a:srgbClr val="00B050"/>
+                </a:solidFill>
+              </a:rPr>
+              <a:t>λ</a:t>
+            </a:r>
+            <a:r>
+              <a:rPr lang="en-US" sz="1200" b="1" baseline="-25000" dirty="0">
+                <a:solidFill>
+                  <a:srgbClr val="00B050"/>
+                </a:solidFill>
+              </a:rPr>
+              <a:t>n</a:t>
+            </a:r>
+            <a:r>
+              <a:rPr lang="en-US" sz="1200" dirty="0">
+                <a:solidFill>
+                  <a:schemeClr val="tx1"/>
+                </a:solidFill>
+              </a:rPr>
+              <a:t>) = The probability of observing data x</a:t>
+            </a:r>
+            <a:r>
+              <a:rPr lang="en-US" sz="1200" baseline="-25000" dirty="0">
+                <a:solidFill>
+                  <a:schemeClr val="tx1"/>
+                </a:solidFill>
+              </a:rPr>
+              <a:t>1</a:t>
+            </a:r>
+            <a:r>
+              <a:rPr lang="en-US" sz="1200" dirty="0">
+                <a:solidFill>
+                  <a:schemeClr val="tx1"/>
+                </a:solidFill>
+              </a:rPr>
+              <a:t>...x</a:t>
+            </a:r>
+            <a:r>
+              <a:rPr lang="en-US" sz="1200" baseline="-25000" dirty="0">
+                <a:solidFill>
+                  <a:schemeClr val="tx1"/>
+                </a:solidFill>
+              </a:rPr>
+              <a:t>50</a:t>
+            </a:r>
+            <a:r>
+              <a:rPr lang="en-US" sz="1200" dirty="0">
+                <a:solidFill>
+                  <a:schemeClr val="tx1"/>
+                </a:solidFill>
+              </a:rPr>
+              <a:t> and </a:t>
+            </a:r>
+            <a:r>
+              <a:rPr lang="el-GR" sz="1200" dirty="0">
+                <a:solidFill>
+                  <a:schemeClr val="tx1"/>
+                </a:solidFill>
+              </a:rPr>
+              <a:t>λ</a:t>
+            </a:r>
+            <a:r>
+              <a:rPr lang="en-US" sz="1200" dirty="0">
+                <a:solidFill>
+                  <a:schemeClr val="tx1"/>
+                </a:solidFill>
+              </a:rPr>
+              <a:t> = </a:t>
+            </a:r>
+            <a:r>
+              <a:rPr lang="el-GR" sz="1200" dirty="0">
+                <a:solidFill>
+                  <a:schemeClr val="tx1"/>
+                </a:solidFill>
+              </a:rPr>
+              <a:t>λ</a:t>
+            </a:r>
+            <a:r>
+              <a:rPr lang="en-US" sz="1200" baseline="-25000" dirty="0">
+                <a:solidFill>
+                  <a:schemeClr val="tx1"/>
+                </a:solidFill>
+              </a:rPr>
+              <a:t>n</a:t>
+            </a:r>
+            <a:endParaRPr lang="en-US" sz="1200" dirty="0">
+              <a:solidFill>
+                <a:schemeClr val="tx1"/>
+              </a:solidFill>
+            </a:endParaRPr>
+          </a:p>
+          <a:p>
+            <a:r>
+              <a:rPr lang="en-US" sz="1200" dirty="0"/>
+              <a:t>      = </a:t>
+            </a:r>
+            <a:r>
+              <a:rPr lang="en-US" sz="1200" dirty="0" err="1"/>
+              <a:t>Pr</a:t>
+            </a:r>
+            <a:r>
+              <a:rPr lang="en-US" sz="1200" dirty="0"/>
+              <a:t>(data | </a:t>
+            </a:r>
+            <a:r>
+              <a:rPr lang="el-GR" sz="1200" dirty="0">
+                <a:solidFill>
+                  <a:schemeClr val="tx1"/>
+                </a:solidFill>
+              </a:rPr>
+              <a:t>λ</a:t>
+            </a:r>
+            <a:r>
+              <a:rPr lang="en-US" sz="1200" dirty="0">
+                <a:solidFill>
+                  <a:schemeClr val="tx1"/>
+                </a:solidFill>
+              </a:rPr>
+              <a:t> = </a:t>
+            </a:r>
+            <a:r>
+              <a:rPr lang="el-GR" sz="1200" dirty="0">
+                <a:solidFill>
+                  <a:schemeClr val="tx1"/>
+                </a:solidFill>
+              </a:rPr>
+              <a:t>λ</a:t>
+            </a:r>
+            <a:r>
+              <a:rPr lang="en-US" sz="1200" baseline="-25000" dirty="0">
+                <a:solidFill>
+                  <a:schemeClr val="tx1"/>
+                </a:solidFill>
+              </a:rPr>
+              <a:t>n</a:t>
+            </a:r>
+            <a:r>
+              <a:rPr lang="en-US" sz="1200" dirty="0"/>
+              <a:t> ) * </a:t>
+            </a:r>
+            <a:r>
+              <a:rPr lang="en-US" sz="1200" dirty="0" err="1"/>
+              <a:t>Pr</a:t>
+            </a:r>
+            <a:r>
+              <a:rPr lang="en-US" sz="1200" dirty="0"/>
+              <a:t> (</a:t>
+            </a:r>
+            <a:r>
+              <a:rPr lang="el-GR" sz="1200" dirty="0">
+                <a:solidFill>
+                  <a:schemeClr val="tx1"/>
+                </a:solidFill>
+              </a:rPr>
+              <a:t>λ</a:t>
+            </a:r>
+            <a:r>
+              <a:rPr lang="en-US" sz="1200" dirty="0">
+                <a:solidFill>
+                  <a:schemeClr val="tx1"/>
+                </a:solidFill>
+              </a:rPr>
+              <a:t> = </a:t>
+            </a:r>
+            <a:r>
+              <a:rPr lang="el-GR" sz="1200" dirty="0">
+                <a:solidFill>
+                  <a:schemeClr val="tx1"/>
+                </a:solidFill>
+              </a:rPr>
+              <a:t>λ</a:t>
+            </a:r>
+            <a:r>
+              <a:rPr lang="en-US" sz="1200" baseline="-25000" dirty="0">
+                <a:solidFill>
+                  <a:schemeClr val="tx1"/>
+                </a:solidFill>
+              </a:rPr>
+              <a:t>n</a:t>
+            </a:r>
+            <a:r>
+              <a:rPr lang="en-US" sz="1200" dirty="0"/>
+              <a:t> )</a:t>
+            </a:r>
+          </a:p>
+          <a:p>
+            <a:r>
+              <a:rPr lang="en-US" sz="1200" dirty="0"/>
+              <a:t>   where </a:t>
+            </a:r>
+            <a:r>
+              <a:rPr lang="en-US" sz="1200" dirty="0" err="1"/>
+              <a:t>Pr</a:t>
+            </a:r>
+            <a:r>
+              <a:rPr lang="en-US" sz="1200" dirty="0"/>
+              <a:t> (</a:t>
+            </a:r>
+            <a:r>
+              <a:rPr lang="el-GR" sz="1200" dirty="0">
+                <a:solidFill>
+                  <a:schemeClr val="tx1"/>
+                </a:solidFill>
+              </a:rPr>
+              <a:t>λ</a:t>
+            </a:r>
+            <a:r>
+              <a:rPr lang="en-US" sz="1200" dirty="0">
+                <a:solidFill>
+                  <a:schemeClr val="tx1"/>
+                </a:solidFill>
+              </a:rPr>
+              <a:t> = </a:t>
+            </a:r>
+            <a:r>
+              <a:rPr lang="el-GR" sz="1200" dirty="0">
+                <a:solidFill>
+                  <a:schemeClr val="tx1"/>
+                </a:solidFill>
+              </a:rPr>
+              <a:t>λ</a:t>
+            </a:r>
+            <a:r>
+              <a:rPr lang="en-US" sz="1200" baseline="-25000" dirty="0">
+                <a:solidFill>
+                  <a:schemeClr val="tx1"/>
+                </a:solidFill>
+              </a:rPr>
+              <a:t>n</a:t>
+            </a:r>
+            <a:r>
+              <a:rPr lang="en-US" sz="1200" dirty="0"/>
+              <a:t> ) = 1/(6-1) = 0.2</a:t>
+            </a:r>
+          </a:p>
+          <a:p>
+            <a:r>
+              <a:rPr lang="en-US" sz="1200" dirty="0"/>
+              <a:t>              </a:t>
+            </a:r>
+            <a:r>
+              <a:rPr lang="en-US" sz="1200" dirty="0" err="1"/>
+              <a:t>Pr</a:t>
+            </a:r>
+            <a:r>
+              <a:rPr lang="en-US" sz="1200" dirty="0"/>
+              <a:t>(data | </a:t>
+            </a:r>
+            <a:r>
+              <a:rPr lang="el-GR" sz="1200" dirty="0">
+                <a:solidFill>
+                  <a:schemeClr val="tx1"/>
+                </a:solidFill>
+              </a:rPr>
+              <a:t>λ</a:t>
+            </a:r>
+            <a:r>
+              <a:rPr lang="en-US" sz="1200" dirty="0">
+                <a:solidFill>
+                  <a:schemeClr val="tx1"/>
+                </a:solidFill>
+              </a:rPr>
+              <a:t> = </a:t>
+            </a:r>
+            <a:r>
+              <a:rPr lang="el-GR" sz="1200" dirty="0">
+                <a:solidFill>
+                  <a:schemeClr val="tx1"/>
+                </a:solidFill>
+              </a:rPr>
+              <a:t>λ</a:t>
+            </a:r>
+            <a:r>
+              <a:rPr lang="en-US" sz="1200" baseline="-25000" dirty="0">
+                <a:solidFill>
+                  <a:schemeClr val="tx1"/>
+                </a:solidFill>
+              </a:rPr>
+              <a:t>n</a:t>
+            </a:r>
+            <a:r>
+              <a:rPr lang="en-US" sz="1200" dirty="0"/>
+              <a:t> ) =  ∏ </a:t>
+            </a:r>
+            <a:r>
+              <a:rPr lang="el-GR" sz="1200" dirty="0">
+                <a:solidFill>
+                  <a:schemeClr val="tx1"/>
+                </a:solidFill>
+              </a:rPr>
+              <a:t>λ</a:t>
+            </a:r>
+            <a:r>
+              <a:rPr lang="en-US" sz="1200" baseline="-25000" dirty="0">
+                <a:solidFill>
+                  <a:schemeClr val="tx1"/>
+                </a:solidFill>
+              </a:rPr>
+              <a:t>n </a:t>
+            </a:r>
+            <a:r>
+              <a:rPr lang="en-US" sz="1200" dirty="0">
+                <a:solidFill>
+                  <a:schemeClr val="tx1"/>
+                </a:solidFill>
+              </a:rPr>
+              <a:t>e</a:t>
+            </a:r>
+            <a:r>
+              <a:rPr lang="en-US" sz="1200" baseline="30000" dirty="0">
+                <a:solidFill>
+                  <a:schemeClr val="tx1"/>
+                </a:solidFill>
+              </a:rPr>
+              <a:t>-</a:t>
+            </a:r>
+            <a:r>
+              <a:rPr lang="el-GR" sz="1200" baseline="30000" dirty="0">
+                <a:solidFill>
+                  <a:schemeClr val="tx1"/>
+                </a:solidFill>
+              </a:rPr>
+              <a:t>λ</a:t>
+            </a:r>
+            <a:r>
+              <a:rPr lang="en-US" sz="1200" baseline="-25000" dirty="0" err="1">
+                <a:solidFill>
+                  <a:schemeClr val="tx1"/>
+                </a:solidFill>
+              </a:rPr>
+              <a:t>n</a:t>
+            </a:r>
+            <a:r>
+              <a:rPr lang="en-US" sz="1200" baseline="30000" dirty="0" err="1">
+                <a:solidFill>
+                  <a:schemeClr val="tx1"/>
+                </a:solidFill>
+              </a:rPr>
+              <a:t>x</a:t>
+            </a:r>
+            <a:r>
+              <a:rPr lang="en-US" sz="1200" baseline="-25000" dirty="0" err="1">
+                <a:solidFill>
+                  <a:schemeClr val="tx1"/>
+                </a:solidFill>
+              </a:rPr>
+              <a:t>i</a:t>
+            </a:r>
+            <a:r>
+              <a:rPr lang="en-US" sz="1200" baseline="-25000" dirty="0">
+                <a:solidFill>
+                  <a:schemeClr val="tx1"/>
+                </a:solidFill>
+              </a:rPr>
+              <a:t> </a:t>
+            </a:r>
+            <a:r>
+              <a:rPr lang="en-US" sz="1200" dirty="0">
+                <a:solidFill>
+                  <a:schemeClr val="tx1"/>
+                </a:solidFill>
+              </a:rPr>
+              <a:t>dx</a:t>
+            </a:r>
+            <a:endParaRPr lang="en-US" sz="1200" dirty="0"/>
+          </a:p>
+          <a:p>
+            <a:endParaRPr lang="en-US" sz="1200" dirty="0"/>
+          </a:p>
+          <a:p>
+            <a:r>
+              <a:rPr lang="en-US" sz="1200" dirty="0"/>
+              <a:t>Step 4 – draw the posterior distribution of </a:t>
+            </a:r>
+            <a:r>
+              <a:rPr lang="el-GR" sz="1200" b="1" dirty="0">
+                <a:solidFill>
+                  <a:srgbClr val="00B050"/>
+                </a:solidFill>
+              </a:rPr>
+              <a:t>λ</a:t>
+            </a:r>
+            <a:r>
+              <a:rPr lang="en-US" sz="1200" dirty="0"/>
+              <a:t> .  </a:t>
+            </a:r>
+            <a:r>
+              <a:rPr lang="en-US" sz="1200" dirty="0" err="1"/>
+              <a:t>Pr</a:t>
+            </a:r>
+            <a:r>
+              <a:rPr lang="en-US" sz="1200" dirty="0"/>
+              <a:t>(</a:t>
+            </a:r>
+            <a:r>
+              <a:rPr lang="el-GR" sz="1200" b="1" dirty="0">
+                <a:solidFill>
+                  <a:srgbClr val="00B050"/>
+                </a:solidFill>
+              </a:rPr>
+              <a:t>λ</a:t>
+            </a:r>
+            <a:r>
+              <a:rPr lang="en-US" sz="1200" dirty="0"/>
+              <a:t> | observed data)</a:t>
+            </a:r>
+          </a:p>
+          <a:p>
+            <a:r>
+              <a:rPr lang="en-US" dirty="0"/>
+              <a:t>   Posterior probability </a:t>
+            </a:r>
+            <a:r>
+              <a:rPr lang="en-US" dirty="0" err="1"/>
+              <a:t>Pr</a:t>
+            </a:r>
+            <a:r>
+              <a:rPr lang="en-US" dirty="0"/>
+              <a:t> (</a:t>
+            </a:r>
+            <a:r>
+              <a:rPr lang="el-GR" dirty="0">
+                <a:solidFill>
+                  <a:schemeClr val="tx1"/>
+                </a:solidFill>
+              </a:rPr>
+              <a:t>λ</a:t>
+            </a:r>
+            <a:r>
+              <a:rPr lang="en-US" dirty="0">
+                <a:solidFill>
+                  <a:schemeClr val="tx1"/>
+                </a:solidFill>
+              </a:rPr>
+              <a:t> = </a:t>
+            </a:r>
+            <a:r>
+              <a:rPr lang="el-GR" dirty="0">
+                <a:solidFill>
+                  <a:schemeClr val="tx1"/>
+                </a:solidFill>
+              </a:rPr>
+              <a:t>λ</a:t>
+            </a:r>
+            <a:r>
+              <a:rPr lang="en-US" baseline="-25000" dirty="0">
+                <a:solidFill>
+                  <a:schemeClr val="tx1"/>
+                </a:solidFill>
+              </a:rPr>
+              <a:t>n</a:t>
+            </a:r>
+            <a:r>
+              <a:rPr lang="en-US" dirty="0"/>
+              <a:t> | data)  is proportional to L(</a:t>
+            </a:r>
+            <a:r>
+              <a:rPr lang="el-GR" b="1" dirty="0">
+                <a:solidFill>
+                  <a:srgbClr val="00B050"/>
+                </a:solidFill>
+              </a:rPr>
+              <a:t>λ</a:t>
+            </a:r>
+            <a:r>
+              <a:rPr lang="en-US" b="1" baseline="-25000" dirty="0">
+                <a:solidFill>
+                  <a:srgbClr val="00B050"/>
+                </a:solidFill>
+              </a:rPr>
+              <a:t>n</a:t>
+            </a:r>
+            <a:r>
+              <a:rPr lang="en-US" dirty="0">
+                <a:solidFill>
+                  <a:schemeClr val="tx1"/>
+                </a:solidFill>
+              </a:rPr>
+              <a:t>) </a:t>
+            </a:r>
+          </a:p>
+          <a:p>
+            <a:endParaRPr lang="en-US" dirty="0"/>
+          </a:p>
+        </p:txBody>
+      </p:sp>
+    </p:spTree>
+    <p:extLst>
+      <p:ext uri="{BB962C8B-B14F-4D97-AF65-F5344CB8AC3E}">
+        <p14:creationId xmlns:p14="http://schemas.microsoft.com/office/powerpoint/2010/main" val="1763970880"/>
+      </p:ext>
+    </p:extLst>
+  </p:cSld>
+  <p:clrMapOvr>
+    <a:masterClrMapping/>
+  </p:clrMapOvr>
+</p:sld>
+</file>
+
+<file path=ppt/slides/slide13.xml><?xml version="1.0" encoding="utf-8"?>
+<p:sld xmlns:a="http://schemas.openxmlformats.org/drawingml/2006/main" xmlns:r="http://schemas.openxmlformats.org/officeDocument/2006/relationships" xmlns:p="http://schemas.openxmlformats.org/presentationml/2006/main">
+  <p:cSld>
+    <p:spTree>
+      <p:nvGrpSpPr>
+        <p:cNvPr id="1" name=""/>
+        <p:cNvGrpSpPr/>
+        <p:nvPr/>
+      </p:nvGrpSpPr>
+      <p:grpSpPr>
+        <a:xfrm>
+          <a:off x="0" y="0"/>
+          <a:ext cx="0" cy="0"/>
+          <a:chOff x="0" y="0"/>
+          <a:chExt cx="0" cy="0"/>
+        </a:xfrm>
+      </p:grpSpPr>
+      <p:sp>
+        <p:nvSpPr>
+          <p:cNvPr id="2" name="TextBox 1">
+            <a:extLst>
+              <a:ext uri="{FF2B5EF4-FFF2-40B4-BE49-F238E27FC236}">
+                <a16:creationId xmlns:a16="http://schemas.microsoft.com/office/drawing/2014/main" id="{CD6798AC-3E28-254E-B533-583935E0DBBC}"/>
+              </a:ext>
+            </a:extLst>
+          </p:cNvPr>
+          <p:cNvSpPr txBox="1"/>
+          <p:nvPr/>
+        </p:nvSpPr>
+        <p:spPr>
+          <a:xfrm>
+            <a:off x="0" y="37572"/>
+            <a:ext cx="4572000" cy="523220"/>
+          </a:xfrm>
+          <a:prstGeom prst="rect">
+            <a:avLst/>
+          </a:prstGeom>
+          <a:noFill/>
+        </p:spPr>
+        <p:txBody>
+          <a:bodyPr wrap="square" rtlCol="0">
+            <a:spAutoFit/>
+          </a:bodyPr>
+          <a:lstStyle/>
+          <a:p>
+            <a:r>
+              <a:rPr lang="en-US" sz="2800" b="1" dirty="0"/>
+              <a:t>Exercise 2 - Gaussian</a:t>
+            </a:r>
+          </a:p>
+        </p:txBody>
+      </p:sp>
+      <p:sp>
+        <p:nvSpPr>
+          <p:cNvPr id="13" name="TextBox 12">
+            <a:extLst>
+              <a:ext uri="{FF2B5EF4-FFF2-40B4-BE49-F238E27FC236}">
+                <a16:creationId xmlns:a16="http://schemas.microsoft.com/office/drawing/2014/main" id="{CCB040D0-EE6B-6747-B044-7BB207CED700}"/>
+              </a:ext>
+            </a:extLst>
+          </p:cNvPr>
+          <p:cNvSpPr txBox="1"/>
+          <p:nvPr/>
+        </p:nvSpPr>
+        <p:spPr>
+          <a:xfrm>
+            <a:off x="0" y="727511"/>
+            <a:ext cx="4572000" cy="830997"/>
+          </a:xfrm>
+          <a:prstGeom prst="rect">
+            <a:avLst/>
+          </a:prstGeom>
+          <a:noFill/>
+        </p:spPr>
+        <p:txBody>
+          <a:bodyPr wrap="square" rtlCol="0">
+            <a:spAutoFit/>
+          </a:bodyPr>
+          <a:lstStyle/>
+          <a:p>
+            <a:r>
+              <a:rPr lang="en-US" sz="1200" dirty="0"/>
+              <a:t>We have a sample of 50 data data points:  x</a:t>
+            </a:r>
+            <a:r>
+              <a:rPr lang="en-US" sz="1200" baseline="-25000" dirty="0"/>
+              <a:t>1</a:t>
+            </a:r>
+            <a:r>
+              <a:rPr lang="en-US" sz="1200" dirty="0"/>
+              <a:t> .. x</a:t>
+            </a:r>
+            <a:r>
+              <a:rPr lang="en-US" sz="1200" baseline="-25000" dirty="0"/>
+              <a:t>50</a:t>
+            </a:r>
+            <a:r>
+              <a:rPr lang="en-US" sz="1200" dirty="0"/>
+              <a:t> .</a:t>
+            </a:r>
+          </a:p>
+          <a:p>
+            <a:r>
+              <a:rPr lang="en-US" sz="1200" dirty="0"/>
+              <a:t>The distribution of the values presumably follows </a:t>
+            </a:r>
+          </a:p>
+          <a:p>
+            <a:r>
+              <a:rPr lang="en-US" sz="1200" dirty="0"/>
+              <a:t>normal Gaussian distribution with some mean and sigma.</a:t>
+            </a:r>
+          </a:p>
+          <a:p>
+            <a:r>
+              <a:rPr lang="en-US" sz="1200" dirty="0"/>
+              <a:t>Please estimate the values of mean and sigma.</a:t>
+            </a:r>
+          </a:p>
+        </p:txBody>
+      </p:sp>
+      <p:pic>
+        <p:nvPicPr>
+          <p:cNvPr id="5" name="Picture 4">
+            <a:extLst>
+              <a:ext uri="{FF2B5EF4-FFF2-40B4-BE49-F238E27FC236}">
+                <a16:creationId xmlns:a16="http://schemas.microsoft.com/office/drawing/2014/main" id="{C01A3C05-4152-034C-B3E0-6C4C5778A22D}"/>
+              </a:ext>
+            </a:extLst>
+          </p:cNvPr>
+          <p:cNvPicPr>
+            <a:picLocks noChangeAspect="1"/>
+          </p:cNvPicPr>
+          <p:nvPr/>
+        </p:nvPicPr>
+        <p:blipFill>
+          <a:blip r:embed="rId2" cstate="email">
+            <a:extLst>
+              <a:ext uri="{28A0092B-C50C-407E-A947-70E740481C1C}">
+                <a14:useLocalDpi xmlns:a14="http://schemas.microsoft.com/office/drawing/2010/main"/>
+              </a:ext>
+            </a:extLst>
+          </a:blip>
+          <a:stretch>
+            <a:fillRect/>
+          </a:stretch>
+        </p:blipFill>
+        <p:spPr>
+          <a:xfrm>
+            <a:off x="5842659" y="560792"/>
+            <a:ext cx="5858329" cy="2514600"/>
+          </a:xfrm>
+          <a:prstGeom prst="rect">
+            <a:avLst/>
+          </a:prstGeom>
+        </p:spPr>
+      </p:pic>
+    </p:spTree>
+    <p:extLst>
+      <p:ext uri="{BB962C8B-B14F-4D97-AF65-F5344CB8AC3E}">
+        <p14:creationId xmlns:p14="http://schemas.microsoft.com/office/powerpoint/2010/main" val="506399319"/>
+      </p:ext>
+    </p:extLst>
+  </p:cSld>
+  <p:clrMapOvr>
+    <a:masterClrMapping/>
+  </p:clrMapOvr>
+</p:sld>
+</file>
+
+<file path=ppt/slides/slide14.xml><?xml version="1.0" encoding="utf-8"?>
+<p:sld xmlns:a="http://schemas.openxmlformats.org/drawingml/2006/main" xmlns:r="http://schemas.openxmlformats.org/officeDocument/2006/relationships" xmlns:p="http://schemas.openxmlformats.org/presentationml/2006/main">
+  <p:cSld>
+    <p:spTree>
+      <p:nvGrpSpPr>
+        <p:cNvPr id="1" name=""/>
+        <p:cNvGrpSpPr/>
+        <p:nvPr/>
+      </p:nvGrpSpPr>
+      <p:grpSpPr>
+        <a:xfrm>
+          <a:off x="0" y="0"/>
+          <a:ext cx="0" cy="0"/>
+          <a:chOff x="0" y="0"/>
+          <a:chExt cx="0" cy="0"/>
+        </a:xfrm>
+      </p:grpSpPr>
+      <p:sp>
+        <p:nvSpPr>
+          <p:cNvPr id="2" name="TextBox 1">
+            <a:extLst>
+              <a:ext uri="{FF2B5EF4-FFF2-40B4-BE49-F238E27FC236}">
+                <a16:creationId xmlns:a16="http://schemas.microsoft.com/office/drawing/2014/main" id="{CD6798AC-3E28-254E-B533-583935E0DBBC}"/>
+              </a:ext>
+            </a:extLst>
+          </p:cNvPr>
+          <p:cNvSpPr txBox="1"/>
+          <p:nvPr/>
+        </p:nvSpPr>
+        <p:spPr>
+          <a:xfrm>
+            <a:off x="0" y="37572"/>
+            <a:ext cx="7730836" cy="523220"/>
+          </a:xfrm>
+          <a:prstGeom prst="rect">
+            <a:avLst/>
+          </a:prstGeom>
+          <a:noFill/>
+        </p:spPr>
+        <p:txBody>
+          <a:bodyPr wrap="square" rtlCol="0">
+            <a:spAutoFit/>
+          </a:bodyPr>
+          <a:lstStyle/>
+          <a:p>
+            <a:r>
+              <a:rPr lang="en-US" sz="2800" b="1" dirty="0"/>
+              <a:t>Exercise 3 – How Many Children Can Read ?</a:t>
+            </a:r>
+          </a:p>
+        </p:txBody>
+      </p:sp>
+      <p:sp>
+        <p:nvSpPr>
+          <p:cNvPr id="13" name="TextBox 12">
+            <a:extLst>
+              <a:ext uri="{FF2B5EF4-FFF2-40B4-BE49-F238E27FC236}">
+                <a16:creationId xmlns:a16="http://schemas.microsoft.com/office/drawing/2014/main" id="{CCB040D0-EE6B-6747-B044-7BB207CED700}"/>
+              </a:ext>
+            </a:extLst>
+          </p:cNvPr>
+          <p:cNvSpPr txBox="1"/>
+          <p:nvPr/>
+        </p:nvSpPr>
+        <p:spPr>
+          <a:xfrm>
+            <a:off x="0" y="727511"/>
+            <a:ext cx="5213268" cy="1569660"/>
+          </a:xfrm>
+          <a:prstGeom prst="rect">
+            <a:avLst/>
+          </a:prstGeom>
+          <a:noFill/>
+        </p:spPr>
+        <p:txBody>
+          <a:bodyPr wrap="square" rtlCol="0">
+            <a:spAutoFit/>
+          </a:bodyPr>
+          <a:lstStyle/>
+          <a:p>
+            <a:r>
+              <a:rPr lang="en-US" sz="1200" dirty="0"/>
+              <a:t>We have sample of 10 children, 3 of them are literate (can read). We need to evaluate number of children who can read in the population. </a:t>
+            </a:r>
+          </a:p>
+          <a:p>
+            <a:endParaRPr lang="en-US" sz="1200" dirty="0"/>
+          </a:p>
+          <a:p>
+            <a:r>
+              <a:rPr lang="en-US" sz="1200" dirty="0"/>
+              <a:t>We presume that children are independent, that population is uniform, etc. </a:t>
+            </a:r>
+          </a:p>
+          <a:p>
+            <a:r>
+              <a:rPr lang="en-US" sz="1200" dirty="0"/>
+              <a:t>We can use binomial distribution. </a:t>
+            </a:r>
+          </a:p>
+          <a:p>
+            <a:r>
+              <a:rPr lang="en-US" sz="1200" dirty="0"/>
+              <a:t>- </a:t>
+            </a:r>
+            <a:r>
+              <a:rPr lang="en-US" sz="1200" dirty="0">
+                <a:hlinkClick r:id="rId2"/>
+              </a:rPr>
+              <a:t>https://www.youtube.com/watch?v=yvWlpwnT1nw</a:t>
+            </a:r>
+            <a:r>
+              <a:rPr lang="en-US" sz="1200" dirty="0"/>
+              <a:t> </a:t>
+            </a:r>
+          </a:p>
+          <a:p>
+            <a:endParaRPr lang="en-US" sz="1200" dirty="0"/>
+          </a:p>
+          <a:p>
+            <a:endParaRPr lang="en-US" sz="1200" dirty="0"/>
+          </a:p>
+        </p:txBody>
+      </p:sp>
+      <p:pic>
+        <p:nvPicPr>
+          <p:cNvPr id="3" name="Picture 2">
+            <a:extLst>
+              <a:ext uri="{FF2B5EF4-FFF2-40B4-BE49-F238E27FC236}">
+                <a16:creationId xmlns:a16="http://schemas.microsoft.com/office/drawing/2014/main" id="{ED78D932-E041-E84C-A583-497021BF7E23}"/>
+              </a:ext>
+            </a:extLst>
+          </p:cNvPr>
+          <p:cNvPicPr>
+            <a:picLocks noChangeAspect="1"/>
+          </p:cNvPicPr>
+          <p:nvPr/>
+        </p:nvPicPr>
+        <p:blipFill>
+          <a:blip r:embed="rId3" cstate="email">
+            <a:extLst>
+              <a:ext uri="{28A0092B-C50C-407E-A947-70E740481C1C}">
+                <a14:useLocalDpi xmlns:a14="http://schemas.microsoft.com/office/drawing/2010/main"/>
+              </a:ext>
+            </a:extLst>
+          </a:blip>
+          <a:stretch>
+            <a:fillRect/>
+          </a:stretch>
+        </p:blipFill>
+        <p:spPr>
+          <a:xfrm>
+            <a:off x="155534" y="2297171"/>
+            <a:ext cx="2712933" cy="1987550"/>
+          </a:xfrm>
+          <a:prstGeom prst="rect">
+            <a:avLst/>
+          </a:prstGeom>
+        </p:spPr>
+      </p:pic>
+      <p:pic>
+        <p:nvPicPr>
+          <p:cNvPr id="4" name="Picture 3">
+            <a:extLst>
+              <a:ext uri="{FF2B5EF4-FFF2-40B4-BE49-F238E27FC236}">
+                <a16:creationId xmlns:a16="http://schemas.microsoft.com/office/drawing/2014/main" id="{4F66711F-3F7E-A94B-9A27-3E813592D730}"/>
+              </a:ext>
+            </a:extLst>
+          </p:cNvPr>
+          <p:cNvPicPr>
+            <a:picLocks noChangeAspect="1"/>
+          </p:cNvPicPr>
+          <p:nvPr/>
+        </p:nvPicPr>
+        <p:blipFill>
+          <a:blip r:embed="rId4" cstate="email">
+            <a:extLst>
+              <a:ext uri="{28A0092B-C50C-407E-A947-70E740481C1C}">
+                <a14:useLocalDpi xmlns:a14="http://schemas.microsoft.com/office/drawing/2010/main"/>
+              </a:ext>
+            </a:extLst>
+          </a:blip>
+          <a:stretch>
+            <a:fillRect/>
+          </a:stretch>
+        </p:blipFill>
+        <p:spPr>
+          <a:xfrm>
+            <a:off x="155534" y="4560830"/>
+            <a:ext cx="2712933" cy="1987550"/>
+          </a:xfrm>
+          <a:prstGeom prst="rect">
+            <a:avLst/>
+          </a:prstGeom>
+        </p:spPr>
+      </p:pic>
+      <p:pic>
+        <p:nvPicPr>
+          <p:cNvPr id="5" name="Picture 4">
+            <a:extLst>
+              <a:ext uri="{FF2B5EF4-FFF2-40B4-BE49-F238E27FC236}">
+                <a16:creationId xmlns:a16="http://schemas.microsoft.com/office/drawing/2014/main" id="{58937095-09E3-D34F-98FA-ACB1E792113D}"/>
+              </a:ext>
+            </a:extLst>
+          </p:cNvPr>
+          <p:cNvPicPr>
+            <a:picLocks noChangeAspect="1"/>
+          </p:cNvPicPr>
+          <p:nvPr/>
+        </p:nvPicPr>
+        <p:blipFill>
+          <a:blip r:embed="rId5" cstate="email">
+            <a:extLst>
+              <a:ext uri="{28A0092B-C50C-407E-A947-70E740481C1C}">
+                <a14:useLocalDpi xmlns:a14="http://schemas.microsoft.com/office/drawing/2010/main"/>
+              </a:ext>
+            </a:extLst>
+          </a:blip>
+          <a:stretch>
+            <a:fillRect/>
+          </a:stretch>
+        </p:blipFill>
+        <p:spPr>
+          <a:xfrm>
+            <a:off x="3168650" y="2297171"/>
+            <a:ext cx="2712933" cy="1987550"/>
+          </a:xfrm>
+          <a:prstGeom prst="rect">
+            <a:avLst/>
+          </a:prstGeom>
+        </p:spPr>
+      </p:pic>
+      <p:pic>
+        <p:nvPicPr>
+          <p:cNvPr id="6" name="Picture 5">
+            <a:extLst>
+              <a:ext uri="{FF2B5EF4-FFF2-40B4-BE49-F238E27FC236}">
+                <a16:creationId xmlns:a16="http://schemas.microsoft.com/office/drawing/2014/main" id="{AE9272F8-C664-3543-BB36-E2E5AFD854AB}"/>
+              </a:ext>
+            </a:extLst>
+          </p:cNvPr>
+          <p:cNvPicPr>
+            <a:picLocks noChangeAspect="1"/>
+          </p:cNvPicPr>
+          <p:nvPr/>
+        </p:nvPicPr>
+        <p:blipFill>
+          <a:blip r:embed="rId6" cstate="email">
+            <a:extLst>
+              <a:ext uri="{28A0092B-C50C-407E-A947-70E740481C1C}">
+                <a14:useLocalDpi xmlns:a14="http://schemas.microsoft.com/office/drawing/2010/main"/>
+              </a:ext>
+            </a:extLst>
+          </a:blip>
+          <a:stretch>
+            <a:fillRect/>
+          </a:stretch>
+        </p:blipFill>
+        <p:spPr>
+          <a:xfrm>
+            <a:off x="3168650" y="4562040"/>
+            <a:ext cx="2711282" cy="1986340"/>
+          </a:xfrm>
+          <a:prstGeom prst="rect">
+            <a:avLst/>
+          </a:prstGeom>
+        </p:spPr>
+      </p:pic>
+      <p:pic>
+        <p:nvPicPr>
+          <p:cNvPr id="7" name="Picture 6">
+            <a:extLst>
+              <a:ext uri="{FF2B5EF4-FFF2-40B4-BE49-F238E27FC236}">
+                <a16:creationId xmlns:a16="http://schemas.microsoft.com/office/drawing/2014/main" id="{F0E58C40-B695-4B42-B615-15EE0BF59B1A}"/>
+              </a:ext>
+            </a:extLst>
+          </p:cNvPr>
+          <p:cNvPicPr>
+            <a:picLocks noChangeAspect="1"/>
+          </p:cNvPicPr>
+          <p:nvPr/>
+        </p:nvPicPr>
+        <p:blipFill>
+          <a:blip r:embed="rId7" cstate="email">
+            <a:extLst>
+              <a:ext uri="{28A0092B-C50C-407E-A947-70E740481C1C}">
+                <a14:useLocalDpi xmlns:a14="http://schemas.microsoft.com/office/drawing/2010/main"/>
+              </a:ext>
+            </a:extLst>
+          </a:blip>
+          <a:stretch>
+            <a:fillRect/>
+          </a:stretch>
+        </p:blipFill>
+        <p:spPr>
+          <a:xfrm>
+            <a:off x="6096000" y="4562040"/>
+            <a:ext cx="2711282" cy="1986340"/>
+          </a:xfrm>
+          <a:prstGeom prst="rect">
+            <a:avLst/>
+          </a:prstGeom>
+        </p:spPr>
+      </p:pic>
+      <p:sp>
+        <p:nvSpPr>
+          <p:cNvPr id="8" name="TextBox 7">
+            <a:extLst>
+              <a:ext uri="{FF2B5EF4-FFF2-40B4-BE49-F238E27FC236}">
+                <a16:creationId xmlns:a16="http://schemas.microsoft.com/office/drawing/2014/main" id="{518489C0-6FB3-7A4B-9A4F-307B788AC944}"/>
+              </a:ext>
+            </a:extLst>
+          </p:cNvPr>
+          <p:cNvSpPr txBox="1"/>
+          <p:nvPr/>
+        </p:nvSpPr>
+        <p:spPr>
+          <a:xfrm>
+            <a:off x="6813466" y="4037610"/>
+            <a:ext cx="1276350" cy="523220"/>
+          </a:xfrm>
+          <a:prstGeom prst="rect">
+            <a:avLst/>
+          </a:prstGeom>
+          <a:noFill/>
+        </p:spPr>
+        <p:txBody>
+          <a:bodyPr wrap="square" rtlCol="0">
+            <a:spAutoFit/>
+          </a:bodyPr>
+          <a:lstStyle/>
+          <a:p>
+            <a:r>
+              <a:rPr lang="en-US" dirty="0"/>
+              <a:t>Increased Sample Size</a:t>
+            </a:r>
+          </a:p>
+        </p:txBody>
+      </p:sp>
+      <p:sp>
+        <p:nvSpPr>
+          <p:cNvPr id="10" name="TextBox 9">
+            <a:extLst>
+              <a:ext uri="{FF2B5EF4-FFF2-40B4-BE49-F238E27FC236}">
+                <a16:creationId xmlns:a16="http://schemas.microsoft.com/office/drawing/2014/main" id="{CD4E59FF-94DA-BE4B-A2B6-E0A0365E44BA}"/>
+              </a:ext>
+            </a:extLst>
+          </p:cNvPr>
+          <p:cNvSpPr txBox="1"/>
+          <p:nvPr/>
+        </p:nvSpPr>
+        <p:spPr>
+          <a:xfrm>
+            <a:off x="9023350" y="4808480"/>
+            <a:ext cx="1276350" cy="307777"/>
+          </a:xfrm>
+          <a:prstGeom prst="rect">
+            <a:avLst/>
+          </a:prstGeom>
+          <a:noFill/>
+        </p:spPr>
+        <p:txBody>
+          <a:bodyPr wrap="square" rtlCol="0">
+            <a:spAutoFit/>
+          </a:bodyPr>
+          <a:lstStyle/>
+          <a:p>
+            <a:r>
+              <a:rPr lang="en-US" dirty="0"/>
+              <a:t>Prior</a:t>
+            </a:r>
+          </a:p>
+        </p:txBody>
+      </p:sp>
+      <p:sp>
+        <p:nvSpPr>
+          <p:cNvPr id="11" name="TextBox 10">
+            <a:extLst>
+              <a:ext uri="{FF2B5EF4-FFF2-40B4-BE49-F238E27FC236}">
+                <a16:creationId xmlns:a16="http://schemas.microsoft.com/office/drawing/2014/main" id="{7AA8ACDC-C4EF-1C4A-8827-C3FA843623C3}"/>
+              </a:ext>
+            </a:extLst>
+          </p:cNvPr>
+          <p:cNvSpPr txBox="1"/>
+          <p:nvPr/>
+        </p:nvSpPr>
+        <p:spPr>
+          <a:xfrm>
+            <a:off x="9023350" y="5400716"/>
+            <a:ext cx="1276350" cy="307777"/>
+          </a:xfrm>
+          <a:prstGeom prst="rect">
+            <a:avLst/>
+          </a:prstGeom>
+          <a:noFill/>
+        </p:spPr>
+        <p:txBody>
+          <a:bodyPr wrap="square" rtlCol="0">
+            <a:spAutoFit/>
+          </a:bodyPr>
+          <a:lstStyle/>
+          <a:p>
+            <a:r>
+              <a:rPr lang="en-US" dirty="0"/>
+              <a:t>Likelihood</a:t>
+            </a:r>
+          </a:p>
+        </p:txBody>
+      </p:sp>
+      <p:sp>
+        <p:nvSpPr>
+          <p:cNvPr id="12" name="TextBox 11">
+            <a:extLst>
+              <a:ext uri="{FF2B5EF4-FFF2-40B4-BE49-F238E27FC236}">
+                <a16:creationId xmlns:a16="http://schemas.microsoft.com/office/drawing/2014/main" id="{637BD549-1D1A-324E-9F6E-1D3B226117E0}"/>
+              </a:ext>
+            </a:extLst>
+          </p:cNvPr>
+          <p:cNvSpPr txBox="1"/>
+          <p:nvPr/>
+        </p:nvSpPr>
+        <p:spPr>
+          <a:xfrm>
+            <a:off x="9023350" y="5992952"/>
+            <a:ext cx="1276350" cy="307777"/>
+          </a:xfrm>
+          <a:prstGeom prst="rect">
+            <a:avLst/>
+          </a:prstGeom>
+          <a:noFill/>
+        </p:spPr>
+        <p:txBody>
+          <a:bodyPr wrap="square" rtlCol="0">
+            <a:spAutoFit/>
+          </a:bodyPr>
+          <a:lstStyle/>
+          <a:p>
+            <a:r>
+              <a:rPr lang="en-US" dirty="0"/>
+              <a:t>Posterior</a:t>
+            </a:r>
+          </a:p>
+        </p:txBody>
+      </p:sp>
+    </p:spTree>
+    <p:extLst>
+      <p:ext uri="{BB962C8B-B14F-4D97-AF65-F5344CB8AC3E}">
+        <p14:creationId xmlns:p14="http://schemas.microsoft.com/office/powerpoint/2010/main" val="2529217939"/>
+      </p:ext>
+    </p:extLst>
+  </p:cSld>
+  <p:clrMapOvr>
+    <a:masterClrMapping/>
+  </p:clrMapOvr>
+</p:sld>
+</file>
+
+<file path=ppt/slides/slide15.xml><?xml version="1.0" encoding="utf-8"?>
+<p:sld xmlns:a="http://schemas.openxmlformats.org/drawingml/2006/main" xmlns:r="http://schemas.openxmlformats.org/officeDocument/2006/relationships" xmlns:p="http://schemas.openxmlformats.org/presentationml/2006/main">
+  <p:cSld>
+    <p:spTree>
+      <p:nvGrpSpPr>
+        <p:cNvPr id="1" name=""/>
+        <p:cNvGrpSpPr/>
+        <p:nvPr/>
+      </p:nvGrpSpPr>
+      <p:grpSpPr>
+        <a:xfrm>
+          <a:off x="0" y="0"/>
+          <a:ext cx="0" cy="0"/>
+          <a:chOff x="0" y="0"/>
+          <a:chExt cx="0" cy="0"/>
+        </a:xfrm>
+      </p:grpSpPr>
+      <p:sp>
+        <p:nvSpPr>
+          <p:cNvPr id="2" name="TextBox 1">
+            <a:extLst>
+              <a:ext uri="{FF2B5EF4-FFF2-40B4-BE49-F238E27FC236}">
+                <a16:creationId xmlns:a16="http://schemas.microsoft.com/office/drawing/2014/main" id="{CD6798AC-3E28-254E-B533-583935E0DBBC}"/>
+              </a:ext>
+            </a:extLst>
+          </p:cNvPr>
+          <p:cNvSpPr txBox="1"/>
+          <p:nvPr/>
+        </p:nvSpPr>
+        <p:spPr>
+          <a:xfrm>
+            <a:off x="0" y="37572"/>
+            <a:ext cx="7730836" cy="523220"/>
+          </a:xfrm>
+          <a:prstGeom prst="rect">
+            <a:avLst/>
+          </a:prstGeom>
+          <a:noFill/>
+        </p:spPr>
+        <p:txBody>
+          <a:bodyPr wrap="square" rtlCol="0">
+            <a:spAutoFit/>
+          </a:bodyPr>
+          <a:lstStyle/>
+          <a:p>
+            <a:r>
+              <a:rPr lang="en-US" sz="2800" b="1" dirty="0"/>
+              <a:t>Exercise 4 – Coin Bias Estimation</a:t>
+            </a:r>
+          </a:p>
+        </p:txBody>
+      </p:sp>
+      <p:sp>
+        <p:nvSpPr>
+          <p:cNvPr id="13" name="TextBox 12">
+            <a:extLst>
+              <a:ext uri="{FF2B5EF4-FFF2-40B4-BE49-F238E27FC236}">
+                <a16:creationId xmlns:a16="http://schemas.microsoft.com/office/drawing/2014/main" id="{CCB040D0-EE6B-6747-B044-7BB207CED700}"/>
+              </a:ext>
+            </a:extLst>
+          </p:cNvPr>
+          <p:cNvSpPr txBox="1"/>
+          <p:nvPr/>
+        </p:nvSpPr>
+        <p:spPr>
+          <a:xfrm>
+            <a:off x="0" y="727511"/>
+            <a:ext cx="5213268" cy="1015663"/>
+          </a:xfrm>
+          <a:prstGeom prst="rect">
+            <a:avLst/>
+          </a:prstGeom>
+          <a:noFill/>
+        </p:spPr>
+        <p:txBody>
+          <a:bodyPr wrap="square" rtlCol="0">
+            <a:spAutoFit/>
+          </a:bodyPr>
+          <a:lstStyle/>
+          <a:p>
+            <a:r>
+              <a:rPr lang="en-US" sz="1200" dirty="0"/>
+              <a:t>Estimate the bias of a coin. </a:t>
+            </a:r>
+          </a:p>
+          <a:p>
+            <a:r>
+              <a:rPr lang="en-US" sz="1200" dirty="0"/>
+              <a:t>We need to estimate P(</a:t>
+            </a:r>
+            <a:r>
+              <a:rPr lang="el-GR" sz="1200" dirty="0"/>
+              <a:t>θ</a:t>
+            </a:r>
+            <a:r>
+              <a:rPr lang="en-US" sz="1200" dirty="0"/>
+              <a:t>), where </a:t>
+            </a:r>
+            <a:r>
+              <a:rPr lang="el-GR" sz="1200" dirty="0"/>
+              <a:t>θ</a:t>
+            </a:r>
+            <a:r>
+              <a:rPr lang="en-US" sz="1200" dirty="0"/>
+              <a:t> is the proportion of heads.</a:t>
+            </a:r>
+          </a:p>
+          <a:p>
+            <a:r>
+              <a:rPr lang="en-US" sz="1200" dirty="0"/>
+              <a:t> - </a:t>
+            </a:r>
+            <a:r>
+              <a:rPr lang="en-US" sz="1200" dirty="0">
+                <a:hlinkClick r:id="rId2"/>
+              </a:rPr>
+              <a:t>https://www.youtube.com/watch?v=Pahyv9i_X2k</a:t>
+            </a:r>
+            <a:r>
+              <a:rPr lang="en-US" sz="1200" dirty="0"/>
+              <a:t> </a:t>
+            </a:r>
+          </a:p>
+          <a:p>
+            <a:endParaRPr lang="en-US" sz="1200" dirty="0"/>
+          </a:p>
+          <a:p>
+            <a:endParaRPr lang="en-US" sz="1200" dirty="0"/>
+          </a:p>
+        </p:txBody>
+      </p:sp>
+    </p:spTree>
+    <p:extLst>
+      <p:ext uri="{BB962C8B-B14F-4D97-AF65-F5344CB8AC3E}">
+        <p14:creationId xmlns:p14="http://schemas.microsoft.com/office/powerpoint/2010/main" val="3873802503"/>
+      </p:ext>
+    </p:extLst>
+  </p:cSld>
+  <p:clrMapOvr>
+    <a:masterClrMapping/>
+  </p:clrMapOvr>
+</p:sld>
+</file>
+
+<file path=ppt/slides/slide16.xml><?xml version="1.0" encoding="utf-8"?>
+<p:sld xmlns:a="http://schemas.openxmlformats.org/drawingml/2006/main" xmlns:r="http://schemas.openxmlformats.org/officeDocument/2006/relationships" xmlns:p="http://schemas.openxmlformats.org/presentationml/2006/main">
+  <p:cSld>
+    <p:spTree>
+      <p:nvGrpSpPr>
+        <p:cNvPr id="1" name=""/>
+        <p:cNvGrpSpPr/>
+        <p:nvPr/>
+      </p:nvGrpSpPr>
+      <p:grpSpPr>
+        <a:xfrm>
+          <a:off x="0" y="0"/>
+          <a:ext cx="0" cy="0"/>
+          <a:chOff x="0" y="0"/>
+          <a:chExt cx="0" cy="0"/>
+        </a:xfrm>
+      </p:grpSpPr>
+      <p:sp>
+        <p:nvSpPr>
+          <p:cNvPr id="2" name="TextBox 1">
+            <a:extLst>
+              <a:ext uri="{FF2B5EF4-FFF2-40B4-BE49-F238E27FC236}">
+                <a16:creationId xmlns:a16="http://schemas.microsoft.com/office/drawing/2014/main" id="{CD6798AC-3E28-254E-B533-583935E0DBBC}"/>
+              </a:ext>
+            </a:extLst>
+          </p:cNvPr>
+          <p:cNvSpPr txBox="1"/>
+          <p:nvPr/>
+        </p:nvSpPr>
+        <p:spPr>
+          <a:xfrm>
+            <a:off x="-1" y="37572"/>
+            <a:ext cx="9274629" cy="523220"/>
+          </a:xfrm>
+          <a:prstGeom prst="rect">
+            <a:avLst/>
+          </a:prstGeom>
+          <a:noFill/>
+        </p:spPr>
+        <p:txBody>
+          <a:bodyPr wrap="square" rtlCol="0">
+            <a:spAutoFit/>
+          </a:bodyPr>
+          <a:lstStyle/>
+          <a:p>
+            <a:r>
+              <a:rPr lang="en-US" sz="2800" b="1" dirty="0"/>
+              <a:t>Exercise 5 – Coffee stains and Damaged Flash Drives</a:t>
+            </a:r>
+          </a:p>
+        </p:txBody>
+      </p:sp>
+      <p:sp>
+        <p:nvSpPr>
+          <p:cNvPr id="13" name="TextBox 12">
+            <a:extLst>
+              <a:ext uri="{FF2B5EF4-FFF2-40B4-BE49-F238E27FC236}">
+                <a16:creationId xmlns:a16="http://schemas.microsoft.com/office/drawing/2014/main" id="{CCB040D0-EE6B-6747-B044-7BB207CED700}"/>
+              </a:ext>
+            </a:extLst>
+          </p:cNvPr>
+          <p:cNvSpPr txBox="1"/>
+          <p:nvPr/>
+        </p:nvSpPr>
+        <p:spPr>
+          <a:xfrm>
+            <a:off x="-1" y="727511"/>
+            <a:ext cx="5438899" cy="830997"/>
+          </a:xfrm>
+          <a:prstGeom prst="rect">
+            <a:avLst/>
+          </a:prstGeom>
+          <a:noFill/>
+        </p:spPr>
+        <p:txBody>
+          <a:bodyPr wrap="square" rtlCol="0">
+            <a:spAutoFit/>
+          </a:bodyPr>
+          <a:lstStyle/>
+          <a:p>
+            <a:r>
+              <a:rPr lang="en-US" sz="1200" dirty="0"/>
+              <a:t>We have 100 damaged flash drives which is a sample of much bigger set.</a:t>
+            </a:r>
+            <a:br>
+              <a:rPr lang="en-US" sz="1200" dirty="0"/>
+            </a:br>
+            <a:r>
+              <a:rPr lang="en-US" sz="1200" dirty="0"/>
+              <a:t>80% of these damaged drives have coffee stains on them.</a:t>
+            </a:r>
+          </a:p>
+          <a:p>
+            <a:br>
+              <a:rPr lang="en-US" sz="1200" dirty="0"/>
+            </a:br>
+            <a:r>
+              <a:rPr lang="en-US" sz="1200" dirty="0"/>
+              <a:t>Estimate probability (and credible interval) that coffee is causing the damage?</a:t>
+            </a:r>
+          </a:p>
+        </p:txBody>
+      </p:sp>
+    </p:spTree>
+    <p:extLst>
+      <p:ext uri="{BB962C8B-B14F-4D97-AF65-F5344CB8AC3E}">
+        <p14:creationId xmlns:p14="http://schemas.microsoft.com/office/powerpoint/2010/main" val="4128884174"/>
+      </p:ext>
+    </p:extLst>
+  </p:cSld>
+  <p:clrMapOvr>
+    <a:masterClrMapping/>
+  </p:clrMapOvr>
+</p:sld>
+</file>
+
+<file path=ppt/slides/slide17.xml><?xml version="1.0" encoding="utf-8"?>
+<p:sld xmlns:a="http://schemas.openxmlformats.org/drawingml/2006/main" xmlns:r="http://schemas.openxmlformats.org/officeDocument/2006/relationships" xmlns:p="http://schemas.openxmlformats.org/presentationml/2006/main">
+  <p:cSld>
+    <p:spTree>
+      <p:nvGrpSpPr>
+        <p:cNvPr id="1" name=""/>
+        <p:cNvGrpSpPr/>
+        <p:nvPr/>
+      </p:nvGrpSpPr>
+      <p:grpSpPr>
+        <a:xfrm>
+          <a:off x="0" y="0"/>
+          <a:ext cx="0" cy="0"/>
+          <a:chOff x="0" y="0"/>
+          <a:chExt cx="0" cy="0"/>
+        </a:xfrm>
+      </p:grpSpPr>
+      <p:sp>
+        <p:nvSpPr>
+          <p:cNvPr id="5" name="TextBox 4">
+            <a:extLst>
+              <a:ext uri="{FF2B5EF4-FFF2-40B4-BE49-F238E27FC236}">
+                <a16:creationId xmlns:a16="http://schemas.microsoft.com/office/drawing/2014/main" id="{3F2ED839-B118-9D48-B600-42594516EAD9}"/>
+              </a:ext>
+            </a:extLst>
+          </p:cNvPr>
+          <p:cNvSpPr txBox="1"/>
+          <p:nvPr/>
+        </p:nvSpPr>
+        <p:spPr>
+          <a:xfrm>
+            <a:off x="726473" y="3185796"/>
+            <a:ext cx="3206337" cy="2031325"/>
+          </a:xfrm>
+          <a:prstGeom prst="rect">
+            <a:avLst/>
+          </a:prstGeom>
+          <a:noFill/>
+        </p:spPr>
+        <p:txBody>
+          <a:bodyPr wrap="square" rtlCol="0">
+            <a:spAutoFit/>
+          </a:bodyPr>
+          <a:lstStyle/>
+          <a:p>
+            <a:r>
+              <a:rPr lang="en-US" dirty="0"/>
+              <a:t>Bayesian Inference for a normal Mean</a:t>
+            </a:r>
+          </a:p>
+          <a:p>
+            <a:r>
+              <a:rPr lang="en-US" dirty="0"/>
+              <a:t>xxx</a:t>
+            </a:r>
+          </a:p>
+          <a:p>
+            <a:endParaRPr lang="en-US" dirty="0"/>
+          </a:p>
+          <a:p>
+            <a:r>
+              <a:rPr lang="en-US" dirty="0"/>
+              <a:t>Conjugate Priors</a:t>
+            </a:r>
+          </a:p>
+          <a:p>
+            <a:r>
+              <a:rPr lang="en-US" dirty="0"/>
+              <a:t>xxx</a:t>
+            </a:r>
+          </a:p>
+          <a:p>
+            <a:endParaRPr lang="en-US" dirty="0"/>
+          </a:p>
+          <a:p>
+            <a:r>
+              <a:rPr lang="en-US" dirty="0"/>
+              <a:t>Credible Intervals</a:t>
+            </a:r>
+          </a:p>
+          <a:p>
+            <a:r>
+              <a:rPr lang="en-US" dirty="0"/>
+              <a:t>xxx</a:t>
+            </a:r>
+          </a:p>
+          <a:p>
+            <a:endParaRPr lang="en-US" dirty="0"/>
+          </a:p>
+        </p:txBody>
+      </p:sp>
+    </p:spTree>
+    <p:extLst>
+      <p:ext uri="{BB962C8B-B14F-4D97-AF65-F5344CB8AC3E}">
+        <p14:creationId xmlns:p14="http://schemas.microsoft.com/office/powerpoint/2010/main" val="4230818339"/>
+      </p:ext>
+    </p:extLst>
+  </p:cSld>
+  <p:clrMapOvr>
+    <a:masterClrMapping/>
+  </p:clrMapOvr>
+</p:sld>
+</file>
+
+<file path=ppt/slides/slide18.xml><?xml version="1.0" encoding="utf-8"?>
 <p:sld xmlns:a="http://schemas.openxmlformats.org/drawingml/2006/main" xmlns:r="http://schemas.openxmlformats.org/officeDocument/2006/relationships" xmlns:p="http://schemas.openxmlformats.org/presentationml/2006/main">
   <p:cSld>
     <p:spTree>
@@ -20546,7 +22615,7 @@
 </p:sld>
 </file>
 
-<file path=ppt/slides/slide13.xml><?xml version="1.0" encoding="utf-8"?>
+<file path=ppt/slides/slide19.xml><?xml version="1.0" encoding="utf-8"?>
 <p:sld xmlns:a="http://schemas.openxmlformats.org/drawingml/2006/main" xmlns:r="http://schemas.openxmlformats.org/officeDocument/2006/relationships" xmlns:p="http://schemas.openxmlformats.org/presentationml/2006/main">
   <p:cSld>
     <p:spTree>
@@ -21063,275 +23132,6 @@
 </p:sld>
 </file>
 
-<file path=ppt/slides/slide14.xml><?xml version="1.0" encoding="utf-8"?>
-<p:sld xmlns:a="http://schemas.openxmlformats.org/drawingml/2006/main" xmlns:r="http://schemas.openxmlformats.org/officeDocument/2006/relationships" xmlns:p="http://schemas.openxmlformats.org/presentationml/2006/main">
-  <p:cSld>
-    <p:spTree>
-      <p:nvGrpSpPr>
-        <p:cNvPr id="1" name=""/>
-        <p:cNvGrpSpPr/>
-        <p:nvPr/>
-      </p:nvGrpSpPr>
-      <p:grpSpPr>
-        <a:xfrm>
-          <a:off x="0" y="0"/>
-          <a:ext cx="0" cy="0"/>
-          <a:chOff x="0" y="0"/>
-          <a:chExt cx="0" cy="0"/>
-        </a:xfrm>
-      </p:grpSpPr>
-      <p:sp>
-        <p:nvSpPr>
-          <p:cNvPr id="2" name="TextBox 1">
-            <a:extLst>
-              <a:ext uri="{FF2B5EF4-FFF2-40B4-BE49-F238E27FC236}">
-                <a16:creationId xmlns:a16="http://schemas.microsoft.com/office/drawing/2014/main" id="{866E1CEB-F40C-EB46-AE42-94921324FD7D}"/>
-              </a:ext>
-            </a:extLst>
-          </p:cNvPr>
-          <p:cNvSpPr txBox="1"/>
-          <p:nvPr/>
-        </p:nvSpPr>
-        <p:spPr>
-          <a:xfrm>
-            <a:off x="-1" y="37572"/>
-            <a:ext cx="8277101" cy="400110"/>
-          </a:xfrm>
-          <a:prstGeom prst="rect">
-            <a:avLst/>
-          </a:prstGeom>
-          <a:noFill/>
-        </p:spPr>
-        <p:txBody>
-          <a:bodyPr wrap="square" rtlCol="0">
-            <a:spAutoFit/>
-          </a:bodyPr>
-          <a:lstStyle/>
-          <a:p>
-            <a:r>
-              <a:rPr lang="en-US" sz="2000" b="1" dirty="0"/>
-              <a:t>Bayesian Exercise Questions &amp; Conditional Probability Questions</a:t>
-            </a:r>
-          </a:p>
-        </p:txBody>
-      </p:sp>
-      <p:sp>
-        <p:nvSpPr>
-          <p:cNvPr id="3" name="TextBox 2">
-            <a:extLst>
-              <a:ext uri="{FF2B5EF4-FFF2-40B4-BE49-F238E27FC236}">
-                <a16:creationId xmlns:a16="http://schemas.microsoft.com/office/drawing/2014/main" id="{42F87632-23F8-1548-BE7C-6E509D69DC76}"/>
-              </a:ext>
-            </a:extLst>
-          </p:cNvPr>
-          <p:cNvSpPr txBox="1"/>
-          <p:nvPr/>
-        </p:nvSpPr>
-        <p:spPr>
-          <a:xfrm>
-            <a:off x="118753" y="560792"/>
-            <a:ext cx="8906494" cy="4185761"/>
-          </a:xfrm>
-          <a:prstGeom prst="rect">
-            <a:avLst/>
-          </a:prstGeom>
-          <a:noFill/>
-        </p:spPr>
-        <p:txBody>
-          <a:bodyPr wrap="square" rtlCol="0">
-            <a:spAutoFit/>
-          </a:bodyPr>
-          <a:lstStyle/>
-          <a:p>
-            <a:pPr marL="285750" indent="-285750">
-              <a:buFont typeface="Arial" panose="020B0604020202020204" pitchFamily="34" charset="0"/>
-              <a:buChar char="•"/>
-            </a:pPr>
-            <a:r>
-              <a:rPr lang="en-US" dirty="0"/>
-              <a:t>A jar has 1000 coins, of which 999 are fair and 1 is double-headed. </a:t>
-            </a:r>
-            <a:br>
-              <a:rPr lang="en-US" dirty="0"/>
-            </a:br>
-            <a:r>
-              <a:rPr lang="en-US" dirty="0"/>
-              <a:t>Pick a coin at random, and toss it 10 times. </a:t>
-            </a:r>
-            <a:br>
-              <a:rPr lang="en-US" dirty="0"/>
-            </a:br>
-            <a:r>
-              <a:rPr lang="en-US" dirty="0"/>
-              <a:t>Given that you see 10 heads, what is the probability that the next toss of that coin is also a head?</a:t>
-            </a:r>
-          </a:p>
-          <a:p>
-            <a:pPr marL="285750" indent="-285750">
-              <a:buFont typeface="Arial" panose="020B0604020202020204" pitchFamily="34" charset="0"/>
-              <a:buChar char="•"/>
-            </a:pPr>
-            <a:endParaRPr lang="en-US" dirty="0"/>
-          </a:p>
-          <a:p>
-            <a:pPr marL="285750" indent="-285750">
-              <a:buFont typeface="Arial" panose="020B0604020202020204" pitchFamily="34" charset="0"/>
-              <a:buChar char="•"/>
-            </a:pPr>
-            <a:r>
-              <a:rPr lang="en-US" dirty="0"/>
-              <a:t>50% of all people who receive a first interview receive a second interview.</a:t>
-            </a:r>
-            <a:br>
-              <a:rPr lang="en-US" dirty="0"/>
-            </a:br>
-            <a:r>
-              <a:rPr lang="en-US" dirty="0"/>
-              <a:t>95% of those who got a second interview felt they had a good first interview.</a:t>
-            </a:r>
-            <a:br>
-              <a:rPr lang="en-US" dirty="0"/>
-            </a:br>
-            <a:r>
-              <a:rPr lang="en-US" dirty="0"/>
-              <a:t>75% of those who didn't get a second interview felt they had a good first interview.</a:t>
-            </a:r>
-            <a:br>
-              <a:rPr lang="en-US" dirty="0"/>
-            </a:br>
-            <a:r>
-              <a:rPr lang="en-US" dirty="0"/>
-              <a:t>If you feel that you had a good first interview, what is the probability you will receive a second interview?</a:t>
-            </a:r>
-          </a:p>
-          <a:p>
-            <a:pPr marL="285750" indent="-285750">
-              <a:buFont typeface="Arial" panose="020B0604020202020204" pitchFamily="34" charset="0"/>
-              <a:buChar char="•"/>
-            </a:pPr>
-            <a:endParaRPr lang="en-US" dirty="0"/>
-          </a:p>
-          <a:p>
-            <a:pPr marL="285750" indent="-285750">
-              <a:buFont typeface="Arial" panose="020B0604020202020204" pitchFamily="34" charset="0"/>
-              <a:buChar char="•"/>
-            </a:pPr>
-            <a:r>
-              <a:rPr lang="en-US" dirty="0"/>
-              <a:t>You're about to get on a plane to Seattle. You want to know if you should bring an umbrella. You call 3 random friends of yours who live there and ask each independently if it's raining. Each of your friends has a 2/3 chance of telling you the truth and a 1/3 chance of messing with you by lying. All 3 friends tell you that "Yes" it is raining. What is the probability that it's actually raining in Seattle?</a:t>
-            </a:r>
-          </a:p>
-          <a:p>
-            <a:pPr marL="285750" indent="-285750">
-              <a:buFont typeface="Arial" panose="020B0604020202020204" pitchFamily="34" charset="0"/>
-              <a:buChar char="•"/>
-            </a:pPr>
-            <a:endParaRPr lang="en-US" dirty="0"/>
-          </a:p>
-          <a:p>
-            <a:pPr marL="285750" indent="-285750">
-              <a:buFont typeface="Arial" panose="020B0604020202020204" pitchFamily="34" charset="0"/>
-              <a:buChar char="•"/>
-            </a:pPr>
-            <a:r>
-              <a:rPr lang="en-US" dirty="0"/>
-              <a:t>Drawing a pair of (x, y) from a joint Gaussian distribution with 0 covariance. Knowing the </a:t>
-            </a:r>
-            <a:r>
-              <a:rPr lang="en-US" dirty="0" err="1"/>
-              <a:t>stndard</a:t>
-            </a:r>
-            <a:r>
-              <a:rPr lang="en-US" dirty="0"/>
-              <a:t> deviations of x and y and knowing z = x + y, what is your best guess for x? </a:t>
-            </a:r>
-          </a:p>
-          <a:p>
-            <a:pPr marL="285750" indent="-285750">
-              <a:buFont typeface="Arial" panose="020B0604020202020204" pitchFamily="34" charset="0"/>
-              <a:buChar char="•"/>
-            </a:pPr>
-            <a:endParaRPr lang="en-US" dirty="0"/>
-          </a:p>
-          <a:p>
-            <a:pPr marL="285750" indent="-285750">
-              <a:buFont typeface="Arial" panose="020B0604020202020204" pitchFamily="34" charset="0"/>
-              <a:buChar char="•"/>
-            </a:pPr>
-            <a:r>
-              <a:rPr lang="en-US" dirty="0"/>
-              <a:t>5 babies in a room, 2 boys and 3 girls. one baby with unknown sex is added. Randomly choose one baby and the result is a boy. What's the prob that the added baby is a boy?</a:t>
-            </a:r>
-          </a:p>
-        </p:txBody>
-      </p:sp>
-      <p:sp>
-        <p:nvSpPr>
-          <p:cNvPr id="4" name="TextBox 3">
-            <a:extLst>
-              <a:ext uri="{FF2B5EF4-FFF2-40B4-BE49-F238E27FC236}">
-                <a16:creationId xmlns:a16="http://schemas.microsoft.com/office/drawing/2014/main" id="{1233587D-200E-7241-9DB9-3DF608B2814A}"/>
-              </a:ext>
-            </a:extLst>
-          </p:cNvPr>
-          <p:cNvSpPr txBox="1"/>
-          <p:nvPr/>
-        </p:nvSpPr>
-        <p:spPr>
-          <a:xfrm>
-            <a:off x="118753" y="5700156"/>
-            <a:ext cx="9239003" cy="738664"/>
-          </a:xfrm>
-          <a:prstGeom prst="rect">
-            <a:avLst/>
-          </a:prstGeom>
-          <a:noFill/>
-        </p:spPr>
-        <p:txBody>
-          <a:bodyPr wrap="square" rtlCol="0">
-            <a:spAutoFit/>
-          </a:bodyPr>
-          <a:lstStyle/>
-          <a:p>
-            <a:r>
-              <a:rPr lang="en-US" dirty="0"/>
-              <a:t> - </a:t>
-            </a:r>
-            <a:r>
-              <a:rPr lang="en-US" dirty="0">
-                <a:hlinkClick r:id="rId2"/>
-              </a:rPr>
-              <a:t>https://www.glassdoor.com/Interview/bayesian-interview-questions-SRCH_KT0,8.htm</a:t>
-            </a:r>
-            <a:r>
-              <a:rPr lang="en-US" dirty="0"/>
-              <a:t> – </a:t>
-            </a:r>
-          </a:p>
-          <a:p>
-            <a:r>
-              <a:rPr lang="en-US" dirty="0"/>
-              <a:t> - - </a:t>
-            </a:r>
-          </a:p>
-          <a:p>
-            <a:endParaRPr lang="en-US" dirty="0"/>
-          </a:p>
-        </p:txBody>
-      </p:sp>
-    </p:spTree>
-    <p:extLst>
-      <p:ext uri="{BB962C8B-B14F-4D97-AF65-F5344CB8AC3E}">
-        <p14:creationId xmlns:p14="http://schemas.microsoft.com/office/powerpoint/2010/main" val="2196273078"/>
-      </p:ext>
-    </p:extLst>
-  </p:cSld>
-  <p:clrMapOvr>
-    <a:masterClrMapping/>
-  </p:clrMapOvr>
-</p:sld>
-</file>
-
 <file path=ppt/slides/slide2.xml><?xml version="1.0" encoding="utf-8"?>
 <p:sld xmlns:a="http://schemas.openxmlformats.org/drawingml/2006/main" xmlns:r="http://schemas.openxmlformats.org/officeDocument/2006/relationships" xmlns:p="http://schemas.openxmlformats.org/presentationml/2006/main">
   <p:cSld>
@@ -21607,6 +23407,275 @@
     <p:extLst>
       <p:ext uri="{BB962C8B-B14F-4D97-AF65-F5344CB8AC3E}">
         <p14:creationId xmlns:p14="http://schemas.microsoft.com/office/powerpoint/2010/main" val="3774625219"/>
+      </p:ext>
+    </p:extLst>
+  </p:cSld>
+  <p:clrMapOvr>
+    <a:masterClrMapping/>
+  </p:clrMapOvr>
+</p:sld>
+</file>
+
+<file path=ppt/slides/slide20.xml><?xml version="1.0" encoding="utf-8"?>
+<p:sld xmlns:a="http://schemas.openxmlformats.org/drawingml/2006/main" xmlns:r="http://schemas.openxmlformats.org/officeDocument/2006/relationships" xmlns:p="http://schemas.openxmlformats.org/presentationml/2006/main">
+  <p:cSld>
+    <p:spTree>
+      <p:nvGrpSpPr>
+        <p:cNvPr id="1" name=""/>
+        <p:cNvGrpSpPr/>
+        <p:nvPr/>
+      </p:nvGrpSpPr>
+      <p:grpSpPr>
+        <a:xfrm>
+          <a:off x="0" y="0"/>
+          <a:ext cx="0" cy="0"/>
+          <a:chOff x="0" y="0"/>
+          <a:chExt cx="0" cy="0"/>
+        </a:xfrm>
+      </p:grpSpPr>
+      <p:sp>
+        <p:nvSpPr>
+          <p:cNvPr id="2" name="TextBox 1">
+            <a:extLst>
+              <a:ext uri="{FF2B5EF4-FFF2-40B4-BE49-F238E27FC236}">
+                <a16:creationId xmlns:a16="http://schemas.microsoft.com/office/drawing/2014/main" id="{866E1CEB-F40C-EB46-AE42-94921324FD7D}"/>
+              </a:ext>
+            </a:extLst>
+          </p:cNvPr>
+          <p:cNvSpPr txBox="1"/>
+          <p:nvPr/>
+        </p:nvSpPr>
+        <p:spPr>
+          <a:xfrm>
+            <a:off x="-1" y="37572"/>
+            <a:ext cx="8277101" cy="400110"/>
+          </a:xfrm>
+          <a:prstGeom prst="rect">
+            <a:avLst/>
+          </a:prstGeom>
+          <a:noFill/>
+        </p:spPr>
+        <p:txBody>
+          <a:bodyPr wrap="square" rtlCol="0">
+            <a:spAutoFit/>
+          </a:bodyPr>
+          <a:lstStyle/>
+          <a:p>
+            <a:r>
+              <a:rPr lang="en-US" sz="2000" b="1" dirty="0"/>
+              <a:t>Bayesian Exercise Questions &amp; Conditional Probability Questions</a:t>
+            </a:r>
+          </a:p>
+        </p:txBody>
+      </p:sp>
+      <p:sp>
+        <p:nvSpPr>
+          <p:cNvPr id="3" name="TextBox 2">
+            <a:extLst>
+              <a:ext uri="{FF2B5EF4-FFF2-40B4-BE49-F238E27FC236}">
+                <a16:creationId xmlns:a16="http://schemas.microsoft.com/office/drawing/2014/main" id="{42F87632-23F8-1548-BE7C-6E509D69DC76}"/>
+              </a:ext>
+            </a:extLst>
+          </p:cNvPr>
+          <p:cNvSpPr txBox="1"/>
+          <p:nvPr/>
+        </p:nvSpPr>
+        <p:spPr>
+          <a:xfrm>
+            <a:off x="118753" y="560792"/>
+            <a:ext cx="8906494" cy="4185761"/>
+          </a:xfrm>
+          <a:prstGeom prst="rect">
+            <a:avLst/>
+          </a:prstGeom>
+          <a:noFill/>
+        </p:spPr>
+        <p:txBody>
+          <a:bodyPr wrap="square" rtlCol="0">
+            <a:spAutoFit/>
+          </a:bodyPr>
+          <a:lstStyle/>
+          <a:p>
+            <a:pPr marL="285750" indent="-285750">
+              <a:buFont typeface="Arial" panose="020B0604020202020204" pitchFamily="34" charset="0"/>
+              <a:buChar char="•"/>
+            </a:pPr>
+            <a:r>
+              <a:rPr lang="en-US" dirty="0"/>
+              <a:t>A jar has 1000 coins, of which 999 are fair and 1 is double-headed. </a:t>
+            </a:r>
+            <a:br>
+              <a:rPr lang="en-US" dirty="0"/>
+            </a:br>
+            <a:r>
+              <a:rPr lang="en-US" dirty="0"/>
+              <a:t>Pick a coin at random, and toss it 10 times. </a:t>
+            </a:r>
+            <a:br>
+              <a:rPr lang="en-US" dirty="0"/>
+            </a:br>
+            <a:r>
+              <a:rPr lang="en-US" dirty="0"/>
+              <a:t>Given that you see 10 heads, what is the probability that the next toss of that coin is also a head?</a:t>
+            </a:r>
+          </a:p>
+          <a:p>
+            <a:pPr marL="285750" indent="-285750">
+              <a:buFont typeface="Arial" panose="020B0604020202020204" pitchFamily="34" charset="0"/>
+              <a:buChar char="•"/>
+            </a:pPr>
+            <a:endParaRPr lang="en-US" dirty="0"/>
+          </a:p>
+          <a:p>
+            <a:pPr marL="285750" indent="-285750">
+              <a:buFont typeface="Arial" panose="020B0604020202020204" pitchFamily="34" charset="0"/>
+              <a:buChar char="•"/>
+            </a:pPr>
+            <a:r>
+              <a:rPr lang="en-US" dirty="0"/>
+              <a:t>50% of all people who receive a first interview receive a second interview.</a:t>
+            </a:r>
+            <a:br>
+              <a:rPr lang="en-US" dirty="0"/>
+            </a:br>
+            <a:r>
+              <a:rPr lang="en-US" dirty="0"/>
+              <a:t>95% of those who got a second interview felt they had a good first interview.</a:t>
+            </a:r>
+            <a:br>
+              <a:rPr lang="en-US" dirty="0"/>
+            </a:br>
+            <a:r>
+              <a:rPr lang="en-US" dirty="0"/>
+              <a:t>75% of those who didn't get a second interview felt they had a good first interview.</a:t>
+            </a:r>
+            <a:br>
+              <a:rPr lang="en-US" dirty="0"/>
+            </a:br>
+            <a:r>
+              <a:rPr lang="en-US" dirty="0"/>
+              <a:t>If you feel that you had a good first interview, what is the probability you will receive a second interview?</a:t>
+            </a:r>
+          </a:p>
+          <a:p>
+            <a:pPr marL="285750" indent="-285750">
+              <a:buFont typeface="Arial" panose="020B0604020202020204" pitchFamily="34" charset="0"/>
+              <a:buChar char="•"/>
+            </a:pPr>
+            <a:endParaRPr lang="en-US" dirty="0"/>
+          </a:p>
+          <a:p>
+            <a:pPr marL="285750" indent="-285750">
+              <a:buFont typeface="Arial" panose="020B0604020202020204" pitchFamily="34" charset="0"/>
+              <a:buChar char="•"/>
+            </a:pPr>
+            <a:r>
+              <a:rPr lang="en-US" dirty="0"/>
+              <a:t>You're about to get on a plane to Seattle. You want to know if you should bring an umbrella. You call 3 random friends of yours who live there and ask each independently if it's raining. Each of your friends has a 2/3 chance of telling you the truth and a 1/3 chance of messing with you by lying. All 3 friends tell you that "Yes" it is raining. What is the probability that it's actually raining in Seattle?</a:t>
+            </a:r>
+          </a:p>
+          <a:p>
+            <a:pPr marL="285750" indent="-285750">
+              <a:buFont typeface="Arial" panose="020B0604020202020204" pitchFamily="34" charset="0"/>
+              <a:buChar char="•"/>
+            </a:pPr>
+            <a:endParaRPr lang="en-US" dirty="0"/>
+          </a:p>
+          <a:p>
+            <a:pPr marL="285750" indent="-285750">
+              <a:buFont typeface="Arial" panose="020B0604020202020204" pitchFamily="34" charset="0"/>
+              <a:buChar char="•"/>
+            </a:pPr>
+            <a:r>
+              <a:rPr lang="en-US" dirty="0"/>
+              <a:t>Drawing a pair of (x, y) from a joint Gaussian distribution with 0 covariance. Knowing the </a:t>
+            </a:r>
+            <a:r>
+              <a:rPr lang="en-US" dirty="0" err="1"/>
+              <a:t>stndard</a:t>
+            </a:r>
+            <a:r>
+              <a:rPr lang="en-US" dirty="0"/>
+              <a:t> deviations of x and y and knowing z = x + y, what is your best guess for x? </a:t>
+            </a:r>
+          </a:p>
+          <a:p>
+            <a:pPr marL="285750" indent="-285750">
+              <a:buFont typeface="Arial" panose="020B0604020202020204" pitchFamily="34" charset="0"/>
+              <a:buChar char="•"/>
+            </a:pPr>
+            <a:endParaRPr lang="en-US" dirty="0"/>
+          </a:p>
+          <a:p>
+            <a:pPr marL="285750" indent="-285750">
+              <a:buFont typeface="Arial" panose="020B0604020202020204" pitchFamily="34" charset="0"/>
+              <a:buChar char="•"/>
+            </a:pPr>
+            <a:r>
+              <a:rPr lang="en-US" dirty="0"/>
+              <a:t>5 babies in a room, 2 boys and 3 girls. one baby with unknown sex is added. Randomly choose one baby and the result is a boy. What's the prob that the added baby is a boy?</a:t>
+            </a:r>
+          </a:p>
+        </p:txBody>
+      </p:sp>
+      <p:sp>
+        <p:nvSpPr>
+          <p:cNvPr id="4" name="TextBox 3">
+            <a:extLst>
+              <a:ext uri="{FF2B5EF4-FFF2-40B4-BE49-F238E27FC236}">
+                <a16:creationId xmlns:a16="http://schemas.microsoft.com/office/drawing/2014/main" id="{1233587D-200E-7241-9DB9-3DF608B2814A}"/>
+              </a:ext>
+            </a:extLst>
+          </p:cNvPr>
+          <p:cNvSpPr txBox="1"/>
+          <p:nvPr/>
+        </p:nvSpPr>
+        <p:spPr>
+          <a:xfrm>
+            <a:off x="118753" y="5700156"/>
+            <a:ext cx="9239003" cy="738664"/>
+          </a:xfrm>
+          <a:prstGeom prst="rect">
+            <a:avLst/>
+          </a:prstGeom>
+          <a:noFill/>
+        </p:spPr>
+        <p:txBody>
+          <a:bodyPr wrap="square" rtlCol="0">
+            <a:spAutoFit/>
+          </a:bodyPr>
+          <a:lstStyle/>
+          <a:p>
+            <a:r>
+              <a:rPr lang="en-US" dirty="0"/>
+              <a:t> - </a:t>
+            </a:r>
+            <a:r>
+              <a:rPr lang="en-US" dirty="0">
+                <a:hlinkClick r:id="rId2"/>
+              </a:rPr>
+              <a:t>https://www.glassdoor.com/Interview/bayesian-interview-questions-SRCH_KT0,8.htm</a:t>
+            </a:r>
+            <a:r>
+              <a:rPr lang="en-US" dirty="0"/>
+              <a:t> – </a:t>
+            </a:r>
+          </a:p>
+          <a:p>
+            <a:r>
+              <a:rPr lang="en-US" dirty="0"/>
+              <a:t> - - </a:t>
+            </a:r>
+          </a:p>
+          <a:p>
+            <a:endParaRPr lang="en-US" dirty="0"/>
+          </a:p>
+        </p:txBody>
+      </p:sp>
+    </p:spTree>
+    <p:extLst>
+      <p:ext uri="{BB962C8B-B14F-4D97-AF65-F5344CB8AC3E}">
+        <p14:creationId xmlns:p14="http://schemas.microsoft.com/office/powerpoint/2010/main" val="2196273078"/>
       </p:ext>
     </p:extLst>
   </p:cSld>
@@ -24338,7 +26407,7 @@
         <p:spPr>
           <a:xfrm>
             <a:off x="340391" y="921460"/>
-            <a:ext cx="5560001" cy="2893100"/>
+            <a:ext cx="5345301" cy="3108543"/>
           </a:xfrm>
           <a:prstGeom prst="rect">
             <a:avLst/>
@@ -24373,7 +26442,14 @@
             </a:r>
             <a:r>
               <a:rPr lang="en-US" dirty="0"/>
-              <a:t> see probability as finding intervals of possible frequencies based on an observed proportion.</a:t>
+              <a:t> see probability as finding intervals of possible</a:t>
+            </a:r>
+            <a:br>
+              <a:rPr lang="en-US" dirty="0"/>
+            </a:br>
+            <a:r>
+              <a:rPr lang="en-US" dirty="0"/>
+              <a:t>frequencies based on an observed proportion.</a:t>
             </a:r>
           </a:p>
           <a:p>
@@ -24394,7 +26470,31 @@
             </a:r>
             <a:r>
               <a:rPr lang="en-US" dirty="0"/>
-              <a:t> is subjective and uses a priori beliefs to define a prior probability distribution on the possible values of the unknown parameters – and computing their probabilities (solving </a:t>
+              <a:t> is subjective and uses a priori beliefs </a:t>
+            </a:r>
+          </a:p>
+          <a:p>
+            <a:r>
+              <a:rPr lang="en-US" dirty="0"/>
+              <a:t>to define a prior probability distribution </a:t>
+            </a:r>
+          </a:p>
+          <a:p>
+            <a:r>
+              <a:rPr lang="en-US" dirty="0"/>
+              <a:t>on the possible values of the unknown parameters</a:t>
+            </a:r>
+          </a:p>
+          <a:p>
+            <a:r>
+              <a:rPr lang="en-US" dirty="0"/>
+              <a:t>and computing their probabilities </a:t>
+            </a:r>
+          </a:p>
+          <a:p>
+            <a:r>
+              <a:rPr lang="en-US" dirty="0"/>
+              <a:t>(solving </a:t>
             </a:r>
             <a:r>
               <a:rPr lang="en-US" b="1" dirty="0">
@@ -24423,7 +26523,13 @@
             </a:r>
             <a:r>
               <a:rPr lang="en-US" dirty="0"/>
-              <a:t> accuse Bayesians for being subjective in selecting a prior model / distribution. </a:t>
+              <a:t> accuse Bayesians for being subjective </a:t>
+            </a:r>
+          </a:p>
+          <a:p>
+            <a:r>
+              <a:rPr lang="en-US" dirty="0"/>
+              <a:t>in selecting a prior model / distribution. </a:t>
             </a:r>
           </a:p>
           <a:p>
@@ -24440,7 +26546,13 @@
             </a:r>
             <a:r>
               <a:rPr lang="en-US" dirty="0"/>
-              <a:t> snap back that at least they have a model, whereas Frequentists just calculate averages of observed data</a:t>
+              <a:t> snap back that at least they have a model, </a:t>
+            </a:r>
+          </a:p>
+          <a:p>
+            <a:r>
+              <a:rPr lang="en-US" dirty="0"/>
+              <a:t>whereas Frequentists just calculate averages of observed data</a:t>
             </a:r>
           </a:p>
         </p:txBody>

--- a/statistics_08_Bayes_Bayesian.pptx
+++ b/statistics_08_Bayes_Bayesian.pptx
@@ -19,9 +19,9 @@
     <p:sldId id="293" r:id="rId10"/>
     <p:sldId id="294" r:id="rId11"/>
     <p:sldId id="298" r:id="rId12"/>
-    <p:sldId id="299" r:id="rId13"/>
-    <p:sldId id="301" r:id="rId14"/>
-    <p:sldId id="302" r:id="rId15"/>
+    <p:sldId id="302" r:id="rId13"/>
+    <p:sldId id="299" r:id="rId14"/>
+    <p:sldId id="301" r:id="rId15"/>
     <p:sldId id="303" r:id="rId16"/>
     <p:sldId id="304" r:id="rId17"/>
     <p:sldId id="300" r:id="rId18"/>
@@ -18424,7 +18424,7 @@
         <p:spPr>
           <a:xfrm>
             <a:off x="0" y="37572"/>
-            <a:ext cx="4572000" cy="523220"/>
+            <a:ext cx="3607496" cy="830997"/>
           </a:xfrm>
           <a:prstGeom prst="rect">
             <a:avLst/>
@@ -18438,8 +18438,22 @@
           <a:lstStyle/>
           <a:p>
             <a:r>
-              <a:rPr lang="en-US" sz="2800" b="1" dirty="0"/>
+              <a:rPr lang="en-US" sz="2400" b="1" dirty="0">
+                <a:solidFill>
+                  <a:srgbClr val="0070C0"/>
+                </a:solidFill>
+              </a:rPr>
               <a:t>Bayesian Inference</a:t>
+            </a:r>
+          </a:p>
+          <a:p>
+            <a:r>
+              <a:rPr lang="en-US" sz="2400" b="1" dirty="0">
+                <a:solidFill>
+                  <a:srgbClr val="0070C0"/>
+                </a:solidFill>
+              </a:rPr>
+              <a:t>Bayesian Estimation</a:t>
             </a:r>
           </a:p>
         </p:txBody>
@@ -18458,8 +18472,8 @@
         </p:nvSpPr>
         <p:spPr>
           <a:xfrm>
-            <a:off x="130629" y="736270"/>
-            <a:ext cx="7125194" cy="5970865"/>
+            <a:off x="3607496" y="5834758"/>
+            <a:ext cx="7298871" cy="1015663"/>
           </a:xfrm>
           <a:prstGeom prst="rect">
             <a:avLst/>
@@ -18472,73 +18486,20 @@
           </a:bodyPr>
           <a:lstStyle/>
           <a:p>
-            <a:r>
-              <a:rPr lang="en-US" dirty="0"/>
-              <a:t>Bayesian inference is a method of statistical inference </a:t>
-            </a:r>
-          </a:p>
-          <a:p>
-            <a:r>
-              <a:rPr lang="en-US" dirty="0"/>
-              <a:t>in which Bayes' theorem is used to update the probability</a:t>
-            </a:r>
-          </a:p>
-          <a:p>
-            <a:r>
-              <a:rPr lang="en-US" dirty="0"/>
-              <a:t>for a hypothesis as more evidence or information becomes available. </a:t>
-            </a:r>
-          </a:p>
-          <a:p>
-            <a:endParaRPr lang="en-US" dirty="0"/>
-          </a:p>
-          <a:p>
-            <a:r>
-              <a:rPr lang="en-US" dirty="0"/>
-              <a:t>Examples of typical problems:</a:t>
-            </a:r>
-          </a:p>
-          <a:p>
-            <a:endParaRPr lang="en-US" dirty="0"/>
-          </a:p>
-          <a:p>
             <a:pPr marL="285750" indent="-285750">
               <a:buFont typeface="Arial" panose="020B0604020202020204" pitchFamily="34" charset="0"/>
               <a:buChar char="•"/>
             </a:pPr>
             <a:r>
-              <a:rPr lang="en-US" dirty="0"/>
-              <a:t>Estimate the bias of a coin. We need to estimate P(</a:t>
-            </a:r>
-            <a:r>
-              <a:rPr lang="el-GR" dirty="0"/>
-              <a:t>θ</a:t>
-            </a:r>
-            <a:r>
-              <a:rPr lang="en-US" dirty="0"/>
-              <a:t>), where </a:t>
-            </a:r>
-            <a:r>
-              <a:rPr lang="el-GR" dirty="0"/>
-              <a:t>θ</a:t>
-            </a:r>
-            <a:r>
-              <a:rPr lang="en-US" dirty="0"/>
-              <a:t> is the proportion of heads. - </a:t>
-            </a:r>
-            <a:r>
-              <a:rPr lang="en-US" dirty="0">
+              <a:rPr lang="en-US" sz="1000" dirty="0">
                 <a:hlinkClick r:id="rId2"/>
               </a:rPr>
-              <a:t>https://www.youtube.com/watch?v=Pahyv9i_X2k</a:t>
-            </a:r>
-            <a:r>
-              <a:rPr lang="en-US" dirty="0"/>
+              <a:t>https://en.wikipedia.org/wiki/Bayesian_inference</a:t>
+            </a:r>
+            <a:r>
+              <a:rPr lang="en-US" sz="1000" dirty="0"/>
               <a:t> </a:t>
             </a:r>
-          </a:p>
-          <a:p>
-            <a:endParaRPr lang="en-US" dirty="0"/>
           </a:p>
           <a:p>
             <a:pPr marL="285750" indent="-285750">
@@ -18546,70 +18507,15 @@
               <a:buChar char="•"/>
             </a:pPr>
             <a:r>
-              <a:rPr lang="en-US" dirty="0"/>
-              <a:t>We have 50 data samples x</a:t>
-            </a:r>
-            <a:r>
-              <a:rPr lang="en-US" baseline="-25000" dirty="0"/>
-              <a:t>1</a:t>
-            </a:r>
-            <a:r>
-              <a:rPr lang="en-US" dirty="0"/>
-              <a:t> .. x</a:t>
-            </a:r>
-            <a:r>
-              <a:rPr lang="en-US" baseline="-25000" dirty="0"/>
-              <a:t>50</a:t>
-            </a:r>
-            <a:r>
-              <a:rPr lang="en-US" dirty="0"/>
-              <a:t> which presumably follow exponential probability distribution </a:t>
-            </a:r>
-            <a:r>
-              <a:rPr lang="el-GR" b="1" dirty="0"/>
-              <a:t>λ</a:t>
-            </a:r>
-            <a:r>
-              <a:rPr lang="en-US" b="1" dirty="0"/>
-              <a:t>e</a:t>
-            </a:r>
-            <a:r>
-              <a:rPr lang="en-US" b="1" baseline="30000" dirty="0"/>
-              <a:t>-</a:t>
-            </a:r>
-            <a:r>
-              <a:rPr lang="el-GR" b="1" baseline="30000" dirty="0"/>
-              <a:t>λ</a:t>
-            </a:r>
-            <a:r>
-              <a:rPr lang="en-US" b="1" baseline="30000" dirty="0"/>
-              <a:t>x</a:t>
-            </a:r>
-            <a:r>
-              <a:rPr lang="en-US" dirty="0"/>
-              <a:t> . Estimate </a:t>
-            </a:r>
-            <a:r>
-              <a:rPr lang="el-GR" b="1" dirty="0"/>
-              <a:t>λ</a:t>
-            </a:r>
-            <a:r>
-              <a:rPr lang="en-US" dirty="0"/>
-              <a:t> . - </a:t>
-            </a:r>
-            <a:r>
-              <a:rPr lang="en-US" dirty="0">
+              <a:rPr lang="en-US" sz="1000" dirty="0">
                 <a:hlinkClick r:id="rId3"/>
               </a:rPr>
-              <a:t>https://www.youtube.com/watch?v=I4dkEALQv34</a:t>
-            </a:r>
-            <a:r>
-              <a:rPr lang="en-US" dirty="0"/>
+              <a:t>https://towardsdatascience.com/probability-concepts-explained-bayesian-inference-for-parameter-estimation-90e8930e5348</a:t>
+            </a:r>
+            <a:r>
+              <a:rPr lang="en-US" sz="1000" dirty="0"/>
               <a:t> </a:t>
             </a:r>
-          </a:p>
-          <a:p>
-            <a:endParaRPr lang="en-US" dirty="0"/>
           </a:p>
           <a:p>
             <a:pPr marL="285750" indent="-285750">
@@ -18617,22 +18523,15 @@
               <a:buChar char="•"/>
             </a:pPr>
             <a:r>
-              <a:rPr lang="en-US" dirty="0"/>
-              <a:t>We have sample of 10 children, 3 of them are literate (can read). We need to evaluate number of children who can read in the population. We presume that children are independent, that population is uniform, etc. We can use binomial distribution. - </a:t>
-            </a:r>
-            <a:r>
-              <a:rPr lang="en-US" dirty="0">
+              <a:rPr lang="en-US" sz="1000" dirty="0">
                 <a:hlinkClick r:id="rId4"/>
               </a:rPr>
-              <a:t>https://www.youtube.com/watch?v=yvWlpwnT1nw</a:t>
-            </a:r>
-            <a:r>
-              <a:rPr lang="en-US" dirty="0"/>
+              <a:t>https://www.probabilitycourse.com/chapter9/9_1_0_bayesian_inference.php</a:t>
+            </a:r>
+            <a:r>
+              <a:rPr lang="en-US" sz="1000" dirty="0"/>
               <a:t> </a:t>
             </a:r>
-          </a:p>
-          <a:p>
-            <a:endParaRPr lang="en-US" dirty="0"/>
           </a:p>
           <a:p>
             <a:pPr marL="285750" indent="-285750">
@@ -18640,29 +18539,15 @@
               <a:buChar char="•"/>
             </a:pPr>
             <a:r>
-              <a:rPr lang="en-US" dirty="0"/>
-              <a:t>We have 100 damaged flash drives which is a sample of much bigger set.</a:t>
-            </a:r>
-            <a:br>
-              <a:rPr lang="en-US" dirty="0"/>
-            </a:br>
-            <a:r>
-              <a:rPr lang="en-US" dirty="0"/>
-              <a:t>80% of these damaged drives have coffee stains on them.</a:t>
-            </a:r>
-            <a:br>
-              <a:rPr lang="en-US" dirty="0"/>
-            </a:br>
-            <a:r>
-              <a:rPr lang="en-US" dirty="0"/>
-              <a:t>Estimate probability (and credible interval) that coffee is causing the damage?</a:t>
-            </a:r>
-          </a:p>
-          <a:p>
-            <a:endParaRPr lang="en-US" dirty="0"/>
-          </a:p>
-          <a:p>
-            <a:endParaRPr lang="en-US" dirty="0"/>
+              <a:rPr lang="en-US" sz="1000" dirty="0">
+                <a:hlinkClick r:id="rId5"/>
+              </a:rPr>
+              <a:t>http://christianherta.de/lehre/dataScience/bayesian/introduction_into_bayesian_inference_with_pymc.slides.php</a:t>
+            </a:r>
+            <a:r>
+              <a:rPr lang="en-US" sz="1000" dirty="0"/>
+              <a:t> </a:t>
+            </a:r>
           </a:p>
           <a:p>
             <a:pPr marL="285750" indent="-285750">
@@ -18670,60 +18555,9 @@
               <a:buChar char="•"/>
             </a:pPr>
             <a:r>
-              <a:rPr lang="en-US" sz="1200" dirty="0">
-                <a:hlinkClick r:id="rId5"/>
-              </a:rPr>
-              <a:t>https://en.wikipedia.org/wiki/Bayesian_inference</a:t>
-            </a:r>
-            <a:r>
-              <a:rPr lang="en-US" sz="1200" dirty="0"/>
-              <a:t> </a:t>
-            </a:r>
-          </a:p>
-          <a:p>
-            <a:pPr marL="285750" indent="-285750">
-              <a:buFont typeface="Arial" panose="020B0604020202020204" pitchFamily="34" charset="0"/>
-              <a:buChar char="•"/>
-            </a:pPr>
-            <a:r>
-              <a:rPr lang="en-US" sz="1200" dirty="0">
-                <a:hlinkClick r:id="rId6"/>
-              </a:rPr>
-              <a:t>https://towardsdatascience.com/probability-concepts-explained-bayesian-inference-for-parameter-estimation-90e8930e5348</a:t>
-            </a:r>
-            <a:r>
-              <a:rPr lang="en-US" sz="1200" dirty="0"/>
-              <a:t> </a:t>
-            </a:r>
-          </a:p>
-          <a:p>
-            <a:pPr marL="285750" indent="-285750">
-              <a:buFont typeface="Arial" panose="020B0604020202020204" pitchFamily="34" charset="0"/>
-              <a:buChar char="•"/>
-            </a:pPr>
-            <a:r>
-              <a:rPr lang="en-US" sz="1200" dirty="0">
-                <a:hlinkClick r:id="rId7"/>
-              </a:rPr>
-              <a:t>https://www.probabilitycourse.com/chapter9/9_1_0_bayesian_inference.php</a:t>
-            </a:r>
-            <a:r>
-              <a:rPr lang="en-US" sz="1200" dirty="0"/>
-              <a:t> </a:t>
-            </a:r>
-          </a:p>
-          <a:p>
-            <a:pPr marL="285750" indent="-285750">
-              <a:buFont typeface="Arial" panose="020B0604020202020204" pitchFamily="34" charset="0"/>
-              <a:buChar char="•"/>
-            </a:pPr>
-            <a:r>
-              <a:rPr lang="en-US" sz="1200" dirty="0"/>
+              <a:rPr lang="en-US" sz="1000" dirty="0"/>
               <a:t>--</a:t>
             </a:r>
-          </a:p>
-          <a:p>
-            <a:endParaRPr lang="en-US" dirty="0"/>
           </a:p>
         </p:txBody>
       </p:sp>
@@ -18742,7 +18576,7 @@
           <p:nvPr/>
         </p:nvPicPr>
         <p:blipFill rotWithShape="1">
-          <a:blip r:embed="rId8" cstate="email">
+          <a:blip r:embed="rId6" cstate="email">
             <a:extLst>
               <a:ext uri="{28A0092B-C50C-407E-A947-70E740481C1C}">
                 <a14:useLocalDpi xmlns:a14="http://schemas.microsoft.com/office/drawing/2010/main"/>
@@ -18803,6 +18637,474 @@
             <a:r>
               <a:rPr lang="en-US" dirty="0"/>
               <a:t>Page Under Construction</a:t>
+            </a:r>
+          </a:p>
+        </p:txBody>
+      </p:sp>
+      <p:sp>
+        <p:nvSpPr>
+          <p:cNvPr id="7" name="TextBox 6">
+            <a:extLst>
+              <a:ext uri="{FF2B5EF4-FFF2-40B4-BE49-F238E27FC236}">
+                <a16:creationId xmlns:a16="http://schemas.microsoft.com/office/drawing/2014/main" id="{2690C9AC-6D70-EA4B-91BC-9BE4C7BA8CA9}"/>
+              </a:ext>
+            </a:extLst>
+          </p:cNvPr>
+          <p:cNvSpPr txBox="1"/>
+          <p:nvPr/>
+        </p:nvSpPr>
+        <p:spPr>
+          <a:xfrm>
+            <a:off x="0" y="1099282"/>
+            <a:ext cx="7298871" cy="4616648"/>
+          </a:xfrm>
+          <a:prstGeom prst="rect">
+            <a:avLst/>
+          </a:prstGeom>
+          <a:noFill/>
+        </p:spPr>
+        <p:txBody>
+          <a:bodyPr wrap="square" rtlCol="0">
+            <a:spAutoFit/>
+          </a:bodyPr>
+          <a:lstStyle/>
+          <a:p>
+            <a:r>
+              <a:rPr lang="en-US" dirty="0"/>
+              <a:t>Bayesian inference is a method of statistical inference </a:t>
+            </a:r>
+          </a:p>
+          <a:p>
+            <a:r>
+              <a:rPr lang="en-US" dirty="0"/>
+              <a:t>in which Bayes' theorem is used to update the probability</a:t>
+            </a:r>
+          </a:p>
+          <a:p>
+            <a:r>
+              <a:rPr lang="en-US" dirty="0"/>
+              <a:t>for </a:t>
+            </a:r>
+            <a:r>
+              <a:rPr lang="en-US" b="1" dirty="0">
+                <a:solidFill>
+                  <a:srgbClr val="0070C0"/>
+                </a:solidFill>
+              </a:rPr>
+              <a:t>a hypothesis</a:t>
+            </a:r>
+            <a:r>
+              <a:rPr lang="en-US" dirty="0"/>
+              <a:t> as more evidence or information </a:t>
+            </a:r>
+          </a:p>
+          <a:p>
+            <a:r>
+              <a:rPr lang="en-US" dirty="0"/>
+              <a:t>becomes available. </a:t>
+            </a:r>
+          </a:p>
+          <a:p>
+            <a:endParaRPr lang="en-US" dirty="0"/>
+          </a:p>
+          <a:p>
+            <a:r>
+              <a:rPr lang="en-US" dirty="0"/>
+              <a:t>Examples of typical problems:</a:t>
+            </a:r>
+          </a:p>
+          <a:p>
+            <a:endParaRPr lang="en-US" dirty="0"/>
+          </a:p>
+          <a:p>
+            <a:pPr marL="342900" indent="-342900">
+              <a:buFont typeface="+mj-lt"/>
+              <a:buAutoNum type="arabicPeriod"/>
+            </a:pPr>
+            <a:r>
+              <a:rPr lang="en-US" dirty="0"/>
+              <a:t>We have sample of 10 children, 3 of them are literate (can read). We need to evaluate number of children who can read in the population. We presume that children are independent, that population is uniform, etc. We can use binomial distribution. - </a:t>
+            </a:r>
+            <a:r>
+              <a:rPr lang="en-US" dirty="0">
+                <a:hlinkClick r:id="rId7"/>
+              </a:rPr>
+              <a:t>https://www.youtube.com/watch?v=yvWlpwnT1nw</a:t>
+            </a:r>
+            <a:r>
+              <a:rPr lang="en-US" dirty="0"/>
+              <a:t> </a:t>
+            </a:r>
+          </a:p>
+          <a:p>
+            <a:pPr marL="342900" indent="-342900">
+              <a:buFont typeface="+mj-lt"/>
+              <a:buAutoNum type="arabicPeriod"/>
+            </a:pPr>
+            <a:endParaRPr lang="en-US" dirty="0"/>
+          </a:p>
+          <a:p>
+            <a:pPr marL="342900" indent="-342900">
+              <a:buFont typeface="+mj-lt"/>
+              <a:buAutoNum type="arabicPeriod"/>
+            </a:pPr>
+            <a:r>
+              <a:rPr lang="en-US" dirty="0"/>
+              <a:t>We have 50 data samples x</a:t>
+            </a:r>
+            <a:r>
+              <a:rPr lang="en-US" baseline="-25000" dirty="0"/>
+              <a:t>1</a:t>
+            </a:r>
+            <a:r>
+              <a:rPr lang="en-US" dirty="0"/>
+              <a:t> .. x</a:t>
+            </a:r>
+            <a:r>
+              <a:rPr lang="en-US" baseline="-25000" dirty="0"/>
+              <a:t>50</a:t>
+            </a:r>
+            <a:r>
+              <a:rPr lang="en-US" dirty="0"/>
+              <a:t> which presumably follow exponential probability distribution </a:t>
+            </a:r>
+            <a:r>
+              <a:rPr lang="el-GR" b="1" dirty="0"/>
+              <a:t>λ</a:t>
+            </a:r>
+            <a:r>
+              <a:rPr lang="en-US" b="1" dirty="0"/>
+              <a:t>e</a:t>
+            </a:r>
+            <a:r>
+              <a:rPr lang="en-US" b="1" baseline="30000" dirty="0"/>
+              <a:t>-</a:t>
+            </a:r>
+            <a:r>
+              <a:rPr lang="el-GR" b="1" baseline="30000" dirty="0"/>
+              <a:t>λ</a:t>
+            </a:r>
+            <a:r>
+              <a:rPr lang="en-US" b="1" baseline="30000" dirty="0"/>
+              <a:t>x</a:t>
+            </a:r>
+            <a:r>
+              <a:rPr lang="en-US" dirty="0"/>
+              <a:t> . Estimate </a:t>
+            </a:r>
+            <a:r>
+              <a:rPr lang="el-GR" b="1" dirty="0"/>
+              <a:t>λ</a:t>
+            </a:r>
+            <a:r>
+              <a:rPr lang="en-US" dirty="0"/>
+              <a:t> . - </a:t>
+            </a:r>
+            <a:r>
+              <a:rPr lang="en-US" dirty="0">
+                <a:hlinkClick r:id="rId8"/>
+              </a:rPr>
+              <a:t>https://www.youtube.com/watch?v=I4dkEALQv34</a:t>
+            </a:r>
+            <a:r>
+              <a:rPr lang="en-US" dirty="0"/>
+              <a:t> </a:t>
+            </a:r>
+          </a:p>
+          <a:p>
+            <a:pPr marL="342900" indent="-342900">
+              <a:buFont typeface="+mj-lt"/>
+              <a:buAutoNum type="arabicPeriod"/>
+            </a:pPr>
+            <a:endParaRPr lang="en-US" dirty="0"/>
+          </a:p>
+          <a:p>
+            <a:pPr marL="342900" indent="-342900">
+              <a:buFont typeface="+mj-lt"/>
+              <a:buAutoNum type="arabicPeriod"/>
+            </a:pPr>
+            <a:r>
+              <a:rPr lang="en-US" dirty="0"/>
+              <a:t>Estimate the bias of a coin. We need to estimate P(</a:t>
+            </a:r>
+            <a:r>
+              <a:rPr lang="el-GR" dirty="0"/>
+              <a:t>θ</a:t>
+            </a:r>
+            <a:r>
+              <a:rPr lang="en-US" dirty="0"/>
+              <a:t>), where </a:t>
+            </a:r>
+            <a:r>
+              <a:rPr lang="el-GR" dirty="0"/>
+              <a:t>θ</a:t>
+            </a:r>
+            <a:r>
+              <a:rPr lang="en-US" dirty="0"/>
+              <a:t> is the proportion of heads. - </a:t>
+            </a:r>
+            <a:r>
+              <a:rPr lang="en-US" dirty="0">
+                <a:hlinkClick r:id="rId9"/>
+              </a:rPr>
+              <a:t>https://www.youtube.com/watch?v=Pahyv9i_X2k</a:t>
+            </a:r>
+            <a:r>
+              <a:rPr lang="en-US" dirty="0"/>
+              <a:t> </a:t>
+            </a:r>
+          </a:p>
+          <a:p>
+            <a:pPr marL="342900" indent="-342900">
+              <a:buFont typeface="+mj-lt"/>
+              <a:buAutoNum type="arabicPeriod"/>
+            </a:pPr>
+            <a:endParaRPr lang="en-US" dirty="0"/>
+          </a:p>
+          <a:p>
+            <a:pPr marL="342900" indent="-342900">
+              <a:buFont typeface="+mj-lt"/>
+              <a:buAutoNum type="arabicPeriod"/>
+            </a:pPr>
+            <a:r>
+              <a:rPr lang="en-US" dirty="0"/>
+              <a:t>We have 100 damaged flash drives which is a sample of much bigger set.</a:t>
+            </a:r>
+            <a:br>
+              <a:rPr lang="en-US" dirty="0"/>
+            </a:br>
+            <a:r>
+              <a:rPr lang="en-US" dirty="0"/>
+              <a:t>80% of these damaged drives have coffee stains on them.</a:t>
+            </a:r>
+            <a:br>
+              <a:rPr lang="en-US" dirty="0"/>
+            </a:br>
+            <a:r>
+              <a:rPr lang="en-US" dirty="0"/>
+              <a:t>Estimate probability (and credible interval) that coffee is causing the damage?</a:t>
+            </a:r>
+          </a:p>
+        </p:txBody>
+      </p:sp>
+      <p:pic>
+        <p:nvPicPr>
+          <p:cNvPr id="4" name="Picture 2" descr="Posterior Distribution - an overview | ScienceDirect Topics">
+            <a:extLst>
+              <a:ext uri="{FF2B5EF4-FFF2-40B4-BE49-F238E27FC236}">
+                <a16:creationId xmlns:a16="http://schemas.microsoft.com/office/drawing/2014/main" id="{CEA4947C-3142-0D4B-95C9-263473499FB2}"/>
+              </a:ext>
+            </a:extLst>
+          </p:cNvPr>
+          <p:cNvPicPr>
+            <a:picLocks noChangeAspect="1" noChangeArrowheads="1"/>
+          </p:cNvPicPr>
+          <p:nvPr/>
+        </p:nvPicPr>
+        <p:blipFill>
+          <a:blip r:embed="rId10" cstate="email">
+            <a:extLst>
+              <a:ext uri="{28A0092B-C50C-407E-A947-70E740481C1C}">
+                <a14:useLocalDpi xmlns:a14="http://schemas.microsoft.com/office/drawing/2010/main"/>
+              </a:ext>
+            </a:extLst>
+          </a:blip>
+          <a:srcRect/>
+          <a:stretch>
+            <a:fillRect/>
+          </a:stretch>
+        </p:blipFill>
+        <p:spPr bwMode="auto">
+          <a:xfrm>
+            <a:off x="9915832" y="2386702"/>
+            <a:ext cx="1995118" cy="2780430"/>
+          </a:xfrm>
+          <a:prstGeom prst="rect">
+            <a:avLst/>
+          </a:prstGeom>
+          <a:noFill/>
+          <a:extLst>
+            <a:ext uri="{909E8E84-426E-40DD-AFC4-6F175D3DCCD1}">
+              <a14:hiddenFill xmlns:a14="http://schemas.microsoft.com/office/drawing/2010/main">
+                <a:solidFill>
+                  <a:srgbClr val="FFFFFF"/>
+                </a:solidFill>
+              </a14:hiddenFill>
+            </a:ext>
+          </a:extLst>
+        </p:spPr>
+      </p:pic>
+      <p:sp>
+        <p:nvSpPr>
+          <p:cNvPr id="5" name="Down Arrow 4">
+            <a:extLst>
+              <a:ext uri="{FF2B5EF4-FFF2-40B4-BE49-F238E27FC236}">
+                <a16:creationId xmlns:a16="http://schemas.microsoft.com/office/drawing/2014/main" id="{568F8C97-730A-8142-88F6-9FFCFC9A61EB}"/>
+              </a:ext>
+            </a:extLst>
+          </p:cNvPr>
+          <p:cNvSpPr/>
+          <p:nvPr/>
+        </p:nvSpPr>
+        <p:spPr>
+          <a:xfrm>
+            <a:off x="8098972" y="2438218"/>
+            <a:ext cx="1621226" cy="2780430"/>
+          </a:xfrm>
+          <a:prstGeom prst="downArrow">
+            <a:avLst/>
+          </a:prstGeom>
+          <a:solidFill>
+            <a:schemeClr val="accent6">
+              <a:lumMod val="40000"/>
+              <a:lumOff val="60000"/>
+            </a:schemeClr>
+          </a:solidFill>
+          <a:ln>
+            <a:noFill/>
+          </a:ln>
+        </p:spPr>
+        <p:style>
+          <a:lnRef idx="2">
+            <a:schemeClr val="accent1">
+              <a:shade val="50000"/>
+            </a:schemeClr>
+          </a:lnRef>
+          <a:fillRef idx="1">
+            <a:schemeClr val="accent1"/>
+          </a:fillRef>
+          <a:effectRef idx="0">
+            <a:schemeClr val="accent1"/>
+          </a:effectRef>
+          <a:fontRef idx="minor">
+            <a:schemeClr val="lt1"/>
+          </a:fontRef>
+        </p:style>
+        <p:txBody>
+          <a:bodyPr rtlCol="0" anchor="ctr"/>
+          <a:lstStyle/>
+          <a:p>
+            <a:pPr algn="ctr"/>
+            <a:endParaRPr lang="en-US"/>
+          </a:p>
+        </p:txBody>
+      </p:sp>
+      <p:sp>
+        <p:nvSpPr>
+          <p:cNvPr id="8" name="TextBox 7">
+            <a:extLst>
+              <a:ext uri="{FF2B5EF4-FFF2-40B4-BE49-F238E27FC236}">
+                <a16:creationId xmlns:a16="http://schemas.microsoft.com/office/drawing/2014/main" id="{23DFD721-123D-204B-AFE0-D17539A91EDE}"/>
+              </a:ext>
+            </a:extLst>
+          </p:cNvPr>
+          <p:cNvSpPr txBox="1"/>
+          <p:nvPr/>
+        </p:nvSpPr>
+        <p:spPr>
+          <a:xfrm>
+            <a:off x="8500526" y="2680246"/>
+            <a:ext cx="837127" cy="369332"/>
+          </a:xfrm>
+          <a:prstGeom prst="rect">
+            <a:avLst/>
+          </a:prstGeom>
+          <a:noFill/>
+        </p:spPr>
+        <p:txBody>
+          <a:bodyPr wrap="square" rtlCol="0">
+            <a:spAutoFit/>
+          </a:bodyPr>
+          <a:lstStyle/>
+          <a:p>
+            <a:pPr algn="ctr"/>
+            <a:r>
+              <a:rPr lang="en-US" sz="1800" b="1" dirty="0">
+                <a:solidFill>
+                  <a:srgbClr val="FF0000"/>
+                </a:solidFill>
+              </a:rPr>
+              <a:t>Prior</a:t>
+            </a:r>
+          </a:p>
+        </p:txBody>
+      </p:sp>
+      <p:sp>
+        <p:nvSpPr>
+          <p:cNvPr id="10" name="TextBox 9">
+            <a:extLst>
+              <a:ext uri="{FF2B5EF4-FFF2-40B4-BE49-F238E27FC236}">
+                <a16:creationId xmlns:a16="http://schemas.microsoft.com/office/drawing/2014/main" id="{1BF5DD88-7604-6042-B781-961D2D4C4483}"/>
+              </a:ext>
+            </a:extLst>
+          </p:cNvPr>
+          <p:cNvSpPr txBox="1"/>
+          <p:nvPr/>
+        </p:nvSpPr>
+        <p:spPr>
+          <a:xfrm>
+            <a:off x="8213068" y="3599851"/>
+            <a:ext cx="1393034" cy="369332"/>
+          </a:xfrm>
+          <a:prstGeom prst="rect">
+            <a:avLst/>
+          </a:prstGeom>
+          <a:noFill/>
+        </p:spPr>
+        <p:txBody>
+          <a:bodyPr wrap="square" rtlCol="0">
+            <a:spAutoFit/>
+          </a:bodyPr>
+          <a:lstStyle/>
+          <a:p>
+            <a:pPr algn="ctr"/>
+            <a:r>
+              <a:rPr lang="en-US" sz="1800" b="1" dirty="0">
+                <a:solidFill>
+                  <a:srgbClr val="FF0000"/>
+                </a:solidFill>
+              </a:rPr>
+              <a:t>Likelihood</a:t>
+            </a:r>
+          </a:p>
+        </p:txBody>
+      </p:sp>
+      <p:sp>
+        <p:nvSpPr>
+          <p:cNvPr id="11" name="TextBox 10">
+            <a:extLst>
+              <a:ext uri="{FF2B5EF4-FFF2-40B4-BE49-F238E27FC236}">
+                <a16:creationId xmlns:a16="http://schemas.microsoft.com/office/drawing/2014/main" id="{8A3DB6B0-E514-F04F-AC27-BA8645C0773D}"/>
+              </a:ext>
+            </a:extLst>
+          </p:cNvPr>
+          <p:cNvSpPr txBox="1"/>
+          <p:nvPr/>
+        </p:nvSpPr>
+        <p:spPr>
+          <a:xfrm>
+            <a:off x="8293994" y="4527347"/>
+            <a:ext cx="1250193" cy="369332"/>
+          </a:xfrm>
+          <a:prstGeom prst="rect">
+            <a:avLst/>
+          </a:prstGeom>
+          <a:noFill/>
+        </p:spPr>
+        <p:txBody>
+          <a:bodyPr wrap="square" rtlCol="0">
+            <a:spAutoFit/>
+          </a:bodyPr>
+          <a:lstStyle/>
+          <a:p>
+            <a:pPr algn="ctr"/>
+            <a:r>
+              <a:rPr lang="en-US" sz="1800" b="1" dirty="0">
+                <a:solidFill>
+                  <a:srgbClr val="FF0000"/>
+                </a:solidFill>
+              </a:rPr>
+              <a:t>Posterior</a:t>
             </a:r>
           </a:p>
         </p:txBody>
@@ -18852,6 +19154,897 @@
         <p:spPr>
           <a:xfrm>
             <a:off x="0" y="37572"/>
+            <a:ext cx="7730836" cy="523220"/>
+          </a:xfrm>
+          <a:prstGeom prst="rect">
+            <a:avLst/>
+          </a:prstGeom>
+          <a:noFill/>
+        </p:spPr>
+        <p:txBody>
+          <a:bodyPr wrap="square" rtlCol="0">
+            <a:spAutoFit/>
+          </a:bodyPr>
+          <a:lstStyle/>
+          <a:p>
+            <a:r>
+              <a:rPr lang="en-US" sz="2800" b="1" dirty="0"/>
+              <a:t>Exercise 1 – How Many Children Can Read ?</a:t>
+            </a:r>
+          </a:p>
+        </p:txBody>
+      </p:sp>
+      <p:sp>
+        <p:nvSpPr>
+          <p:cNvPr id="13" name="TextBox 12">
+            <a:extLst>
+              <a:ext uri="{FF2B5EF4-FFF2-40B4-BE49-F238E27FC236}">
+                <a16:creationId xmlns:a16="http://schemas.microsoft.com/office/drawing/2014/main" id="{CCB040D0-EE6B-6747-B044-7BB207CED700}"/>
+              </a:ext>
+            </a:extLst>
+          </p:cNvPr>
+          <p:cNvSpPr txBox="1"/>
+          <p:nvPr/>
+        </p:nvSpPr>
+        <p:spPr>
+          <a:xfrm>
+            <a:off x="49585" y="760317"/>
+            <a:ext cx="7057068" cy="1384995"/>
+          </a:xfrm>
+          <a:prstGeom prst="rect">
+            <a:avLst/>
+          </a:prstGeom>
+          <a:noFill/>
+        </p:spPr>
+        <p:txBody>
+          <a:bodyPr wrap="square" rtlCol="0">
+            <a:spAutoFit/>
+          </a:bodyPr>
+          <a:lstStyle/>
+          <a:p>
+            <a:r>
+              <a:rPr lang="en-US" sz="1600" dirty="0"/>
+              <a:t>We have sample of </a:t>
+            </a:r>
+            <a:r>
+              <a:rPr lang="en-US" sz="1600" b="1" dirty="0"/>
+              <a:t>10 children</a:t>
+            </a:r>
+            <a:r>
+              <a:rPr lang="en-US" sz="1600" dirty="0"/>
+              <a:t>, </a:t>
+            </a:r>
+            <a:r>
+              <a:rPr lang="en-US" sz="1600" b="1" dirty="0"/>
+              <a:t>3 of them are literate</a:t>
+            </a:r>
+            <a:r>
+              <a:rPr lang="en-US" sz="1600" dirty="0"/>
+              <a:t> (can read). </a:t>
+            </a:r>
+          </a:p>
+          <a:p>
+            <a:r>
+              <a:rPr lang="en-US" sz="1600" dirty="0"/>
+              <a:t>We need to evaluate the literacy rate </a:t>
+            </a:r>
+            <a:r>
+              <a:rPr lang="el-GR" sz="1600" dirty="0"/>
+              <a:t>θ</a:t>
+            </a:r>
+            <a:r>
+              <a:rPr lang="en-US" sz="1600" dirty="0"/>
+              <a:t>  (percentage of children who can read) in the population. </a:t>
+            </a:r>
+            <a:endParaRPr lang="en-US" sz="1200" dirty="0"/>
+          </a:p>
+          <a:p>
+            <a:r>
+              <a:rPr lang="en-US" sz="1200" dirty="0"/>
+              <a:t>We presume that children are independent, that population is uniform, etc. </a:t>
+            </a:r>
+          </a:p>
+          <a:p>
+            <a:r>
+              <a:rPr lang="en-US" sz="1200" dirty="0"/>
+              <a:t>We can use binomial distribution for likelihood function. </a:t>
+            </a:r>
+          </a:p>
+          <a:p>
+            <a:r>
+              <a:rPr lang="en-US" sz="1200" dirty="0"/>
+              <a:t>- </a:t>
+            </a:r>
+            <a:r>
+              <a:rPr lang="en-US" sz="1200" dirty="0">
+                <a:hlinkClick r:id="rId2"/>
+              </a:rPr>
+              <a:t>https://www.youtube.com/watch?v=yvWlpwnT1nw</a:t>
+            </a:r>
+            <a:r>
+              <a:rPr lang="en-US" sz="1200" dirty="0"/>
+              <a:t> </a:t>
+            </a:r>
+          </a:p>
+        </p:txBody>
+      </p:sp>
+      <p:pic>
+        <p:nvPicPr>
+          <p:cNvPr id="3" name="Picture 2">
+            <a:extLst>
+              <a:ext uri="{FF2B5EF4-FFF2-40B4-BE49-F238E27FC236}">
+                <a16:creationId xmlns:a16="http://schemas.microsoft.com/office/drawing/2014/main" id="{ED78D932-E041-E84C-A583-497021BF7E23}"/>
+              </a:ext>
+            </a:extLst>
+          </p:cNvPr>
+          <p:cNvPicPr>
+            <a:picLocks noChangeAspect="1"/>
+          </p:cNvPicPr>
+          <p:nvPr/>
+        </p:nvPicPr>
+        <p:blipFill>
+          <a:blip r:embed="rId3" cstate="email">
+            <a:extLst>
+              <a:ext uri="{28A0092B-C50C-407E-A947-70E740481C1C}">
+                <a14:useLocalDpi xmlns:a14="http://schemas.microsoft.com/office/drawing/2010/main"/>
+              </a:ext>
+            </a:extLst>
+          </a:blip>
+          <a:stretch>
+            <a:fillRect/>
+          </a:stretch>
+        </p:blipFill>
+        <p:spPr>
+          <a:xfrm>
+            <a:off x="75324" y="2730305"/>
+            <a:ext cx="2712933" cy="1987550"/>
+          </a:xfrm>
+          <a:prstGeom prst="rect">
+            <a:avLst/>
+          </a:prstGeom>
+        </p:spPr>
+      </p:pic>
+      <p:pic>
+        <p:nvPicPr>
+          <p:cNvPr id="4" name="Picture 3">
+            <a:extLst>
+              <a:ext uri="{FF2B5EF4-FFF2-40B4-BE49-F238E27FC236}">
+                <a16:creationId xmlns:a16="http://schemas.microsoft.com/office/drawing/2014/main" id="{4F66711F-3F7E-A94B-9A27-3E813592D730}"/>
+              </a:ext>
+            </a:extLst>
+          </p:cNvPr>
+          <p:cNvPicPr>
+            <a:picLocks noChangeAspect="1"/>
+          </p:cNvPicPr>
+          <p:nvPr/>
+        </p:nvPicPr>
+        <p:blipFill>
+          <a:blip r:embed="rId4" cstate="email">
+            <a:extLst>
+              <a:ext uri="{28A0092B-C50C-407E-A947-70E740481C1C}">
+                <a14:useLocalDpi xmlns:a14="http://schemas.microsoft.com/office/drawing/2010/main"/>
+              </a:ext>
+            </a:extLst>
+          </a:blip>
+          <a:stretch>
+            <a:fillRect/>
+          </a:stretch>
+        </p:blipFill>
+        <p:spPr>
+          <a:xfrm>
+            <a:off x="75324" y="4801460"/>
+            <a:ext cx="2712933" cy="1987550"/>
+          </a:xfrm>
+          <a:prstGeom prst="rect">
+            <a:avLst/>
+          </a:prstGeom>
+        </p:spPr>
+      </p:pic>
+      <p:pic>
+        <p:nvPicPr>
+          <p:cNvPr id="5" name="Picture 4">
+            <a:extLst>
+              <a:ext uri="{FF2B5EF4-FFF2-40B4-BE49-F238E27FC236}">
+                <a16:creationId xmlns:a16="http://schemas.microsoft.com/office/drawing/2014/main" id="{58937095-09E3-D34F-98FA-ACB1E792113D}"/>
+              </a:ext>
+            </a:extLst>
+          </p:cNvPr>
+          <p:cNvPicPr>
+            <a:picLocks noChangeAspect="1"/>
+          </p:cNvPicPr>
+          <p:nvPr/>
+        </p:nvPicPr>
+        <p:blipFill>
+          <a:blip r:embed="rId5" cstate="email">
+            <a:extLst>
+              <a:ext uri="{28A0092B-C50C-407E-A947-70E740481C1C}">
+                <a14:useLocalDpi xmlns:a14="http://schemas.microsoft.com/office/drawing/2010/main"/>
+              </a:ext>
+            </a:extLst>
+          </a:blip>
+          <a:stretch>
+            <a:fillRect/>
+          </a:stretch>
+        </p:blipFill>
+        <p:spPr>
+          <a:xfrm>
+            <a:off x="3088440" y="2730305"/>
+            <a:ext cx="2712933" cy="1987550"/>
+          </a:xfrm>
+          <a:prstGeom prst="rect">
+            <a:avLst/>
+          </a:prstGeom>
+        </p:spPr>
+      </p:pic>
+      <p:pic>
+        <p:nvPicPr>
+          <p:cNvPr id="6" name="Picture 5">
+            <a:extLst>
+              <a:ext uri="{FF2B5EF4-FFF2-40B4-BE49-F238E27FC236}">
+                <a16:creationId xmlns:a16="http://schemas.microsoft.com/office/drawing/2014/main" id="{AE9272F8-C664-3543-BB36-E2E5AFD854AB}"/>
+              </a:ext>
+            </a:extLst>
+          </p:cNvPr>
+          <p:cNvPicPr>
+            <a:picLocks noChangeAspect="1"/>
+          </p:cNvPicPr>
+          <p:nvPr/>
+        </p:nvPicPr>
+        <p:blipFill>
+          <a:blip r:embed="rId6" cstate="email">
+            <a:extLst>
+              <a:ext uri="{28A0092B-C50C-407E-A947-70E740481C1C}">
+                <a14:useLocalDpi xmlns:a14="http://schemas.microsoft.com/office/drawing/2010/main"/>
+              </a:ext>
+            </a:extLst>
+          </a:blip>
+          <a:stretch>
+            <a:fillRect/>
+          </a:stretch>
+        </p:blipFill>
+        <p:spPr>
+          <a:xfrm>
+            <a:off x="3088440" y="4802670"/>
+            <a:ext cx="2711282" cy="1986340"/>
+          </a:xfrm>
+          <a:prstGeom prst="rect">
+            <a:avLst/>
+          </a:prstGeom>
+        </p:spPr>
+      </p:pic>
+      <p:pic>
+        <p:nvPicPr>
+          <p:cNvPr id="7" name="Picture 6">
+            <a:extLst>
+              <a:ext uri="{FF2B5EF4-FFF2-40B4-BE49-F238E27FC236}">
+                <a16:creationId xmlns:a16="http://schemas.microsoft.com/office/drawing/2014/main" id="{F0E58C40-B695-4B42-B615-15EE0BF59B1A}"/>
+              </a:ext>
+            </a:extLst>
+          </p:cNvPr>
+          <p:cNvPicPr>
+            <a:picLocks noChangeAspect="1"/>
+          </p:cNvPicPr>
+          <p:nvPr/>
+        </p:nvPicPr>
+        <p:blipFill>
+          <a:blip r:embed="rId7" cstate="email">
+            <a:extLst>
+              <a:ext uri="{28A0092B-C50C-407E-A947-70E740481C1C}">
+                <a14:useLocalDpi xmlns:a14="http://schemas.microsoft.com/office/drawing/2010/main"/>
+              </a:ext>
+            </a:extLst>
+          </a:blip>
+          <a:stretch>
+            <a:fillRect/>
+          </a:stretch>
+        </p:blipFill>
+        <p:spPr>
+          <a:xfrm>
+            <a:off x="6015790" y="4802670"/>
+            <a:ext cx="2711282" cy="1986340"/>
+          </a:xfrm>
+          <a:prstGeom prst="rect">
+            <a:avLst/>
+          </a:prstGeom>
+        </p:spPr>
+      </p:pic>
+      <p:sp>
+        <p:nvSpPr>
+          <p:cNvPr id="8" name="TextBox 7">
+            <a:extLst>
+              <a:ext uri="{FF2B5EF4-FFF2-40B4-BE49-F238E27FC236}">
+                <a16:creationId xmlns:a16="http://schemas.microsoft.com/office/drawing/2014/main" id="{518489C0-6FB3-7A4B-9A4F-307B788AC944}"/>
+              </a:ext>
+            </a:extLst>
+          </p:cNvPr>
+          <p:cNvSpPr txBox="1"/>
+          <p:nvPr/>
+        </p:nvSpPr>
+        <p:spPr>
+          <a:xfrm>
+            <a:off x="6733256" y="4278240"/>
+            <a:ext cx="1276350" cy="523220"/>
+          </a:xfrm>
+          <a:prstGeom prst="rect">
+            <a:avLst/>
+          </a:prstGeom>
+          <a:noFill/>
+        </p:spPr>
+        <p:txBody>
+          <a:bodyPr wrap="square" rtlCol="0">
+            <a:spAutoFit/>
+          </a:bodyPr>
+          <a:lstStyle/>
+          <a:p>
+            <a:r>
+              <a:rPr lang="en-US" b="1" dirty="0">
+                <a:solidFill>
+                  <a:srgbClr val="00B050"/>
+                </a:solidFill>
+              </a:rPr>
+              <a:t>Increased Sample Size</a:t>
+            </a:r>
+          </a:p>
+        </p:txBody>
+      </p:sp>
+      <p:sp>
+        <p:nvSpPr>
+          <p:cNvPr id="10" name="TextBox 9">
+            <a:extLst>
+              <a:ext uri="{FF2B5EF4-FFF2-40B4-BE49-F238E27FC236}">
+                <a16:creationId xmlns:a16="http://schemas.microsoft.com/office/drawing/2014/main" id="{CD4E59FF-94DA-BE4B-A2B6-E0A0365E44BA}"/>
+              </a:ext>
+            </a:extLst>
+          </p:cNvPr>
+          <p:cNvSpPr txBox="1"/>
+          <p:nvPr/>
+        </p:nvSpPr>
+        <p:spPr>
+          <a:xfrm>
+            <a:off x="8943139" y="5049110"/>
+            <a:ext cx="2366545" cy="307777"/>
+          </a:xfrm>
+          <a:prstGeom prst="rect">
+            <a:avLst/>
+          </a:prstGeom>
+          <a:noFill/>
+        </p:spPr>
+        <p:txBody>
+          <a:bodyPr wrap="square" rtlCol="0">
+            <a:spAutoFit/>
+          </a:bodyPr>
+          <a:lstStyle/>
+          <a:p>
+            <a:r>
+              <a:rPr lang="en-US" b="1" dirty="0">
+                <a:solidFill>
+                  <a:srgbClr val="00B050"/>
+                </a:solidFill>
+              </a:rPr>
+              <a:t>Prior  (many Hypotheses)</a:t>
+            </a:r>
+          </a:p>
+        </p:txBody>
+      </p:sp>
+      <p:sp>
+        <p:nvSpPr>
+          <p:cNvPr id="11" name="TextBox 10">
+            <a:extLst>
+              <a:ext uri="{FF2B5EF4-FFF2-40B4-BE49-F238E27FC236}">
+                <a16:creationId xmlns:a16="http://schemas.microsoft.com/office/drawing/2014/main" id="{7AA8ACDC-C4EF-1C4A-8827-C3FA843623C3}"/>
+              </a:ext>
+            </a:extLst>
+          </p:cNvPr>
+          <p:cNvSpPr txBox="1"/>
+          <p:nvPr/>
+        </p:nvSpPr>
+        <p:spPr>
+          <a:xfrm>
+            <a:off x="8943140" y="5641346"/>
+            <a:ext cx="2366544" cy="307777"/>
+          </a:xfrm>
+          <a:prstGeom prst="rect">
+            <a:avLst/>
+          </a:prstGeom>
+          <a:noFill/>
+        </p:spPr>
+        <p:txBody>
+          <a:bodyPr wrap="square" rtlCol="0">
+            <a:spAutoFit/>
+          </a:bodyPr>
+          <a:lstStyle/>
+          <a:p>
+            <a:r>
+              <a:rPr lang="en-US" b="1" dirty="0">
+                <a:solidFill>
+                  <a:srgbClr val="00B050"/>
+                </a:solidFill>
+              </a:rPr>
+              <a:t>Likelihood (from Data)</a:t>
+            </a:r>
+          </a:p>
+        </p:txBody>
+      </p:sp>
+      <p:sp>
+        <p:nvSpPr>
+          <p:cNvPr id="12" name="TextBox 11">
+            <a:extLst>
+              <a:ext uri="{FF2B5EF4-FFF2-40B4-BE49-F238E27FC236}">
+                <a16:creationId xmlns:a16="http://schemas.microsoft.com/office/drawing/2014/main" id="{637BD549-1D1A-324E-9F6E-1D3B226117E0}"/>
+              </a:ext>
+            </a:extLst>
+          </p:cNvPr>
+          <p:cNvSpPr txBox="1"/>
+          <p:nvPr/>
+        </p:nvSpPr>
+        <p:spPr>
+          <a:xfrm>
+            <a:off x="8943140" y="6233582"/>
+            <a:ext cx="2366544" cy="307777"/>
+          </a:xfrm>
+          <a:prstGeom prst="rect">
+            <a:avLst/>
+          </a:prstGeom>
+          <a:noFill/>
+        </p:spPr>
+        <p:txBody>
+          <a:bodyPr wrap="square" rtlCol="0">
+            <a:spAutoFit/>
+          </a:bodyPr>
+          <a:lstStyle/>
+          <a:p>
+            <a:r>
+              <a:rPr lang="en-US" b="1" dirty="0">
+                <a:solidFill>
+                  <a:srgbClr val="00B050"/>
+                </a:solidFill>
+              </a:rPr>
+              <a:t>Posterior (combination)</a:t>
+            </a:r>
+          </a:p>
+        </p:txBody>
+      </p:sp>
+      <p:sp>
+        <p:nvSpPr>
+          <p:cNvPr id="16" name="TextBox 15">
+            <a:extLst>
+              <a:ext uri="{FF2B5EF4-FFF2-40B4-BE49-F238E27FC236}">
+                <a16:creationId xmlns:a16="http://schemas.microsoft.com/office/drawing/2014/main" id="{CB21DEFB-400B-EC41-8148-718E9493529F}"/>
+              </a:ext>
+            </a:extLst>
+          </p:cNvPr>
+          <p:cNvSpPr txBox="1"/>
+          <p:nvPr/>
+        </p:nvSpPr>
+        <p:spPr>
+          <a:xfrm>
+            <a:off x="7886370" y="1452814"/>
+            <a:ext cx="4305630" cy="2677656"/>
+          </a:xfrm>
+          <a:prstGeom prst="rect">
+            <a:avLst/>
+          </a:prstGeom>
+          <a:solidFill>
+            <a:schemeClr val="accent6">
+              <a:lumMod val="20000"/>
+              <a:lumOff val="80000"/>
+            </a:schemeClr>
+          </a:solidFill>
+        </p:spPr>
+        <p:txBody>
+          <a:bodyPr wrap="square" rtlCol="0">
+            <a:spAutoFit/>
+          </a:bodyPr>
+          <a:lstStyle/>
+          <a:p>
+            <a:r>
+              <a:rPr lang="en-US" dirty="0"/>
+              <a:t>We try different </a:t>
+            </a:r>
+            <a:r>
+              <a:rPr lang="en-US" b="1" dirty="0">
+                <a:solidFill>
+                  <a:srgbClr val="FF0000"/>
+                </a:solidFill>
+              </a:rPr>
+              <a:t>Prior</a:t>
+            </a:r>
+            <a:r>
+              <a:rPr lang="en-US" dirty="0"/>
+              <a:t> functions P(</a:t>
+            </a:r>
+            <a:r>
+              <a:rPr lang="el-GR" dirty="0"/>
+              <a:t>θ</a:t>
+            </a:r>
+            <a:r>
+              <a:rPr lang="en-US" dirty="0"/>
+              <a:t>) </a:t>
+            </a:r>
+          </a:p>
+          <a:p>
+            <a:endParaRPr lang="en-US" dirty="0"/>
+          </a:p>
+          <a:p>
+            <a:r>
+              <a:rPr lang="en-US" dirty="0"/>
+              <a:t>Then we can estimate the </a:t>
+            </a:r>
+            <a:r>
+              <a:rPr lang="en-US" b="1" dirty="0">
+                <a:solidFill>
+                  <a:srgbClr val="FF0000"/>
+                </a:solidFill>
+              </a:rPr>
+              <a:t>Likelihood</a:t>
+            </a:r>
+            <a:r>
+              <a:rPr lang="en-US" dirty="0"/>
+              <a:t> function from observed data as </a:t>
+            </a:r>
+            <a:r>
+              <a:rPr lang="en-US" b="1" dirty="0">
+                <a:solidFill>
+                  <a:srgbClr val="0070C0"/>
+                </a:solidFill>
+              </a:rPr>
+              <a:t>Binomial distribution</a:t>
+            </a:r>
+            <a:r>
+              <a:rPr lang="en-US" dirty="0"/>
+              <a:t> :</a:t>
+            </a:r>
+          </a:p>
+          <a:p>
+            <a:r>
+              <a:rPr lang="en-US" b="1" dirty="0" err="1">
+                <a:solidFill>
+                  <a:srgbClr val="0070C0"/>
+                </a:solidFill>
+              </a:rPr>
+              <a:t>binom.pmf</a:t>
+            </a:r>
+            <a:r>
+              <a:rPr lang="en-US" b="1" dirty="0">
+                <a:solidFill>
+                  <a:srgbClr val="0070C0"/>
+                </a:solidFill>
+              </a:rPr>
+              <a:t>(x, n, p)</a:t>
+            </a:r>
+            <a:r>
+              <a:rPr lang="en-US" dirty="0"/>
+              <a:t> , where n=sample size, x=number of literate kids, p=</a:t>
+            </a:r>
+            <a:r>
+              <a:rPr lang="el-GR" dirty="0"/>
+              <a:t>θ</a:t>
+            </a:r>
+            <a:r>
+              <a:rPr lang="en-US" dirty="0"/>
+              <a:t>=Literacy rate </a:t>
+            </a:r>
+          </a:p>
+          <a:p>
+            <a:endParaRPr lang="en-US" dirty="0"/>
+          </a:p>
+          <a:p>
+            <a:r>
+              <a:rPr lang="en-US" dirty="0"/>
+              <a:t>Finally we can calculate </a:t>
+            </a:r>
+            <a:r>
+              <a:rPr lang="en-US" b="1" dirty="0">
+                <a:solidFill>
+                  <a:srgbClr val="FF0000"/>
+                </a:solidFill>
+              </a:rPr>
+              <a:t>Posterior distribution </a:t>
+            </a:r>
+            <a:r>
+              <a:rPr lang="en-US" dirty="0"/>
+              <a:t> using Bayes formula (without denominator P(x), which is constant, depends only on data "x" )</a:t>
+            </a:r>
+          </a:p>
+          <a:p>
+            <a:endParaRPr lang="en-US" dirty="0"/>
+          </a:p>
+          <a:p>
+            <a:r>
+              <a:rPr lang="en-US" dirty="0"/>
+              <a:t>    P(</a:t>
+            </a:r>
+            <a:r>
+              <a:rPr lang="el-GR" dirty="0"/>
+              <a:t>θ</a:t>
+            </a:r>
+            <a:r>
+              <a:rPr lang="en-US" dirty="0"/>
+              <a:t> | x) </a:t>
+            </a:r>
+            <a:r>
+              <a:rPr lang="en-US" dirty="0">
+                <a:sym typeface="Wingdings" pitchFamily="2" charset="2"/>
+              </a:rPr>
+              <a:t>=</a:t>
+            </a:r>
+            <a:r>
+              <a:rPr lang="en-US" dirty="0"/>
+              <a:t> P(x|</a:t>
+            </a:r>
+            <a:r>
+              <a:rPr lang="el-GR" dirty="0"/>
+              <a:t>θ</a:t>
+            </a:r>
+            <a:r>
+              <a:rPr lang="en-US" dirty="0"/>
+              <a:t>) * P(</a:t>
+            </a:r>
+            <a:r>
+              <a:rPr lang="el-GR" dirty="0"/>
+              <a:t>θ</a:t>
+            </a:r>
+            <a:r>
+              <a:rPr lang="en-US" dirty="0"/>
+              <a:t>)</a:t>
+            </a:r>
+          </a:p>
+        </p:txBody>
+      </p:sp>
+      <p:sp>
+        <p:nvSpPr>
+          <p:cNvPr id="17" name="TextBox 16">
+            <a:extLst>
+              <a:ext uri="{FF2B5EF4-FFF2-40B4-BE49-F238E27FC236}">
+                <a16:creationId xmlns:a16="http://schemas.microsoft.com/office/drawing/2014/main" id="{E58001A0-66A1-9345-9AC0-0D34470AF616}"/>
+              </a:ext>
+            </a:extLst>
+          </p:cNvPr>
+          <p:cNvSpPr txBox="1"/>
+          <p:nvPr/>
+        </p:nvSpPr>
+        <p:spPr>
+          <a:xfrm>
+            <a:off x="793614" y="2444686"/>
+            <a:ext cx="1362943" cy="307777"/>
+          </a:xfrm>
+          <a:prstGeom prst="rect">
+            <a:avLst/>
+          </a:prstGeom>
+          <a:noFill/>
+        </p:spPr>
+        <p:txBody>
+          <a:bodyPr wrap="square" rtlCol="0">
+            <a:spAutoFit/>
+          </a:bodyPr>
+          <a:lstStyle/>
+          <a:p>
+            <a:r>
+              <a:rPr lang="en-US" b="1" dirty="0">
+                <a:solidFill>
+                  <a:srgbClr val="00B050"/>
+                </a:solidFill>
+              </a:rPr>
+              <a:t>Change Prior</a:t>
+            </a:r>
+          </a:p>
+        </p:txBody>
+      </p:sp>
+      <p:sp>
+        <p:nvSpPr>
+          <p:cNvPr id="18" name="TextBox 17">
+            <a:extLst>
+              <a:ext uri="{FF2B5EF4-FFF2-40B4-BE49-F238E27FC236}">
+                <a16:creationId xmlns:a16="http://schemas.microsoft.com/office/drawing/2014/main" id="{A50554F9-33AD-8E4A-A6A0-A61CD003CC00}"/>
+              </a:ext>
+            </a:extLst>
+          </p:cNvPr>
+          <p:cNvSpPr txBox="1"/>
+          <p:nvPr/>
+        </p:nvSpPr>
+        <p:spPr>
+          <a:xfrm>
+            <a:off x="3305620" y="2438740"/>
+            <a:ext cx="2311090" cy="307777"/>
+          </a:xfrm>
+          <a:prstGeom prst="rect">
+            <a:avLst/>
+          </a:prstGeom>
+          <a:noFill/>
+        </p:spPr>
+        <p:txBody>
+          <a:bodyPr wrap="square" rtlCol="0">
+            <a:spAutoFit/>
+          </a:bodyPr>
+          <a:lstStyle/>
+          <a:p>
+            <a:r>
+              <a:rPr lang="en-US" b="1" dirty="0">
+                <a:solidFill>
+                  <a:srgbClr val="00B050"/>
+                </a:solidFill>
+              </a:rPr>
+              <a:t>Change Data / Likelihood</a:t>
+            </a:r>
+          </a:p>
+        </p:txBody>
+      </p:sp>
+      <p:pic>
+        <p:nvPicPr>
+          <p:cNvPr id="9" name="Picture 8">
+            <a:extLst>
+              <a:ext uri="{FF2B5EF4-FFF2-40B4-BE49-F238E27FC236}">
+                <a16:creationId xmlns:a16="http://schemas.microsoft.com/office/drawing/2014/main" id="{22AF3A29-5739-F040-A6EE-6B9376B4F836}"/>
+              </a:ext>
+            </a:extLst>
+          </p:cNvPr>
+          <p:cNvPicPr>
+            <a:picLocks noChangeAspect="1"/>
+          </p:cNvPicPr>
+          <p:nvPr/>
+        </p:nvPicPr>
+        <p:blipFill>
+          <a:blip r:embed="rId8" cstate="email">
+            <a:extLst>
+              <a:ext uri="{28A0092B-C50C-407E-A947-70E740481C1C}">
+                <a14:useLocalDpi xmlns:a14="http://schemas.microsoft.com/office/drawing/2010/main"/>
+              </a:ext>
+            </a:extLst>
+          </a:blip>
+          <a:stretch>
+            <a:fillRect/>
+          </a:stretch>
+        </p:blipFill>
+        <p:spPr>
+          <a:xfrm>
+            <a:off x="9818315" y="330367"/>
+            <a:ext cx="2324100" cy="660400"/>
+          </a:xfrm>
+          <a:prstGeom prst="rect">
+            <a:avLst/>
+          </a:prstGeom>
+        </p:spPr>
+      </p:pic>
+      <p:sp>
+        <p:nvSpPr>
+          <p:cNvPr id="14" name="TextBox 13">
+            <a:extLst>
+              <a:ext uri="{FF2B5EF4-FFF2-40B4-BE49-F238E27FC236}">
+                <a16:creationId xmlns:a16="http://schemas.microsoft.com/office/drawing/2014/main" id="{42CCD526-9AC4-7C4D-8364-2BCCCF58C3E5}"/>
+              </a:ext>
+            </a:extLst>
+          </p:cNvPr>
+          <p:cNvSpPr txBox="1"/>
+          <p:nvPr/>
+        </p:nvSpPr>
+        <p:spPr>
+          <a:xfrm>
+            <a:off x="9818315" y="36592"/>
+            <a:ext cx="1808709" cy="307777"/>
+          </a:xfrm>
+          <a:prstGeom prst="rect">
+            <a:avLst/>
+          </a:prstGeom>
+          <a:noFill/>
+        </p:spPr>
+        <p:txBody>
+          <a:bodyPr wrap="square" rtlCol="0">
+            <a:spAutoFit/>
+          </a:bodyPr>
+          <a:lstStyle/>
+          <a:p>
+            <a:r>
+              <a:rPr lang="en-US" dirty="0"/>
+              <a:t>Binomial Distribution</a:t>
+            </a:r>
+          </a:p>
+        </p:txBody>
+      </p:sp>
+      <p:sp>
+        <p:nvSpPr>
+          <p:cNvPr id="15" name="Down Arrow 14">
+            <a:extLst>
+              <a:ext uri="{FF2B5EF4-FFF2-40B4-BE49-F238E27FC236}">
+                <a16:creationId xmlns:a16="http://schemas.microsoft.com/office/drawing/2014/main" id="{8F1F6B84-E02C-714B-A889-0780879217CC}"/>
+              </a:ext>
+            </a:extLst>
+          </p:cNvPr>
+          <p:cNvSpPr/>
+          <p:nvPr/>
+        </p:nvSpPr>
+        <p:spPr>
+          <a:xfrm rot="3648071">
+            <a:off x="6431189" y="2844913"/>
+            <a:ext cx="825363" cy="1112125"/>
+          </a:xfrm>
+          <a:prstGeom prst="downArrow">
+            <a:avLst/>
+          </a:prstGeom>
+          <a:solidFill>
+            <a:schemeClr val="accent1">
+              <a:lumMod val="60000"/>
+              <a:lumOff val="40000"/>
+            </a:schemeClr>
+          </a:solidFill>
+          <a:ln>
+            <a:solidFill>
+              <a:schemeClr val="accent1">
+                <a:lumMod val="60000"/>
+                <a:lumOff val="40000"/>
+              </a:schemeClr>
+            </a:solidFill>
+          </a:ln>
+        </p:spPr>
+        <p:style>
+          <a:lnRef idx="2">
+            <a:schemeClr val="accent1">
+              <a:shade val="50000"/>
+            </a:schemeClr>
+          </a:lnRef>
+          <a:fillRef idx="1">
+            <a:schemeClr val="accent1"/>
+          </a:fillRef>
+          <a:effectRef idx="0">
+            <a:schemeClr val="accent1"/>
+          </a:effectRef>
+          <a:fontRef idx="minor">
+            <a:schemeClr val="lt1"/>
+          </a:fontRef>
+        </p:style>
+        <p:txBody>
+          <a:bodyPr rtlCol="0" anchor="ctr"/>
+          <a:lstStyle/>
+          <a:p>
+            <a:pPr algn="ctr"/>
+            <a:endParaRPr lang="en-US"/>
+          </a:p>
+        </p:txBody>
+      </p:sp>
+    </p:spTree>
+    <p:extLst>
+      <p:ext uri="{BB962C8B-B14F-4D97-AF65-F5344CB8AC3E}">
+        <p14:creationId xmlns:p14="http://schemas.microsoft.com/office/powerpoint/2010/main" val="2529217939"/>
+      </p:ext>
+    </p:extLst>
+  </p:cSld>
+  <p:clrMapOvr>
+    <a:masterClrMapping/>
+  </p:clrMapOvr>
+</p:sld>
+</file>
+
+<file path=ppt/slides/slide13.xml><?xml version="1.0" encoding="utf-8"?>
+<p:sld xmlns:a="http://schemas.openxmlformats.org/drawingml/2006/main" xmlns:r="http://schemas.openxmlformats.org/officeDocument/2006/relationships" xmlns:p="http://schemas.openxmlformats.org/presentationml/2006/main">
+  <p:cSld>
+    <p:spTree>
+      <p:nvGrpSpPr>
+        <p:cNvPr id="1" name=""/>
+        <p:cNvGrpSpPr/>
+        <p:nvPr/>
+      </p:nvGrpSpPr>
+      <p:grpSpPr>
+        <a:xfrm>
+          <a:off x="0" y="0"/>
+          <a:ext cx="0" cy="0"/>
+          <a:chOff x="0" y="0"/>
+          <a:chExt cx="0" cy="0"/>
+        </a:xfrm>
+      </p:grpSpPr>
+      <p:sp>
+        <p:nvSpPr>
+          <p:cNvPr id="2" name="TextBox 1">
+            <a:extLst>
+              <a:ext uri="{FF2B5EF4-FFF2-40B4-BE49-F238E27FC236}">
+                <a16:creationId xmlns:a16="http://schemas.microsoft.com/office/drawing/2014/main" id="{CD6798AC-3E28-254E-B533-583935E0DBBC}"/>
+              </a:ext>
+            </a:extLst>
+          </p:cNvPr>
+          <p:cNvSpPr txBox="1"/>
+          <p:nvPr/>
+        </p:nvSpPr>
+        <p:spPr>
+          <a:xfrm>
+            <a:off x="0" y="37572"/>
             <a:ext cx="4572000" cy="523220"/>
           </a:xfrm>
           <a:prstGeom prst="rect">
@@ -18867,7 +20060,7 @@
           <a:p>
             <a:r>
               <a:rPr lang="en-US" sz="2800" b="1" dirty="0"/>
-              <a:t>Exercise 1 - exponential</a:t>
+              <a:t>Exercise 2 - exponential</a:t>
             </a:r>
           </a:p>
         </p:txBody>
@@ -18974,7 +20167,27 @@
           <a:p>
             <a:r>
               <a:rPr lang="en-US" sz="1200" dirty="0"/>
-              <a:t>Step 2 – generated 1000 values (prior distribution)</a:t>
+              <a:t>Step 2 – generated 1000 values of </a:t>
+            </a:r>
+            <a:r>
+              <a:rPr lang="el-GR" sz="1200" b="1" dirty="0">
+                <a:solidFill>
+                  <a:srgbClr val="00B050"/>
+                </a:solidFill>
+              </a:rPr>
+              <a:t>λ</a:t>
+            </a:r>
+            <a:r>
+              <a:rPr lang="en-US" sz="1200" b="1" dirty="0">
+                <a:solidFill>
+                  <a:srgbClr val="00B050"/>
+                </a:solidFill>
+              </a:rPr>
+              <a:t> </a:t>
+            </a:r>
+            <a:r>
+              <a:rPr lang="en-US" sz="1200" dirty="0"/>
+              <a:t>(prior distribution)</a:t>
             </a:r>
           </a:p>
         </p:txBody>
@@ -19954,7 +21167,7 @@
 </p:sld>
 </file>
 
-<file path=ppt/slides/slide13.xml><?xml version="1.0" encoding="utf-8"?>
+<file path=ppt/slides/slide14.xml><?xml version="1.0" encoding="utf-8"?>
 <p:sld xmlns:a="http://schemas.openxmlformats.org/drawingml/2006/main" xmlns:r="http://schemas.openxmlformats.org/officeDocument/2006/relationships" xmlns:p="http://schemas.openxmlformats.org/presentationml/2006/main">
   <p:cSld>
     <p:spTree>
@@ -20111,42 +21324,12 @@
           </a:prstGeom>
         </p:spPr>
       </p:pic>
-    </p:spTree>
-    <p:extLst>
-      <p:ext uri="{BB962C8B-B14F-4D97-AF65-F5344CB8AC3E}">
-        <p14:creationId xmlns:p14="http://schemas.microsoft.com/office/powerpoint/2010/main" val="506399319"/>
-      </p:ext>
-    </p:extLst>
-  </p:cSld>
-  <p:clrMapOvr>
-    <a:masterClrMapping/>
-  </p:clrMapOvr>
-</p:sld>
-</file>
-
-<file path=ppt/slides/slide14.xml><?xml version="1.0" encoding="utf-8"?>
-<p:sld xmlns:a="http://schemas.openxmlformats.org/drawingml/2006/main" xmlns:r="http://schemas.openxmlformats.org/officeDocument/2006/relationships" xmlns:p="http://schemas.openxmlformats.org/presentationml/2006/main">
-  <p:cSld>
-    <p:spTree>
-      <p:nvGrpSpPr>
-        <p:cNvPr id="1" name=""/>
-        <p:cNvGrpSpPr/>
-        <p:nvPr/>
-      </p:nvGrpSpPr>
-      <p:grpSpPr>
-        <a:xfrm>
-          <a:off x="0" y="0"/>
-          <a:ext cx="0" cy="0"/>
-          <a:chOff x="0" y="0"/>
-          <a:chExt cx="0" cy="0"/>
-        </a:xfrm>
-      </p:grpSpPr>
       <p:sp>
         <p:nvSpPr>
-          <p:cNvPr id="2" name="TextBox 1">
+          <p:cNvPr id="6" name="TextBox 5">
             <a:extLst>
               <a:ext uri="{FF2B5EF4-FFF2-40B4-BE49-F238E27FC236}">
-                <a16:creationId xmlns:a16="http://schemas.microsoft.com/office/drawing/2014/main" id="{CD6798AC-3E28-254E-B533-583935E0DBBC}"/>
+                <a16:creationId xmlns:a16="http://schemas.microsoft.com/office/drawing/2014/main" id="{DDFBA8E8-DF37-3E4D-935A-5D3649F096ED}"/>
               </a:ext>
             </a:extLst>
           </p:cNvPr>
@@ -20155,8 +21338,8 @@
         </p:nvSpPr>
         <p:spPr>
           <a:xfrm>
-            <a:off x="0" y="37572"/>
-            <a:ext cx="7730836" cy="523220"/>
+            <a:off x="10813960" y="37572"/>
+            <a:ext cx="1378040" cy="523220"/>
           </a:xfrm>
           <a:prstGeom prst="rect">
             <a:avLst/>
@@ -20170,400 +21353,12 @@
           <a:lstStyle/>
           <a:p>
             <a:r>
-              <a:rPr lang="en-US" sz="2800" b="1" dirty="0"/>
-              <a:t>Exercise 3 – How Many Children Can Read ?</a:t>
-            </a:r>
-          </a:p>
-        </p:txBody>
-      </p:sp>
-      <p:sp>
-        <p:nvSpPr>
-          <p:cNvPr id="13" name="TextBox 12">
-            <a:extLst>
-              <a:ext uri="{FF2B5EF4-FFF2-40B4-BE49-F238E27FC236}">
-                <a16:creationId xmlns:a16="http://schemas.microsoft.com/office/drawing/2014/main" id="{CCB040D0-EE6B-6747-B044-7BB207CED700}"/>
-              </a:ext>
-            </a:extLst>
-          </p:cNvPr>
-          <p:cNvSpPr txBox="1"/>
-          <p:nvPr/>
-        </p:nvSpPr>
-        <p:spPr>
-          <a:xfrm>
-            <a:off x="0" y="727511"/>
-            <a:ext cx="5213268" cy="1569660"/>
-          </a:xfrm>
-          <a:prstGeom prst="rect">
-            <a:avLst/>
-          </a:prstGeom>
-          <a:noFill/>
-        </p:spPr>
-        <p:txBody>
-          <a:bodyPr wrap="square" rtlCol="0">
-            <a:spAutoFit/>
-          </a:bodyPr>
-          <a:lstStyle/>
-          <a:p>
-            <a:r>
-              <a:rPr lang="en-US" sz="1200" dirty="0"/>
-              <a:t>We have sample of 10 children, 3 of them are literate (can read). We need to evaluate number of children who can read in the population. </a:t>
-            </a:r>
-          </a:p>
-          <a:p>
-            <a:endParaRPr lang="en-US" sz="1200" dirty="0"/>
-          </a:p>
-          <a:p>
-            <a:r>
-              <a:rPr lang="en-US" sz="1200" dirty="0"/>
-              <a:t>We presume that children are independent, that population is uniform, etc. </a:t>
-            </a:r>
-          </a:p>
-          <a:p>
-            <a:r>
-              <a:rPr lang="en-US" sz="1200" dirty="0"/>
-              <a:t>We can use binomial distribution. </a:t>
-            </a:r>
-          </a:p>
-          <a:p>
-            <a:r>
-              <a:rPr lang="en-US" sz="1200" dirty="0"/>
-              <a:t>- </a:t>
-            </a:r>
-            <a:r>
-              <a:rPr lang="en-US" sz="1200" dirty="0">
-                <a:hlinkClick r:id="rId2"/>
-              </a:rPr>
-              <a:t>https://www.youtube.com/watch?v=yvWlpwnT1nw</a:t>
-            </a:r>
-            <a:r>
-              <a:rPr lang="en-US" sz="1200" dirty="0"/>
-              <a:t> </a:t>
-            </a:r>
-          </a:p>
-          <a:p>
-            <a:endParaRPr lang="en-US" sz="1200" dirty="0"/>
-          </a:p>
-          <a:p>
-            <a:endParaRPr lang="en-US" sz="1200" dirty="0"/>
-          </a:p>
-        </p:txBody>
-      </p:sp>
-      <p:pic>
-        <p:nvPicPr>
-          <p:cNvPr id="3" name="Picture 2">
-            <a:extLst>
-              <a:ext uri="{FF2B5EF4-FFF2-40B4-BE49-F238E27FC236}">
-                <a16:creationId xmlns:a16="http://schemas.microsoft.com/office/drawing/2014/main" id="{ED78D932-E041-E84C-A583-497021BF7E23}"/>
-              </a:ext>
-            </a:extLst>
-          </p:cNvPr>
-          <p:cNvPicPr>
-            <a:picLocks noChangeAspect="1"/>
-          </p:cNvPicPr>
-          <p:nvPr/>
-        </p:nvPicPr>
-        <p:blipFill>
-          <a:blip r:embed="rId3" cstate="email">
-            <a:extLst>
-              <a:ext uri="{28A0092B-C50C-407E-A947-70E740481C1C}">
-                <a14:useLocalDpi xmlns:a14="http://schemas.microsoft.com/office/drawing/2010/main"/>
-              </a:ext>
-            </a:extLst>
-          </a:blip>
-          <a:stretch>
-            <a:fillRect/>
-          </a:stretch>
-        </p:blipFill>
-        <p:spPr>
-          <a:xfrm>
-            <a:off x="155534" y="2297171"/>
-            <a:ext cx="2712933" cy="1987550"/>
-          </a:xfrm>
-          <a:prstGeom prst="rect">
-            <a:avLst/>
-          </a:prstGeom>
-        </p:spPr>
-      </p:pic>
-      <p:pic>
-        <p:nvPicPr>
-          <p:cNvPr id="4" name="Picture 3">
-            <a:extLst>
-              <a:ext uri="{FF2B5EF4-FFF2-40B4-BE49-F238E27FC236}">
-                <a16:creationId xmlns:a16="http://schemas.microsoft.com/office/drawing/2014/main" id="{4F66711F-3F7E-A94B-9A27-3E813592D730}"/>
-              </a:ext>
-            </a:extLst>
-          </p:cNvPr>
-          <p:cNvPicPr>
-            <a:picLocks noChangeAspect="1"/>
-          </p:cNvPicPr>
-          <p:nvPr/>
-        </p:nvPicPr>
-        <p:blipFill>
-          <a:blip r:embed="rId4" cstate="email">
-            <a:extLst>
-              <a:ext uri="{28A0092B-C50C-407E-A947-70E740481C1C}">
-                <a14:useLocalDpi xmlns:a14="http://schemas.microsoft.com/office/drawing/2010/main"/>
-              </a:ext>
-            </a:extLst>
-          </a:blip>
-          <a:stretch>
-            <a:fillRect/>
-          </a:stretch>
-        </p:blipFill>
-        <p:spPr>
-          <a:xfrm>
-            <a:off x="155534" y="4560830"/>
-            <a:ext cx="2712933" cy="1987550"/>
-          </a:xfrm>
-          <a:prstGeom prst="rect">
-            <a:avLst/>
-          </a:prstGeom>
-        </p:spPr>
-      </p:pic>
-      <p:pic>
-        <p:nvPicPr>
-          <p:cNvPr id="5" name="Picture 4">
-            <a:extLst>
-              <a:ext uri="{FF2B5EF4-FFF2-40B4-BE49-F238E27FC236}">
-                <a16:creationId xmlns:a16="http://schemas.microsoft.com/office/drawing/2014/main" id="{58937095-09E3-D34F-98FA-ACB1E792113D}"/>
-              </a:ext>
-            </a:extLst>
-          </p:cNvPr>
-          <p:cNvPicPr>
-            <a:picLocks noChangeAspect="1"/>
-          </p:cNvPicPr>
-          <p:nvPr/>
-        </p:nvPicPr>
-        <p:blipFill>
-          <a:blip r:embed="rId5" cstate="email">
-            <a:extLst>
-              <a:ext uri="{28A0092B-C50C-407E-A947-70E740481C1C}">
-                <a14:useLocalDpi xmlns:a14="http://schemas.microsoft.com/office/drawing/2010/main"/>
-              </a:ext>
-            </a:extLst>
-          </a:blip>
-          <a:stretch>
-            <a:fillRect/>
-          </a:stretch>
-        </p:blipFill>
-        <p:spPr>
-          <a:xfrm>
-            <a:off x="3168650" y="2297171"/>
-            <a:ext cx="2712933" cy="1987550"/>
-          </a:xfrm>
-          <a:prstGeom prst="rect">
-            <a:avLst/>
-          </a:prstGeom>
-        </p:spPr>
-      </p:pic>
-      <p:pic>
-        <p:nvPicPr>
-          <p:cNvPr id="6" name="Picture 5">
-            <a:extLst>
-              <a:ext uri="{FF2B5EF4-FFF2-40B4-BE49-F238E27FC236}">
-                <a16:creationId xmlns:a16="http://schemas.microsoft.com/office/drawing/2014/main" id="{AE9272F8-C664-3543-BB36-E2E5AFD854AB}"/>
-              </a:ext>
-            </a:extLst>
-          </p:cNvPr>
-          <p:cNvPicPr>
-            <a:picLocks noChangeAspect="1"/>
-          </p:cNvPicPr>
-          <p:nvPr/>
-        </p:nvPicPr>
-        <p:blipFill>
-          <a:blip r:embed="rId6" cstate="email">
-            <a:extLst>
-              <a:ext uri="{28A0092B-C50C-407E-A947-70E740481C1C}">
-                <a14:useLocalDpi xmlns:a14="http://schemas.microsoft.com/office/drawing/2010/main"/>
-              </a:ext>
-            </a:extLst>
-          </a:blip>
-          <a:stretch>
-            <a:fillRect/>
-          </a:stretch>
-        </p:blipFill>
-        <p:spPr>
-          <a:xfrm>
-            <a:off x="3168650" y="4562040"/>
-            <a:ext cx="2711282" cy="1986340"/>
-          </a:xfrm>
-          <a:prstGeom prst="rect">
-            <a:avLst/>
-          </a:prstGeom>
-        </p:spPr>
-      </p:pic>
-      <p:pic>
-        <p:nvPicPr>
-          <p:cNvPr id="7" name="Picture 6">
-            <a:extLst>
-              <a:ext uri="{FF2B5EF4-FFF2-40B4-BE49-F238E27FC236}">
-                <a16:creationId xmlns:a16="http://schemas.microsoft.com/office/drawing/2014/main" id="{F0E58C40-B695-4B42-B615-15EE0BF59B1A}"/>
-              </a:ext>
-            </a:extLst>
-          </p:cNvPr>
-          <p:cNvPicPr>
-            <a:picLocks noChangeAspect="1"/>
-          </p:cNvPicPr>
-          <p:nvPr/>
-        </p:nvPicPr>
-        <p:blipFill>
-          <a:blip r:embed="rId7" cstate="email">
-            <a:extLst>
-              <a:ext uri="{28A0092B-C50C-407E-A947-70E740481C1C}">
-                <a14:useLocalDpi xmlns:a14="http://schemas.microsoft.com/office/drawing/2010/main"/>
-              </a:ext>
-            </a:extLst>
-          </a:blip>
-          <a:stretch>
-            <a:fillRect/>
-          </a:stretch>
-        </p:blipFill>
-        <p:spPr>
-          <a:xfrm>
-            <a:off x="6096000" y="4562040"/>
-            <a:ext cx="2711282" cy="1986340"/>
-          </a:xfrm>
-          <a:prstGeom prst="rect">
-            <a:avLst/>
-          </a:prstGeom>
-        </p:spPr>
-      </p:pic>
-      <p:sp>
-        <p:nvSpPr>
-          <p:cNvPr id="8" name="TextBox 7">
-            <a:extLst>
-              <a:ext uri="{FF2B5EF4-FFF2-40B4-BE49-F238E27FC236}">
-                <a16:creationId xmlns:a16="http://schemas.microsoft.com/office/drawing/2014/main" id="{518489C0-6FB3-7A4B-9A4F-307B788AC944}"/>
-              </a:ext>
-            </a:extLst>
-          </p:cNvPr>
-          <p:cNvSpPr txBox="1"/>
-          <p:nvPr/>
-        </p:nvSpPr>
-        <p:spPr>
-          <a:xfrm>
-            <a:off x="6813466" y="4037610"/>
-            <a:ext cx="1276350" cy="523220"/>
-          </a:xfrm>
-          <a:prstGeom prst="rect">
-            <a:avLst/>
-          </a:prstGeom>
-          <a:noFill/>
-        </p:spPr>
-        <p:txBody>
-          <a:bodyPr wrap="square" rtlCol="0">
-            <a:spAutoFit/>
-          </a:bodyPr>
-          <a:lstStyle/>
-          <a:p>
-            <a:r>
-              <a:rPr lang="en-US" dirty="0"/>
-              <a:t>Increased Sample Size</a:t>
-            </a:r>
-          </a:p>
-        </p:txBody>
-      </p:sp>
-      <p:sp>
-        <p:nvSpPr>
-          <p:cNvPr id="10" name="TextBox 9">
-            <a:extLst>
-              <a:ext uri="{FF2B5EF4-FFF2-40B4-BE49-F238E27FC236}">
-                <a16:creationId xmlns:a16="http://schemas.microsoft.com/office/drawing/2014/main" id="{CD4E59FF-94DA-BE4B-A2B6-E0A0365E44BA}"/>
-              </a:ext>
-            </a:extLst>
-          </p:cNvPr>
-          <p:cNvSpPr txBox="1"/>
-          <p:nvPr/>
-        </p:nvSpPr>
-        <p:spPr>
-          <a:xfrm>
-            <a:off x="9023350" y="4808480"/>
-            <a:ext cx="1276350" cy="307777"/>
-          </a:xfrm>
-          <a:prstGeom prst="rect">
-            <a:avLst/>
-          </a:prstGeom>
-          <a:noFill/>
-        </p:spPr>
-        <p:txBody>
-          <a:bodyPr wrap="square" rtlCol="0">
-            <a:spAutoFit/>
-          </a:bodyPr>
-          <a:lstStyle/>
-          <a:p>
-            <a:r>
-              <a:rPr lang="en-US" dirty="0"/>
-              <a:t>Prior</a:t>
-            </a:r>
-          </a:p>
-        </p:txBody>
-      </p:sp>
-      <p:sp>
-        <p:nvSpPr>
-          <p:cNvPr id="11" name="TextBox 10">
-            <a:extLst>
-              <a:ext uri="{FF2B5EF4-FFF2-40B4-BE49-F238E27FC236}">
-                <a16:creationId xmlns:a16="http://schemas.microsoft.com/office/drawing/2014/main" id="{7AA8ACDC-C4EF-1C4A-8827-C3FA843623C3}"/>
-              </a:ext>
-            </a:extLst>
-          </p:cNvPr>
-          <p:cNvSpPr txBox="1"/>
-          <p:nvPr/>
-        </p:nvSpPr>
-        <p:spPr>
-          <a:xfrm>
-            <a:off x="9023350" y="5400716"/>
-            <a:ext cx="1276350" cy="307777"/>
-          </a:xfrm>
-          <a:prstGeom prst="rect">
-            <a:avLst/>
-          </a:prstGeom>
-          <a:noFill/>
-        </p:spPr>
-        <p:txBody>
-          <a:bodyPr wrap="square" rtlCol="0">
-            <a:spAutoFit/>
-          </a:bodyPr>
-          <a:lstStyle/>
-          <a:p>
-            <a:r>
-              <a:rPr lang="en-US" dirty="0"/>
-              <a:t>Likelihood</a:t>
-            </a:r>
-          </a:p>
-        </p:txBody>
-      </p:sp>
-      <p:sp>
-        <p:nvSpPr>
-          <p:cNvPr id="12" name="TextBox 11">
-            <a:extLst>
-              <a:ext uri="{FF2B5EF4-FFF2-40B4-BE49-F238E27FC236}">
-                <a16:creationId xmlns:a16="http://schemas.microsoft.com/office/drawing/2014/main" id="{637BD549-1D1A-324E-9F6E-1D3B226117E0}"/>
-              </a:ext>
-            </a:extLst>
-          </p:cNvPr>
-          <p:cNvSpPr txBox="1"/>
-          <p:nvPr/>
-        </p:nvSpPr>
-        <p:spPr>
-          <a:xfrm>
-            <a:off x="9023350" y="5992952"/>
-            <a:ext cx="1276350" cy="307777"/>
-          </a:xfrm>
-          <a:prstGeom prst="rect">
-            <a:avLst/>
-          </a:prstGeom>
-          <a:noFill/>
-        </p:spPr>
-        <p:txBody>
-          <a:bodyPr wrap="square" rtlCol="0">
-            <a:spAutoFit/>
-          </a:bodyPr>
-          <a:lstStyle/>
-          <a:p>
-            <a:r>
-              <a:rPr lang="en-US" dirty="0"/>
-              <a:t>Posterior</a:t>
+              <a:rPr lang="en-US" b="1" dirty="0">
+                <a:solidFill>
+                  <a:srgbClr val="FF0000"/>
+                </a:solidFill>
+              </a:rPr>
+              <a:t>Page Under Construction</a:t>
             </a:r>
           </a:p>
         </p:txBody>
@@ -20571,7 +21366,7 @@
     </p:spTree>
     <p:extLst>
       <p:ext uri="{BB962C8B-B14F-4D97-AF65-F5344CB8AC3E}">
-        <p14:creationId xmlns:p14="http://schemas.microsoft.com/office/powerpoint/2010/main" val="2529217939"/>
+        <p14:creationId xmlns:p14="http://schemas.microsoft.com/office/powerpoint/2010/main" val="506399319"/>
       </p:ext>
     </p:extLst>
   </p:cSld>
@@ -20709,6 +21504,45 @@
           </a:p>
           <a:p>
             <a:endParaRPr lang="en-US" sz="1200" dirty="0"/>
+          </a:p>
+        </p:txBody>
+      </p:sp>
+      <p:sp>
+        <p:nvSpPr>
+          <p:cNvPr id="4" name="TextBox 3">
+            <a:extLst>
+              <a:ext uri="{FF2B5EF4-FFF2-40B4-BE49-F238E27FC236}">
+                <a16:creationId xmlns:a16="http://schemas.microsoft.com/office/drawing/2014/main" id="{3B108155-1A92-1B4B-8DFA-2AE7E8721930}"/>
+              </a:ext>
+            </a:extLst>
+          </p:cNvPr>
+          <p:cNvSpPr txBox="1"/>
+          <p:nvPr/>
+        </p:nvSpPr>
+        <p:spPr>
+          <a:xfrm>
+            <a:off x="10813960" y="37572"/>
+            <a:ext cx="1378040" cy="523220"/>
+          </a:xfrm>
+          <a:prstGeom prst="rect">
+            <a:avLst/>
+          </a:prstGeom>
+          <a:noFill/>
+        </p:spPr>
+        <p:txBody>
+          <a:bodyPr wrap="square" rtlCol="0">
+            <a:spAutoFit/>
+          </a:bodyPr>
+          <a:lstStyle/>
+          <a:p>
+            <a:r>
+              <a:rPr lang="en-US" b="1" dirty="0">
+                <a:solidFill>
+                  <a:srgbClr val="FF0000"/>
+                </a:solidFill>
+              </a:rPr>
+              <a:t>Page Under Construction</a:t>
+            </a:r>
           </a:p>
         </p:txBody>
       </p:sp>
@@ -20828,6 +21662,45 @@
           </a:p>
         </p:txBody>
       </p:sp>
+      <p:sp>
+        <p:nvSpPr>
+          <p:cNvPr id="4" name="TextBox 3">
+            <a:extLst>
+              <a:ext uri="{FF2B5EF4-FFF2-40B4-BE49-F238E27FC236}">
+                <a16:creationId xmlns:a16="http://schemas.microsoft.com/office/drawing/2014/main" id="{AE2BFA1A-4174-624F-849E-5B09662570D2}"/>
+              </a:ext>
+            </a:extLst>
+          </p:cNvPr>
+          <p:cNvSpPr txBox="1"/>
+          <p:nvPr/>
+        </p:nvSpPr>
+        <p:spPr>
+          <a:xfrm>
+            <a:off x="10813960" y="37572"/>
+            <a:ext cx="1378040" cy="523220"/>
+          </a:xfrm>
+          <a:prstGeom prst="rect">
+            <a:avLst/>
+          </a:prstGeom>
+          <a:noFill/>
+        </p:spPr>
+        <p:txBody>
+          <a:bodyPr wrap="square" rtlCol="0">
+            <a:spAutoFit/>
+          </a:bodyPr>
+          <a:lstStyle/>
+          <a:p>
+            <a:r>
+              <a:rPr lang="en-US" b="1" dirty="0">
+                <a:solidFill>
+                  <a:srgbClr val="FF0000"/>
+                </a:solidFill>
+              </a:rPr>
+              <a:t>Page Under Construction</a:t>
+            </a:r>
+          </a:p>
+        </p:txBody>
+      </p:sp>
     </p:spTree>
     <p:extLst>
       <p:ext uri="{BB962C8B-B14F-4D97-AF65-F5344CB8AC3E}">
@@ -20872,8 +21745,8 @@
         </p:nvSpPr>
         <p:spPr>
           <a:xfrm>
-            <a:off x="726473" y="3185796"/>
-            <a:ext cx="3206337" cy="2031325"/>
+            <a:off x="8010838" y="3657123"/>
+            <a:ext cx="4079558" cy="1600438"/>
           </a:xfrm>
           <a:prstGeom prst="rect">
             <a:avLst/>
@@ -20887,51 +21760,654 @@
           <a:lstStyle/>
           <a:p>
             <a:r>
+              <a:rPr lang="en-US" sz="2000" b="1" dirty="0">
+                <a:solidFill>
+                  <a:srgbClr val="FF0000"/>
+                </a:solidFill>
+              </a:rPr>
+              <a:t>Credible Interval</a:t>
+            </a:r>
+          </a:p>
+          <a:p>
+            <a:endParaRPr lang="en-US" sz="800" dirty="0"/>
+          </a:p>
+          <a:p>
+            <a:r>
               <a:rPr lang="en-US" dirty="0"/>
-              <a:t>Bayesian Inference for a normal Mean</a:t>
+              <a:t>In Bayesian statistics, a credible interval </a:t>
             </a:r>
           </a:p>
           <a:p>
             <a:r>
               <a:rPr lang="en-US" dirty="0"/>
-              <a:t>xxx</a:t>
-            </a:r>
-          </a:p>
-          <a:p>
-            <a:endParaRPr lang="en-US" dirty="0"/>
+              <a:t>in the posterior probability distribution</a:t>
+            </a:r>
           </a:p>
           <a:p>
             <a:r>
               <a:rPr lang="en-US" dirty="0"/>
-              <a:t>Conjugate Priors</a:t>
+              <a:t>is an interval within which </a:t>
             </a:r>
           </a:p>
           <a:p>
             <a:r>
               <a:rPr lang="en-US" dirty="0"/>
-              <a:t>xxx</a:t>
-            </a:r>
-          </a:p>
-          <a:p>
-            <a:endParaRPr lang="en-US" dirty="0"/>
+              <a:t>an unobserved parameter value falls </a:t>
+            </a:r>
           </a:p>
           <a:p>
             <a:r>
               <a:rPr lang="en-US" dirty="0"/>
-              <a:t>Credible Intervals</a:t>
-            </a:r>
-          </a:p>
-          <a:p>
-            <a:r>
-              <a:rPr lang="en-US" dirty="0"/>
-              <a:t>xxx</a:t>
-            </a:r>
-          </a:p>
-          <a:p>
-            <a:endParaRPr lang="en-US" dirty="0"/>
+              <a:t>with a given probability (usually 95%).</a:t>
+            </a:r>
           </a:p>
         </p:txBody>
       </p:sp>
+      <p:sp>
+        <p:nvSpPr>
+          <p:cNvPr id="2" name="TextBox 1">
+            <a:extLst>
+              <a:ext uri="{FF2B5EF4-FFF2-40B4-BE49-F238E27FC236}">
+                <a16:creationId xmlns:a16="http://schemas.microsoft.com/office/drawing/2014/main" id="{A2E925B5-C306-C84C-A0C3-4D5E4E705A6A}"/>
+              </a:ext>
+            </a:extLst>
+          </p:cNvPr>
+          <p:cNvSpPr txBox="1"/>
+          <p:nvPr/>
+        </p:nvSpPr>
+        <p:spPr>
+          <a:xfrm>
+            <a:off x="101602" y="903692"/>
+            <a:ext cx="6515100" cy="5232202"/>
+          </a:xfrm>
+          <a:prstGeom prst="rect">
+            <a:avLst/>
+          </a:prstGeom>
+          <a:noFill/>
+        </p:spPr>
+        <p:txBody>
+          <a:bodyPr wrap="square" rtlCol="0">
+            <a:spAutoFit/>
+          </a:bodyPr>
+          <a:lstStyle/>
+          <a:p>
+            <a:r>
+              <a:rPr lang="en-US" sz="2000" b="1" dirty="0">
+                <a:solidFill>
+                  <a:srgbClr val="FF0000"/>
+                </a:solidFill>
+              </a:rPr>
+              <a:t>Conjugate Distributions</a:t>
+            </a:r>
+          </a:p>
+          <a:p>
+            <a:r>
+              <a:rPr lang="en-US" sz="2000" b="1" dirty="0">
+                <a:solidFill>
+                  <a:srgbClr val="FF0000"/>
+                </a:solidFill>
+              </a:rPr>
+              <a:t>Conjugate Prior</a:t>
+            </a:r>
+          </a:p>
+          <a:p>
+            <a:endParaRPr lang="en-US" dirty="0"/>
+          </a:p>
+          <a:p>
+            <a:r>
+              <a:rPr lang="en-US" dirty="0"/>
+              <a:t>In Bayesian probability theory, if the posterior distributions </a:t>
+            </a:r>
+            <a:r>
+              <a:rPr lang="en-US" b="1" dirty="0">
+                <a:solidFill>
+                  <a:srgbClr val="0070C0"/>
+                </a:solidFill>
+              </a:rPr>
+              <a:t>p(</a:t>
+            </a:r>
+            <a:r>
+              <a:rPr lang="el-GR" b="1" dirty="0">
+                <a:solidFill>
+                  <a:srgbClr val="0070C0"/>
+                </a:solidFill>
+              </a:rPr>
+              <a:t>θ | </a:t>
+            </a:r>
+            <a:r>
+              <a:rPr lang="en-US" b="1" dirty="0">
+                <a:solidFill>
+                  <a:srgbClr val="0070C0"/>
+                </a:solidFill>
+              </a:rPr>
+              <a:t>x)</a:t>
+            </a:r>
+            <a:r>
+              <a:rPr lang="en-US" dirty="0"/>
+              <a:t> are in the same probability distribution family as the prior probability distribution </a:t>
+            </a:r>
+            <a:r>
+              <a:rPr lang="en-US" b="1" dirty="0">
+                <a:solidFill>
+                  <a:srgbClr val="0070C0"/>
+                </a:solidFill>
+              </a:rPr>
+              <a:t>p(</a:t>
+            </a:r>
+            <a:r>
+              <a:rPr lang="el-GR" b="1" dirty="0">
+                <a:solidFill>
+                  <a:srgbClr val="0070C0"/>
+                </a:solidFill>
+              </a:rPr>
+              <a:t>θ)</a:t>
+            </a:r>
+            <a:r>
+              <a:rPr lang="el-GR" dirty="0"/>
+              <a:t>, </a:t>
+            </a:r>
+            <a:endParaRPr lang="en-US" dirty="0"/>
+          </a:p>
+          <a:p>
+            <a:r>
+              <a:rPr lang="en-US" dirty="0"/>
+              <a:t>then:</a:t>
+            </a:r>
+          </a:p>
+          <a:p>
+            <a:pPr marL="285750" indent="-285750">
+              <a:buFont typeface="Arial" panose="020B0604020202020204" pitchFamily="34" charset="0"/>
+              <a:buChar char="•"/>
+            </a:pPr>
+            <a:r>
+              <a:rPr lang="en-US" dirty="0"/>
+              <a:t>the </a:t>
+            </a:r>
+            <a:r>
+              <a:rPr lang="en-US" b="1" dirty="0">
+                <a:solidFill>
+                  <a:srgbClr val="0070C0"/>
+                </a:solidFill>
+              </a:rPr>
+              <a:t>prior and posterior </a:t>
+            </a:r>
+            <a:r>
+              <a:rPr lang="en-US" dirty="0"/>
+              <a:t>are then called </a:t>
+            </a:r>
+            <a:r>
+              <a:rPr lang="en-US" b="1" dirty="0">
+                <a:solidFill>
+                  <a:srgbClr val="FF0000"/>
+                </a:solidFill>
+              </a:rPr>
+              <a:t>conjugate distributions</a:t>
+            </a:r>
+            <a:r>
+              <a:rPr lang="en-US" dirty="0"/>
+              <a:t>, </a:t>
+            </a:r>
+          </a:p>
+          <a:p>
+            <a:pPr marL="285750" indent="-285750">
+              <a:buFont typeface="Arial" panose="020B0604020202020204" pitchFamily="34" charset="0"/>
+              <a:buChar char="•"/>
+            </a:pPr>
+            <a:r>
+              <a:rPr lang="en-US" dirty="0"/>
+              <a:t>and the </a:t>
+            </a:r>
+            <a:r>
+              <a:rPr lang="en-US" b="1" dirty="0">
+                <a:solidFill>
+                  <a:srgbClr val="0070C0"/>
+                </a:solidFill>
+              </a:rPr>
+              <a:t>prior</a:t>
+            </a:r>
+            <a:r>
+              <a:rPr lang="en-US" dirty="0"/>
+              <a:t> is called a </a:t>
+            </a:r>
+            <a:r>
+              <a:rPr lang="en-US" b="1" dirty="0">
+                <a:solidFill>
+                  <a:srgbClr val="FF0000"/>
+                </a:solidFill>
+              </a:rPr>
+              <a:t>conjugate prior</a:t>
+            </a:r>
+            <a:r>
+              <a:rPr lang="en-US" dirty="0"/>
+              <a:t> for the </a:t>
+            </a:r>
+            <a:r>
+              <a:rPr lang="en-US" b="1" dirty="0">
+                <a:solidFill>
+                  <a:srgbClr val="0070C0"/>
+                </a:solidFill>
+              </a:rPr>
+              <a:t>likelihood function</a:t>
+            </a:r>
+            <a:r>
+              <a:rPr lang="en-US" dirty="0"/>
+              <a:t> p(x | </a:t>
+            </a:r>
+            <a:r>
+              <a:rPr lang="el-GR" dirty="0"/>
+              <a:t>θ). </a:t>
+            </a:r>
+            <a:endParaRPr lang="en-US" dirty="0"/>
+          </a:p>
+          <a:p>
+            <a:endParaRPr lang="en-US" dirty="0"/>
+          </a:p>
+          <a:p>
+            <a:r>
+              <a:rPr lang="en-US" dirty="0"/>
+              <a:t>Example 1:</a:t>
+            </a:r>
+          </a:p>
+          <a:p>
+            <a:endParaRPr lang="en-US" dirty="0"/>
+          </a:p>
+          <a:p>
+            <a:r>
+              <a:rPr lang="en-US" dirty="0"/>
+              <a:t>The </a:t>
+            </a:r>
+            <a:r>
+              <a:rPr lang="en-US" b="1" dirty="0">
+                <a:solidFill>
+                  <a:srgbClr val="FF0000"/>
+                </a:solidFill>
+              </a:rPr>
+              <a:t>Gaussian family</a:t>
+            </a:r>
+            <a:r>
+              <a:rPr lang="en-US" dirty="0"/>
+              <a:t> is conjugate to itself (or </a:t>
+            </a:r>
+            <a:r>
+              <a:rPr lang="en-US" b="1" dirty="0">
+                <a:solidFill>
+                  <a:srgbClr val="FF0000"/>
+                </a:solidFill>
+              </a:rPr>
+              <a:t>self-conjugate</a:t>
+            </a:r>
+            <a:r>
+              <a:rPr lang="en-US" dirty="0"/>
+              <a:t>) with respect to a </a:t>
+            </a:r>
+            <a:r>
+              <a:rPr lang="en-US" b="1" dirty="0">
+                <a:solidFill>
+                  <a:srgbClr val="FF0000"/>
+                </a:solidFill>
+              </a:rPr>
+              <a:t>Gaussian </a:t>
+            </a:r>
+            <a:r>
+              <a:rPr lang="en-US" b="1" dirty="0">
+                <a:solidFill>
+                  <a:srgbClr val="0070C0"/>
+                </a:solidFill>
+              </a:rPr>
+              <a:t>likelihood</a:t>
+            </a:r>
+            <a:r>
+              <a:rPr lang="en-US" dirty="0"/>
+              <a:t> function. </a:t>
+            </a:r>
+          </a:p>
+          <a:p>
+            <a:r>
+              <a:rPr lang="en-US" dirty="0"/>
+              <a:t>If the likelihood function is </a:t>
+            </a:r>
+            <a:r>
+              <a:rPr lang="en-US" b="1" dirty="0">
+                <a:solidFill>
+                  <a:srgbClr val="FF0000"/>
+                </a:solidFill>
+              </a:rPr>
+              <a:t>Gaussian</a:t>
+            </a:r>
+            <a:r>
+              <a:rPr lang="en-US" dirty="0"/>
+              <a:t>, choosing a </a:t>
+            </a:r>
+            <a:r>
+              <a:rPr lang="en-US" b="1" dirty="0">
+                <a:solidFill>
+                  <a:srgbClr val="FF0000"/>
+                </a:solidFill>
+              </a:rPr>
+              <a:t>Gaussian </a:t>
+            </a:r>
+            <a:r>
+              <a:rPr lang="en-US" b="1" dirty="0">
+                <a:solidFill>
+                  <a:srgbClr val="0070C0"/>
+                </a:solidFill>
+              </a:rPr>
+              <a:t>prior</a:t>
+            </a:r>
+            <a:r>
+              <a:rPr lang="en-US" dirty="0"/>
+              <a:t> over the mean will ensure that the </a:t>
+            </a:r>
+            <a:r>
+              <a:rPr lang="en-US" b="1" dirty="0">
+                <a:solidFill>
+                  <a:srgbClr val="0070C0"/>
+                </a:solidFill>
+              </a:rPr>
+              <a:t>posterior distribution</a:t>
+            </a:r>
+            <a:r>
+              <a:rPr lang="en-US" b="1" dirty="0">
+                <a:solidFill>
+                  <a:srgbClr val="FF0000"/>
+                </a:solidFill>
+              </a:rPr>
+              <a:t> </a:t>
+            </a:r>
+            <a:r>
+              <a:rPr lang="en-US" dirty="0">
+                <a:solidFill>
+                  <a:schemeClr val="tx1"/>
+                </a:solidFill>
+              </a:rPr>
+              <a:t>is also</a:t>
+            </a:r>
+            <a:r>
+              <a:rPr lang="en-US" b="1" dirty="0">
+                <a:solidFill>
+                  <a:srgbClr val="FF0000"/>
+                </a:solidFill>
+              </a:rPr>
+              <a:t> Gaussian</a:t>
+            </a:r>
+            <a:r>
+              <a:rPr lang="en-US" dirty="0"/>
+              <a:t>. </a:t>
+            </a:r>
+          </a:p>
+          <a:p>
+            <a:endParaRPr lang="en-US" dirty="0"/>
+          </a:p>
+          <a:p>
+            <a:r>
+              <a:rPr lang="en-US" dirty="0"/>
+              <a:t>This means that the </a:t>
+            </a:r>
+            <a:r>
+              <a:rPr lang="en-US" b="1" dirty="0">
+                <a:solidFill>
+                  <a:srgbClr val="FF0000"/>
+                </a:solidFill>
+              </a:rPr>
+              <a:t>Gaussian distribution</a:t>
+            </a:r>
+            <a:r>
+              <a:rPr lang="en-US" dirty="0"/>
+              <a:t> is a conjugate prior for the </a:t>
+            </a:r>
+            <a:r>
+              <a:rPr lang="en-US" b="1" dirty="0">
+                <a:solidFill>
+                  <a:srgbClr val="0070C0"/>
+                </a:solidFill>
+              </a:rPr>
+              <a:t>likelihood</a:t>
+            </a:r>
+            <a:r>
+              <a:rPr lang="en-US" dirty="0"/>
+              <a:t> that is also Gaussian. </a:t>
+            </a:r>
+          </a:p>
+          <a:p>
+            <a:endParaRPr lang="en-US" dirty="0"/>
+          </a:p>
+          <a:p>
+            <a:r>
+              <a:rPr lang="en-US" dirty="0"/>
+              <a:t>Example 2:</a:t>
+            </a:r>
+          </a:p>
+          <a:p>
+            <a:endParaRPr lang="en-US" dirty="0"/>
+          </a:p>
+          <a:p>
+            <a:r>
+              <a:rPr lang="en-US" dirty="0"/>
+              <a:t>The </a:t>
+            </a:r>
+            <a:r>
+              <a:rPr lang="en-US" b="1" dirty="0">
+                <a:solidFill>
+                  <a:srgbClr val="FF0000"/>
+                </a:solidFill>
+              </a:rPr>
+              <a:t>beta distribution</a:t>
+            </a:r>
+            <a:r>
+              <a:rPr lang="en-US" dirty="0"/>
+              <a:t> is the conjugate prior for many distributions: </a:t>
+            </a:r>
+          </a:p>
+          <a:p>
+            <a:r>
+              <a:rPr lang="en-US" dirty="0"/>
+              <a:t>    </a:t>
+            </a:r>
+            <a:r>
+              <a:rPr lang="en-US" b="1" dirty="0">
+                <a:solidFill>
+                  <a:srgbClr val="0070C0"/>
+                </a:solidFill>
+              </a:rPr>
+              <a:t>Bernoulli, binomial, negative binomial, geometric distributions</a:t>
+            </a:r>
+            <a:r>
+              <a:rPr lang="en-US" dirty="0"/>
+              <a:t>.</a:t>
+            </a:r>
+          </a:p>
+        </p:txBody>
+      </p:sp>
+      <p:sp>
+        <p:nvSpPr>
+          <p:cNvPr id="4" name="TextBox 3">
+            <a:extLst>
+              <a:ext uri="{FF2B5EF4-FFF2-40B4-BE49-F238E27FC236}">
+                <a16:creationId xmlns:a16="http://schemas.microsoft.com/office/drawing/2014/main" id="{0D567E5F-290B-DE49-836D-8B7AA86D7483}"/>
+              </a:ext>
+            </a:extLst>
+          </p:cNvPr>
+          <p:cNvSpPr txBox="1"/>
+          <p:nvPr/>
+        </p:nvSpPr>
+        <p:spPr>
+          <a:xfrm>
+            <a:off x="-1" y="37572"/>
+            <a:ext cx="5600701" cy="523220"/>
+          </a:xfrm>
+          <a:prstGeom prst="rect">
+            <a:avLst/>
+          </a:prstGeom>
+          <a:noFill/>
+        </p:spPr>
+        <p:txBody>
+          <a:bodyPr wrap="square" rtlCol="0">
+            <a:spAutoFit/>
+          </a:bodyPr>
+          <a:lstStyle/>
+          <a:p>
+            <a:r>
+              <a:rPr lang="en-US" sz="2800" b="1" dirty="0"/>
+              <a:t>Bayesian Inference - continued</a:t>
+            </a:r>
+          </a:p>
+        </p:txBody>
+      </p:sp>
+      <p:pic>
+        <p:nvPicPr>
+          <p:cNvPr id="1026" name="Picture 2" descr="Do You Know Credible Interval. Don't Mess up Your Next Data… | by Shaw Lu |  Towards Data Science">
+            <a:extLst>
+              <a:ext uri="{FF2B5EF4-FFF2-40B4-BE49-F238E27FC236}">
+                <a16:creationId xmlns:a16="http://schemas.microsoft.com/office/drawing/2014/main" id="{B667D2BD-D19A-0A43-AB63-B5E2DFEFEC79}"/>
+              </a:ext>
+            </a:extLst>
+          </p:cNvPr>
+          <p:cNvPicPr>
+            <a:picLocks noChangeAspect="1" noChangeArrowheads="1"/>
+          </p:cNvPicPr>
+          <p:nvPr/>
+        </p:nvPicPr>
+        <p:blipFill>
+          <a:blip r:embed="rId2" cstate="email">
+            <a:extLst>
+              <a:ext uri="{28A0092B-C50C-407E-A947-70E740481C1C}">
+                <a14:useLocalDpi xmlns:a14="http://schemas.microsoft.com/office/drawing/2010/main"/>
+              </a:ext>
+            </a:extLst>
+          </a:blip>
+          <a:srcRect/>
+          <a:stretch>
+            <a:fillRect/>
+          </a:stretch>
+        </p:blipFill>
+        <p:spPr bwMode="auto">
+          <a:xfrm>
+            <a:off x="8677184" y="5257561"/>
+            <a:ext cx="2400659" cy="1600439"/>
+          </a:xfrm>
+          <a:prstGeom prst="rect">
+            <a:avLst/>
+          </a:prstGeom>
+          <a:noFill/>
+          <a:extLst>
+            <a:ext uri="{909E8E84-426E-40DD-AFC4-6F175D3DCCD1}">
+              <a14:hiddenFill xmlns:a14="http://schemas.microsoft.com/office/drawing/2010/main">
+                <a:solidFill>
+                  <a:srgbClr val="FFFFFF"/>
+                </a:solidFill>
+              </a14:hiddenFill>
+            </a:ext>
+          </a:extLst>
+        </p:spPr>
+      </p:pic>
+      <p:sp>
+        <p:nvSpPr>
+          <p:cNvPr id="3" name="TextBox 2">
+            <a:extLst>
+              <a:ext uri="{FF2B5EF4-FFF2-40B4-BE49-F238E27FC236}">
+                <a16:creationId xmlns:a16="http://schemas.microsoft.com/office/drawing/2014/main" id="{CCD26C95-B775-434B-9812-58AEDE80A0D2}"/>
+              </a:ext>
+            </a:extLst>
+          </p:cNvPr>
+          <p:cNvSpPr txBox="1"/>
+          <p:nvPr/>
+        </p:nvSpPr>
+        <p:spPr>
+          <a:xfrm>
+            <a:off x="8010838" y="368128"/>
+            <a:ext cx="4079559" cy="2246769"/>
+          </a:xfrm>
+          <a:prstGeom prst="rect">
+            <a:avLst/>
+          </a:prstGeom>
+          <a:noFill/>
+        </p:spPr>
+        <p:txBody>
+          <a:bodyPr wrap="square" rtlCol="0">
+            <a:spAutoFit/>
+          </a:bodyPr>
+          <a:lstStyle/>
+          <a:p>
+            <a:r>
+              <a:rPr lang="en-US" sz="2000" b="1" dirty="0">
+                <a:solidFill>
+                  <a:srgbClr val="FF0000"/>
+                </a:solidFill>
+              </a:rPr>
+              <a:t>Nuisance Parameters</a:t>
+            </a:r>
+          </a:p>
+          <a:p>
+            <a:endParaRPr lang="en-US" sz="800" dirty="0"/>
+          </a:p>
+          <a:p>
+            <a:r>
+              <a:rPr lang="en-US" dirty="0"/>
+              <a:t>Nuisance parameters occur when reality and data are complex enough to require models with multiple parameters, but inferential interest is confined to a reduced set of parameters.</a:t>
+            </a:r>
+          </a:p>
+          <a:p>
+            <a:endParaRPr lang="en-US" dirty="0"/>
+          </a:p>
+          <a:p>
+            <a:r>
+              <a:rPr lang="en-US" dirty="0"/>
+              <a:t>Nuisance parameters are often variances,</a:t>
+            </a:r>
+          </a:p>
+          <a:p>
+            <a:r>
+              <a:rPr lang="en-US" dirty="0"/>
+              <a:t>or some unknown parameters (think about black box with some invisible parameters inside).</a:t>
+            </a:r>
+          </a:p>
+        </p:txBody>
+      </p:sp>
+      <p:pic>
+        <p:nvPicPr>
+          <p:cNvPr id="5122" name="Picture 2" descr="Black Box for Vehicles">
+            <a:extLst>
+              <a:ext uri="{FF2B5EF4-FFF2-40B4-BE49-F238E27FC236}">
+                <a16:creationId xmlns:a16="http://schemas.microsoft.com/office/drawing/2014/main" id="{468BF0D6-6A62-1543-8017-1C553CF4DE13}"/>
+              </a:ext>
+            </a:extLst>
+          </p:cNvPr>
+          <p:cNvPicPr>
+            <a:picLocks noChangeAspect="1" noChangeArrowheads="1"/>
+          </p:cNvPicPr>
+          <p:nvPr/>
+        </p:nvPicPr>
+        <p:blipFill rotWithShape="1">
+          <a:blip r:embed="rId3" cstate="email">
+            <a:extLst>
+              <a:ext uri="{28A0092B-C50C-407E-A947-70E740481C1C}">
+                <a14:useLocalDpi xmlns:a14="http://schemas.microsoft.com/office/drawing/2010/main"/>
+              </a:ext>
+            </a:extLst>
+          </a:blip>
+          <a:srcRect/>
+          <a:stretch/>
+        </p:blipFill>
+        <p:spPr bwMode="auto">
+          <a:xfrm>
+            <a:off x="9207340" y="2637297"/>
+            <a:ext cx="1222910" cy="439214"/>
+          </a:xfrm>
+          <a:prstGeom prst="rect">
+            <a:avLst/>
+          </a:prstGeom>
+          <a:noFill/>
+          <a:extLst>
+            <a:ext uri="{909E8E84-426E-40DD-AFC4-6F175D3DCCD1}">
+              <a14:hiddenFill xmlns:a14="http://schemas.microsoft.com/office/drawing/2010/main">
+                <a:solidFill>
+                  <a:srgbClr val="FFFFFF"/>
+                </a:solidFill>
+              </a14:hiddenFill>
+            </a:ext>
+          </a:extLst>
+        </p:spPr>
+      </p:pic>
     </p:spTree>
     <p:extLst>
       <p:ext uri="{BB962C8B-B14F-4D97-AF65-F5344CB8AC3E}">
@@ -25277,7 +26753,7 @@
         </p:nvSpPr>
         <p:spPr>
           <a:xfrm>
-            <a:off x="7538024" y="6157292"/>
+            <a:off x="7983724" y="162602"/>
             <a:ext cx="4653976" cy="523220"/>
           </a:xfrm>
           <a:prstGeom prst="rect">
@@ -25467,6 +26943,94 @@
               </a:rPr>
               <a:t>Our Particular Interval</a:t>
             </a:r>
+          </a:p>
+        </p:txBody>
+      </p:sp>
+      <p:pic>
+        <p:nvPicPr>
+          <p:cNvPr id="2050" name="Picture 2" descr="jakevdp (Jake Vanderplas) · GitHub">
+            <a:extLst>
+              <a:ext uri="{FF2B5EF4-FFF2-40B4-BE49-F238E27FC236}">
+                <a16:creationId xmlns:a16="http://schemas.microsoft.com/office/drawing/2014/main" id="{5D6298A0-DEB9-1946-AA2C-515B38CD732B}"/>
+              </a:ext>
+            </a:extLst>
+          </p:cNvPr>
+          <p:cNvPicPr>
+            <a:picLocks noChangeAspect="1" noChangeArrowheads="1"/>
+          </p:cNvPicPr>
+          <p:nvPr/>
+        </p:nvPicPr>
+        <p:blipFill>
+          <a:blip r:embed="rId3" cstate="email">
+            <a:extLst>
+              <a:ext uri="{28A0092B-C50C-407E-A947-70E740481C1C}">
+                <a14:useLocalDpi xmlns:a14="http://schemas.microsoft.com/office/drawing/2010/main"/>
+              </a:ext>
+            </a:extLst>
+          </a:blip>
+          <a:srcRect/>
+          <a:stretch>
+            <a:fillRect/>
+          </a:stretch>
+        </p:blipFill>
+        <p:spPr bwMode="auto">
+          <a:xfrm>
+            <a:off x="10537849" y="855953"/>
+            <a:ext cx="1377826" cy="1377826"/>
+          </a:xfrm>
+          <a:prstGeom prst="rect">
+            <a:avLst/>
+          </a:prstGeom>
+          <a:noFill/>
+          <a:extLst>
+            <a:ext uri="{909E8E84-426E-40DD-AFC4-6F175D3DCCD1}">
+              <a14:hiddenFill xmlns:a14="http://schemas.microsoft.com/office/drawing/2010/main">
+                <a:solidFill>
+                  <a:srgbClr val="FFFFFF"/>
+                </a:solidFill>
+              </a14:hiddenFill>
+            </a:ext>
+          </a:extLst>
+        </p:spPr>
+      </p:pic>
+      <p:sp>
+        <p:nvSpPr>
+          <p:cNvPr id="28" name="TextBox 27">
+            <a:extLst>
+              <a:ext uri="{FF2B5EF4-FFF2-40B4-BE49-F238E27FC236}">
+                <a16:creationId xmlns:a16="http://schemas.microsoft.com/office/drawing/2014/main" id="{66EA754E-B414-0E46-A7C6-0D49F68F18AE}"/>
+              </a:ext>
+            </a:extLst>
+          </p:cNvPr>
+          <p:cNvSpPr txBox="1"/>
+          <p:nvPr/>
+        </p:nvSpPr>
+        <p:spPr>
+          <a:xfrm>
+            <a:off x="10387167" y="2200247"/>
+            <a:ext cx="1610870" cy="309062"/>
+          </a:xfrm>
+          <a:prstGeom prst="rect">
+            <a:avLst/>
+          </a:prstGeom>
+          <a:noFill/>
+        </p:spPr>
+        <p:txBody>
+          <a:bodyPr wrap="square" rtlCol="0">
+            <a:spAutoFit/>
+          </a:bodyPr>
+          <a:lstStyle/>
+          <a:p>
+            <a:pPr algn="ctr"/>
+            <a:r>
+              <a:rPr lang="en-US" dirty="0"/>
+              <a:t>Jake </a:t>
+            </a:r>
+            <a:r>
+              <a:rPr lang="en-US" dirty="0" err="1"/>
+              <a:t>VanderPlas</a:t>
+            </a:r>
+            <a:endParaRPr lang="en-US" dirty="0"/>
           </a:p>
         </p:txBody>
       </p:sp>

--- a/statistics_08_Bayes_Bayesian.pptx
+++ b/statistics_08_Bayes_Bayesian.pptx
@@ -5,29 +5,30 @@
     <p:sldMasterId id="2147483659" r:id="rId1"/>
   </p:sldMasterIdLst>
   <p:notesMasterIdLst>
-    <p:notesMasterId r:id="rId22"/>
+    <p:notesMasterId r:id="rId23"/>
   </p:notesMasterIdLst>
   <p:sldIdLst>
     <p:sldId id="256" r:id="rId2"/>
     <p:sldId id="263" r:id="rId3"/>
-    <p:sldId id="295" r:id="rId4"/>
-    <p:sldId id="296" r:id="rId5"/>
-    <p:sldId id="291" r:id="rId6"/>
-    <p:sldId id="257" r:id="rId7"/>
-    <p:sldId id="258" r:id="rId8"/>
-    <p:sldId id="260" r:id="rId9"/>
-    <p:sldId id="293" r:id="rId10"/>
-    <p:sldId id="294" r:id="rId11"/>
-    <p:sldId id="298" r:id="rId12"/>
-    <p:sldId id="302" r:id="rId13"/>
-    <p:sldId id="299" r:id="rId14"/>
-    <p:sldId id="301" r:id="rId15"/>
-    <p:sldId id="303" r:id="rId16"/>
-    <p:sldId id="304" r:id="rId17"/>
-    <p:sldId id="300" r:id="rId18"/>
-    <p:sldId id="292" r:id="rId19"/>
-    <p:sldId id="262" r:id="rId20"/>
-    <p:sldId id="297" r:id="rId21"/>
+    <p:sldId id="305" r:id="rId4"/>
+    <p:sldId id="295" r:id="rId5"/>
+    <p:sldId id="296" r:id="rId6"/>
+    <p:sldId id="291" r:id="rId7"/>
+    <p:sldId id="257" r:id="rId8"/>
+    <p:sldId id="258" r:id="rId9"/>
+    <p:sldId id="260" r:id="rId10"/>
+    <p:sldId id="293" r:id="rId11"/>
+    <p:sldId id="294" r:id="rId12"/>
+    <p:sldId id="298" r:id="rId13"/>
+    <p:sldId id="302" r:id="rId14"/>
+    <p:sldId id="299" r:id="rId15"/>
+    <p:sldId id="301" r:id="rId16"/>
+    <p:sldId id="303" r:id="rId17"/>
+    <p:sldId id="304" r:id="rId18"/>
+    <p:sldId id="300" r:id="rId19"/>
+    <p:sldId id="292" r:id="rId20"/>
+    <p:sldId id="262" r:id="rId21"/>
+    <p:sldId id="297" r:id="rId22"/>
   </p:sldIdLst>
   <p:sldSz cx="12192000" cy="6858000"/>
   <p:notesSz cx="6858000" cy="9144000"/>
@@ -17627,6 +17628,688 @@
       </p:grpSpPr>
       <p:sp>
         <p:nvSpPr>
+          <p:cNvPr id="18" name="Google Shape;107;p14">
+            <a:extLst>
+              <a:ext uri="{FF2B5EF4-FFF2-40B4-BE49-F238E27FC236}">
+                <a16:creationId xmlns:a16="http://schemas.microsoft.com/office/drawing/2014/main" id="{C2992640-6531-5D46-B219-A020079806DB}"/>
+              </a:ext>
+            </a:extLst>
+          </p:cNvPr>
+          <p:cNvSpPr txBox="1"/>
+          <p:nvPr/>
+        </p:nvSpPr>
+        <p:spPr>
+          <a:xfrm>
+            <a:off x="91343" y="40387"/>
+            <a:ext cx="5893822" cy="1137250"/>
+          </a:xfrm>
+          <a:prstGeom prst="rect">
+            <a:avLst/>
+          </a:prstGeom>
+          <a:noFill/>
+          <a:ln>
+            <a:noFill/>
+          </a:ln>
+        </p:spPr>
+        <p:txBody>
+          <a:bodyPr spcFirstLastPara="1" wrap="square" lIns="91425" tIns="45700" rIns="91425" bIns="45700" anchor="t" anchorCtr="0">
+            <a:noAutofit/>
+          </a:bodyPr>
+          <a:lstStyle/>
+          <a:p>
+            <a:pPr marL="0" marR="0" lvl="0" indent="0" algn="l" rtl="0">
+              <a:spcBef>
+                <a:spcPts val="0"/>
+              </a:spcBef>
+              <a:spcAft>
+                <a:spcPts val="0"/>
+              </a:spcAft>
+              <a:buNone/>
+            </a:pPr>
+            <a:r>
+              <a:rPr lang="en-US" sz="2800" b="1" dirty="0">
+                <a:solidFill>
+                  <a:schemeClr val="tx1"/>
+                </a:solidFill>
+                <a:latin typeface="Calibri" panose="020F0502020204030204" pitchFamily="34" charset="0"/>
+                <a:cs typeface="Calibri" panose="020F0502020204030204" pitchFamily="34" charset="0"/>
+                <a:sym typeface="Calibri"/>
+              </a:rPr>
+              <a:t>Bayesian network  </a:t>
+            </a:r>
+            <a:br>
+              <a:rPr lang="en-US" sz="2800" b="1" dirty="0">
+                <a:solidFill>
+                  <a:schemeClr val="tx1"/>
+                </a:solidFill>
+                <a:latin typeface="Calibri" panose="020F0502020204030204" pitchFamily="34" charset="0"/>
+                <a:cs typeface="Calibri" panose="020F0502020204030204" pitchFamily="34" charset="0"/>
+                <a:sym typeface="Calibri"/>
+              </a:rPr>
+            </a:br>
+            <a:r>
+              <a:rPr lang="en-US" sz="1800" dirty="0">
+                <a:solidFill>
+                  <a:schemeClr val="dk1"/>
+                </a:solidFill>
+                <a:latin typeface="Calibri"/>
+                <a:cs typeface="Calibri"/>
+                <a:sym typeface="Calibri"/>
+              </a:rPr>
+              <a:t>( a.k.a. Bayes network, belief network, Bayes(</a:t>
+            </a:r>
+            <a:r>
+              <a:rPr lang="en-US" sz="1800" dirty="0" err="1">
+                <a:solidFill>
+                  <a:schemeClr val="dk1"/>
+                </a:solidFill>
+                <a:latin typeface="Calibri"/>
+                <a:cs typeface="Calibri"/>
+                <a:sym typeface="Calibri"/>
+              </a:rPr>
+              <a:t>ian</a:t>
+            </a:r>
+            <a:r>
+              <a:rPr lang="en-US" sz="1800" dirty="0">
+                <a:solidFill>
+                  <a:schemeClr val="dk1"/>
+                </a:solidFill>
+                <a:latin typeface="Calibri"/>
+                <a:cs typeface="Calibri"/>
+                <a:sym typeface="Calibri"/>
+              </a:rPr>
+              <a:t>) model </a:t>
+            </a:r>
+          </a:p>
+          <a:p>
+            <a:pPr marL="0" marR="0" lvl="0" indent="0" algn="l" rtl="0">
+              <a:spcBef>
+                <a:spcPts val="0"/>
+              </a:spcBef>
+              <a:spcAft>
+                <a:spcPts val="0"/>
+              </a:spcAft>
+              <a:buNone/>
+            </a:pPr>
+            <a:r>
+              <a:rPr lang="en-US" sz="1800" dirty="0">
+                <a:solidFill>
+                  <a:schemeClr val="dk1"/>
+                </a:solidFill>
+                <a:latin typeface="Calibri"/>
+                <a:cs typeface="Calibri"/>
+                <a:sym typeface="Calibri"/>
+              </a:rPr>
+              <a:t>  or probabilistic directed acyclic graphical model )</a:t>
+            </a:r>
+            <a:r>
+              <a:rPr lang="en-US" sz="1800" dirty="0">
+                <a:solidFill>
+                  <a:schemeClr val="dk1"/>
+                </a:solidFill>
+                <a:latin typeface="Calibri"/>
+                <a:ea typeface="Calibri"/>
+                <a:cs typeface="Calibri"/>
+                <a:sym typeface="Calibri"/>
+              </a:rPr>
+              <a:t> </a:t>
+            </a:r>
+          </a:p>
+        </p:txBody>
+      </p:sp>
+      <p:pic>
+        <p:nvPicPr>
+          <p:cNvPr id="19" name="Google Shape;114;p14">
+            <a:extLst>
+              <a:ext uri="{FF2B5EF4-FFF2-40B4-BE49-F238E27FC236}">
+                <a16:creationId xmlns:a16="http://schemas.microsoft.com/office/drawing/2014/main" id="{6CEB8B6B-5D31-D04D-8340-CFFC67C74C71}"/>
+              </a:ext>
+            </a:extLst>
+          </p:cNvPr>
+          <p:cNvPicPr preferRelativeResize="0"/>
+          <p:nvPr/>
+        </p:nvPicPr>
+        <p:blipFill rotWithShape="1">
+          <a:blip r:embed="rId3" cstate="email">
+            <a:alphaModFix/>
+            <a:extLst>
+              <a:ext uri="{28A0092B-C50C-407E-A947-70E740481C1C}">
+                <a14:useLocalDpi xmlns:a14="http://schemas.microsoft.com/office/drawing/2010/main"/>
+              </a:ext>
+            </a:extLst>
+          </a:blip>
+          <a:srcRect/>
+          <a:stretch/>
+        </p:blipFill>
+        <p:spPr>
+          <a:xfrm>
+            <a:off x="7021286" y="418578"/>
+            <a:ext cx="1715986" cy="1996320"/>
+          </a:xfrm>
+          <a:prstGeom prst="rect">
+            <a:avLst/>
+          </a:prstGeom>
+          <a:noFill/>
+          <a:ln>
+            <a:noFill/>
+          </a:ln>
+        </p:spPr>
+      </p:pic>
+      <p:pic>
+        <p:nvPicPr>
+          <p:cNvPr id="1026" name="Picture 2" descr="A name for layered directed graph as in a fully-connected neural network -  Mathematics Stack Exchange">
+            <a:extLst>
+              <a:ext uri="{FF2B5EF4-FFF2-40B4-BE49-F238E27FC236}">
+                <a16:creationId xmlns:a16="http://schemas.microsoft.com/office/drawing/2014/main" id="{9F27D678-C094-7546-8A93-B3B6A7DC683E}"/>
+              </a:ext>
+            </a:extLst>
+          </p:cNvPr>
+          <p:cNvPicPr>
+            <a:picLocks noChangeAspect="1" noChangeArrowheads="1"/>
+          </p:cNvPicPr>
+          <p:nvPr/>
+        </p:nvPicPr>
+        <p:blipFill>
+          <a:blip r:embed="rId4" cstate="email">
+            <a:extLst>
+              <a:ext uri="{28A0092B-C50C-407E-A947-70E740481C1C}">
+                <a14:useLocalDpi xmlns:a14="http://schemas.microsoft.com/office/drawing/2010/main"/>
+              </a:ext>
+            </a:extLst>
+          </a:blip>
+          <a:srcRect/>
+          <a:stretch>
+            <a:fillRect/>
+          </a:stretch>
+        </p:blipFill>
+        <p:spPr bwMode="auto">
+          <a:xfrm>
+            <a:off x="7021286" y="3248453"/>
+            <a:ext cx="4388069" cy="2234581"/>
+          </a:xfrm>
+          <a:prstGeom prst="rect">
+            <a:avLst/>
+          </a:prstGeom>
+          <a:noFill/>
+          <a:extLst>
+            <a:ext uri="{909E8E84-426E-40DD-AFC4-6F175D3DCCD1}">
+              <a14:hiddenFill xmlns:a14="http://schemas.microsoft.com/office/drawing/2010/main">
+                <a:solidFill>
+                  <a:srgbClr val="FFFFFF"/>
+                </a:solidFill>
+              </a14:hiddenFill>
+            </a:ext>
+          </a:extLst>
+        </p:spPr>
+      </p:pic>
+      <p:sp>
+        <p:nvSpPr>
+          <p:cNvPr id="5" name="Google Shape;107;p14">
+            <a:extLst>
+              <a:ext uri="{FF2B5EF4-FFF2-40B4-BE49-F238E27FC236}">
+                <a16:creationId xmlns:a16="http://schemas.microsoft.com/office/drawing/2014/main" id="{341F2A09-BD6A-6E40-B245-BD73EC20CC51}"/>
+              </a:ext>
+            </a:extLst>
+          </p:cNvPr>
+          <p:cNvSpPr txBox="1"/>
+          <p:nvPr/>
+        </p:nvSpPr>
+        <p:spPr>
+          <a:xfrm>
+            <a:off x="91342" y="1416738"/>
+            <a:ext cx="6613415" cy="998160"/>
+          </a:xfrm>
+          <a:prstGeom prst="rect">
+            <a:avLst/>
+          </a:prstGeom>
+          <a:noFill/>
+          <a:ln>
+            <a:noFill/>
+          </a:ln>
+        </p:spPr>
+        <p:txBody>
+          <a:bodyPr spcFirstLastPara="1" wrap="square" lIns="91425" tIns="45700" rIns="91425" bIns="45700" anchor="t" anchorCtr="0">
+            <a:noAutofit/>
+          </a:bodyPr>
+          <a:lstStyle/>
+          <a:p>
+            <a:pPr marL="0" marR="0" lvl="0" indent="0" algn="l" rtl="0">
+              <a:spcBef>
+                <a:spcPts val="0"/>
+              </a:spcBef>
+              <a:spcAft>
+                <a:spcPts val="0"/>
+              </a:spcAft>
+              <a:buNone/>
+            </a:pPr>
+            <a:r>
+              <a:rPr lang="en-US" sz="1800" b="1" dirty="0">
+                <a:solidFill>
+                  <a:schemeClr val="accent1"/>
+                </a:solidFill>
+                <a:latin typeface="Calibri" panose="020F0502020204030204" pitchFamily="34" charset="0"/>
+                <a:cs typeface="Calibri" panose="020F0502020204030204" pitchFamily="34" charset="0"/>
+                <a:sym typeface="Calibri"/>
+              </a:rPr>
+              <a:t>Bayesian network </a:t>
+            </a:r>
+            <a:r>
+              <a:rPr lang="en-US" sz="1800" dirty="0">
+                <a:solidFill>
+                  <a:schemeClr val="dk1"/>
+                </a:solidFill>
+                <a:latin typeface="Calibri"/>
+                <a:ea typeface="Calibri"/>
+                <a:cs typeface="Calibri"/>
+                <a:sym typeface="Calibri"/>
+              </a:rPr>
+              <a:t>is a probabilistic graphical model (a type of statistical model) that represents a set of random variables and their conditional dependencies via a directed acyclic graph (DAG). </a:t>
+            </a:r>
+          </a:p>
+        </p:txBody>
+      </p:sp>
+      <p:sp>
+        <p:nvSpPr>
+          <p:cNvPr id="7" name="Google Shape;107;p14">
+            <a:extLst>
+              <a:ext uri="{FF2B5EF4-FFF2-40B4-BE49-F238E27FC236}">
+                <a16:creationId xmlns:a16="http://schemas.microsoft.com/office/drawing/2014/main" id="{4CCE08F0-3501-EE45-BB4D-DD3F87E80562}"/>
+              </a:ext>
+            </a:extLst>
+          </p:cNvPr>
+          <p:cNvSpPr txBox="1"/>
+          <p:nvPr/>
+        </p:nvSpPr>
+        <p:spPr>
+          <a:xfrm>
+            <a:off x="91342" y="2423668"/>
+            <a:ext cx="6428357" cy="1480847"/>
+          </a:xfrm>
+          <a:prstGeom prst="rect">
+            <a:avLst/>
+          </a:prstGeom>
+          <a:noFill/>
+          <a:ln>
+            <a:noFill/>
+          </a:ln>
+        </p:spPr>
+        <p:txBody>
+          <a:bodyPr spcFirstLastPara="1" wrap="square" lIns="91425" tIns="45700" rIns="91425" bIns="45700" anchor="t" anchorCtr="0">
+            <a:noAutofit/>
+          </a:bodyPr>
+          <a:lstStyle/>
+          <a:p>
+            <a:pPr marL="0" marR="0" lvl="0" indent="0" algn="l" rtl="0">
+              <a:spcBef>
+                <a:spcPts val="0"/>
+              </a:spcBef>
+              <a:spcAft>
+                <a:spcPts val="0"/>
+              </a:spcAft>
+              <a:buNone/>
+            </a:pPr>
+            <a:r>
+              <a:rPr lang="en-US" sz="1800" dirty="0">
+                <a:solidFill>
+                  <a:schemeClr val="dk1"/>
+                </a:solidFill>
+                <a:latin typeface="Calibri"/>
+                <a:ea typeface="Calibri"/>
+                <a:cs typeface="Calibri"/>
+                <a:sym typeface="Calibri"/>
+              </a:rPr>
+              <a:t>Example: </a:t>
+            </a:r>
+          </a:p>
+          <a:p>
+            <a:pPr lvl="0"/>
+            <a:r>
+              <a:rPr lang="en-US" sz="1800" b="1" dirty="0">
+                <a:solidFill>
+                  <a:srgbClr val="0070C0"/>
+                </a:solidFill>
+                <a:latin typeface="Calibri"/>
+                <a:ea typeface="Calibri"/>
+                <a:cs typeface="Calibri"/>
+                <a:sym typeface="Calibri"/>
+              </a:rPr>
+              <a:t>Deep Belief Networks </a:t>
+            </a:r>
+            <a:r>
+              <a:rPr lang="en-US" sz="1800" dirty="0">
+                <a:solidFill>
+                  <a:schemeClr val="dk1"/>
+                </a:solidFill>
+                <a:latin typeface="Calibri"/>
+                <a:ea typeface="Calibri"/>
+                <a:cs typeface="Calibri"/>
+                <a:sym typeface="Calibri"/>
+              </a:rPr>
+              <a:t>- made of layers of RBMs, each next layer (“B”) is trained on top of the previous layer (“A”).</a:t>
+            </a:r>
+          </a:p>
+          <a:p>
+            <a:pPr marL="0" marR="0" lvl="0" indent="0" algn="l" rtl="0">
+              <a:spcBef>
+                <a:spcPts val="0"/>
+              </a:spcBef>
+              <a:spcAft>
+                <a:spcPts val="0"/>
+              </a:spcAft>
+              <a:buNone/>
+            </a:pPr>
+            <a:r>
+              <a:rPr lang="en-US" sz="1800" dirty="0">
+                <a:solidFill>
+                  <a:schemeClr val="dk1"/>
+                </a:solidFill>
+                <a:latin typeface="Calibri"/>
+                <a:ea typeface="Calibri"/>
+                <a:cs typeface="Calibri"/>
+                <a:sym typeface="Calibri"/>
+              </a:rPr>
+              <a:t>Here </a:t>
+            </a:r>
+            <a:r>
+              <a:rPr lang="en-US" sz="1800" b="1" dirty="0">
+                <a:solidFill>
+                  <a:srgbClr val="0070C0"/>
+                </a:solidFill>
+                <a:latin typeface="Calibri"/>
+                <a:ea typeface="Calibri"/>
+                <a:cs typeface="Calibri"/>
+                <a:sym typeface="Calibri"/>
+              </a:rPr>
+              <a:t>RBM</a:t>
+            </a:r>
+            <a:r>
+              <a:rPr lang="en-US" sz="1800" dirty="0">
+                <a:solidFill>
+                  <a:schemeClr val="dk1"/>
+                </a:solidFill>
+                <a:latin typeface="Calibri"/>
+                <a:ea typeface="Calibri"/>
+                <a:cs typeface="Calibri"/>
+                <a:sym typeface="Calibri"/>
+              </a:rPr>
+              <a:t> (Restricted Boltzmann Machine) is a two-layered artificial neural network.</a:t>
+            </a:r>
+            <a:endParaRPr lang="en-US" sz="1800" dirty="0">
+              <a:solidFill>
+                <a:schemeClr val="dk1"/>
+              </a:solidFill>
+              <a:latin typeface="Calibri"/>
+              <a:cs typeface="Calibri"/>
+              <a:sym typeface="Calibri"/>
+            </a:endParaRPr>
+          </a:p>
+        </p:txBody>
+      </p:sp>
+      <p:pic>
+        <p:nvPicPr>
+          <p:cNvPr id="3" name="Picture 2">
+            <a:extLst>
+              <a:ext uri="{FF2B5EF4-FFF2-40B4-BE49-F238E27FC236}">
+                <a16:creationId xmlns:a16="http://schemas.microsoft.com/office/drawing/2014/main" id="{221CF74C-2765-1A49-9DE4-312EA056AB81}"/>
+              </a:ext>
+            </a:extLst>
+          </p:cNvPr>
+          <p:cNvPicPr>
+            <a:picLocks noChangeAspect="1"/>
+          </p:cNvPicPr>
+          <p:nvPr/>
+        </p:nvPicPr>
+        <p:blipFill rotWithShape="1">
+          <a:blip r:embed="rId5" cstate="email">
+            <a:extLst>
+              <a:ext uri="{28A0092B-C50C-407E-A947-70E740481C1C}">
+                <a14:useLocalDpi xmlns:a14="http://schemas.microsoft.com/office/drawing/2010/main"/>
+              </a:ext>
+            </a:extLst>
+          </a:blip>
+          <a:srcRect/>
+          <a:stretch/>
+        </p:blipFill>
+        <p:spPr>
+          <a:xfrm>
+            <a:off x="2476501" y="4071018"/>
+            <a:ext cx="1123506" cy="1412016"/>
+          </a:xfrm>
+          <a:prstGeom prst="rect">
+            <a:avLst/>
+          </a:prstGeom>
+        </p:spPr>
+      </p:pic>
+      <p:pic>
+        <p:nvPicPr>
+          <p:cNvPr id="4" name="Picture 3">
+            <a:extLst>
+              <a:ext uri="{FF2B5EF4-FFF2-40B4-BE49-F238E27FC236}">
+                <a16:creationId xmlns:a16="http://schemas.microsoft.com/office/drawing/2014/main" id="{F3F0E989-24F4-954F-8654-A11FAA84E879}"/>
+              </a:ext>
+            </a:extLst>
+          </p:cNvPr>
+          <p:cNvPicPr>
+            <a:picLocks noChangeAspect="1"/>
+          </p:cNvPicPr>
+          <p:nvPr/>
+        </p:nvPicPr>
+        <p:blipFill rotWithShape="1">
+          <a:blip r:embed="rId6" cstate="email">
+            <a:extLst>
+              <a:ext uri="{28A0092B-C50C-407E-A947-70E740481C1C}">
+                <a14:useLocalDpi xmlns:a14="http://schemas.microsoft.com/office/drawing/2010/main"/>
+              </a:ext>
+            </a:extLst>
+          </a:blip>
+          <a:srcRect/>
+          <a:stretch/>
+        </p:blipFill>
+        <p:spPr>
+          <a:xfrm>
+            <a:off x="570314" y="4041266"/>
+            <a:ext cx="1253671" cy="1417842"/>
+          </a:xfrm>
+          <a:prstGeom prst="rect">
+            <a:avLst/>
+          </a:prstGeom>
+        </p:spPr>
+      </p:pic>
+      <p:sp>
+        <p:nvSpPr>
+          <p:cNvPr id="10" name="Google Shape;107;p14">
+            <a:extLst>
+              <a:ext uri="{FF2B5EF4-FFF2-40B4-BE49-F238E27FC236}">
+                <a16:creationId xmlns:a16="http://schemas.microsoft.com/office/drawing/2014/main" id="{BBAA03BF-9CD1-2742-8F30-65CF844C9AE9}"/>
+              </a:ext>
+            </a:extLst>
+          </p:cNvPr>
+          <p:cNvSpPr txBox="1"/>
+          <p:nvPr/>
+        </p:nvSpPr>
+        <p:spPr>
+          <a:xfrm>
+            <a:off x="183869" y="5485948"/>
+            <a:ext cx="6428357" cy="1219839"/>
+          </a:xfrm>
+          <a:prstGeom prst="rect">
+            <a:avLst/>
+          </a:prstGeom>
+          <a:noFill/>
+          <a:ln>
+            <a:noFill/>
+          </a:ln>
+        </p:spPr>
+        <p:txBody>
+          <a:bodyPr spcFirstLastPara="1" wrap="square" lIns="91425" tIns="45700" rIns="91425" bIns="45700" anchor="t" anchorCtr="0">
+            <a:noAutofit/>
+          </a:bodyPr>
+          <a:lstStyle/>
+          <a:p>
+            <a:pPr lvl="0"/>
+            <a:r>
+              <a:rPr lang="en-US" sz="1800" dirty="0">
+                <a:solidFill>
+                  <a:schemeClr val="dk1"/>
+                </a:solidFill>
+                <a:latin typeface="Calibri"/>
+                <a:cs typeface="Calibri"/>
+              </a:rPr>
+              <a:t>Geoffrey Hinton &amp; Ruslan </a:t>
+            </a:r>
+            <a:r>
+              <a:rPr lang="en-US" sz="1800" dirty="0" err="1">
+                <a:solidFill>
+                  <a:schemeClr val="dk1"/>
+                </a:solidFill>
+                <a:latin typeface="Calibri"/>
+                <a:cs typeface="Calibri"/>
+              </a:rPr>
+              <a:t>Salakhutdinov</a:t>
+            </a:r>
+            <a:r>
+              <a:rPr lang="en-US" sz="1800" dirty="0">
+                <a:solidFill>
+                  <a:schemeClr val="dk1"/>
+                </a:solidFill>
+                <a:latin typeface="Calibri"/>
+                <a:cs typeface="Calibri"/>
+              </a:rPr>
+              <a:t> (2006). </a:t>
+            </a:r>
+          </a:p>
+          <a:p>
+            <a:pPr lvl="0"/>
+            <a:r>
+              <a:rPr lang="en-US" sz="1800" dirty="0">
+                <a:solidFill>
+                  <a:schemeClr val="dk1"/>
+                </a:solidFill>
+                <a:latin typeface="Calibri"/>
+                <a:cs typeface="Calibri"/>
+              </a:rPr>
+              <a:t>Reducing the dimensionality of data with neural networks.</a:t>
+            </a:r>
+          </a:p>
+          <a:p>
+            <a:pPr lvl="0"/>
+            <a:r>
+              <a:rPr lang="en-US" sz="1800" dirty="0">
+                <a:solidFill>
+                  <a:schemeClr val="dk1"/>
+                </a:solidFill>
+                <a:latin typeface="Calibri"/>
+                <a:cs typeface="Calibri"/>
+              </a:rPr>
+              <a:t>Science, 313, 504 – 507.</a:t>
+            </a:r>
+          </a:p>
+          <a:p>
+            <a:pPr lvl="0"/>
+            <a:r>
+              <a:rPr lang="en-US" sz="1800" dirty="0">
+                <a:solidFill>
+                  <a:schemeClr val="dk1"/>
+                </a:solidFill>
+                <a:latin typeface="Calibri"/>
+                <a:cs typeface="Calibri"/>
+                <a:sym typeface="Calibri"/>
+              </a:rPr>
+              <a:t> - </a:t>
+            </a:r>
+            <a:r>
+              <a:rPr lang="en-US" sz="1800" dirty="0">
+                <a:solidFill>
+                  <a:schemeClr val="dk1"/>
+                </a:solidFill>
+                <a:latin typeface="Calibri"/>
+                <a:cs typeface="Calibri"/>
+                <a:sym typeface="Calibri"/>
+                <a:hlinkClick r:id="rId7"/>
+              </a:rPr>
+              <a:t>https://www.cs.toronto.edu/~hinton/science.pdf</a:t>
+            </a:r>
+            <a:r>
+              <a:rPr lang="en-US" sz="1800" dirty="0">
+                <a:solidFill>
+                  <a:schemeClr val="dk1"/>
+                </a:solidFill>
+                <a:latin typeface="Calibri"/>
+                <a:cs typeface="Calibri"/>
+                <a:sym typeface="Calibri"/>
+              </a:rPr>
+              <a:t> </a:t>
+            </a:r>
+          </a:p>
+        </p:txBody>
+      </p:sp>
+      <p:sp>
+        <p:nvSpPr>
+          <p:cNvPr id="6" name="TextBox 5">
+            <a:extLst>
+              <a:ext uri="{FF2B5EF4-FFF2-40B4-BE49-F238E27FC236}">
+                <a16:creationId xmlns:a16="http://schemas.microsoft.com/office/drawing/2014/main" id="{AC6499AC-2623-244C-B653-E3602A825F7E}"/>
+              </a:ext>
+            </a:extLst>
+          </p:cNvPr>
+          <p:cNvSpPr txBox="1"/>
+          <p:nvPr/>
+        </p:nvSpPr>
+        <p:spPr>
+          <a:xfrm>
+            <a:off x="8118388" y="5609967"/>
+            <a:ext cx="2001795" cy="307777"/>
+          </a:xfrm>
+          <a:prstGeom prst="rect">
+            <a:avLst/>
+          </a:prstGeom>
+          <a:noFill/>
+        </p:spPr>
+        <p:txBody>
+          <a:bodyPr wrap="square" rtlCol="0">
+            <a:spAutoFit/>
+          </a:bodyPr>
+          <a:lstStyle/>
+          <a:p>
+            <a:r>
+              <a:rPr lang="en-US" dirty="0"/>
+              <a:t>A Deep Belief Network</a:t>
+            </a:r>
+          </a:p>
+        </p:txBody>
+      </p:sp>
+    </p:spTree>
+    <p:extLst>
+      <p:ext uri="{BB962C8B-B14F-4D97-AF65-F5344CB8AC3E}">
+        <p14:creationId xmlns:p14="http://schemas.microsoft.com/office/powerpoint/2010/main" val="4205312314"/>
+      </p:ext>
+    </p:extLst>
+  </p:cSld>
+  <p:clrMapOvr>
+    <a:masterClrMapping/>
+  </p:clrMapOvr>
+</p:sld>
+</file>
+
+<file path=ppt/slides/slide11.xml><?xml version="1.0" encoding="utf-8"?>
+<p:sld xmlns:a="http://schemas.openxmlformats.org/drawingml/2006/main" xmlns:r="http://schemas.openxmlformats.org/officeDocument/2006/relationships" xmlns:p="http://schemas.openxmlformats.org/presentationml/2006/main">
+  <p:cSld>
+    <p:spTree>
+      <p:nvGrpSpPr>
+        <p:cNvPr id="1" name="Shape 87"/>
+        <p:cNvGrpSpPr/>
+        <p:nvPr/>
+      </p:nvGrpSpPr>
+      <p:grpSpPr>
+        <a:xfrm>
+          <a:off x="0" y="0"/>
+          <a:ext cx="0" cy="0"/>
+          <a:chOff x="0" y="0"/>
+          <a:chExt cx="0" cy="0"/>
+        </a:xfrm>
+      </p:grpSpPr>
+      <p:sp>
+        <p:nvSpPr>
           <p:cNvPr id="17" name="Google Shape;113;p14">
             <a:extLst>
               <a:ext uri="{FF2B5EF4-FFF2-40B4-BE49-F238E27FC236}">
@@ -17811,7 +18494,30 @@
                 <a:cs typeface="Calibri"/>
                 <a:sym typeface="Calibri"/>
               </a:rPr>
-              <a:t>Optimizing a black-box system without calculatin</a:t>
+              <a:t>Optimizing a black-box system </a:t>
+            </a:r>
+            <a:r>
+              <a:rPr lang="en-US" b="1" dirty="0">
+                <a:solidFill>
+                  <a:srgbClr val="00B050"/>
+                </a:solidFill>
+                <a:latin typeface="Calibri"/>
+                <a:ea typeface="Calibri"/>
+                <a:cs typeface="Calibri"/>
+                <a:sym typeface="Calibri"/>
+              </a:rPr>
+              <a:t>without calculatin</a:t>
+            </a:r>
+            <a:r>
+              <a:rPr lang="en-US" b="1" dirty="0">
+                <a:solidFill>
+                  <a:srgbClr val="00B050"/>
+                </a:solidFill>
+                <a:latin typeface="Calibri"/>
+                <a:cs typeface="Calibri"/>
+                <a:sym typeface="Calibri"/>
+              </a:rPr>
+              <a:t>g derivatives</a:t>
             </a:r>
             <a:r>
               <a:rPr lang="en-US" dirty="0">
@@ -17822,7 +18528,7 @@
                 <a:cs typeface="Calibri"/>
                 <a:sym typeface="Calibri"/>
               </a:rPr>
-              <a:t>g derivatives.</a:t>
+              <a:t>.</a:t>
             </a:r>
           </a:p>
           <a:p>
@@ -18392,7 +19098,7 @@
 </p:sld>
 </file>
 
-<file path=ppt/slides/slide11.xml><?xml version="1.0" encoding="utf-8"?>
+<file path=ppt/slides/slide12.xml><?xml version="1.0" encoding="utf-8"?>
 <p:sld xmlns:a="http://schemas.openxmlformats.org/drawingml/2006/main" xmlns:r="http://schemas.openxmlformats.org/officeDocument/2006/relationships" xmlns:p="http://schemas.openxmlformats.org/presentationml/2006/main">
   <p:cSld>
     <p:spTree>
@@ -19122,7 +19828,7 @@
 </p:sld>
 </file>
 
-<file path=ppt/slides/slide12.xml><?xml version="1.0" encoding="utf-8"?>
+<file path=ppt/slides/slide13.xml><?xml version="1.0" encoding="utf-8"?>
 <p:sld xmlns:a="http://schemas.openxmlformats.org/drawingml/2006/main" xmlns:r="http://schemas.openxmlformats.org/officeDocument/2006/relationships" xmlns:p="http://schemas.openxmlformats.org/presentationml/2006/main">
   <p:cSld>
     <p:spTree>
@@ -19188,8 +19894,8 @@
         </p:nvSpPr>
         <p:spPr>
           <a:xfrm>
-            <a:off x="49585" y="760317"/>
-            <a:ext cx="7057068" cy="1384995"/>
+            <a:off x="0" y="402106"/>
+            <a:ext cx="7057068" cy="338554"/>
           </a:xfrm>
           <a:prstGeom prst="rect">
             <a:avLst/>
@@ -19221,49 +19927,6 @@
             <a:r>
               <a:rPr lang="en-US" sz="1600" dirty="0"/>
               <a:t> (can read). </a:t>
-            </a:r>
-          </a:p>
-          <a:p>
-            <a:r>
-              <a:rPr lang="en-US" sz="1600" dirty="0"/>
-              <a:t>We need to evaluate the literacy rate </a:t>
-            </a:r>
-            <a:r>
-              <a:rPr lang="el-GR" sz="1600" dirty="0"/>
-              <a:t>θ</a:t>
-            </a:r>
-            <a:r>
-              <a:rPr lang="en-US" sz="1600" dirty="0"/>
-              <a:t>  (percentage of children who can read) in the population. </a:t>
-            </a:r>
-            <a:endParaRPr lang="en-US" sz="1200" dirty="0"/>
-          </a:p>
-          <a:p>
-            <a:r>
-              <a:rPr lang="en-US" sz="1200" dirty="0"/>
-              <a:t>We presume that children are independent, that population is uniform, etc. </a:t>
-            </a:r>
-          </a:p>
-          <a:p>
-            <a:r>
-              <a:rPr lang="en-US" sz="1200" dirty="0"/>
-              <a:t>We can use binomial distribution for likelihood function. </a:t>
-            </a:r>
-          </a:p>
-          <a:p>
-            <a:r>
-              <a:rPr lang="en-US" sz="1200" dirty="0"/>
-              <a:t>- </a:t>
-            </a:r>
-            <a:r>
-              <a:rPr lang="en-US" sz="1200" dirty="0">
-                <a:hlinkClick r:id="rId2"/>
-              </a:rPr>
-              <a:t>https://www.youtube.com/watch?v=yvWlpwnT1nw</a:t>
-            </a:r>
-            <a:r>
-              <a:rPr lang="en-US" sz="1200" dirty="0"/>
-              <a:t> </a:t>
             </a:r>
           </a:p>
         </p:txBody>
@@ -19283,7 +19946,7 @@
           <p:nvPr/>
         </p:nvPicPr>
         <p:blipFill>
-          <a:blip r:embed="rId3" cstate="email">
+          <a:blip r:embed="rId2" cstate="email">
             <a:extLst>
               <a:ext uri="{28A0092B-C50C-407E-A947-70E740481C1C}">
                 <a14:useLocalDpi xmlns:a14="http://schemas.microsoft.com/office/drawing/2010/main"/>
@@ -19319,7 +19982,7 @@
           <p:nvPr/>
         </p:nvPicPr>
         <p:blipFill>
-          <a:blip r:embed="rId4" cstate="email">
+          <a:blip r:embed="rId3" cstate="email">
             <a:extLst>
               <a:ext uri="{28A0092B-C50C-407E-A947-70E740481C1C}">
                 <a14:useLocalDpi xmlns:a14="http://schemas.microsoft.com/office/drawing/2010/main"/>
@@ -19355,7 +20018,7 @@
           <p:nvPr/>
         </p:nvPicPr>
         <p:blipFill>
-          <a:blip r:embed="rId5" cstate="email">
+          <a:blip r:embed="rId4" cstate="email">
             <a:extLst>
               <a:ext uri="{28A0092B-C50C-407E-A947-70E740481C1C}">
                 <a14:useLocalDpi xmlns:a14="http://schemas.microsoft.com/office/drawing/2010/main"/>
@@ -19391,7 +20054,7 @@
           <p:nvPr/>
         </p:nvPicPr>
         <p:blipFill>
-          <a:blip r:embed="rId6" cstate="email">
+          <a:blip r:embed="rId5" cstate="email">
             <a:extLst>
               <a:ext uri="{28A0092B-C50C-407E-A947-70E740481C1C}">
                 <a14:useLocalDpi xmlns:a14="http://schemas.microsoft.com/office/drawing/2010/main"/>
@@ -19427,7 +20090,7 @@
           <p:nvPr/>
         </p:nvPicPr>
         <p:blipFill>
-          <a:blip r:embed="rId7" cstate="email">
+          <a:blip r:embed="rId6" cstate="email">
             <a:extLst>
               <a:ext uri="{28A0092B-C50C-407E-A947-70E740481C1C}">
                 <a14:useLocalDpi xmlns:a14="http://schemas.microsoft.com/office/drawing/2010/main"/>
@@ -19884,7 +20547,7 @@
           <p:nvPr/>
         </p:nvPicPr>
         <p:blipFill>
-          <a:blip r:embed="rId8" cstate="email">
+          <a:blip r:embed="rId7" cstate="email">
             <a:extLst>
               <a:ext uri="{28A0092B-C50C-407E-A947-70E740481C1C}">
                 <a14:useLocalDpi xmlns:a14="http://schemas.microsoft.com/office/drawing/2010/main"/>
@@ -20000,6 +20663,528 @@
           </a:p>
         </p:txBody>
       </p:sp>
+      <p:sp>
+        <p:nvSpPr>
+          <p:cNvPr id="20" name="TextBox 19">
+            <a:extLst>
+              <a:ext uri="{FF2B5EF4-FFF2-40B4-BE49-F238E27FC236}">
+                <a16:creationId xmlns:a16="http://schemas.microsoft.com/office/drawing/2014/main" id="{430D0526-1D3A-EA4A-951A-265143D80F77}"/>
+              </a:ext>
+            </a:extLst>
+          </p:cNvPr>
+          <p:cNvSpPr txBox="1"/>
+          <p:nvPr/>
+        </p:nvSpPr>
+        <p:spPr>
+          <a:xfrm>
+            <a:off x="0" y="1255432"/>
+            <a:ext cx="7057068" cy="1138773"/>
+          </a:xfrm>
+          <a:prstGeom prst="rect">
+            <a:avLst/>
+          </a:prstGeom>
+          <a:noFill/>
+        </p:spPr>
+        <p:txBody>
+          <a:bodyPr wrap="square" rtlCol="0">
+            <a:spAutoFit/>
+          </a:bodyPr>
+          <a:lstStyle/>
+          <a:p>
+            <a:r>
+              <a:rPr lang="en-US" sz="1600" dirty="0"/>
+              <a:t>We need to evaluate the literacy rate </a:t>
+            </a:r>
+            <a:r>
+              <a:rPr lang="el-GR" sz="1600" dirty="0"/>
+              <a:t>θ</a:t>
+            </a:r>
+            <a:r>
+              <a:rPr lang="en-US" sz="1600" dirty="0"/>
+              <a:t>  (percentage of children who can read) in the population. </a:t>
+            </a:r>
+            <a:endParaRPr lang="en-US" sz="1200" dirty="0"/>
+          </a:p>
+          <a:p>
+            <a:r>
+              <a:rPr lang="en-US" sz="1200" dirty="0"/>
+              <a:t>We presume that children are independent, that population is uniform, etc. </a:t>
+            </a:r>
+          </a:p>
+          <a:p>
+            <a:r>
+              <a:rPr lang="en-US" sz="1200" dirty="0"/>
+              <a:t>We can use binomial distribution for likelihood function. </a:t>
+            </a:r>
+          </a:p>
+          <a:p>
+            <a:r>
+              <a:rPr lang="en-US" sz="1200" dirty="0"/>
+              <a:t>- </a:t>
+            </a:r>
+            <a:r>
+              <a:rPr lang="en-US" sz="1200" dirty="0">
+                <a:hlinkClick r:id="rId8"/>
+              </a:rPr>
+              <a:t>https://www.youtube.com/watch?v=yvWlpwnT1nw</a:t>
+            </a:r>
+            <a:r>
+              <a:rPr lang="en-US" sz="1200" dirty="0"/>
+              <a:t> </a:t>
+            </a:r>
+          </a:p>
+        </p:txBody>
+      </p:sp>
+      <p:pic>
+        <p:nvPicPr>
+          <p:cNvPr id="1028" name="Picture 4" descr="Boy Reading Book Outline Stock Illustrations – 760 Boy Reading Book Outline  Stock Illustrations, Vectors &amp; Clipart - Dreamstime">
+            <a:extLst>
+              <a:ext uri="{FF2B5EF4-FFF2-40B4-BE49-F238E27FC236}">
+                <a16:creationId xmlns:a16="http://schemas.microsoft.com/office/drawing/2014/main" id="{40619F64-57EE-6A4C-9B53-5C007FEC9852}"/>
+              </a:ext>
+            </a:extLst>
+          </p:cNvPr>
+          <p:cNvPicPr>
+            <a:picLocks noChangeAspect="1" noChangeArrowheads="1"/>
+          </p:cNvPicPr>
+          <p:nvPr/>
+        </p:nvPicPr>
+        <p:blipFill rotWithShape="1">
+          <a:blip r:embed="rId9" cstate="email">
+            <a:extLst>
+              <a:ext uri="{28A0092B-C50C-407E-A947-70E740481C1C}">
+                <a14:useLocalDpi xmlns:a14="http://schemas.microsoft.com/office/drawing/2010/main"/>
+              </a:ext>
+            </a:extLst>
+          </a:blip>
+          <a:srcRect/>
+          <a:stretch/>
+        </p:blipFill>
+        <p:spPr bwMode="auto">
+          <a:xfrm flipH="1">
+            <a:off x="1089375" y="773087"/>
+            <a:ext cx="244474" cy="485421"/>
+          </a:xfrm>
+          <a:prstGeom prst="rect">
+            <a:avLst/>
+          </a:prstGeom>
+          <a:noFill/>
+          <a:extLst>
+            <a:ext uri="{909E8E84-426E-40DD-AFC4-6F175D3DCCD1}">
+              <a14:hiddenFill xmlns:a14="http://schemas.microsoft.com/office/drawing/2010/main">
+                <a:solidFill>
+                  <a:srgbClr val="FFFFFF"/>
+                </a:solidFill>
+              </a14:hiddenFill>
+            </a:ext>
+          </a:extLst>
+        </p:spPr>
+      </p:pic>
+      <p:pic>
+        <p:nvPicPr>
+          <p:cNvPr id="1030" name="Picture 6" descr="Boy Reading Book Outline Stock Illustrations – 760 Boy Reading Book Outline  Stock Illustrations, Vectors &amp; Clipart - Dreamstime">
+            <a:extLst>
+              <a:ext uri="{FF2B5EF4-FFF2-40B4-BE49-F238E27FC236}">
+                <a16:creationId xmlns:a16="http://schemas.microsoft.com/office/drawing/2014/main" id="{9D0864A7-86E8-1B49-9097-CE290E750850}"/>
+              </a:ext>
+            </a:extLst>
+          </p:cNvPr>
+          <p:cNvPicPr>
+            <a:picLocks noChangeAspect="1" noChangeArrowheads="1"/>
+          </p:cNvPicPr>
+          <p:nvPr/>
+        </p:nvPicPr>
+        <p:blipFill rotWithShape="1">
+          <a:blip r:embed="rId10" cstate="email">
+            <a:extLst>
+              <a:ext uri="{28A0092B-C50C-407E-A947-70E740481C1C}">
+                <a14:useLocalDpi xmlns:a14="http://schemas.microsoft.com/office/drawing/2010/main"/>
+              </a:ext>
+            </a:extLst>
+          </a:blip>
+          <a:srcRect/>
+          <a:stretch/>
+        </p:blipFill>
+        <p:spPr bwMode="auto">
+          <a:xfrm flipH="1">
+            <a:off x="2069871" y="773087"/>
+            <a:ext cx="236647" cy="485421"/>
+          </a:xfrm>
+          <a:prstGeom prst="rect">
+            <a:avLst/>
+          </a:prstGeom>
+          <a:noFill/>
+          <a:extLst>
+            <a:ext uri="{909E8E84-426E-40DD-AFC4-6F175D3DCCD1}">
+              <a14:hiddenFill xmlns:a14="http://schemas.microsoft.com/office/drawing/2010/main">
+                <a:solidFill>
+                  <a:srgbClr val="FFFFFF"/>
+                </a:solidFill>
+              </a14:hiddenFill>
+            </a:ext>
+          </a:extLst>
+        </p:spPr>
+      </p:pic>
+      <p:pic>
+        <p:nvPicPr>
+          <p:cNvPr id="26" name="Picture 4" descr="Boy Reading Book Outline Stock Illustrations – 760 Boy Reading Book Outline  Stock Illustrations, Vectors &amp; Clipart - Dreamstime">
+            <a:extLst>
+              <a:ext uri="{FF2B5EF4-FFF2-40B4-BE49-F238E27FC236}">
+                <a16:creationId xmlns:a16="http://schemas.microsoft.com/office/drawing/2014/main" id="{E3805C6D-7B99-EF42-AE48-500D6C0E00EC}"/>
+              </a:ext>
+            </a:extLst>
+          </p:cNvPr>
+          <p:cNvPicPr>
+            <a:picLocks noChangeAspect="1" noChangeArrowheads="1"/>
+          </p:cNvPicPr>
+          <p:nvPr/>
+        </p:nvPicPr>
+        <p:blipFill rotWithShape="1">
+          <a:blip r:embed="rId9" cstate="email">
+            <a:extLst>
+              <a:ext uri="{28A0092B-C50C-407E-A947-70E740481C1C}">
+                <a14:useLocalDpi xmlns:a14="http://schemas.microsoft.com/office/drawing/2010/main"/>
+              </a:ext>
+            </a:extLst>
+          </a:blip>
+          <a:srcRect/>
+          <a:stretch/>
+        </p:blipFill>
+        <p:spPr bwMode="auto">
+          <a:xfrm flipH="1">
+            <a:off x="599127" y="773087"/>
+            <a:ext cx="244474" cy="485421"/>
+          </a:xfrm>
+          <a:prstGeom prst="rect">
+            <a:avLst/>
+          </a:prstGeom>
+          <a:noFill/>
+          <a:extLst>
+            <a:ext uri="{909E8E84-426E-40DD-AFC4-6F175D3DCCD1}">
+              <a14:hiddenFill xmlns:a14="http://schemas.microsoft.com/office/drawing/2010/main">
+                <a:solidFill>
+                  <a:srgbClr val="FFFFFF"/>
+                </a:solidFill>
+              </a14:hiddenFill>
+            </a:ext>
+          </a:extLst>
+        </p:spPr>
+      </p:pic>
+      <p:pic>
+        <p:nvPicPr>
+          <p:cNvPr id="27" name="Picture 4" descr="Boy Reading Book Outline Stock Illustrations – 760 Boy Reading Book Outline  Stock Illustrations, Vectors &amp; Clipart - Dreamstime">
+            <a:extLst>
+              <a:ext uri="{FF2B5EF4-FFF2-40B4-BE49-F238E27FC236}">
+                <a16:creationId xmlns:a16="http://schemas.microsoft.com/office/drawing/2014/main" id="{F4C8897B-D1DB-984E-BD40-F6E8F54CFADD}"/>
+              </a:ext>
+            </a:extLst>
+          </p:cNvPr>
+          <p:cNvPicPr>
+            <a:picLocks noChangeAspect="1" noChangeArrowheads="1"/>
+          </p:cNvPicPr>
+          <p:nvPr/>
+        </p:nvPicPr>
+        <p:blipFill rotWithShape="1">
+          <a:blip r:embed="rId9" cstate="email">
+            <a:extLst>
+              <a:ext uri="{28A0092B-C50C-407E-A947-70E740481C1C}">
+                <a14:useLocalDpi xmlns:a14="http://schemas.microsoft.com/office/drawing/2010/main"/>
+              </a:ext>
+            </a:extLst>
+          </a:blip>
+          <a:srcRect/>
+          <a:stretch/>
+        </p:blipFill>
+        <p:spPr bwMode="auto">
+          <a:xfrm flipH="1">
+            <a:off x="1579623" y="773087"/>
+            <a:ext cx="244474" cy="485421"/>
+          </a:xfrm>
+          <a:prstGeom prst="rect">
+            <a:avLst/>
+          </a:prstGeom>
+          <a:noFill/>
+          <a:extLst>
+            <a:ext uri="{909E8E84-426E-40DD-AFC4-6F175D3DCCD1}">
+              <a14:hiddenFill xmlns:a14="http://schemas.microsoft.com/office/drawing/2010/main">
+                <a:solidFill>
+                  <a:srgbClr val="FFFFFF"/>
+                </a:solidFill>
+              </a14:hiddenFill>
+            </a:ext>
+          </a:extLst>
+        </p:spPr>
+      </p:pic>
+      <p:pic>
+        <p:nvPicPr>
+          <p:cNvPr id="28" name="Picture 6" descr="Boy Reading Book Outline Stock Illustrations – 760 Boy Reading Book Outline  Stock Illustrations, Vectors &amp; Clipart - Dreamstime">
+            <a:extLst>
+              <a:ext uri="{FF2B5EF4-FFF2-40B4-BE49-F238E27FC236}">
+                <a16:creationId xmlns:a16="http://schemas.microsoft.com/office/drawing/2014/main" id="{23676CD5-3841-4140-96B6-ADC6A512390E}"/>
+              </a:ext>
+            </a:extLst>
+          </p:cNvPr>
+          <p:cNvPicPr>
+            <a:picLocks noChangeAspect="1" noChangeArrowheads="1"/>
+          </p:cNvPicPr>
+          <p:nvPr/>
+        </p:nvPicPr>
+        <p:blipFill rotWithShape="1">
+          <a:blip r:embed="rId10" cstate="email">
+            <a:extLst>
+              <a:ext uri="{28A0092B-C50C-407E-A947-70E740481C1C}">
+                <a14:useLocalDpi xmlns:a14="http://schemas.microsoft.com/office/drawing/2010/main"/>
+              </a:ext>
+            </a:extLst>
+          </a:blip>
+          <a:srcRect/>
+          <a:stretch/>
+        </p:blipFill>
+        <p:spPr bwMode="auto">
+          <a:xfrm flipH="1">
+            <a:off x="2552292" y="773087"/>
+            <a:ext cx="236647" cy="485421"/>
+          </a:xfrm>
+          <a:prstGeom prst="rect">
+            <a:avLst/>
+          </a:prstGeom>
+          <a:noFill/>
+          <a:extLst>
+            <a:ext uri="{909E8E84-426E-40DD-AFC4-6F175D3DCCD1}">
+              <a14:hiddenFill xmlns:a14="http://schemas.microsoft.com/office/drawing/2010/main">
+                <a:solidFill>
+                  <a:srgbClr val="FFFFFF"/>
+                </a:solidFill>
+              </a14:hiddenFill>
+            </a:ext>
+          </a:extLst>
+        </p:spPr>
+      </p:pic>
+      <p:pic>
+        <p:nvPicPr>
+          <p:cNvPr id="29" name="Picture 6" descr="Boy Reading Book Outline Stock Illustrations – 760 Boy Reading Book Outline  Stock Illustrations, Vectors &amp; Clipart - Dreamstime">
+            <a:extLst>
+              <a:ext uri="{FF2B5EF4-FFF2-40B4-BE49-F238E27FC236}">
+                <a16:creationId xmlns:a16="http://schemas.microsoft.com/office/drawing/2014/main" id="{A1C2C2CF-35B8-6C48-B49E-9563489C9059}"/>
+              </a:ext>
+            </a:extLst>
+          </p:cNvPr>
+          <p:cNvPicPr>
+            <a:picLocks noChangeAspect="1" noChangeArrowheads="1"/>
+          </p:cNvPicPr>
+          <p:nvPr/>
+        </p:nvPicPr>
+        <p:blipFill rotWithShape="1">
+          <a:blip r:embed="rId10" cstate="email">
+            <a:extLst>
+              <a:ext uri="{28A0092B-C50C-407E-A947-70E740481C1C}">
+                <a14:useLocalDpi xmlns:a14="http://schemas.microsoft.com/office/drawing/2010/main"/>
+              </a:ext>
+            </a:extLst>
+          </a:blip>
+          <a:srcRect/>
+          <a:stretch/>
+        </p:blipFill>
+        <p:spPr bwMode="auto">
+          <a:xfrm flipH="1">
+            <a:off x="3034713" y="773087"/>
+            <a:ext cx="236647" cy="485421"/>
+          </a:xfrm>
+          <a:prstGeom prst="rect">
+            <a:avLst/>
+          </a:prstGeom>
+          <a:noFill/>
+          <a:extLst>
+            <a:ext uri="{909E8E84-426E-40DD-AFC4-6F175D3DCCD1}">
+              <a14:hiddenFill xmlns:a14="http://schemas.microsoft.com/office/drawing/2010/main">
+                <a:solidFill>
+                  <a:srgbClr val="FFFFFF"/>
+                </a:solidFill>
+              </a14:hiddenFill>
+            </a:ext>
+          </a:extLst>
+        </p:spPr>
+      </p:pic>
+      <p:pic>
+        <p:nvPicPr>
+          <p:cNvPr id="30" name="Picture 6" descr="Boy Reading Book Outline Stock Illustrations – 760 Boy Reading Book Outline  Stock Illustrations, Vectors &amp; Clipart - Dreamstime">
+            <a:extLst>
+              <a:ext uri="{FF2B5EF4-FFF2-40B4-BE49-F238E27FC236}">
+                <a16:creationId xmlns:a16="http://schemas.microsoft.com/office/drawing/2014/main" id="{69BF1247-FF67-5943-9D52-0EBC7509F47D}"/>
+              </a:ext>
+            </a:extLst>
+          </p:cNvPr>
+          <p:cNvPicPr>
+            <a:picLocks noChangeAspect="1" noChangeArrowheads="1"/>
+          </p:cNvPicPr>
+          <p:nvPr/>
+        </p:nvPicPr>
+        <p:blipFill rotWithShape="1">
+          <a:blip r:embed="rId10" cstate="email">
+            <a:extLst>
+              <a:ext uri="{28A0092B-C50C-407E-A947-70E740481C1C}">
+                <a14:useLocalDpi xmlns:a14="http://schemas.microsoft.com/office/drawing/2010/main"/>
+              </a:ext>
+            </a:extLst>
+          </a:blip>
+          <a:srcRect/>
+          <a:stretch/>
+        </p:blipFill>
+        <p:spPr bwMode="auto">
+          <a:xfrm flipH="1">
+            <a:off x="3517134" y="773087"/>
+            <a:ext cx="236647" cy="485421"/>
+          </a:xfrm>
+          <a:prstGeom prst="rect">
+            <a:avLst/>
+          </a:prstGeom>
+          <a:noFill/>
+          <a:extLst>
+            <a:ext uri="{909E8E84-426E-40DD-AFC4-6F175D3DCCD1}">
+              <a14:hiddenFill xmlns:a14="http://schemas.microsoft.com/office/drawing/2010/main">
+                <a:solidFill>
+                  <a:srgbClr val="FFFFFF"/>
+                </a:solidFill>
+              </a14:hiddenFill>
+            </a:ext>
+          </a:extLst>
+        </p:spPr>
+      </p:pic>
+      <p:pic>
+        <p:nvPicPr>
+          <p:cNvPr id="31" name="Picture 6" descr="Boy Reading Book Outline Stock Illustrations – 760 Boy Reading Book Outline  Stock Illustrations, Vectors &amp; Clipart - Dreamstime">
+            <a:extLst>
+              <a:ext uri="{FF2B5EF4-FFF2-40B4-BE49-F238E27FC236}">
+                <a16:creationId xmlns:a16="http://schemas.microsoft.com/office/drawing/2014/main" id="{8B0EEF28-CAE6-6248-BEF1-7739B5DD85D5}"/>
+              </a:ext>
+            </a:extLst>
+          </p:cNvPr>
+          <p:cNvPicPr>
+            <a:picLocks noChangeAspect="1" noChangeArrowheads="1"/>
+          </p:cNvPicPr>
+          <p:nvPr/>
+        </p:nvPicPr>
+        <p:blipFill rotWithShape="1">
+          <a:blip r:embed="rId10" cstate="email">
+            <a:extLst>
+              <a:ext uri="{28A0092B-C50C-407E-A947-70E740481C1C}">
+                <a14:useLocalDpi xmlns:a14="http://schemas.microsoft.com/office/drawing/2010/main"/>
+              </a:ext>
+            </a:extLst>
+          </a:blip>
+          <a:srcRect/>
+          <a:stretch/>
+        </p:blipFill>
+        <p:spPr bwMode="auto">
+          <a:xfrm flipH="1">
+            <a:off x="3999555" y="773087"/>
+            <a:ext cx="236647" cy="485421"/>
+          </a:xfrm>
+          <a:prstGeom prst="rect">
+            <a:avLst/>
+          </a:prstGeom>
+          <a:noFill/>
+          <a:extLst>
+            <a:ext uri="{909E8E84-426E-40DD-AFC4-6F175D3DCCD1}">
+              <a14:hiddenFill xmlns:a14="http://schemas.microsoft.com/office/drawing/2010/main">
+                <a:solidFill>
+                  <a:srgbClr val="FFFFFF"/>
+                </a:solidFill>
+              </a14:hiddenFill>
+            </a:ext>
+          </a:extLst>
+        </p:spPr>
+      </p:pic>
+      <p:pic>
+        <p:nvPicPr>
+          <p:cNvPr id="32" name="Picture 6" descr="Boy Reading Book Outline Stock Illustrations – 760 Boy Reading Book Outline  Stock Illustrations, Vectors &amp; Clipart - Dreamstime">
+            <a:extLst>
+              <a:ext uri="{FF2B5EF4-FFF2-40B4-BE49-F238E27FC236}">
+                <a16:creationId xmlns:a16="http://schemas.microsoft.com/office/drawing/2014/main" id="{7A0224BF-BD58-E045-897C-C5EA6B27E20B}"/>
+              </a:ext>
+            </a:extLst>
+          </p:cNvPr>
+          <p:cNvPicPr>
+            <a:picLocks noChangeAspect="1" noChangeArrowheads="1"/>
+          </p:cNvPicPr>
+          <p:nvPr/>
+        </p:nvPicPr>
+        <p:blipFill rotWithShape="1">
+          <a:blip r:embed="rId10" cstate="email">
+            <a:extLst>
+              <a:ext uri="{28A0092B-C50C-407E-A947-70E740481C1C}">
+                <a14:useLocalDpi xmlns:a14="http://schemas.microsoft.com/office/drawing/2010/main"/>
+              </a:ext>
+            </a:extLst>
+          </a:blip>
+          <a:srcRect/>
+          <a:stretch/>
+        </p:blipFill>
+        <p:spPr bwMode="auto">
+          <a:xfrm flipH="1">
+            <a:off x="4481976" y="773087"/>
+            <a:ext cx="236647" cy="485421"/>
+          </a:xfrm>
+          <a:prstGeom prst="rect">
+            <a:avLst/>
+          </a:prstGeom>
+          <a:noFill/>
+          <a:extLst>
+            <a:ext uri="{909E8E84-426E-40DD-AFC4-6F175D3DCCD1}">
+              <a14:hiddenFill xmlns:a14="http://schemas.microsoft.com/office/drawing/2010/main">
+                <a:solidFill>
+                  <a:srgbClr val="FFFFFF"/>
+                </a:solidFill>
+              </a14:hiddenFill>
+            </a:ext>
+          </a:extLst>
+        </p:spPr>
+      </p:pic>
+      <p:pic>
+        <p:nvPicPr>
+          <p:cNvPr id="33" name="Picture 6" descr="Boy Reading Book Outline Stock Illustrations – 760 Boy Reading Book Outline  Stock Illustrations, Vectors &amp; Clipart - Dreamstime">
+            <a:extLst>
+              <a:ext uri="{FF2B5EF4-FFF2-40B4-BE49-F238E27FC236}">
+                <a16:creationId xmlns:a16="http://schemas.microsoft.com/office/drawing/2014/main" id="{9DE4ACC5-10FB-C043-94A8-B0CFF33E2162}"/>
+              </a:ext>
+            </a:extLst>
+          </p:cNvPr>
+          <p:cNvPicPr>
+            <a:picLocks noChangeAspect="1" noChangeArrowheads="1"/>
+          </p:cNvPicPr>
+          <p:nvPr/>
+        </p:nvPicPr>
+        <p:blipFill rotWithShape="1">
+          <a:blip r:embed="rId10" cstate="email">
+            <a:extLst>
+              <a:ext uri="{28A0092B-C50C-407E-A947-70E740481C1C}">
+                <a14:useLocalDpi xmlns:a14="http://schemas.microsoft.com/office/drawing/2010/main"/>
+              </a:ext>
+            </a:extLst>
+          </a:blip>
+          <a:srcRect/>
+          <a:stretch/>
+        </p:blipFill>
+        <p:spPr bwMode="auto">
+          <a:xfrm flipH="1">
+            <a:off x="4964397" y="773087"/>
+            <a:ext cx="236647" cy="485421"/>
+          </a:xfrm>
+          <a:prstGeom prst="rect">
+            <a:avLst/>
+          </a:prstGeom>
+          <a:noFill/>
+          <a:extLst>
+            <a:ext uri="{909E8E84-426E-40DD-AFC4-6F175D3DCCD1}">
+              <a14:hiddenFill xmlns:a14="http://schemas.microsoft.com/office/drawing/2010/main">
+                <a:solidFill>
+                  <a:srgbClr val="FFFFFF"/>
+                </a:solidFill>
+              </a14:hiddenFill>
+            </a:ext>
+          </a:extLst>
+        </p:spPr>
+      </p:pic>
     </p:spTree>
     <p:extLst>
       <p:ext uri="{BB962C8B-B14F-4D97-AF65-F5344CB8AC3E}">
@@ -20013,7 +21198,7 @@
 </p:sld>
 </file>
 
-<file path=ppt/slides/slide13.xml><?xml version="1.0" encoding="utf-8"?>
+<file path=ppt/slides/slide14.xml><?xml version="1.0" encoding="utf-8"?>
 <p:sld xmlns:a="http://schemas.openxmlformats.org/drawingml/2006/main" xmlns:r="http://schemas.openxmlformats.org/officeDocument/2006/relationships" xmlns:p="http://schemas.openxmlformats.org/presentationml/2006/main">
   <p:cSld>
     <p:spTree>
@@ -21167,7 +22352,7 @@
 </p:sld>
 </file>
 
-<file path=ppt/slides/slide14.xml><?xml version="1.0" encoding="utf-8"?>
+<file path=ppt/slides/slide15.xml><?xml version="1.0" encoding="utf-8"?>
 <p:sld xmlns:a="http://schemas.openxmlformats.org/drawingml/2006/main" xmlns:r="http://schemas.openxmlformats.org/officeDocument/2006/relationships" xmlns:p="http://schemas.openxmlformats.org/presentationml/2006/main">
   <p:cSld>
     <p:spTree>
@@ -21376,7 +22561,7 @@
 </p:sld>
 </file>
 
-<file path=ppt/slides/slide15.xml><?xml version="1.0" encoding="utf-8"?>
+<file path=ppt/slides/slide16.xml><?xml version="1.0" encoding="utf-8"?>
 <p:sld xmlns:a="http://schemas.openxmlformats.org/drawingml/2006/main" xmlns:r="http://schemas.openxmlformats.org/officeDocument/2006/relationships" xmlns:p="http://schemas.openxmlformats.org/presentationml/2006/main">
   <p:cSld>
     <p:spTree>
@@ -21559,7 +22744,7 @@
 </p:sld>
 </file>
 
-<file path=ppt/slides/slide16.xml><?xml version="1.0" encoding="utf-8"?>
+<file path=ppt/slides/slide17.xml><?xml version="1.0" encoding="utf-8"?>
 <p:sld xmlns:a="http://schemas.openxmlformats.org/drawingml/2006/main" xmlns:r="http://schemas.openxmlformats.org/officeDocument/2006/relationships" xmlns:p="http://schemas.openxmlformats.org/presentationml/2006/main">
   <p:cSld>
     <p:spTree>
@@ -21714,7 +22899,7 @@
 </p:sld>
 </file>
 
-<file path=ppt/slides/slide17.xml><?xml version="1.0" encoding="utf-8"?>
+<file path=ppt/slides/slide18.xml><?xml version="1.0" encoding="utf-8"?>
 <p:sld xmlns:a="http://schemas.openxmlformats.org/drawingml/2006/main" xmlns:r="http://schemas.openxmlformats.org/officeDocument/2006/relationships" xmlns:p="http://schemas.openxmlformats.org/presentationml/2006/main">
   <p:cSld>
     <p:spTree>
@@ -22421,7 +23606,7 @@
 </p:sld>
 </file>
 
-<file path=ppt/slides/slide18.xml><?xml version="1.0" encoding="utf-8"?>
+<file path=ppt/slides/slide19.xml><?xml version="1.0" encoding="utf-8"?>
 <p:sld xmlns:a="http://schemas.openxmlformats.org/drawingml/2006/main" xmlns:r="http://schemas.openxmlformats.org/officeDocument/2006/relationships" xmlns:p="http://schemas.openxmlformats.org/presentationml/2006/main">
   <p:cSld>
     <p:spTree>
@@ -24091,7 +25276,291 @@
 </p:sld>
 </file>
 
-<file path=ppt/slides/slide19.xml><?xml version="1.0" encoding="utf-8"?>
+<file path=ppt/slides/slide2.xml><?xml version="1.0" encoding="utf-8"?>
+<p:sld xmlns:a="http://schemas.openxmlformats.org/drawingml/2006/main" xmlns:r="http://schemas.openxmlformats.org/officeDocument/2006/relationships" xmlns:p="http://schemas.openxmlformats.org/presentationml/2006/main">
+  <p:cSld>
+    <p:spTree>
+      <p:nvGrpSpPr>
+        <p:cNvPr id="1" name=""/>
+        <p:cNvGrpSpPr/>
+        <p:nvPr/>
+      </p:nvGrpSpPr>
+      <p:grpSpPr>
+        <a:xfrm>
+          <a:off x="0" y="0"/>
+          <a:ext cx="0" cy="0"/>
+          <a:chOff x="0" y="0"/>
+          <a:chExt cx="0" cy="0"/>
+        </a:xfrm>
+      </p:grpSpPr>
+      <p:sp>
+        <p:nvSpPr>
+          <p:cNvPr id="4" name="TextBox 3">
+            <a:extLst>
+              <a:ext uri="{FF2B5EF4-FFF2-40B4-BE49-F238E27FC236}">
+                <a16:creationId xmlns:a16="http://schemas.microsoft.com/office/drawing/2014/main" id="{93FB964B-A29C-1649-A2C4-81BC78C24A50}"/>
+              </a:ext>
+            </a:extLst>
+          </p:cNvPr>
+          <p:cNvSpPr txBox="1"/>
+          <p:nvPr/>
+        </p:nvSpPr>
+        <p:spPr>
+          <a:xfrm>
+            <a:off x="0" y="58846"/>
+            <a:ext cx="5579165" cy="6740307"/>
+          </a:xfrm>
+          <a:prstGeom prst="rect">
+            <a:avLst/>
+          </a:prstGeom>
+          <a:noFill/>
+        </p:spPr>
+        <p:txBody>
+          <a:bodyPr wrap="square" rtlCol="0">
+            <a:spAutoFit/>
+          </a:bodyPr>
+          <a:lstStyle/>
+          <a:p>
+            <a:r>
+              <a:rPr lang="en-US" sz="2000" b="1" dirty="0"/>
+              <a:t>Bayesian vs Frequentist</a:t>
+            </a:r>
+          </a:p>
+          <a:p>
+            <a:r>
+              <a:rPr lang="en-US" sz="2000" b="1" dirty="0"/>
+              <a:t>Survivorship Bias in World War 2</a:t>
+            </a:r>
+          </a:p>
+          <a:p>
+            <a:endParaRPr lang="en-US" dirty="0"/>
+          </a:p>
+          <a:p>
+            <a:r>
+              <a:rPr lang="en-US" dirty="0"/>
+              <a:t>During World War II the US military's concluded that the most-hit areas of the plane needed additional armor.</a:t>
+            </a:r>
+          </a:p>
+          <a:p>
+            <a:r>
+              <a:rPr lang="en-US" dirty="0"/>
+              <a:t>But statistician Abraham Wald (Statistical Research Group (SRG) at Columbia University) has recommended adding armor to the areas that showed the least damage. His reasoning was that the sample didn't include the planes which were shot down.</a:t>
+            </a:r>
+          </a:p>
+          <a:p>
+            <a:endParaRPr lang="en-US" dirty="0"/>
+          </a:p>
+          <a:p>
+            <a:r>
+              <a:rPr lang="en-US" dirty="0"/>
+              <a:t>It is dangerous to use data "as is" to create a model,</a:t>
+            </a:r>
+            <a:br>
+              <a:rPr lang="en-US" dirty="0"/>
+            </a:br>
+            <a:r>
+              <a:rPr lang="en-US" dirty="0"/>
+              <a:t>because the data may be biased to start with,</a:t>
+            </a:r>
+            <a:br>
+              <a:rPr lang="en-US" dirty="0"/>
+            </a:br>
+            <a:r>
+              <a:rPr lang="en-US" dirty="0"/>
+              <a:t>and it can easily lead to creating a biased model</a:t>
+            </a:r>
+            <a:br>
+              <a:rPr lang="en-US" dirty="0"/>
+            </a:br>
+            <a:br>
+              <a:rPr lang="en-US" dirty="0"/>
+            </a:br>
+            <a:r>
+              <a:rPr lang="en-US" dirty="0"/>
+              <a:t>Problem occur when we have:</a:t>
+            </a:r>
+            <a:br>
+              <a:rPr lang="en-US" dirty="0"/>
+            </a:br>
+            <a:r>
+              <a:rPr lang="en-US" dirty="0"/>
+              <a:t> - under-represented features (missing data)</a:t>
+            </a:r>
+            <a:br>
+              <a:rPr lang="en-US" dirty="0"/>
+            </a:br>
+            <a:r>
+              <a:rPr lang="en-US" dirty="0"/>
+              <a:t> - over-represented features,</a:t>
+            </a:r>
+            <a:br>
+              <a:rPr lang="en-US" dirty="0"/>
+            </a:br>
+            <a:r>
+              <a:rPr lang="en-US" dirty="0"/>
+              <a:t> - "target leakage" effect.</a:t>
+            </a:r>
+            <a:br>
+              <a:rPr lang="en-US" dirty="0"/>
+            </a:br>
+            <a:br>
+              <a:rPr lang="en-US" dirty="0"/>
+            </a:br>
+            <a:r>
+              <a:rPr lang="en-US" dirty="0"/>
+              <a:t>Survivorship bias:</a:t>
+            </a:r>
+            <a:br>
+              <a:rPr lang="en-US" dirty="0"/>
+            </a:br>
+            <a:r>
+              <a:rPr lang="en-US" dirty="0"/>
+              <a:t> - </a:t>
+            </a:r>
+            <a:r>
+              <a:rPr lang="en-US" dirty="0">
+                <a:hlinkClick r:id="rId2"/>
+              </a:rPr>
+              <a:t>https://www.youtube.com/watch?v=B3YQJ5DwTzM</a:t>
+            </a:r>
+            <a:r>
+              <a:rPr lang="en-US" dirty="0"/>
+              <a:t> </a:t>
+            </a:r>
+            <a:br>
+              <a:rPr lang="en-US" dirty="0"/>
+            </a:br>
+            <a:br>
+              <a:rPr lang="en-US" dirty="0"/>
+            </a:br>
+            <a:r>
+              <a:rPr lang="en-US" dirty="0"/>
+              <a:t>Gender Bias:</a:t>
+            </a:r>
+            <a:br>
+              <a:rPr lang="en-US" dirty="0"/>
+            </a:br>
+            <a:r>
+              <a:rPr lang="en-US" dirty="0"/>
+              <a:t> - </a:t>
+            </a:r>
+            <a:r>
+              <a:rPr lang="en-US" dirty="0">
+                <a:hlinkClick r:id="rId3"/>
+              </a:rPr>
+              <a:t>https://www.youtube.com/watch?v=p60-Jdq754A</a:t>
+            </a:r>
+            <a:r>
+              <a:rPr lang="en-US" dirty="0"/>
+              <a:t> </a:t>
+            </a:r>
+            <a:br>
+              <a:rPr lang="en-US" dirty="0"/>
+            </a:br>
+            <a:br>
+              <a:rPr lang="en-US" dirty="0"/>
+            </a:br>
+            <a:r>
+              <a:rPr lang="en-US" dirty="0"/>
+              <a:t>Bias in criminal justice:</a:t>
+            </a:r>
+            <a:br>
+              <a:rPr lang="en-US" dirty="0"/>
+            </a:br>
+            <a:r>
+              <a:rPr lang="en-US" dirty="0"/>
+              <a:t> - </a:t>
+            </a:r>
+            <a:r>
+              <a:rPr lang="en-US" dirty="0">
+                <a:hlinkClick r:id="rId4"/>
+              </a:rPr>
+              <a:t>https://www.youtube.com/watch?v=Gi4YeRqfb24</a:t>
+            </a:r>
+            <a:r>
+              <a:rPr lang="en-US" dirty="0"/>
+              <a:t> </a:t>
+            </a:r>
+            <a:br>
+              <a:rPr lang="en-US" dirty="0"/>
+            </a:br>
+            <a:br>
+              <a:rPr lang="en-US" dirty="0"/>
+            </a:br>
+            <a:r>
+              <a:rPr lang="en-US" dirty="0"/>
+              <a:t>Target Leakage:</a:t>
+            </a:r>
+            <a:br>
+              <a:rPr lang="en-US" dirty="0"/>
+            </a:br>
+            <a:r>
+              <a:rPr lang="en-US" dirty="0"/>
+              <a:t> - </a:t>
+            </a:r>
+            <a:r>
+              <a:rPr lang="en-US" dirty="0">
+                <a:hlinkClick r:id="rId5"/>
+              </a:rPr>
+              <a:t>https://www.youtube.com/watch?v=y8qaI5mpJeA</a:t>
+            </a:r>
+            <a:r>
+              <a:rPr lang="en-US" dirty="0"/>
+              <a:t> </a:t>
+            </a:r>
+          </a:p>
+        </p:txBody>
+      </p:sp>
+      <p:pic>
+        <p:nvPicPr>
+          <p:cNvPr id="6" name="Picture 5">
+            <a:extLst>
+              <a:ext uri="{FF2B5EF4-FFF2-40B4-BE49-F238E27FC236}">
+                <a16:creationId xmlns:a16="http://schemas.microsoft.com/office/drawing/2014/main" id="{EA27DDEE-0422-6E4F-AC95-3AFA579C3DB8}"/>
+              </a:ext>
+            </a:extLst>
+          </p:cNvPr>
+          <p:cNvPicPr>
+            <a:picLocks noChangeAspect="1"/>
+          </p:cNvPicPr>
+          <p:nvPr/>
+        </p:nvPicPr>
+        <p:blipFill>
+          <a:blip r:embed="rId6" cstate="email">
+            <a:extLst>
+              <a:ext uri="{28A0092B-C50C-407E-A947-70E740481C1C}">
+                <a14:useLocalDpi xmlns:a14="http://schemas.microsoft.com/office/drawing/2010/main"/>
+              </a:ext>
+            </a:extLst>
+          </a:blip>
+          <a:stretch>
+            <a:fillRect/>
+          </a:stretch>
+        </p:blipFill>
+        <p:spPr>
+          <a:xfrm>
+            <a:off x="6617056" y="225286"/>
+            <a:ext cx="5429170" cy="3419062"/>
+          </a:xfrm>
+          <a:prstGeom prst="rect">
+            <a:avLst/>
+          </a:prstGeom>
+        </p:spPr>
+      </p:pic>
+    </p:spTree>
+    <p:extLst>
+      <p:ext uri="{BB962C8B-B14F-4D97-AF65-F5344CB8AC3E}">
+        <p14:creationId xmlns:p14="http://schemas.microsoft.com/office/powerpoint/2010/main" val="3774625219"/>
+      </p:ext>
+    </p:extLst>
+  </p:cSld>
+  <p:clrMapOvr>
+    <a:masterClrMapping/>
+  </p:clrMapOvr>
+</p:sld>
+</file>
+
+<file path=ppt/slides/slide20.xml><?xml version="1.0" encoding="utf-8"?>
 <p:sld xmlns:a="http://schemas.openxmlformats.org/drawingml/2006/main" xmlns:r="http://schemas.openxmlformats.org/officeDocument/2006/relationships" xmlns:p="http://schemas.openxmlformats.org/presentationml/2006/main">
   <p:cSld>
     <p:spTree>
@@ -24608,291 +26077,7 @@
 </p:sld>
 </file>
 
-<file path=ppt/slides/slide2.xml><?xml version="1.0" encoding="utf-8"?>
-<p:sld xmlns:a="http://schemas.openxmlformats.org/drawingml/2006/main" xmlns:r="http://schemas.openxmlformats.org/officeDocument/2006/relationships" xmlns:p="http://schemas.openxmlformats.org/presentationml/2006/main">
-  <p:cSld>
-    <p:spTree>
-      <p:nvGrpSpPr>
-        <p:cNvPr id="1" name=""/>
-        <p:cNvGrpSpPr/>
-        <p:nvPr/>
-      </p:nvGrpSpPr>
-      <p:grpSpPr>
-        <a:xfrm>
-          <a:off x="0" y="0"/>
-          <a:ext cx="0" cy="0"/>
-          <a:chOff x="0" y="0"/>
-          <a:chExt cx="0" cy="0"/>
-        </a:xfrm>
-      </p:grpSpPr>
-      <p:sp>
-        <p:nvSpPr>
-          <p:cNvPr id="4" name="TextBox 3">
-            <a:extLst>
-              <a:ext uri="{FF2B5EF4-FFF2-40B4-BE49-F238E27FC236}">
-                <a16:creationId xmlns:a16="http://schemas.microsoft.com/office/drawing/2014/main" id="{93FB964B-A29C-1649-A2C4-81BC78C24A50}"/>
-              </a:ext>
-            </a:extLst>
-          </p:cNvPr>
-          <p:cNvSpPr txBox="1"/>
-          <p:nvPr/>
-        </p:nvSpPr>
-        <p:spPr>
-          <a:xfrm>
-            <a:off x="0" y="58846"/>
-            <a:ext cx="5579165" cy="6740307"/>
-          </a:xfrm>
-          <a:prstGeom prst="rect">
-            <a:avLst/>
-          </a:prstGeom>
-          <a:noFill/>
-        </p:spPr>
-        <p:txBody>
-          <a:bodyPr wrap="square" rtlCol="0">
-            <a:spAutoFit/>
-          </a:bodyPr>
-          <a:lstStyle/>
-          <a:p>
-            <a:r>
-              <a:rPr lang="en-US" sz="2000" b="1" dirty="0"/>
-              <a:t>Bayesian vs Frequentist</a:t>
-            </a:r>
-          </a:p>
-          <a:p>
-            <a:r>
-              <a:rPr lang="en-US" sz="2000" b="1" dirty="0"/>
-              <a:t>Survivorship Bias in World War 2</a:t>
-            </a:r>
-          </a:p>
-          <a:p>
-            <a:endParaRPr lang="en-US" dirty="0"/>
-          </a:p>
-          <a:p>
-            <a:r>
-              <a:rPr lang="en-US" dirty="0"/>
-              <a:t>During World War II the US military's concluded that the most-hit areas of the plane needed additional armor.</a:t>
-            </a:r>
-          </a:p>
-          <a:p>
-            <a:r>
-              <a:rPr lang="en-US" dirty="0"/>
-              <a:t>But statistician Abraham Wald (Statistical Research Group (SRG) at Columbia University) has recommended adding armor to the areas that showed the least damage. His reasoning was that the sample didn't include the planes which were shot down.</a:t>
-            </a:r>
-          </a:p>
-          <a:p>
-            <a:endParaRPr lang="en-US" dirty="0"/>
-          </a:p>
-          <a:p>
-            <a:r>
-              <a:rPr lang="en-US" dirty="0"/>
-              <a:t>It is dangerous to use data "as is" to create a model,</a:t>
-            </a:r>
-            <a:br>
-              <a:rPr lang="en-US" dirty="0"/>
-            </a:br>
-            <a:r>
-              <a:rPr lang="en-US" dirty="0"/>
-              <a:t>because the data may be biased to start with,</a:t>
-            </a:r>
-            <a:br>
-              <a:rPr lang="en-US" dirty="0"/>
-            </a:br>
-            <a:r>
-              <a:rPr lang="en-US" dirty="0"/>
-              <a:t>and it can easily lead to creating a biased model</a:t>
-            </a:r>
-            <a:br>
-              <a:rPr lang="en-US" dirty="0"/>
-            </a:br>
-            <a:br>
-              <a:rPr lang="en-US" dirty="0"/>
-            </a:br>
-            <a:r>
-              <a:rPr lang="en-US" dirty="0"/>
-              <a:t>Problem occur when we have:</a:t>
-            </a:r>
-            <a:br>
-              <a:rPr lang="en-US" dirty="0"/>
-            </a:br>
-            <a:r>
-              <a:rPr lang="en-US" dirty="0"/>
-              <a:t> - under-represented features (missing data)</a:t>
-            </a:r>
-            <a:br>
-              <a:rPr lang="en-US" dirty="0"/>
-            </a:br>
-            <a:r>
-              <a:rPr lang="en-US" dirty="0"/>
-              <a:t> - over-represented features,</a:t>
-            </a:r>
-            <a:br>
-              <a:rPr lang="en-US" dirty="0"/>
-            </a:br>
-            <a:r>
-              <a:rPr lang="en-US" dirty="0"/>
-              <a:t> - "target leakage" effect.</a:t>
-            </a:r>
-            <a:br>
-              <a:rPr lang="en-US" dirty="0"/>
-            </a:br>
-            <a:br>
-              <a:rPr lang="en-US" dirty="0"/>
-            </a:br>
-            <a:r>
-              <a:rPr lang="en-US" dirty="0"/>
-              <a:t>Survivorship bias:</a:t>
-            </a:r>
-            <a:br>
-              <a:rPr lang="en-US" dirty="0"/>
-            </a:br>
-            <a:r>
-              <a:rPr lang="en-US" dirty="0"/>
-              <a:t> - </a:t>
-            </a:r>
-            <a:r>
-              <a:rPr lang="en-US" dirty="0">
-                <a:hlinkClick r:id="rId2"/>
-              </a:rPr>
-              <a:t>https://www.youtube.com/watch?v=B3YQJ5DwTzM</a:t>
-            </a:r>
-            <a:r>
-              <a:rPr lang="en-US" dirty="0"/>
-              <a:t> </a:t>
-            </a:r>
-            <a:br>
-              <a:rPr lang="en-US" dirty="0"/>
-            </a:br>
-            <a:br>
-              <a:rPr lang="en-US" dirty="0"/>
-            </a:br>
-            <a:r>
-              <a:rPr lang="en-US" dirty="0"/>
-              <a:t>Gender Bias:</a:t>
-            </a:r>
-            <a:br>
-              <a:rPr lang="en-US" dirty="0"/>
-            </a:br>
-            <a:r>
-              <a:rPr lang="en-US" dirty="0"/>
-              <a:t> - </a:t>
-            </a:r>
-            <a:r>
-              <a:rPr lang="en-US" dirty="0">
-                <a:hlinkClick r:id="rId3"/>
-              </a:rPr>
-              <a:t>https://www.youtube.com/watch?v=p60-Jdq754A</a:t>
-            </a:r>
-            <a:r>
-              <a:rPr lang="en-US" dirty="0"/>
-              <a:t> </a:t>
-            </a:r>
-            <a:br>
-              <a:rPr lang="en-US" dirty="0"/>
-            </a:br>
-            <a:br>
-              <a:rPr lang="en-US" dirty="0"/>
-            </a:br>
-            <a:r>
-              <a:rPr lang="en-US" dirty="0"/>
-              <a:t>Bias in criminal justice:</a:t>
-            </a:r>
-            <a:br>
-              <a:rPr lang="en-US" dirty="0"/>
-            </a:br>
-            <a:r>
-              <a:rPr lang="en-US" dirty="0"/>
-              <a:t> - </a:t>
-            </a:r>
-            <a:r>
-              <a:rPr lang="en-US" dirty="0">
-                <a:hlinkClick r:id="rId4"/>
-              </a:rPr>
-              <a:t>https://www.youtube.com/watch?v=Gi4YeRqfb24</a:t>
-            </a:r>
-            <a:r>
-              <a:rPr lang="en-US" dirty="0"/>
-              <a:t> </a:t>
-            </a:r>
-            <a:br>
-              <a:rPr lang="en-US" dirty="0"/>
-            </a:br>
-            <a:br>
-              <a:rPr lang="en-US" dirty="0"/>
-            </a:br>
-            <a:r>
-              <a:rPr lang="en-US" dirty="0"/>
-              <a:t>Target Leakage:</a:t>
-            </a:r>
-            <a:br>
-              <a:rPr lang="en-US" dirty="0"/>
-            </a:br>
-            <a:r>
-              <a:rPr lang="en-US" dirty="0"/>
-              <a:t> - </a:t>
-            </a:r>
-            <a:r>
-              <a:rPr lang="en-US" dirty="0">
-                <a:hlinkClick r:id="rId5"/>
-              </a:rPr>
-              <a:t>https://www.youtube.com/watch?v=y8qaI5mpJeA</a:t>
-            </a:r>
-            <a:r>
-              <a:rPr lang="en-US" dirty="0"/>
-              <a:t> </a:t>
-            </a:r>
-          </a:p>
-        </p:txBody>
-      </p:sp>
-      <p:pic>
-        <p:nvPicPr>
-          <p:cNvPr id="6" name="Picture 5">
-            <a:extLst>
-              <a:ext uri="{FF2B5EF4-FFF2-40B4-BE49-F238E27FC236}">
-                <a16:creationId xmlns:a16="http://schemas.microsoft.com/office/drawing/2014/main" id="{EA27DDEE-0422-6E4F-AC95-3AFA579C3DB8}"/>
-              </a:ext>
-            </a:extLst>
-          </p:cNvPr>
-          <p:cNvPicPr>
-            <a:picLocks noChangeAspect="1"/>
-          </p:cNvPicPr>
-          <p:nvPr/>
-        </p:nvPicPr>
-        <p:blipFill>
-          <a:blip r:embed="rId6" cstate="email">
-            <a:extLst>
-              <a:ext uri="{28A0092B-C50C-407E-A947-70E740481C1C}">
-                <a14:useLocalDpi xmlns:a14="http://schemas.microsoft.com/office/drawing/2010/main"/>
-              </a:ext>
-            </a:extLst>
-          </a:blip>
-          <a:stretch>
-            <a:fillRect/>
-          </a:stretch>
-        </p:blipFill>
-        <p:spPr>
-          <a:xfrm>
-            <a:off x="6617056" y="225286"/>
-            <a:ext cx="5429170" cy="3419062"/>
-          </a:xfrm>
-          <a:prstGeom prst="rect">
-            <a:avLst/>
-          </a:prstGeom>
-        </p:spPr>
-      </p:pic>
-    </p:spTree>
-    <p:extLst>
-      <p:ext uri="{BB962C8B-B14F-4D97-AF65-F5344CB8AC3E}">
-        <p14:creationId xmlns:p14="http://schemas.microsoft.com/office/powerpoint/2010/main" val="3774625219"/>
-      </p:ext>
-    </p:extLst>
-  </p:cSld>
-  <p:clrMapOvr>
-    <a:masterClrMapping/>
-  </p:clrMapOvr>
-</p:sld>
-</file>
-
-<file path=ppt/slides/slide20.xml><?xml version="1.0" encoding="utf-8"?>
+<file path=ppt/slides/slide21.xml><?xml version="1.0" encoding="utf-8"?>
 <p:sld xmlns:a="http://schemas.openxmlformats.org/drawingml/2006/main" xmlns:r="http://schemas.openxmlformats.org/officeDocument/2006/relationships" xmlns:p="http://schemas.openxmlformats.org/presentationml/2006/main">
   <p:cSld>
     <p:spTree>
@@ -25162,6 +26347,485 @@
 </file>
 
 <file path=ppt/slides/slide3.xml><?xml version="1.0" encoding="utf-8"?>
+<p:sld xmlns:a="http://schemas.openxmlformats.org/drawingml/2006/main" xmlns:r="http://schemas.openxmlformats.org/officeDocument/2006/relationships" xmlns:p="http://schemas.openxmlformats.org/presentationml/2006/main">
+  <p:cSld>
+    <p:spTree>
+      <p:nvGrpSpPr>
+        <p:cNvPr id="1" name=""/>
+        <p:cNvGrpSpPr/>
+        <p:nvPr/>
+      </p:nvGrpSpPr>
+      <p:grpSpPr>
+        <a:xfrm>
+          <a:off x="0" y="0"/>
+          <a:ext cx="0" cy="0"/>
+          <a:chOff x="0" y="0"/>
+          <a:chExt cx="0" cy="0"/>
+        </a:xfrm>
+      </p:grpSpPr>
+      <p:sp>
+        <p:nvSpPr>
+          <p:cNvPr id="9" name="Rectangle 8">
+            <a:extLst>
+              <a:ext uri="{FF2B5EF4-FFF2-40B4-BE49-F238E27FC236}">
+                <a16:creationId xmlns:a16="http://schemas.microsoft.com/office/drawing/2014/main" id="{67E31AB4-7740-204E-B42C-A6C2F88F06FA}"/>
+              </a:ext>
+            </a:extLst>
+          </p:cNvPr>
+          <p:cNvSpPr/>
+          <p:nvPr/>
+        </p:nvSpPr>
+        <p:spPr>
+          <a:xfrm>
+            <a:off x="613423" y="1081825"/>
+            <a:ext cx="3438659" cy="2347175"/>
+          </a:xfrm>
+          <a:prstGeom prst="rect">
+            <a:avLst/>
+          </a:prstGeom>
+          <a:solidFill>
+            <a:schemeClr val="accent1">
+              <a:alpha val="10000"/>
+            </a:schemeClr>
+          </a:solidFill>
+        </p:spPr>
+        <p:style>
+          <a:lnRef idx="2">
+            <a:schemeClr val="accent1">
+              <a:shade val="50000"/>
+            </a:schemeClr>
+          </a:lnRef>
+          <a:fillRef idx="1">
+            <a:schemeClr val="accent1"/>
+          </a:fillRef>
+          <a:effectRef idx="0">
+            <a:schemeClr val="accent1"/>
+          </a:effectRef>
+          <a:fontRef idx="minor">
+            <a:schemeClr val="lt1"/>
+          </a:fontRef>
+        </p:style>
+        <p:txBody>
+          <a:bodyPr rtlCol="0" anchor="ctr"/>
+          <a:lstStyle/>
+          <a:p>
+            <a:pPr algn="ctr"/>
+            <a:endParaRPr lang="en-US" sz="1800" dirty="0"/>
+          </a:p>
+        </p:txBody>
+      </p:sp>
+      <p:sp>
+        <p:nvSpPr>
+          <p:cNvPr id="3" name="TextBox 2">
+            <a:extLst>
+              <a:ext uri="{FF2B5EF4-FFF2-40B4-BE49-F238E27FC236}">
+                <a16:creationId xmlns:a16="http://schemas.microsoft.com/office/drawing/2014/main" id="{FD8F2B0F-F8E3-874A-92B1-5FAAD5BE74E3}"/>
+              </a:ext>
+            </a:extLst>
+          </p:cNvPr>
+          <p:cNvSpPr txBox="1"/>
+          <p:nvPr/>
+        </p:nvSpPr>
+        <p:spPr>
+          <a:xfrm>
+            <a:off x="0" y="0"/>
+            <a:ext cx="4585855" cy="523220"/>
+          </a:xfrm>
+          <a:prstGeom prst="rect">
+            <a:avLst/>
+          </a:prstGeom>
+          <a:noFill/>
+        </p:spPr>
+        <p:txBody>
+          <a:bodyPr wrap="square" rtlCol="0">
+            <a:spAutoFit/>
+          </a:bodyPr>
+          <a:lstStyle/>
+          <a:p>
+            <a:r>
+              <a:rPr lang="en-US" sz="2800" b="1" dirty="0"/>
+              <a:t>Bayesian Data Analysis</a:t>
+            </a:r>
+          </a:p>
+        </p:txBody>
+      </p:sp>
+      <p:sp>
+        <p:nvSpPr>
+          <p:cNvPr id="4" name="TextBox 3">
+            <a:extLst>
+              <a:ext uri="{FF2B5EF4-FFF2-40B4-BE49-F238E27FC236}">
+                <a16:creationId xmlns:a16="http://schemas.microsoft.com/office/drawing/2014/main" id="{344EB4DF-E6B0-BE43-AAD2-125543C30EC4}"/>
+              </a:ext>
+            </a:extLst>
+          </p:cNvPr>
+          <p:cNvSpPr txBox="1"/>
+          <p:nvPr/>
+        </p:nvSpPr>
+        <p:spPr>
+          <a:xfrm>
+            <a:off x="798297" y="1308451"/>
+            <a:ext cx="3068910" cy="646331"/>
+          </a:xfrm>
+          <a:prstGeom prst="rect">
+            <a:avLst/>
+          </a:prstGeom>
+          <a:noFill/>
+        </p:spPr>
+        <p:txBody>
+          <a:bodyPr wrap="square" rtlCol="0">
+            <a:spAutoFit/>
+          </a:bodyPr>
+          <a:lstStyle/>
+          <a:p>
+            <a:pPr algn="ctr"/>
+            <a:r>
+              <a:rPr lang="en-US" sz="1800" dirty="0"/>
+              <a:t>Unknown Parameters (priors)</a:t>
+            </a:r>
+          </a:p>
+        </p:txBody>
+      </p:sp>
+      <p:sp>
+        <p:nvSpPr>
+          <p:cNvPr id="5" name="TextBox 4">
+            <a:extLst>
+              <a:ext uri="{FF2B5EF4-FFF2-40B4-BE49-F238E27FC236}">
+                <a16:creationId xmlns:a16="http://schemas.microsoft.com/office/drawing/2014/main" id="{9BD2C10F-4995-D744-80AD-8D18F2145922}"/>
+              </a:ext>
+            </a:extLst>
+          </p:cNvPr>
+          <p:cNvSpPr txBox="1"/>
+          <p:nvPr/>
+        </p:nvSpPr>
+        <p:spPr>
+          <a:xfrm>
+            <a:off x="798297" y="2748944"/>
+            <a:ext cx="3068910" cy="369332"/>
+          </a:xfrm>
+          <a:prstGeom prst="rect">
+            <a:avLst/>
+          </a:prstGeom>
+          <a:noFill/>
+        </p:spPr>
+        <p:txBody>
+          <a:bodyPr wrap="square" rtlCol="0">
+            <a:spAutoFit/>
+          </a:bodyPr>
+          <a:lstStyle/>
+          <a:p>
+            <a:pPr algn="ctr"/>
+            <a:r>
+              <a:rPr lang="en-US" sz="1800" dirty="0"/>
+              <a:t>Model to generate data</a:t>
+            </a:r>
+          </a:p>
+        </p:txBody>
+      </p:sp>
+      <p:sp>
+        <p:nvSpPr>
+          <p:cNvPr id="6" name="TextBox 5">
+            <a:extLst>
+              <a:ext uri="{FF2B5EF4-FFF2-40B4-BE49-F238E27FC236}">
+                <a16:creationId xmlns:a16="http://schemas.microsoft.com/office/drawing/2014/main" id="{BD18747A-3F88-8B46-958A-68AA13FA2897}"/>
+              </a:ext>
+            </a:extLst>
+          </p:cNvPr>
+          <p:cNvSpPr txBox="1"/>
+          <p:nvPr/>
+        </p:nvSpPr>
+        <p:spPr>
+          <a:xfrm>
+            <a:off x="798297" y="4151248"/>
+            <a:ext cx="3068910" cy="369332"/>
+          </a:xfrm>
+          <a:prstGeom prst="rect">
+            <a:avLst/>
+          </a:prstGeom>
+          <a:noFill/>
+        </p:spPr>
+        <p:txBody>
+          <a:bodyPr wrap="square" rtlCol="0">
+            <a:spAutoFit/>
+          </a:bodyPr>
+          <a:lstStyle/>
+          <a:p>
+            <a:pPr algn="ctr"/>
+            <a:r>
+              <a:rPr lang="en-US" sz="1800" dirty="0"/>
+              <a:t>Observed Data</a:t>
+            </a:r>
+          </a:p>
+        </p:txBody>
+      </p:sp>
+      <p:sp>
+        <p:nvSpPr>
+          <p:cNvPr id="7" name="Down Arrow 6">
+            <a:extLst>
+              <a:ext uri="{FF2B5EF4-FFF2-40B4-BE49-F238E27FC236}">
+                <a16:creationId xmlns:a16="http://schemas.microsoft.com/office/drawing/2014/main" id="{11C8CA14-CFCA-F44D-80AD-26E19612414D}"/>
+              </a:ext>
+            </a:extLst>
+          </p:cNvPr>
+          <p:cNvSpPr/>
+          <p:nvPr/>
+        </p:nvSpPr>
+        <p:spPr>
+          <a:xfrm>
+            <a:off x="2231071" y="2026696"/>
+            <a:ext cx="203363" cy="722248"/>
+          </a:xfrm>
+          <a:prstGeom prst="downArrow">
+            <a:avLst/>
+          </a:prstGeom>
+        </p:spPr>
+        <p:style>
+          <a:lnRef idx="2">
+            <a:schemeClr val="accent1">
+              <a:shade val="50000"/>
+            </a:schemeClr>
+          </a:lnRef>
+          <a:fillRef idx="1">
+            <a:schemeClr val="accent1"/>
+          </a:fillRef>
+          <a:effectRef idx="0">
+            <a:schemeClr val="accent1"/>
+          </a:effectRef>
+          <a:fontRef idx="minor">
+            <a:schemeClr val="lt1"/>
+          </a:fontRef>
+        </p:style>
+        <p:txBody>
+          <a:bodyPr rtlCol="0" anchor="ctr"/>
+          <a:lstStyle/>
+          <a:p>
+            <a:pPr algn="ctr"/>
+            <a:endParaRPr lang="en-US" sz="1800"/>
+          </a:p>
+        </p:txBody>
+      </p:sp>
+      <p:sp>
+        <p:nvSpPr>
+          <p:cNvPr id="8" name="Down Arrow 7">
+            <a:extLst>
+              <a:ext uri="{FF2B5EF4-FFF2-40B4-BE49-F238E27FC236}">
+                <a16:creationId xmlns:a16="http://schemas.microsoft.com/office/drawing/2014/main" id="{A6BF515A-4A50-8943-9DC6-BE6FE6D7A7FE}"/>
+              </a:ext>
+            </a:extLst>
+          </p:cNvPr>
+          <p:cNvSpPr/>
+          <p:nvPr/>
+        </p:nvSpPr>
+        <p:spPr>
+          <a:xfrm>
+            <a:off x="2231071" y="3201831"/>
+            <a:ext cx="203363" cy="949417"/>
+          </a:xfrm>
+          <a:prstGeom prst="downArrow">
+            <a:avLst/>
+          </a:prstGeom>
+        </p:spPr>
+        <p:style>
+          <a:lnRef idx="2">
+            <a:schemeClr val="accent1">
+              <a:shade val="50000"/>
+            </a:schemeClr>
+          </a:lnRef>
+          <a:fillRef idx="1">
+            <a:schemeClr val="accent1"/>
+          </a:fillRef>
+          <a:effectRef idx="0">
+            <a:schemeClr val="accent1"/>
+          </a:effectRef>
+          <a:fontRef idx="minor">
+            <a:schemeClr val="lt1"/>
+          </a:fontRef>
+        </p:style>
+        <p:txBody>
+          <a:bodyPr rtlCol="0" anchor="ctr"/>
+          <a:lstStyle/>
+          <a:p>
+            <a:pPr algn="ctr"/>
+            <a:endParaRPr lang="en-US" sz="1800"/>
+          </a:p>
+        </p:txBody>
+      </p:sp>
+      <p:sp>
+        <p:nvSpPr>
+          <p:cNvPr id="10" name="TextBox 9">
+            <a:extLst>
+              <a:ext uri="{FF2B5EF4-FFF2-40B4-BE49-F238E27FC236}">
+                <a16:creationId xmlns:a16="http://schemas.microsoft.com/office/drawing/2014/main" id="{92B4B3A9-26DA-D046-8E9C-F3AC8C6DDDED}"/>
+              </a:ext>
+            </a:extLst>
+          </p:cNvPr>
+          <p:cNvSpPr txBox="1"/>
+          <p:nvPr/>
+        </p:nvSpPr>
+        <p:spPr>
+          <a:xfrm>
+            <a:off x="5299981" y="690465"/>
+            <a:ext cx="4397811" cy="1569660"/>
+          </a:xfrm>
+          <a:prstGeom prst="rect">
+            <a:avLst/>
+          </a:prstGeom>
+          <a:noFill/>
+        </p:spPr>
+        <p:txBody>
+          <a:bodyPr wrap="square" rtlCol="0">
+            <a:spAutoFit/>
+          </a:bodyPr>
+          <a:lstStyle/>
+          <a:p>
+            <a:r>
+              <a:rPr lang="en-US" sz="1600" dirty="0"/>
+              <a:t>We know the observed data.</a:t>
+            </a:r>
+          </a:p>
+          <a:p>
+            <a:endParaRPr lang="en-US" sz="1600" dirty="0"/>
+          </a:p>
+          <a:p>
+            <a:r>
+              <a:rPr lang="en-US" sz="1600" dirty="0"/>
+              <a:t>We are trying to figure out the unknown parameters.</a:t>
+            </a:r>
+          </a:p>
+          <a:p>
+            <a:endParaRPr lang="en-US" sz="1600" dirty="0"/>
+          </a:p>
+          <a:p>
+            <a:r>
+              <a:rPr lang="en-US" sz="1600" dirty="0"/>
+              <a:t>This is the reverse probability problem.</a:t>
+            </a:r>
+          </a:p>
+        </p:txBody>
+      </p:sp>
+      <p:sp>
+        <p:nvSpPr>
+          <p:cNvPr id="11" name="TextBox 10">
+            <a:extLst>
+              <a:ext uri="{FF2B5EF4-FFF2-40B4-BE49-F238E27FC236}">
+                <a16:creationId xmlns:a16="http://schemas.microsoft.com/office/drawing/2014/main" id="{D9CCC619-C946-BF4B-AE53-CAE6F9A0BD7D}"/>
+              </a:ext>
+            </a:extLst>
+          </p:cNvPr>
+          <p:cNvSpPr txBox="1"/>
+          <p:nvPr/>
+        </p:nvSpPr>
+        <p:spPr>
+          <a:xfrm>
+            <a:off x="5299980" y="2767280"/>
+            <a:ext cx="6587219" cy="1569660"/>
+          </a:xfrm>
+          <a:prstGeom prst="rect">
+            <a:avLst/>
+          </a:prstGeom>
+          <a:noFill/>
+        </p:spPr>
+        <p:txBody>
+          <a:bodyPr wrap="square" rtlCol="0">
+            <a:spAutoFit/>
+          </a:bodyPr>
+          <a:lstStyle/>
+          <a:p>
+            <a:r>
+              <a:rPr lang="en-US" sz="1600" b="1" dirty="0">
+                <a:solidFill>
+                  <a:srgbClr val="FF0000"/>
+                </a:solidFill>
+              </a:rPr>
+              <a:t>Bayesian Data Analysis</a:t>
+            </a:r>
+            <a:r>
+              <a:rPr lang="en-US" sz="1600" dirty="0"/>
+              <a:t> – a method of figuring our "</a:t>
+            </a:r>
+            <a:r>
+              <a:rPr lang="en-US" sz="1600" b="1" dirty="0">
+                <a:solidFill>
+                  <a:srgbClr val="0070C0"/>
+                </a:solidFill>
+              </a:rPr>
+              <a:t>unknowns</a:t>
+            </a:r>
+            <a:r>
+              <a:rPr lang="en-US" sz="1600" dirty="0"/>
+              <a:t>".</a:t>
+            </a:r>
+          </a:p>
+          <a:p>
+            <a:endParaRPr lang="en-US" sz="1600" dirty="0"/>
+          </a:p>
+          <a:p>
+            <a:r>
+              <a:rPr lang="en-US" sz="1600" dirty="0"/>
+              <a:t>It requires three things:</a:t>
+            </a:r>
+          </a:p>
+          <a:p>
+            <a:pPr marL="285750" indent="-285750">
+              <a:buFont typeface="Arial" panose="020B0604020202020204" pitchFamily="34" charset="0"/>
+              <a:buChar char="•"/>
+            </a:pPr>
+            <a:r>
+              <a:rPr lang="en-US" sz="1600" b="1" dirty="0">
+                <a:solidFill>
+                  <a:srgbClr val="0070C0"/>
+                </a:solidFill>
+              </a:rPr>
+              <a:t>Data</a:t>
+            </a:r>
+          </a:p>
+          <a:p>
+            <a:pPr marL="285750" indent="-285750">
+              <a:buFont typeface="Arial" panose="020B0604020202020204" pitchFamily="34" charset="0"/>
+              <a:buChar char="•"/>
+            </a:pPr>
+            <a:r>
+              <a:rPr lang="en-US" sz="1600" b="1" dirty="0">
+                <a:solidFill>
+                  <a:srgbClr val="0070C0"/>
+                </a:solidFill>
+              </a:rPr>
+              <a:t>Generative model</a:t>
+            </a:r>
+          </a:p>
+          <a:p>
+            <a:pPr marL="285750" indent="-285750">
+              <a:buFont typeface="Arial" panose="020B0604020202020204" pitchFamily="34" charset="0"/>
+              <a:buChar char="•"/>
+            </a:pPr>
+            <a:r>
+              <a:rPr lang="en-US" sz="1600" b="1" dirty="0">
+                <a:solidFill>
+                  <a:srgbClr val="0070C0"/>
+                </a:solidFill>
+              </a:rPr>
+              <a:t>Priors</a:t>
+            </a:r>
+            <a:r>
+              <a:rPr lang="en-US" sz="1600" dirty="0"/>
+              <a:t> – what information the model has before seeing the data.</a:t>
+            </a:r>
+          </a:p>
+        </p:txBody>
+      </p:sp>
+    </p:spTree>
+    <p:extLst>
+      <p:ext uri="{BB962C8B-B14F-4D97-AF65-F5344CB8AC3E}">
+        <p14:creationId xmlns:p14="http://schemas.microsoft.com/office/powerpoint/2010/main" val="393128932"/>
+      </p:ext>
+    </p:extLst>
+  </p:cSld>
+  <p:clrMapOvr>
+    <a:masterClrMapping/>
+  </p:clrMapOvr>
+</p:sld>
+</file>
+
+<file path=ppt/slides/slide4.xml><?xml version="1.0" encoding="utf-8"?>
 <p:sld xmlns:a="http://schemas.openxmlformats.org/drawingml/2006/main" xmlns:r="http://schemas.openxmlformats.org/officeDocument/2006/relationships" xmlns:p="http://schemas.openxmlformats.org/presentationml/2006/main">
   <p:cSld>
     <p:spTree>
@@ -27047,7 +28711,7 @@
 </p:sld>
 </file>
 
-<file path=ppt/slides/slide4.xml><?xml version="1.0" encoding="utf-8"?>
+<file path=ppt/slides/slide5.xml><?xml version="1.0" encoding="utf-8"?>
 <p:sld xmlns:a="http://schemas.openxmlformats.org/drawingml/2006/main" xmlns:r="http://schemas.openxmlformats.org/officeDocument/2006/relationships" xmlns:p="http://schemas.openxmlformats.org/presentationml/2006/main">
   <p:cSld>
     <p:spTree>
@@ -27465,7 +29129,7 @@
 </p:sld>
 </file>
 
-<file path=ppt/slides/slide5.xml><?xml version="1.0" encoding="utf-8"?>
+<file path=ppt/slides/slide6.xml><?xml version="1.0" encoding="utf-8"?>
 <p:sld xmlns:a="http://schemas.openxmlformats.org/drawingml/2006/main" xmlns:r="http://schemas.openxmlformats.org/officeDocument/2006/relationships" xmlns:p="http://schemas.openxmlformats.org/presentationml/2006/main">
   <p:cSld>
     <p:spTree>
@@ -28170,7 +29834,7 @@
 </p:sld>
 </file>
 
-<file path=ppt/slides/slide6.xml><?xml version="1.0" encoding="utf-8"?>
+<file path=ppt/slides/slide7.xml><?xml version="1.0" encoding="utf-8"?>
 <p:sld xmlns:a="http://schemas.openxmlformats.org/drawingml/2006/main" xmlns:r="http://schemas.openxmlformats.org/officeDocument/2006/relationships" xmlns:p="http://schemas.openxmlformats.org/presentationml/2006/main">
   <p:cSld>
     <p:spTree>
@@ -30182,7 +31846,7 @@
 </p:sld>
 </file>
 
-<file path=ppt/slides/slide7.xml><?xml version="1.0" encoding="utf-8"?>
+<file path=ppt/slides/slide8.xml><?xml version="1.0" encoding="utf-8"?>
 <p:sld xmlns:a="http://schemas.openxmlformats.org/drawingml/2006/main" xmlns:r="http://schemas.openxmlformats.org/officeDocument/2006/relationships" xmlns:p="http://schemas.openxmlformats.org/presentationml/2006/main">
   <p:cSld>
     <p:spTree>
@@ -31749,7 +33413,7 @@
 </p:sld>
 </file>
 
-<file path=ppt/slides/slide8.xml><?xml version="1.0" encoding="utf-8"?>
+<file path=ppt/slides/slide9.xml><?xml version="1.0" encoding="utf-8"?>
 <p:sld xmlns:a="http://schemas.openxmlformats.org/drawingml/2006/main" xmlns:r="http://schemas.openxmlformats.org/officeDocument/2006/relationships" xmlns:p="http://schemas.openxmlformats.org/presentationml/2006/main">
   <p:cSld>
     <p:spTree>
@@ -32698,688 +34362,6 @@
     <p:extLst>
       <p:ext uri="{BB962C8B-B14F-4D97-AF65-F5344CB8AC3E}">
         <p14:creationId xmlns:p14="http://schemas.microsoft.com/office/powerpoint/2010/main" val="2024227266"/>
-      </p:ext>
-    </p:extLst>
-  </p:cSld>
-  <p:clrMapOvr>
-    <a:masterClrMapping/>
-  </p:clrMapOvr>
-</p:sld>
-</file>
-
-<file path=ppt/slides/slide9.xml><?xml version="1.0" encoding="utf-8"?>
-<p:sld xmlns:a="http://schemas.openxmlformats.org/drawingml/2006/main" xmlns:r="http://schemas.openxmlformats.org/officeDocument/2006/relationships" xmlns:p="http://schemas.openxmlformats.org/presentationml/2006/main">
-  <p:cSld>
-    <p:spTree>
-      <p:nvGrpSpPr>
-        <p:cNvPr id="1" name="Shape 87"/>
-        <p:cNvGrpSpPr/>
-        <p:nvPr/>
-      </p:nvGrpSpPr>
-      <p:grpSpPr>
-        <a:xfrm>
-          <a:off x="0" y="0"/>
-          <a:ext cx="0" cy="0"/>
-          <a:chOff x="0" y="0"/>
-          <a:chExt cx="0" cy="0"/>
-        </a:xfrm>
-      </p:grpSpPr>
-      <p:sp>
-        <p:nvSpPr>
-          <p:cNvPr id="18" name="Google Shape;107;p14">
-            <a:extLst>
-              <a:ext uri="{FF2B5EF4-FFF2-40B4-BE49-F238E27FC236}">
-                <a16:creationId xmlns:a16="http://schemas.microsoft.com/office/drawing/2014/main" id="{C2992640-6531-5D46-B219-A020079806DB}"/>
-              </a:ext>
-            </a:extLst>
-          </p:cNvPr>
-          <p:cNvSpPr txBox="1"/>
-          <p:nvPr/>
-        </p:nvSpPr>
-        <p:spPr>
-          <a:xfrm>
-            <a:off x="91343" y="40387"/>
-            <a:ext cx="5893822" cy="1137250"/>
-          </a:xfrm>
-          <a:prstGeom prst="rect">
-            <a:avLst/>
-          </a:prstGeom>
-          <a:noFill/>
-          <a:ln>
-            <a:noFill/>
-          </a:ln>
-        </p:spPr>
-        <p:txBody>
-          <a:bodyPr spcFirstLastPara="1" wrap="square" lIns="91425" tIns="45700" rIns="91425" bIns="45700" anchor="t" anchorCtr="0">
-            <a:noAutofit/>
-          </a:bodyPr>
-          <a:lstStyle/>
-          <a:p>
-            <a:pPr marL="0" marR="0" lvl="0" indent="0" algn="l" rtl="0">
-              <a:spcBef>
-                <a:spcPts val="0"/>
-              </a:spcBef>
-              <a:spcAft>
-                <a:spcPts val="0"/>
-              </a:spcAft>
-              <a:buNone/>
-            </a:pPr>
-            <a:r>
-              <a:rPr lang="en-US" sz="2800" b="1" dirty="0">
-                <a:solidFill>
-                  <a:schemeClr val="tx1"/>
-                </a:solidFill>
-                <a:latin typeface="Calibri" panose="020F0502020204030204" pitchFamily="34" charset="0"/>
-                <a:cs typeface="Calibri" panose="020F0502020204030204" pitchFamily="34" charset="0"/>
-                <a:sym typeface="Calibri"/>
-              </a:rPr>
-              <a:t>Bayesian network  </a:t>
-            </a:r>
-            <a:br>
-              <a:rPr lang="en-US" sz="2800" b="1" dirty="0">
-                <a:solidFill>
-                  <a:schemeClr val="tx1"/>
-                </a:solidFill>
-                <a:latin typeface="Calibri" panose="020F0502020204030204" pitchFamily="34" charset="0"/>
-                <a:cs typeface="Calibri" panose="020F0502020204030204" pitchFamily="34" charset="0"/>
-                <a:sym typeface="Calibri"/>
-              </a:rPr>
-            </a:br>
-            <a:r>
-              <a:rPr lang="en-US" sz="1800" dirty="0">
-                <a:solidFill>
-                  <a:schemeClr val="dk1"/>
-                </a:solidFill>
-                <a:latin typeface="Calibri"/>
-                <a:cs typeface="Calibri"/>
-                <a:sym typeface="Calibri"/>
-              </a:rPr>
-              <a:t>( a.k.a. Bayes network, belief network, Bayes(</a:t>
-            </a:r>
-            <a:r>
-              <a:rPr lang="en-US" sz="1800" dirty="0" err="1">
-                <a:solidFill>
-                  <a:schemeClr val="dk1"/>
-                </a:solidFill>
-                <a:latin typeface="Calibri"/>
-                <a:cs typeface="Calibri"/>
-                <a:sym typeface="Calibri"/>
-              </a:rPr>
-              <a:t>ian</a:t>
-            </a:r>
-            <a:r>
-              <a:rPr lang="en-US" sz="1800" dirty="0">
-                <a:solidFill>
-                  <a:schemeClr val="dk1"/>
-                </a:solidFill>
-                <a:latin typeface="Calibri"/>
-                <a:cs typeface="Calibri"/>
-                <a:sym typeface="Calibri"/>
-              </a:rPr>
-              <a:t>) model </a:t>
-            </a:r>
-          </a:p>
-          <a:p>
-            <a:pPr marL="0" marR="0" lvl="0" indent="0" algn="l" rtl="0">
-              <a:spcBef>
-                <a:spcPts val="0"/>
-              </a:spcBef>
-              <a:spcAft>
-                <a:spcPts val="0"/>
-              </a:spcAft>
-              <a:buNone/>
-            </a:pPr>
-            <a:r>
-              <a:rPr lang="en-US" sz="1800" dirty="0">
-                <a:solidFill>
-                  <a:schemeClr val="dk1"/>
-                </a:solidFill>
-                <a:latin typeface="Calibri"/>
-                <a:cs typeface="Calibri"/>
-                <a:sym typeface="Calibri"/>
-              </a:rPr>
-              <a:t>  or probabilistic directed acyclic graphical model )</a:t>
-            </a:r>
-            <a:r>
-              <a:rPr lang="en-US" sz="1800" dirty="0">
-                <a:solidFill>
-                  <a:schemeClr val="dk1"/>
-                </a:solidFill>
-                <a:latin typeface="Calibri"/>
-                <a:ea typeface="Calibri"/>
-                <a:cs typeface="Calibri"/>
-                <a:sym typeface="Calibri"/>
-              </a:rPr>
-              <a:t> </a:t>
-            </a:r>
-          </a:p>
-        </p:txBody>
-      </p:sp>
-      <p:pic>
-        <p:nvPicPr>
-          <p:cNvPr id="19" name="Google Shape;114;p14">
-            <a:extLst>
-              <a:ext uri="{FF2B5EF4-FFF2-40B4-BE49-F238E27FC236}">
-                <a16:creationId xmlns:a16="http://schemas.microsoft.com/office/drawing/2014/main" id="{6CEB8B6B-5D31-D04D-8340-CFFC67C74C71}"/>
-              </a:ext>
-            </a:extLst>
-          </p:cNvPr>
-          <p:cNvPicPr preferRelativeResize="0"/>
-          <p:nvPr/>
-        </p:nvPicPr>
-        <p:blipFill rotWithShape="1">
-          <a:blip r:embed="rId3" cstate="email">
-            <a:alphaModFix/>
-            <a:extLst>
-              <a:ext uri="{28A0092B-C50C-407E-A947-70E740481C1C}">
-                <a14:useLocalDpi xmlns:a14="http://schemas.microsoft.com/office/drawing/2010/main"/>
-              </a:ext>
-            </a:extLst>
-          </a:blip>
-          <a:srcRect/>
-          <a:stretch/>
-        </p:blipFill>
-        <p:spPr>
-          <a:xfrm>
-            <a:off x="7021286" y="418578"/>
-            <a:ext cx="1715986" cy="1996320"/>
-          </a:xfrm>
-          <a:prstGeom prst="rect">
-            <a:avLst/>
-          </a:prstGeom>
-          <a:noFill/>
-          <a:ln>
-            <a:noFill/>
-          </a:ln>
-        </p:spPr>
-      </p:pic>
-      <p:pic>
-        <p:nvPicPr>
-          <p:cNvPr id="1026" name="Picture 2" descr="A name for layered directed graph as in a fully-connected neural network -  Mathematics Stack Exchange">
-            <a:extLst>
-              <a:ext uri="{FF2B5EF4-FFF2-40B4-BE49-F238E27FC236}">
-                <a16:creationId xmlns:a16="http://schemas.microsoft.com/office/drawing/2014/main" id="{9F27D678-C094-7546-8A93-B3B6A7DC683E}"/>
-              </a:ext>
-            </a:extLst>
-          </p:cNvPr>
-          <p:cNvPicPr>
-            <a:picLocks noChangeAspect="1" noChangeArrowheads="1"/>
-          </p:cNvPicPr>
-          <p:nvPr/>
-        </p:nvPicPr>
-        <p:blipFill>
-          <a:blip r:embed="rId4" cstate="email">
-            <a:extLst>
-              <a:ext uri="{28A0092B-C50C-407E-A947-70E740481C1C}">
-                <a14:useLocalDpi xmlns:a14="http://schemas.microsoft.com/office/drawing/2010/main"/>
-              </a:ext>
-            </a:extLst>
-          </a:blip>
-          <a:srcRect/>
-          <a:stretch>
-            <a:fillRect/>
-          </a:stretch>
-        </p:blipFill>
-        <p:spPr bwMode="auto">
-          <a:xfrm>
-            <a:off x="7021286" y="3248453"/>
-            <a:ext cx="4388069" cy="2234581"/>
-          </a:xfrm>
-          <a:prstGeom prst="rect">
-            <a:avLst/>
-          </a:prstGeom>
-          <a:noFill/>
-          <a:extLst>
-            <a:ext uri="{909E8E84-426E-40DD-AFC4-6F175D3DCCD1}">
-              <a14:hiddenFill xmlns:a14="http://schemas.microsoft.com/office/drawing/2010/main">
-                <a:solidFill>
-                  <a:srgbClr val="FFFFFF"/>
-                </a:solidFill>
-              </a14:hiddenFill>
-            </a:ext>
-          </a:extLst>
-        </p:spPr>
-      </p:pic>
-      <p:sp>
-        <p:nvSpPr>
-          <p:cNvPr id="5" name="Google Shape;107;p14">
-            <a:extLst>
-              <a:ext uri="{FF2B5EF4-FFF2-40B4-BE49-F238E27FC236}">
-                <a16:creationId xmlns:a16="http://schemas.microsoft.com/office/drawing/2014/main" id="{341F2A09-BD6A-6E40-B245-BD73EC20CC51}"/>
-              </a:ext>
-            </a:extLst>
-          </p:cNvPr>
-          <p:cNvSpPr txBox="1"/>
-          <p:nvPr/>
-        </p:nvSpPr>
-        <p:spPr>
-          <a:xfrm>
-            <a:off x="91342" y="1416738"/>
-            <a:ext cx="6613415" cy="998160"/>
-          </a:xfrm>
-          <a:prstGeom prst="rect">
-            <a:avLst/>
-          </a:prstGeom>
-          <a:noFill/>
-          <a:ln>
-            <a:noFill/>
-          </a:ln>
-        </p:spPr>
-        <p:txBody>
-          <a:bodyPr spcFirstLastPara="1" wrap="square" lIns="91425" tIns="45700" rIns="91425" bIns="45700" anchor="t" anchorCtr="0">
-            <a:noAutofit/>
-          </a:bodyPr>
-          <a:lstStyle/>
-          <a:p>
-            <a:pPr marL="0" marR="0" lvl="0" indent="0" algn="l" rtl="0">
-              <a:spcBef>
-                <a:spcPts val="0"/>
-              </a:spcBef>
-              <a:spcAft>
-                <a:spcPts val="0"/>
-              </a:spcAft>
-              <a:buNone/>
-            </a:pPr>
-            <a:r>
-              <a:rPr lang="en-US" sz="1800" b="1" dirty="0">
-                <a:solidFill>
-                  <a:schemeClr val="accent1"/>
-                </a:solidFill>
-                <a:latin typeface="Calibri" panose="020F0502020204030204" pitchFamily="34" charset="0"/>
-                <a:cs typeface="Calibri" panose="020F0502020204030204" pitchFamily="34" charset="0"/>
-                <a:sym typeface="Calibri"/>
-              </a:rPr>
-              <a:t>Bayesian network </a:t>
-            </a:r>
-            <a:r>
-              <a:rPr lang="en-US" sz="1800" dirty="0">
-                <a:solidFill>
-                  <a:schemeClr val="dk1"/>
-                </a:solidFill>
-                <a:latin typeface="Calibri"/>
-                <a:ea typeface="Calibri"/>
-                <a:cs typeface="Calibri"/>
-                <a:sym typeface="Calibri"/>
-              </a:rPr>
-              <a:t>is a probabilistic graphical model (a type of statistical model) that represents a set of random variables and their conditional dependencies via a directed acyclic graph (DAG). </a:t>
-            </a:r>
-          </a:p>
-        </p:txBody>
-      </p:sp>
-      <p:sp>
-        <p:nvSpPr>
-          <p:cNvPr id="7" name="Google Shape;107;p14">
-            <a:extLst>
-              <a:ext uri="{FF2B5EF4-FFF2-40B4-BE49-F238E27FC236}">
-                <a16:creationId xmlns:a16="http://schemas.microsoft.com/office/drawing/2014/main" id="{4CCE08F0-3501-EE45-BB4D-DD3F87E80562}"/>
-              </a:ext>
-            </a:extLst>
-          </p:cNvPr>
-          <p:cNvSpPr txBox="1"/>
-          <p:nvPr/>
-        </p:nvSpPr>
-        <p:spPr>
-          <a:xfrm>
-            <a:off x="91342" y="2423668"/>
-            <a:ext cx="6428357" cy="1480847"/>
-          </a:xfrm>
-          <a:prstGeom prst="rect">
-            <a:avLst/>
-          </a:prstGeom>
-          <a:noFill/>
-          <a:ln>
-            <a:noFill/>
-          </a:ln>
-        </p:spPr>
-        <p:txBody>
-          <a:bodyPr spcFirstLastPara="1" wrap="square" lIns="91425" tIns="45700" rIns="91425" bIns="45700" anchor="t" anchorCtr="0">
-            <a:noAutofit/>
-          </a:bodyPr>
-          <a:lstStyle/>
-          <a:p>
-            <a:pPr marL="0" marR="0" lvl="0" indent="0" algn="l" rtl="0">
-              <a:spcBef>
-                <a:spcPts val="0"/>
-              </a:spcBef>
-              <a:spcAft>
-                <a:spcPts val="0"/>
-              </a:spcAft>
-              <a:buNone/>
-            </a:pPr>
-            <a:r>
-              <a:rPr lang="en-US" sz="1800" dirty="0">
-                <a:solidFill>
-                  <a:schemeClr val="dk1"/>
-                </a:solidFill>
-                <a:latin typeface="Calibri"/>
-                <a:ea typeface="Calibri"/>
-                <a:cs typeface="Calibri"/>
-                <a:sym typeface="Calibri"/>
-              </a:rPr>
-              <a:t>Example: </a:t>
-            </a:r>
-          </a:p>
-          <a:p>
-            <a:pPr lvl="0"/>
-            <a:r>
-              <a:rPr lang="en-US" sz="1800" b="1" dirty="0">
-                <a:solidFill>
-                  <a:srgbClr val="0070C0"/>
-                </a:solidFill>
-                <a:latin typeface="Calibri"/>
-                <a:ea typeface="Calibri"/>
-                <a:cs typeface="Calibri"/>
-                <a:sym typeface="Calibri"/>
-              </a:rPr>
-              <a:t>Deep Belief Networks </a:t>
-            </a:r>
-            <a:r>
-              <a:rPr lang="en-US" sz="1800" dirty="0">
-                <a:solidFill>
-                  <a:schemeClr val="dk1"/>
-                </a:solidFill>
-                <a:latin typeface="Calibri"/>
-                <a:ea typeface="Calibri"/>
-                <a:cs typeface="Calibri"/>
-                <a:sym typeface="Calibri"/>
-              </a:rPr>
-              <a:t>- made of layers of RBMs, each next layer (“B”) is trained on top of the previous layer (“A”).</a:t>
-            </a:r>
-          </a:p>
-          <a:p>
-            <a:pPr marL="0" marR="0" lvl="0" indent="0" algn="l" rtl="0">
-              <a:spcBef>
-                <a:spcPts val="0"/>
-              </a:spcBef>
-              <a:spcAft>
-                <a:spcPts val="0"/>
-              </a:spcAft>
-              <a:buNone/>
-            </a:pPr>
-            <a:r>
-              <a:rPr lang="en-US" sz="1800" dirty="0">
-                <a:solidFill>
-                  <a:schemeClr val="dk1"/>
-                </a:solidFill>
-                <a:latin typeface="Calibri"/>
-                <a:ea typeface="Calibri"/>
-                <a:cs typeface="Calibri"/>
-                <a:sym typeface="Calibri"/>
-              </a:rPr>
-              <a:t>Here </a:t>
-            </a:r>
-            <a:r>
-              <a:rPr lang="en-US" sz="1800" b="1" dirty="0">
-                <a:solidFill>
-                  <a:srgbClr val="0070C0"/>
-                </a:solidFill>
-                <a:latin typeface="Calibri"/>
-                <a:ea typeface="Calibri"/>
-                <a:cs typeface="Calibri"/>
-                <a:sym typeface="Calibri"/>
-              </a:rPr>
-              <a:t>RBM</a:t>
-            </a:r>
-            <a:r>
-              <a:rPr lang="en-US" sz="1800" dirty="0">
-                <a:solidFill>
-                  <a:schemeClr val="dk1"/>
-                </a:solidFill>
-                <a:latin typeface="Calibri"/>
-                <a:ea typeface="Calibri"/>
-                <a:cs typeface="Calibri"/>
-                <a:sym typeface="Calibri"/>
-              </a:rPr>
-              <a:t> (Restricted Boltzmann Machine) is a two-layered artificial neural network.</a:t>
-            </a:r>
-            <a:endParaRPr lang="en-US" sz="1800" dirty="0">
-              <a:solidFill>
-                <a:schemeClr val="dk1"/>
-              </a:solidFill>
-              <a:latin typeface="Calibri"/>
-              <a:cs typeface="Calibri"/>
-              <a:sym typeface="Calibri"/>
-            </a:endParaRPr>
-          </a:p>
-        </p:txBody>
-      </p:sp>
-      <p:pic>
-        <p:nvPicPr>
-          <p:cNvPr id="3" name="Picture 2">
-            <a:extLst>
-              <a:ext uri="{FF2B5EF4-FFF2-40B4-BE49-F238E27FC236}">
-                <a16:creationId xmlns:a16="http://schemas.microsoft.com/office/drawing/2014/main" id="{221CF74C-2765-1A49-9DE4-312EA056AB81}"/>
-              </a:ext>
-            </a:extLst>
-          </p:cNvPr>
-          <p:cNvPicPr>
-            <a:picLocks noChangeAspect="1"/>
-          </p:cNvPicPr>
-          <p:nvPr/>
-        </p:nvPicPr>
-        <p:blipFill rotWithShape="1">
-          <a:blip r:embed="rId5" cstate="email">
-            <a:extLst>
-              <a:ext uri="{28A0092B-C50C-407E-A947-70E740481C1C}">
-                <a14:useLocalDpi xmlns:a14="http://schemas.microsoft.com/office/drawing/2010/main"/>
-              </a:ext>
-            </a:extLst>
-          </a:blip>
-          <a:srcRect/>
-          <a:stretch/>
-        </p:blipFill>
-        <p:spPr>
-          <a:xfrm>
-            <a:off x="2476501" y="4071018"/>
-            <a:ext cx="1123506" cy="1412016"/>
-          </a:xfrm>
-          <a:prstGeom prst="rect">
-            <a:avLst/>
-          </a:prstGeom>
-        </p:spPr>
-      </p:pic>
-      <p:pic>
-        <p:nvPicPr>
-          <p:cNvPr id="4" name="Picture 3">
-            <a:extLst>
-              <a:ext uri="{FF2B5EF4-FFF2-40B4-BE49-F238E27FC236}">
-                <a16:creationId xmlns:a16="http://schemas.microsoft.com/office/drawing/2014/main" id="{F3F0E989-24F4-954F-8654-A11FAA84E879}"/>
-              </a:ext>
-            </a:extLst>
-          </p:cNvPr>
-          <p:cNvPicPr>
-            <a:picLocks noChangeAspect="1"/>
-          </p:cNvPicPr>
-          <p:nvPr/>
-        </p:nvPicPr>
-        <p:blipFill rotWithShape="1">
-          <a:blip r:embed="rId6" cstate="email">
-            <a:extLst>
-              <a:ext uri="{28A0092B-C50C-407E-A947-70E740481C1C}">
-                <a14:useLocalDpi xmlns:a14="http://schemas.microsoft.com/office/drawing/2010/main"/>
-              </a:ext>
-            </a:extLst>
-          </a:blip>
-          <a:srcRect/>
-          <a:stretch/>
-        </p:blipFill>
-        <p:spPr>
-          <a:xfrm>
-            <a:off x="570314" y="4041266"/>
-            <a:ext cx="1253671" cy="1417842"/>
-          </a:xfrm>
-          <a:prstGeom prst="rect">
-            <a:avLst/>
-          </a:prstGeom>
-        </p:spPr>
-      </p:pic>
-      <p:sp>
-        <p:nvSpPr>
-          <p:cNvPr id="10" name="Google Shape;107;p14">
-            <a:extLst>
-              <a:ext uri="{FF2B5EF4-FFF2-40B4-BE49-F238E27FC236}">
-                <a16:creationId xmlns:a16="http://schemas.microsoft.com/office/drawing/2014/main" id="{BBAA03BF-9CD1-2742-8F30-65CF844C9AE9}"/>
-              </a:ext>
-            </a:extLst>
-          </p:cNvPr>
-          <p:cNvSpPr txBox="1"/>
-          <p:nvPr/>
-        </p:nvSpPr>
-        <p:spPr>
-          <a:xfrm>
-            <a:off x="183869" y="5485948"/>
-            <a:ext cx="6428357" cy="1219839"/>
-          </a:xfrm>
-          <a:prstGeom prst="rect">
-            <a:avLst/>
-          </a:prstGeom>
-          <a:noFill/>
-          <a:ln>
-            <a:noFill/>
-          </a:ln>
-        </p:spPr>
-        <p:txBody>
-          <a:bodyPr spcFirstLastPara="1" wrap="square" lIns="91425" tIns="45700" rIns="91425" bIns="45700" anchor="t" anchorCtr="0">
-            <a:noAutofit/>
-          </a:bodyPr>
-          <a:lstStyle/>
-          <a:p>
-            <a:pPr lvl="0"/>
-            <a:r>
-              <a:rPr lang="en-US" sz="1800" dirty="0">
-                <a:solidFill>
-                  <a:schemeClr val="dk1"/>
-                </a:solidFill>
-                <a:latin typeface="Calibri"/>
-                <a:cs typeface="Calibri"/>
-              </a:rPr>
-              <a:t>Geoffrey Hinton &amp; Ruslan </a:t>
-            </a:r>
-            <a:r>
-              <a:rPr lang="en-US" sz="1800" dirty="0" err="1">
-                <a:solidFill>
-                  <a:schemeClr val="dk1"/>
-                </a:solidFill>
-                <a:latin typeface="Calibri"/>
-                <a:cs typeface="Calibri"/>
-              </a:rPr>
-              <a:t>Salakhutdinov</a:t>
-            </a:r>
-            <a:r>
-              <a:rPr lang="en-US" sz="1800" dirty="0">
-                <a:solidFill>
-                  <a:schemeClr val="dk1"/>
-                </a:solidFill>
-                <a:latin typeface="Calibri"/>
-                <a:cs typeface="Calibri"/>
-              </a:rPr>
-              <a:t> (2006). </a:t>
-            </a:r>
-          </a:p>
-          <a:p>
-            <a:pPr lvl="0"/>
-            <a:r>
-              <a:rPr lang="en-US" sz="1800" dirty="0">
-                <a:solidFill>
-                  <a:schemeClr val="dk1"/>
-                </a:solidFill>
-                <a:latin typeface="Calibri"/>
-                <a:cs typeface="Calibri"/>
-              </a:rPr>
-              <a:t>Reducing the dimensionality of data with neural networks.</a:t>
-            </a:r>
-          </a:p>
-          <a:p>
-            <a:pPr lvl="0"/>
-            <a:r>
-              <a:rPr lang="en-US" sz="1800" dirty="0">
-                <a:solidFill>
-                  <a:schemeClr val="dk1"/>
-                </a:solidFill>
-                <a:latin typeface="Calibri"/>
-                <a:cs typeface="Calibri"/>
-              </a:rPr>
-              <a:t>Science, 313, 504 – 507.</a:t>
-            </a:r>
-          </a:p>
-          <a:p>
-            <a:pPr lvl="0"/>
-            <a:r>
-              <a:rPr lang="en-US" sz="1800" dirty="0">
-                <a:solidFill>
-                  <a:schemeClr val="dk1"/>
-                </a:solidFill>
-                <a:latin typeface="Calibri"/>
-                <a:cs typeface="Calibri"/>
-                <a:sym typeface="Calibri"/>
-              </a:rPr>
-              <a:t> - </a:t>
-            </a:r>
-            <a:r>
-              <a:rPr lang="en-US" sz="1800" dirty="0">
-                <a:solidFill>
-                  <a:schemeClr val="dk1"/>
-                </a:solidFill>
-                <a:latin typeface="Calibri"/>
-                <a:cs typeface="Calibri"/>
-                <a:sym typeface="Calibri"/>
-                <a:hlinkClick r:id="rId7"/>
-              </a:rPr>
-              <a:t>https://www.cs.toronto.edu/~hinton/science.pdf</a:t>
-            </a:r>
-            <a:r>
-              <a:rPr lang="en-US" sz="1800" dirty="0">
-                <a:solidFill>
-                  <a:schemeClr val="dk1"/>
-                </a:solidFill>
-                <a:latin typeface="Calibri"/>
-                <a:cs typeface="Calibri"/>
-                <a:sym typeface="Calibri"/>
-              </a:rPr>
-              <a:t> </a:t>
-            </a:r>
-          </a:p>
-        </p:txBody>
-      </p:sp>
-      <p:sp>
-        <p:nvSpPr>
-          <p:cNvPr id="6" name="TextBox 5">
-            <a:extLst>
-              <a:ext uri="{FF2B5EF4-FFF2-40B4-BE49-F238E27FC236}">
-                <a16:creationId xmlns:a16="http://schemas.microsoft.com/office/drawing/2014/main" id="{AC6499AC-2623-244C-B653-E3602A825F7E}"/>
-              </a:ext>
-            </a:extLst>
-          </p:cNvPr>
-          <p:cNvSpPr txBox="1"/>
-          <p:nvPr/>
-        </p:nvSpPr>
-        <p:spPr>
-          <a:xfrm>
-            <a:off x="8118388" y="5609967"/>
-            <a:ext cx="2001795" cy="307777"/>
-          </a:xfrm>
-          <a:prstGeom prst="rect">
-            <a:avLst/>
-          </a:prstGeom>
-          <a:noFill/>
-        </p:spPr>
-        <p:txBody>
-          <a:bodyPr wrap="square" rtlCol="0">
-            <a:spAutoFit/>
-          </a:bodyPr>
-          <a:lstStyle/>
-          <a:p>
-            <a:r>
-              <a:rPr lang="en-US" dirty="0"/>
-              <a:t>A Deep Belief Network</a:t>
-            </a:r>
-          </a:p>
-        </p:txBody>
-      </p:sp>
-    </p:spTree>
-    <p:extLst>
-      <p:ext uri="{BB962C8B-B14F-4D97-AF65-F5344CB8AC3E}">
-        <p14:creationId xmlns:p14="http://schemas.microsoft.com/office/powerpoint/2010/main" val="4205312314"/>
       </p:ext>
     </p:extLst>
   </p:cSld>

--- a/statistics_08_Bayes_Bayesian.pptx
+++ b/statistics_08_Bayes_Bayesian.pptx
@@ -24,10 +24,10 @@
     <p:sldId id="299" r:id="rId15"/>
     <p:sldId id="301" r:id="rId16"/>
     <p:sldId id="303" r:id="rId17"/>
-    <p:sldId id="304" r:id="rId18"/>
-    <p:sldId id="300" r:id="rId19"/>
-    <p:sldId id="292" r:id="rId20"/>
-    <p:sldId id="262" r:id="rId21"/>
+    <p:sldId id="300" r:id="rId18"/>
+    <p:sldId id="292" r:id="rId19"/>
+    <p:sldId id="262" r:id="rId20"/>
+    <p:sldId id="306" r:id="rId21"/>
     <p:sldId id="297" r:id="rId22"/>
   </p:sldIdLst>
   <p:sldSz cx="12192000" cy="6858000"/>
@@ -22763,161 +22763,6 @@
       </p:grpSpPr>
       <p:sp>
         <p:nvSpPr>
-          <p:cNvPr id="2" name="TextBox 1">
-            <a:extLst>
-              <a:ext uri="{FF2B5EF4-FFF2-40B4-BE49-F238E27FC236}">
-                <a16:creationId xmlns:a16="http://schemas.microsoft.com/office/drawing/2014/main" id="{CD6798AC-3E28-254E-B533-583935E0DBBC}"/>
-              </a:ext>
-            </a:extLst>
-          </p:cNvPr>
-          <p:cNvSpPr txBox="1"/>
-          <p:nvPr/>
-        </p:nvSpPr>
-        <p:spPr>
-          <a:xfrm>
-            <a:off x="-1" y="37572"/>
-            <a:ext cx="9274629" cy="523220"/>
-          </a:xfrm>
-          <a:prstGeom prst="rect">
-            <a:avLst/>
-          </a:prstGeom>
-          <a:noFill/>
-        </p:spPr>
-        <p:txBody>
-          <a:bodyPr wrap="square" rtlCol="0">
-            <a:spAutoFit/>
-          </a:bodyPr>
-          <a:lstStyle/>
-          <a:p>
-            <a:r>
-              <a:rPr lang="en-US" sz="2800" b="1" dirty="0"/>
-              <a:t>Exercise 5 – Coffee stains and Damaged Flash Drives</a:t>
-            </a:r>
-          </a:p>
-        </p:txBody>
-      </p:sp>
-      <p:sp>
-        <p:nvSpPr>
-          <p:cNvPr id="13" name="TextBox 12">
-            <a:extLst>
-              <a:ext uri="{FF2B5EF4-FFF2-40B4-BE49-F238E27FC236}">
-                <a16:creationId xmlns:a16="http://schemas.microsoft.com/office/drawing/2014/main" id="{CCB040D0-EE6B-6747-B044-7BB207CED700}"/>
-              </a:ext>
-            </a:extLst>
-          </p:cNvPr>
-          <p:cNvSpPr txBox="1"/>
-          <p:nvPr/>
-        </p:nvSpPr>
-        <p:spPr>
-          <a:xfrm>
-            <a:off x="-1" y="727511"/>
-            <a:ext cx="5438899" cy="830997"/>
-          </a:xfrm>
-          <a:prstGeom prst="rect">
-            <a:avLst/>
-          </a:prstGeom>
-          <a:noFill/>
-        </p:spPr>
-        <p:txBody>
-          <a:bodyPr wrap="square" rtlCol="0">
-            <a:spAutoFit/>
-          </a:bodyPr>
-          <a:lstStyle/>
-          <a:p>
-            <a:r>
-              <a:rPr lang="en-US" sz="1200" dirty="0"/>
-              <a:t>We have 100 damaged flash drives which is a sample of much bigger set.</a:t>
-            </a:r>
-            <a:br>
-              <a:rPr lang="en-US" sz="1200" dirty="0"/>
-            </a:br>
-            <a:r>
-              <a:rPr lang="en-US" sz="1200" dirty="0"/>
-              <a:t>80% of these damaged drives have coffee stains on them.</a:t>
-            </a:r>
-          </a:p>
-          <a:p>
-            <a:br>
-              <a:rPr lang="en-US" sz="1200" dirty="0"/>
-            </a:br>
-            <a:r>
-              <a:rPr lang="en-US" sz="1200" dirty="0"/>
-              <a:t>Estimate probability (and credible interval) that coffee is causing the damage?</a:t>
-            </a:r>
-          </a:p>
-        </p:txBody>
-      </p:sp>
-      <p:sp>
-        <p:nvSpPr>
-          <p:cNvPr id="4" name="TextBox 3">
-            <a:extLst>
-              <a:ext uri="{FF2B5EF4-FFF2-40B4-BE49-F238E27FC236}">
-                <a16:creationId xmlns:a16="http://schemas.microsoft.com/office/drawing/2014/main" id="{AE2BFA1A-4174-624F-849E-5B09662570D2}"/>
-              </a:ext>
-            </a:extLst>
-          </p:cNvPr>
-          <p:cNvSpPr txBox="1"/>
-          <p:nvPr/>
-        </p:nvSpPr>
-        <p:spPr>
-          <a:xfrm>
-            <a:off x="10813960" y="37572"/>
-            <a:ext cx="1378040" cy="523220"/>
-          </a:xfrm>
-          <a:prstGeom prst="rect">
-            <a:avLst/>
-          </a:prstGeom>
-          <a:noFill/>
-        </p:spPr>
-        <p:txBody>
-          <a:bodyPr wrap="square" rtlCol="0">
-            <a:spAutoFit/>
-          </a:bodyPr>
-          <a:lstStyle/>
-          <a:p>
-            <a:r>
-              <a:rPr lang="en-US" b="1" dirty="0">
-                <a:solidFill>
-                  <a:srgbClr val="FF0000"/>
-                </a:solidFill>
-              </a:rPr>
-              <a:t>Page Under Construction</a:t>
-            </a:r>
-          </a:p>
-        </p:txBody>
-      </p:sp>
-    </p:spTree>
-    <p:extLst>
-      <p:ext uri="{BB962C8B-B14F-4D97-AF65-F5344CB8AC3E}">
-        <p14:creationId xmlns:p14="http://schemas.microsoft.com/office/powerpoint/2010/main" val="4128884174"/>
-      </p:ext>
-    </p:extLst>
-  </p:cSld>
-  <p:clrMapOvr>
-    <a:masterClrMapping/>
-  </p:clrMapOvr>
-</p:sld>
-</file>
-
-<file path=ppt/slides/slide18.xml><?xml version="1.0" encoding="utf-8"?>
-<p:sld xmlns:a="http://schemas.openxmlformats.org/drawingml/2006/main" xmlns:r="http://schemas.openxmlformats.org/officeDocument/2006/relationships" xmlns:p="http://schemas.openxmlformats.org/presentationml/2006/main">
-  <p:cSld>
-    <p:spTree>
-      <p:nvGrpSpPr>
-        <p:cNvPr id="1" name=""/>
-        <p:cNvGrpSpPr/>
-        <p:nvPr/>
-      </p:nvGrpSpPr>
-      <p:grpSpPr>
-        <a:xfrm>
-          <a:off x="0" y="0"/>
-          <a:ext cx="0" cy="0"/>
-          <a:chOff x="0" y="0"/>
-          <a:chExt cx="0" cy="0"/>
-        </a:xfrm>
-      </p:grpSpPr>
-      <p:sp>
-        <p:nvSpPr>
           <p:cNvPr id="5" name="TextBox 4">
             <a:extLst>
               <a:ext uri="{FF2B5EF4-FFF2-40B4-BE49-F238E27FC236}">
@@ -23606,7 +23451,7 @@
 </p:sld>
 </file>
 
-<file path=ppt/slides/slide19.xml><?xml version="1.0" encoding="utf-8"?>
+<file path=ppt/slides/slide18.xml><?xml version="1.0" encoding="utf-8"?>
 <p:sld xmlns:a="http://schemas.openxmlformats.org/drawingml/2006/main" xmlns:r="http://schemas.openxmlformats.org/officeDocument/2006/relationships" xmlns:p="http://schemas.openxmlformats.org/presentationml/2006/main">
   <p:cSld>
     <p:spTree>
@@ -25276,291 +25121,7 @@
 </p:sld>
 </file>
 
-<file path=ppt/slides/slide2.xml><?xml version="1.0" encoding="utf-8"?>
-<p:sld xmlns:a="http://schemas.openxmlformats.org/drawingml/2006/main" xmlns:r="http://schemas.openxmlformats.org/officeDocument/2006/relationships" xmlns:p="http://schemas.openxmlformats.org/presentationml/2006/main">
-  <p:cSld>
-    <p:spTree>
-      <p:nvGrpSpPr>
-        <p:cNvPr id="1" name=""/>
-        <p:cNvGrpSpPr/>
-        <p:nvPr/>
-      </p:nvGrpSpPr>
-      <p:grpSpPr>
-        <a:xfrm>
-          <a:off x="0" y="0"/>
-          <a:ext cx="0" cy="0"/>
-          <a:chOff x="0" y="0"/>
-          <a:chExt cx="0" cy="0"/>
-        </a:xfrm>
-      </p:grpSpPr>
-      <p:sp>
-        <p:nvSpPr>
-          <p:cNvPr id="4" name="TextBox 3">
-            <a:extLst>
-              <a:ext uri="{FF2B5EF4-FFF2-40B4-BE49-F238E27FC236}">
-                <a16:creationId xmlns:a16="http://schemas.microsoft.com/office/drawing/2014/main" id="{93FB964B-A29C-1649-A2C4-81BC78C24A50}"/>
-              </a:ext>
-            </a:extLst>
-          </p:cNvPr>
-          <p:cNvSpPr txBox="1"/>
-          <p:nvPr/>
-        </p:nvSpPr>
-        <p:spPr>
-          <a:xfrm>
-            <a:off x="0" y="58846"/>
-            <a:ext cx="5579165" cy="6740307"/>
-          </a:xfrm>
-          <a:prstGeom prst="rect">
-            <a:avLst/>
-          </a:prstGeom>
-          <a:noFill/>
-        </p:spPr>
-        <p:txBody>
-          <a:bodyPr wrap="square" rtlCol="0">
-            <a:spAutoFit/>
-          </a:bodyPr>
-          <a:lstStyle/>
-          <a:p>
-            <a:r>
-              <a:rPr lang="en-US" sz="2000" b="1" dirty="0"/>
-              <a:t>Bayesian vs Frequentist</a:t>
-            </a:r>
-          </a:p>
-          <a:p>
-            <a:r>
-              <a:rPr lang="en-US" sz="2000" b="1" dirty="0"/>
-              <a:t>Survivorship Bias in World War 2</a:t>
-            </a:r>
-          </a:p>
-          <a:p>
-            <a:endParaRPr lang="en-US" dirty="0"/>
-          </a:p>
-          <a:p>
-            <a:r>
-              <a:rPr lang="en-US" dirty="0"/>
-              <a:t>During World War II the US military's concluded that the most-hit areas of the plane needed additional armor.</a:t>
-            </a:r>
-          </a:p>
-          <a:p>
-            <a:r>
-              <a:rPr lang="en-US" dirty="0"/>
-              <a:t>But statistician Abraham Wald (Statistical Research Group (SRG) at Columbia University) has recommended adding armor to the areas that showed the least damage. His reasoning was that the sample didn't include the planes which were shot down.</a:t>
-            </a:r>
-          </a:p>
-          <a:p>
-            <a:endParaRPr lang="en-US" dirty="0"/>
-          </a:p>
-          <a:p>
-            <a:r>
-              <a:rPr lang="en-US" dirty="0"/>
-              <a:t>It is dangerous to use data "as is" to create a model,</a:t>
-            </a:r>
-            <a:br>
-              <a:rPr lang="en-US" dirty="0"/>
-            </a:br>
-            <a:r>
-              <a:rPr lang="en-US" dirty="0"/>
-              <a:t>because the data may be biased to start with,</a:t>
-            </a:r>
-            <a:br>
-              <a:rPr lang="en-US" dirty="0"/>
-            </a:br>
-            <a:r>
-              <a:rPr lang="en-US" dirty="0"/>
-              <a:t>and it can easily lead to creating a biased model</a:t>
-            </a:r>
-            <a:br>
-              <a:rPr lang="en-US" dirty="0"/>
-            </a:br>
-            <a:br>
-              <a:rPr lang="en-US" dirty="0"/>
-            </a:br>
-            <a:r>
-              <a:rPr lang="en-US" dirty="0"/>
-              <a:t>Problem occur when we have:</a:t>
-            </a:r>
-            <a:br>
-              <a:rPr lang="en-US" dirty="0"/>
-            </a:br>
-            <a:r>
-              <a:rPr lang="en-US" dirty="0"/>
-              <a:t> - under-represented features (missing data)</a:t>
-            </a:r>
-            <a:br>
-              <a:rPr lang="en-US" dirty="0"/>
-            </a:br>
-            <a:r>
-              <a:rPr lang="en-US" dirty="0"/>
-              <a:t> - over-represented features,</a:t>
-            </a:r>
-            <a:br>
-              <a:rPr lang="en-US" dirty="0"/>
-            </a:br>
-            <a:r>
-              <a:rPr lang="en-US" dirty="0"/>
-              <a:t> - "target leakage" effect.</a:t>
-            </a:r>
-            <a:br>
-              <a:rPr lang="en-US" dirty="0"/>
-            </a:br>
-            <a:br>
-              <a:rPr lang="en-US" dirty="0"/>
-            </a:br>
-            <a:r>
-              <a:rPr lang="en-US" dirty="0"/>
-              <a:t>Survivorship bias:</a:t>
-            </a:r>
-            <a:br>
-              <a:rPr lang="en-US" dirty="0"/>
-            </a:br>
-            <a:r>
-              <a:rPr lang="en-US" dirty="0"/>
-              <a:t> - </a:t>
-            </a:r>
-            <a:r>
-              <a:rPr lang="en-US" dirty="0">
-                <a:hlinkClick r:id="rId2"/>
-              </a:rPr>
-              <a:t>https://www.youtube.com/watch?v=B3YQJ5DwTzM</a:t>
-            </a:r>
-            <a:r>
-              <a:rPr lang="en-US" dirty="0"/>
-              <a:t> </a:t>
-            </a:r>
-            <a:br>
-              <a:rPr lang="en-US" dirty="0"/>
-            </a:br>
-            <a:br>
-              <a:rPr lang="en-US" dirty="0"/>
-            </a:br>
-            <a:r>
-              <a:rPr lang="en-US" dirty="0"/>
-              <a:t>Gender Bias:</a:t>
-            </a:r>
-            <a:br>
-              <a:rPr lang="en-US" dirty="0"/>
-            </a:br>
-            <a:r>
-              <a:rPr lang="en-US" dirty="0"/>
-              <a:t> - </a:t>
-            </a:r>
-            <a:r>
-              <a:rPr lang="en-US" dirty="0">
-                <a:hlinkClick r:id="rId3"/>
-              </a:rPr>
-              <a:t>https://www.youtube.com/watch?v=p60-Jdq754A</a:t>
-            </a:r>
-            <a:r>
-              <a:rPr lang="en-US" dirty="0"/>
-              <a:t> </a:t>
-            </a:r>
-            <a:br>
-              <a:rPr lang="en-US" dirty="0"/>
-            </a:br>
-            <a:br>
-              <a:rPr lang="en-US" dirty="0"/>
-            </a:br>
-            <a:r>
-              <a:rPr lang="en-US" dirty="0"/>
-              <a:t>Bias in criminal justice:</a:t>
-            </a:r>
-            <a:br>
-              <a:rPr lang="en-US" dirty="0"/>
-            </a:br>
-            <a:r>
-              <a:rPr lang="en-US" dirty="0"/>
-              <a:t> - </a:t>
-            </a:r>
-            <a:r>
-              <a:rPr lang="en-US" dirty="0">
-                <a:hlinkClick r:id="rId4"/>
-              </a:rPr>
-              <a:t>https://www.youtube.com/watch?v=Gi4YeRqfb24</a:t>
-            </a:r>
-            <a:r>
-              <a:rPr lang="en-US" dirty="0"/>
-              <a:t> </a:t>
-            </a:r>
-            <a:br>
-              <a:rPr lang="en-US" dirty="0"/>
-            </a:br>
-            <a:br>
-              <a:rPr lang="en-US" dirty="0"/>
-            </a:br>
-            <a:r>
-              <a:rPr lang="en-US" dirty="0"/>
-              <a:t>Target Leakage:</a:t>
-            </a:r>
-            <a:br>
-              <a:rPr lang="en-US" dirty="0"/>
-            </a:br>
-            <a:r>
-              <a:rPr lang="en-US" dirty="0"/>
-              <a:t> - </a:t>
-            </a:r>
-            <a:r>
-              <a:rPr lang="en-US" dirty="0">
-                <a:hlinkClick r:id="rId5"/>
-              </a:rPr>
-              <a:t>https://www.youtube.com/watch?v=y8qaI5mpJeA</a:t>
-            </a:r>
-            <a:r>
-              <a:rPr lang="en-US" dirty="0"/>
-              <a:t> </a:t>
-            </a:r>
-          </a:p>
-        </p:txBody>
-      </p:sp>
-      <p:pic>
-        <p:nvPicPr>
-          <p:cNvPr id="6" name="Picture 5">
-            <a:extLst>
-              <a:ext uri="{FF2B5EF4-FFF2-40B4-BE49-F238E27FC236}">
-                <a16:creationId xmlns:a16="http://schemas.microsoft.com/office/drawing/2014/main" id="{EA27DDEE-0422-6E4F-AC95-3AFA579C3DB8}"/>
-              </a:ext>
-            </a:extLst>
-          </p:cNvPr>
-          <p:cNvPicPr>
-            <a:picLocks noChangeAspect="1"/>
-          </p:cNvPicPr>
-          <p:nvPr/>
-        </p:nvPicPr>
-        <p:blipFill>
-          <a:blip r:embed="rId6" cstate="email">
-            <a:extLst>
-              <a:ext uri="{28A0092B-C50C-407E-A947-70E740481C1C}">
-                <a14:useLocalDpi xmlns:a14="http://schemas.microsoft.com/office/drawing/2010/main"/>
-              </a:ext>
-            </a:extLst>
-          </a:blip>
-          <a:stretch>
-            <a:fillRect/>
-          </a:stretch>
-        </p:blipFill>
-        <p:spPr>
-          <a:xfrm>
-            <a:off x="6617056" y="225286"/>
-            <a:ext cx="5429170" cy="3419062"/>
-          </a:xfrm>
-          <a:prstGeom prst="rect">
-            <a:avLst/>
-          </a:prstGeom>
-        </p:spPr>
-      </p:pic>
-    </p:spTree>
-    <p:extLst>
-      <p:ext uri="{BB962C8B-B14F-4D97-AF65-F5344CB8AC3E}">
-        <p14:creationId xmlns:p14="http://schemas.microsoft.com/office/powerpoint/2010/main" val="3774625219"/>
-      </p:ext>
-    </p:extLst>
-  </p:cSld>
-  <p:clrMapOvr>
-    <a:masterClrMapping/>
-  </p:clrMapOvr>
-</p:sld>
-</file>
-
-<file path=ppt/slides/slide20.xml><?xml version="1.0" encoding="utf-8"?>
+<file path=ppt/slides/slide19.xml><?xml version="1.0" encoding="utf-8"?>
 <p:sld xmlns:a="http://schemas.openxmlformats.org/drawingml/2006/main" xmlns:r="http://schemas.openxmlformats.org/officeDocument/2006/relationships" xmlns:p="http://schemas.openxmlformats.org/presentationml/2006/main">
   <p:cSld>
     <p:spTree>
@@ -26068,6 +25629,1051 @@
     <p:extLst>
       <p:ext uri="{BB962C8B-B14F-4D97-AF65-F5344CB8AC3E}">
         <p14:creationId xmlns:p14="http://schemas.microsoft.com/office/powerpoint/2010/main" val="272889797"/>
+      </p:ext>
+    </p:extLst>
+  </p:cSld>
+  <p:clrMapOvr>
+    <a:masterClrMapping/>
+  </p:clrMapOvr>
+</p:sld>
+</file>
+
+<file path=ppt/slides/slide2.xml><?xml version="1.0" encoding="utf-8"?>
+<p:sld xmlns:a="http://schemas.openxmlformats.org/drawingml/2006/main" xmlns:r="http://schemas.openxmlformats.org/officeDocument/2006/relationships" xmlns:p="http://schemas.openxmlformats.org/presentationml/2006/main">
+  <p:cSld>
+    <p:spTree>
+      <p:nvGrpSpPr>
+        <p:cNvPr id="1" name=""/>
+        <p:cNvGrpSpPr/>
+        <p:nvPr/>
+      </p:nvGrpSpPr>
+      <p:grpSpPr>
+        <a:xfrm>
+          <a:off x="0" y="0"/>
+          <a:ext cx="0" cy="0"/>
+          <a:chOff x="0" y="0"/>
+          <a:chExt cx="0" cy="0"/>
+        </a:xfrm>
+      </p:grpSpPr>
+      <p:sp>
+        <p:nvSpPr>
+          <p:cNvPr id="4" name="TextBox 3">
+            <a:extLst>
+              <a:ext uri="{FF2B5EF4-FFF2-40B4-BE49-F238E27FC236}">
+                <a16:creationId xmlns:a16="http://schemas.microsoft.com/office/drawing/2014/main" id="{93FB964B-A29C-1649-A2C4-81BC78C24A50}"/>
+              </a:ext>
+            </a:extLst>
+          </p:cNvPr>
+          <p:cNvSpPr txBox="1"/>
+          <p:nvPr/>
+        </p:nvSpPr>
+        <p:spPr>
+          <a:xfrm>
+            <a:off x="0" y="58846"/>
+            <a:ext cx="5579165" cy="6401753"/>
+          </a:xfrm>
+          <a:prstGeom prst="rect">
+            <a:avLst/>
+          </a:prstGeom>
+          <a:noFill/>
+        </p:spPr>
+        <p:txBody>
+          <a:bodyPr wrap="square" rtlCol="0">
+            <a:spAutoFit/>
+          </a:bodyPr>
+          <a:lstStyle/>
+          <a:p>
+            <a:r>
+              <a:rPr lang="en-US" sz="2000" b="1" dirty="0"/>
+              <a:t>Bayesian vs Frequentist</a:t>
+            </a:r>
+          </a:p>
+          <a:p>
+            <a:r>
+              <a:rPr lang="en-US" sz="2000" b="1" dirty="0"/>
+              <a:t>Survivorship Bias in World War 2</a:t>
+            </a:r>
+          </a:p>
+          <a:p>
+            <a:endParaRPr lang="en-US" dirty="0"/>
+          </a:p>
+          <a:p>
+            <a:r>
+              <a:rPr lang="en-US" dirty="0"/>
+              <a:t>During World War II the US military's concluded that the most-hit areas of the plane needed additional armor.</a:t>
+            </a:r>
+          </a:p>
+          <a:p>
+            <a:endParaRPr lang="en-US" sz="800" dirty="0"/>
+          </a:p>
+          <a:p>
+            <a:r>
+              <a:rPr lang="en-US" dirty="0"/>
+              <a:t>But statistician Abraham Wald (Statistical Research Group (SRG) - Military Panel at Columbia University) has recommended adding armor to the areas that showed the least damage. His reasoning was that the sample didn't include the planes which were shot down.</a:t>
+            </a:r>
+          </a:p>
+          <a:p>
+            <a:endParaRPr lang="en-US" sz="800" dirty="0"/>
+          </a:p>
+          <a:p>
+            <a:r>
+              <a:rPr lang="en-US" dirty="0"/>
+              <a:t>This is a very good example demonstrating that it is dangerous to use data "as is" to create a model, because the data may be biased to start with, and it can easily lead to creating a biased model.</a:t>
+            </a:r>
+            <a:br>
+              <a:rPr lang="en-US" dirty="0"/>
+            </a:br>
+            <a:br>
+              <a:rPr lang="en-US" sz="800" dirty="0"/>
+            </a:br>
+            <a:r>
+              <a:rPr lang="en-US" dirty="0"/>
+              <a:t>Problem occur when we have:</a:t>
+            </a:r>
+            <a:br>
+              <a:rPr lang="en-US" dirty="0"/>
+            </a:br>
+            <a:r>
+              <a:rPr lang="en-US" dirty="0"/>
+              <a:t> - under-represented features (missing data)</a:t>
+            </a:r>
+            <a:br>
+              <a:rPr lang="en-US" dirty="0"/>
+            </a:br>
+            <a:r>
+              <a:rPr lang="en-US" dirty="0"/>
+              <a:t> - over-represented features,</a:t>
+            </a:r>
+            <a:br>
+              <a:rPr lang="en-US" dirty="0"/>
+            </a:br>
+            <a:r>
+              <a:rPr lang="en-US" dirty="0"/>
+              <a:t> - "target leakage" effect.</a:t>
+            </a:r>
+            <a:br>
+              <a:rPr lang="en-US" dirty="0"/>
+            </a:br>
+            <a:br>
+              <a:rPr lang="en-US" sz="800" dirty="0"/>
+            </a:br>
+            <a:r>
+              <a:rPr lang="en-US" dirty="0"/>
+              <a:t>Survivorship bias:</a:t>
+            </a:r>
+            <a:br>
+              <a:rPr lang="en-US" dirty="0"/>
+            </a:br>
+            <a:r>
+              <a:rPr lang="en-US" dirty="0"/>
+              <a:t> - </a:t>
+            </a:r>
+            <a:r>
+              <a:rPr lang="en-US" dirty="0">
+                <a:hlinkClick r:id="rId2"/>
+              </a:rPr>
+              <a:t>https://www.youtube.com/watch?v=B3YQJ5DwTzM</a:t>
+            </a:r>
+            <a:r>
+              <a:rPr lang="en-US" dirty="0"/>
+              <a:t> </a:t>
+            </a:r>
+            <a:br>
+              <a:rPr lang="en-US" dirty="0"/>
+            </a:br>
+            <a:br>
+              <a:rPr lang="en-US" sz="800" dirty="0"/>
+            </a:br>
+            <a:r>
+              <a:rPr lang="en-US" dirty="0"/>
+              <a:t>Gender Bias:</a:t>
+            </a:r>
+            <a:br>
+              <a:rPr lang="en-US" dirty="0"/>
+            </a:br>
+            <a:r>
+              <a:rPr lang="en-US" dirty="0"/>
+              <a:t> - </a:t>
+            </a:r>
+            <a:r>
+              <a:rPr lang="en-US" dirty="0">
+                <a:hlinkClick r:id="rId3"/>
+              </a:rPr>
+              <a:t>https://www.youtube.com/watch?v=p60-Jdq754A</a:t>
+            </a:r>
+            <a:r>
+              <a:rPr lang="en-US" dirty="0"/>
+              <a:t> </a:t>
+            </a:r>
+            <a:br>
+              <a:rPr lang="en-US" dirty="0"/>
+            </a:br>
+            <a:br>
+              <a:rPr lang="en-US" sz="800" dirty="0"/>
+            </a:br>
+            <a:r>
+              <a:rPr lang="en-US" dirty="0"/>
+              <a:t>Bias in criminal justice:</a:t>
+            </a:r>
+            <a:br>
+              <a:rPr lang="en-US" dirty="0"/>
+            </a:br>
+            <a:r>
+              <a:rPr lang="en-US" dirty="0"/>
+              <a:t> - </a:t>
+            </a:r>
+            <a:r>
+              <a:rPr lang="en-US" dirty="0">
+                <a:hlinkClick r:id="rId4"/>
+              </a:rPr>
+              <a:t>https://www.youtube.com/watch?v=Gi4YeRqfb24</a:t>
+            </a:r>
+            <a:r>
+              <a:rPr lang="en-US" dirty="0"/>
+              <a:t> </a:t>
+            </a:r>
+            <a:br>
+              <a:rPr lang="en-US" dirty="0"/>
+            </a:br>
+            <a:br>
+              <a:rPr lang="en-US" sz="800" dirty="0"/>
+            </a:br>
+            <a:r>
+              <a:rPr lang="en-US" dirty="0"/>
+              <a:t>Target Leakage:</a:t>
+            </a:r>
+            <a:br>
+              <a:rPr lang="en-US" dirty="0"/>
+            </a:br>
+            <a:r>
+              <a:rPr lang="en-US" dirty="0"/>
+              <a:t> - </a:t>
+            </a:r>
+            <a:r>
+              <a:rPr lang="en-US" dirty="0">
+                <a:hlinkClick r:id="rId5"/>
+              </a:rPr>
+              <a:t>https://www.youtube.com/watch?v=y8qaI5mpJeA</a:t>
+            </a:r>
+            <a:r>
+              <a:rPr lang="en-US" dirty="0"/>
+              <a:t> </a:t>
+            </a:r>
+          </a:p>
+        </p:txBody>
+      </p:sp>
+      <p:pic>
+        <p:nvPicPr>
+          <p:cNvPr id="6" name="Picture 5">
+            <a:extLst>
+              <a:ext uri="{FF2B5EF4-FFF2-40B4-BE49-F238E27FC236}">
+                <a16:creationId xmlns:a16="http://schemas.microsoft.com/office/drawing/2014/main" id="{EA27DDEE-0422-6E4F-AC95-3AFA579C3DB8}"/>
+              </a:ext>
+            </a:extLst>
+          </p:cNvPr>
+          <p:cNvPicPr>
+            <a:picLocks noChangeAspect="1"/>
+          </p:cNvPicPr>
+          <p:nvPr/>
+        </p:nvPicPr>
+        <p:blipFill>
+          <a:blip r:embed="rId6" cstate="email">
+            <a:extLst>
+              <a:ext uri="{28A0092B-C50C-407E-A947-70E740481C1C}">
+                <a14:useLocalDpi xmlns:a14="http://schemas.microsoft.com/office/drawing/2010/main"/>
+              </a:ext>
+            </a:extLst>
+          </a:blip>
+          <a:stretch>
+            <a:fillRect/>
+          </a:stretch>
+        </p:blipFill>
+        <p:spPr>
+          <a:xfrm>
+            <a:off x="6617056" y="225286"/>
+            <a:ext cx="5429170" cy="3419062"/>
+          </a:xfrm>
+          <a:prstGeom prst="rect">
+            <a:avLst/>
+          </a:prstGeom>
+        </p:spPr>
+      </p:pic>
+      <p:sp>
+        <p:nvSpPr>
+          <p:cNvPr id="2" name="TextBox 1">
+            <a:extLst>
+              <a:ext uri="{FF2B5EF4-FFF2-40B4-BE49-F238E27FC236}">
+                <a16:creationId xmlns:a16="http://schemas.microsoft.com/office/drawing/2014/main" id="{07789739-19F1-2B48-92A1-6C60983C6616}"/>
+              </a:ext>
+            </a:extLst>
+          </p:cNvPr>
+          <p:cNvSpPr txBox="1"/>
+          <p:nvPr/>
+        </p:nvSpPr>
+        <p:spPr>
+          <a:xfrm>
+            <a:off x="5254388" y="3987018"/>
+            <a:ext cx="6791838" cy="2246769"/>
+          </a:xfrm>
+          <a:prstGeom prst="rect">
+            <a:avLst/>
+          </a:prstGeom>
+          <a:noFill/>
+        </p:spPr>
+        <p:txBody>
+          <a:bodyPr wrap="square" rtlCol="0">
+            <a:spAutoFit/>
+          </a:bodyPr>
+          <a:lstStyle/>
+          <a:p>
+            <a:pPr marL="285750" indent="-285750">
+              <a:buFont typeface="Arial" panose="020B0604020202020204" pitchFamily="34" charset="0"/>
+              <a:buChar char="•"/>
+            </a:pPr>
+            <a:r>
+              <a:rPr lang="en-US" b="1" dirty="0">
+                <a:solidFill>
+                  <a:srgbClr val="0070C0"/>
+                </a:solidFill>
+              </a:rPr>
+              <a:t>Data on killed (downed) aircrafts was unobservable</a:t>
+            </a:r>
+            <a:r>
+              <a:rPr lang="en-US" dirty="0"/>
+              <a:t>. Without such data, Wald set to work on the problem of estimating the probability that an aircraft that has sustained a fixed number of hits will survive an additional hit.</a:t>
+            </a:r>
+          </a:p>
+          <a:p>
+            <a:pPr marL="285750" indent="-285750">
+              <a:buFont typeface="Arial" panose="020B0604020202020204" pitchFamily="34" charset="0"/>
+              <a:buChar char="•"/>
+            </a:pPr>
+            <a:r>
+              <a:rPr lang="en-US" dirty="0"/>
+              <a:t>He also attempted to estimate the survival probability of an aircraft sustaining a hit to one of various portions of the body, with different failure rates (e.g.. a hit to the nose is more lethal than a hit to the middle of the fuselage).</a:t>
+            </a:r>
+          </a:p>
+          <a:p>
+            <a:pPr marL="285750" indent="-285750">
+              <a:buFont typeface="Arial" panose="020B0604020202020204" pitchFamily="34" charset="0"/>
+              <a:buChar char="•"/>
+            </a:pPr>
+            <a:r>
+              <a:rPr lang="en-US" dirty="0"/>
+              <a:t>The work was written as a set of 8 memoranda. Very good description is here:</a:t>
+            </a:r>
+            <a:br>
+              <a:rPr lang="en-US" dirty="0"/>
+            </a:br>
+            <a:r>
+              <a:rPr lang="en-US" dirty="0"/>
+              <a:t>   - </a:t>
+            </a:r>
+            <a:r>
+              <a:rPr lang="en-US" dirty="0">
+                <a:hlinkClick r:id="rId7"/>
+              </a:rPr>
+              <a:t>https://people.ucsc.edu/~msmangel/Wald.pdf</a:t>
+            </a:r>
+            <a:r>
+              <a:rPr lang="en-US" dirty="0"/>
+              <a:t> </a:t>
+            </a:r>
+          </a:p>
+          <a:p>
+            <a:pPr marL="285750" indent="-285750">
+              <a:buFont typeface="Arial" panose="020B0604020202020204" pitchFamily="34" charset="0"/>
+              <a:buChar char="•"/>
+            </a:pPr>
+            <a:r>
+              <a:rPr lang="en-US" dirty="0"/>
+              <a:t>Also here is a 30-min podcast  </a:t>
+            </a:r>
+            <a:r>
+              <a:rPr lang="en-US" dirty="0">
+                <a:hlinkClick r:id="rId8"/>
+              </a:rPr>
+              <a:t>https://youarenotsosmart.com/2016/01/02/yanss-065-survivorship-bias-rebroadcast/</a:t>
+            </a:r>
+            <a:r>
+              <a:rPr lang="en-US" dirty="0"/>
+              <a:t> </a:t>
+            </a:r>
+          </a:p>
+        </p:txBody>
+      </p:sp>
+    </p:spTree>
+    <p:extLst>
+      <p:ext uri="{BB962C8B-B14F-4D97-AF65-F5344CB8AC3E}">
+        <p14:creationId xmlns:p14="http://schemas.microsoft.com/office/powerpoint/2010/main" val="3774625219"/>
+      </p:ext>
+    </p:extLst>
+  </p:cSld>
+  <p:clrMapOvr>
+    <a:masterClrMapping/>
+  </p:clrMapOvr>
+</p:sld>
+</file>
+
+<file path=ppt/slides/slide20.xml><?xml version="1.0" encoding="utf-8"?>
+<p:sld xmlns:a="http://schemas.openxmlformats.org/drawingml/2006/main" xmlns:r="http://schemas.openxmlformats.org/officeDocument/2006/relationships" xmlns:p="http://schemas.openxmlformats.org/presentationml/2006/main">
+  <p:cSld>
+    <p:spTree>
+      <p:nvGrpSpPr>
+        <p:cNvPr id="1" name=""/>
+        <p:cNvGrpSpPr/>
+        <p:nvPr/>
+      </p:nvGrpSpPr>
+      <p:grpSpPr>
+        <a:xfrm>
+          <a:off x="0" y="0"/>
+          <a:ext cx="0" cy="0"/>
+          <a:chOff x="0" y="0"/>
+          <a:chExt cx="0" cy="0"/>
+        </a:xfrm>
+      </p:grpSpPr>
+      <p:sp>
+        <p:nvSpPr>
+          <p:cNvPr id="4" name="TextBox 3">
+            <a:extLst>
+              <a:ext uri="{FF2B5EF4-FFF2-40B4-BE49-F238E27FC236}">
+                <a16:creationId xmlns:a16="http://schemas.microsoft.com/office/drawing/2014/main" id="{BFEE87B2-5B9C-5C4C-93EC-F7473021FFC2}"/>
+              </a:ext>
+            </a:extLst>
+          </p:cNvPr>
+          <p:cNvSpPr txBox="1"/>
+          <p:nvPr/>
+        </p:nvSpPr>
+        <p:spPr>
+          <a:xfrm>
+            <a:off x="234778" y="185351"/>
+            <a:ext cx="3991233" cy="523220"/>
+          </a:xfrm>
+          <a:prstGeom prst="rect">
+            <a:avLst/>
+          </a:prstGeom>
+          <a:noFill/>
+        </p:spPr>
+        <p:txBody>
+          <a:bodyPr wrap="square" rtlCol="0">
+            <a:spAutoFit/>
+          </a:bodyPr>
+          <a:lstStyle/>
+          <a:p>
+            <a:r>
+              <a:rPr lang="en-US" sz="2800" b="1" dirty="0"/>
+              <a:t>Tools and Libraries</a:t>
+            </a:r>
+          </a:p>
+        </p:txBody>
+      </p:sp>
+      <p:sp>
+        <p:nvSpPr>
+          <p:cNvPr id="5" name="TextBox 4">
+            <a:extLst>
+              <a:ext uri="{FF2B5EF4-FFF2-40B4-BE49-F238E27FC236}">
+                <a16:creationId xmlns:a16="http://schemas.microsoft.com/office/drawing/2014/main" id="{A8E7B846-443F-764F-8F5D-80476415DB61}"/>
+              </a:ext>
+            </a:extLst>
+          </p:cNvPr>
+          <p:cNvSpPr txBox="1"/>
+          <p:nvPr/>
+        </p:nvSpPr>
+        <p:spPr>
+          <a:xfrm>
+            <a:off x="3002691" y="827902"/>
+            <a:ext cx="8872152" cy="4832092"/>
+          </a:xfrm>
+          <a:prstGeom prst="rect">
+            <a:avLst/>
+          </a:prstGeom>
+          <a:noFill/>
+        </p:spPr>
+        <p:txBody>
+          <a:bodyPr wrap="square" rtlCol="0">
+            <a:spAutoFit/>
+          </a:bodyPr>
+          <a:lstStyle/>
+          <a:p>
+            <a:pPr marL="285750" indent="-285750">
+              <a:buFont typeface="Arial" panose="020B0604020202020204" pitchFamily="34" charset="0"/>
+              <a:buChar char="•"/>
+            </a:pPr>
+            <a:r>
+              <a:rPr lang="en-US" dirty="0"/>
+              <a:t>Scikit-learn </a:t>
+            </a:r>
+            <a:br>
+              <a:rPr lang="en-US" dirty="0"/>
+            </a:br>
+            <a:r>
+              <a:rPr lang="en-US" dirty="0"/>
+              <a:t>- </a:t>
+            </a:r>
+            <a:r>
+              <a:rPr lang="en-US" dirty="0">
+                <a:hlinkClick r:id="rId2"/>
+              </a:rPr>
+              <a:t>https://scikit-learn.org/stable/modules/naive_bayes.html</a:t>
+            </a:r>
+            <a:r>
+              <a:rPr lang="en-US" dirty="0"/>
+              <a:t> -</a:t>
+            </a:r>
+            <a:br>
+              <a:rPr lang="en-US" dirty="0"/>
+            </a:br>
+            <a:r>
+              <a:rPr lang="en-US" dirty="0"/>
+              <a:t>- </a:t>
+            </a:r>
+            <a:r>
+              <a:rPr lang="en-US" dirty="0">
+                <a:hlinkClick r:id="rId3"/>
+              </a:rPr>
+              <a:t>https://scikit-learn.org/stable/modules/generated/sklearn.naive_bayes.GaussianNB.html</a:t>
+            </a:r>
+            <a:r>
+              <a:rPr lang="en-US" dirty="0"/>
+              <a:t> - </a:t>
+            </a:r>
+            <a:br>
+              <a:rPr lang="en-US" dirty="0"/>
+            </a:br>
+            <a:r>
+              <a:rPr lang="en-US" dirty="0"/>
+              <a:t>- </a:t>
+            </a:r>
+            <a:r>
+              <a:rPr lang="en-US" dirty="0">
+                <a:hlinkClick r:id="rId4"/>
+              </a:rPr>
+              <a:t>https://scikit-learn.org/stable/modules/generated/sklearn.naive_bayes.MultinomialNB.html</a:t>
+            </a:r>
+            <a:r>
+              <a:rPr lang="en-US" dirty="0"/>
+              <a:t> - </a:t>
+            </a:r>
+            <a:br>
+              <a:rPr lang="en-US" dirty="0"/>
+            </a:br>
+            <a:r>
+              <a:rPr lang="en-US" dirty="0"/>
+              <a:t>- </a:t>
+            </a:r>
+            <a:r>
+              <a:rPr lang="en-US" dirty="0">
+                <a:hlinkClick r:id="rId5"/>
+              </a:rPr>
+              <a:t>https://scikit-learn.org/stable/modules/linear_model.html#bayesian-regression</a:t>
+            </a:r>
+            <a:r>
+              <a:rPr lang="en-US" dirty="0"/>
+              <a:t> </a:t>
+            </a:r>
+            <a:br>
+              <a:rPr lang="en-US" dirty="0"/>
+            </a:br>
+            <a:r>
+              <a:rPr lang="en-US" dirty="0"/>
+              <a:t>- etc.</a:t>
+            </a:r>
+          </a:p>
+          <a:p>
+            <a:pPr marL="285750" indent="-285750">
+              <a:buFont typeface="Arial" panose="020B0604020202020204" pitchFamily="34" charset="0"/>
+              <a:buChar char="•"/>
+            </a:pPr>
+            <a:r>
+              <a:rPr lang="en-US" dirty="0" err="1"/>
+              <a:t>PyStan</a:t>
+            </a:r>
+            <a:r>
+              <a:rPr lang="en-US" dirty="0"/>
+              <a:t> - </a:t>
+            </a:r>
+            <a:r>
+              <a:rPr lang="en-US" dirty="0" err="1"/>
+              <a:t>PyStan</a:t>
+            </a:r>
+            <a:r>
+              <a:rPr lang="en-US" dirty="0"/>
+              <a:t> is a Python interface to Stan, a package for Bayesian inference.</a:t>
+            </a:r>
+            <a:br>
+              <a:rPr lang="en-US" dirty="0"/>
+            </a:br>
+            <a:r>
+              <a:rPr lang="en-US" dirty="0"/>
+              <a:t>- </a:t>
+            </a:r>
+            <a:r>
+              <a:rPr lang="en-US" dirty="0">
+                <a:hlinkClick r:id="rId6"/>
+              </a:rPr>
+              <a:t>https://mc-stan.org/users/interfaces/pystan</a:t>
+            </a:r>
+            <a:r>
+              <a:rPr lang="en-US" dirty="0"/>
+              <a:t> </a:t>
+            </a:r>
+            <a:br>
+              <a:rPr lang="en-US" dirty="0"/>
+            </a:br>
+            <a:r>
+              <a:rPr lang="en-US" dirty="0"/>
+              <a:t>- </a:t>
+            </a:r>
+            <a:r>
+              <a:rPr lang="en-US" dirty="0">
+                <a:hlinkClick r:id="rId7"/>
+              </a:rPr>
+              <a:t>https://pystan.readthedocs.io/en/latest/</a:t>
+            </a:r>
+            <a:r>
+              <a:rPr lang="en-US" dirty="0"/>
+              <a:t> -  </a:t>
+            </a:r>
+          </a:p>
+          <a:p>
+            <a:pPr marL="285750" indent="-285750">
+              <a:buFont typeface="Arial" panose="020B0604020202020204" pitchFamily="34" charset="0"/>
+              <a:buChar char="•"/>
+            </a:pPr>
+            <a:r>
+              <a:rPr lang="en-US" dirty="0"/>
+              <a:t>PyMC3 - Python package for Bayesian statistical modeling and probabilistic machine learning which focuses on advanced Markov chain Monte Carlo and variational fitting algorithms. It was originally built on Theano.</a:t>
+            </a:r>
+            <a:br>
+              <a:rPr lang="en-US" dirty="0"/>
+            </a:br>
+            <a:r>
+              <a:rPr lang="en-US" dirty="0"/>
+              <a:t> - </a:t>
+            </a:r>
+            <a:r>
+              <a:rPr lang="en-US" dirty="0">
+                <a:hlinkClick r:id="rId8"/>
+              </a:rPr>
+              <a:t>https://docs.pymc.io/</a:t>
+            </a:r>
+            <a:r>
+              <a:rPr lang="en-US" dirty="0"/>
+              <a:t> - </a:t>
+            </a:r>
+          </a:p>
+          <a:p>
+            <a:pPr marL="285750" indent="-285750">
+              <a:buFont typeface="Arial" panose="020B0604020202020204" pitchFamily="34" charset="0"/>
+              <a:buChar char="•"/>
+            </a:pPr>
+            <a:r>
+              <a:rPr lang="en-US" dirty="0"/>
+              <a:t>Pyro - a universal probabilistic programming language (PPL) written in Python and supported by </a:t>
+            </a:r>
+            <a:r>
+              <a:rPr lang="en-US" dirty="0" err="1"/>
+              <a:t>PyTorch</a:t>
+            </a:r>
+            <a:r>
+              <a:rPr lang="en-US" dirty="0"/>
+              <a:t> on the backend. Pyro enables flexible and expressive deep probabilistic modeling, unifying the best of modern deep learning and Bayesian modeling. </a:t>
+            </a:r>
+            <a:br>
+              <a:rPr lang="en-US" dirty="0"/>
+            </a:br>
+            <a:r>
+              <a:rPr lang="en-US" dirty="0"/>
+              <a:t> - </a:t>
+            </a:r>
+            <a:r>
+              <a:rPr lang="en-US" dirty="0">
+                <a:hlinkClick r:id="rId9"/>
+              </a:rPr>
+              <a:t>https://pyro.ai/</a:t>
+            </a:r>
+            <a:r>
+              <a:rPr lang="en-US" dirty="0"/>
+              <a:t> - </a:t>
+            </a:r>
+          </a:p>
+          <a:p>
+            <a:pPr marL="285750" indent="-285750">
+              <a:buFont typeface="Arial" panose="020B0604020202020204" pitchFamily="34" charset="0"/>
+              <a:buChar char="•"/>
+            </a:pPr>
+            <a:r>
+              <a:rPr lang="en-US" dirty="0"/>
+              <a:t>TensorFlow Probability is a library for probabilistic reasoning and statistical analysis.</a:t>
+            </a:r>
+            <a:br>
+              <a:rPr lang="en-US" dirty="0"/>
+            </a:br>
+            <a:r>
+              <a:rPr lang="en-US" dirty="0"/>
+              <a:t> - </a:t>
+            </a:r>
+            <a:r>
+              <a:rPr lang="en-US" dirty="0">
+                <a:hlinkClick r:id="rId10"/>
+              </a:rPr>
+              <a:t>https://www.tensorflow.org/probability</a:t>
+            </a:r>
+            <a:r>
+              <a:rPr lang="en-US" dirty="0"/>
+              <a:t> - </a:t>
+            </a:r>
+          </a:p>
+          <a:p>
+            <a:pPr marL="285750" indent="-285750">
+              <a:buFont typeface="Arial" panose="020B0604020202020204" pitchFamily="34" charset="0"/>
+              <a:buChar char="•"/>
+            </a:pPr>
+            <a:r>
+              <a:rPr lang="en-US" dirty="0"/>
+              <a:t>Edward - a python library on top of TensorFlow for probabilistic modeling, inference, and criticism.</a:t>
+            </a:r>
+            <a:br>
+              <a:rPr lang="en-US" dirty="0"/>
+            </a:br>
+            <a:r>
+              <a:rPr lang="en-US" dirty="0"/>
+              <a:t> - http://</a:t>
+            </a:r>
+            <a:r>
+              <a:rPr lang="en-US" dirty="0" err="1"/>
+              <a:t>edwardlib.org</a:t>
+            </a:r>
+            <a:r>
+              <a:rPr lang="en-US" dirty="0"/>
+              <a:t>/ – </a:t>
+            </a:r>
+            <a:br>
+              <a:rPr lang="en-US" dirty="0"/>
+            </a:br>
+            <a:r>
+              <a:rPr lang="en-US" dirty="0"/>
+              <a:t> --</a:t>
+            </a:r>
+          </a:p>
+        </p:txBody>
+      </p:sp>
+      <p:pic>
+        <p:nvPicPr>
+          <p:cNvPr id="1026" name="Picture 2" descr="Pyro">
+            <a:extLst>
+              <a:ext uri="{FF2B5EF4-FFF2-40B4-BE49-F238E27FC236}">
+                <a16:creationId xmlns:a16="http://schemas.microsoft.com/office/drawing/2014/main" id="{1AF695B5-D650-C441-BB64-995A0C18AAE4}"/>
+              </a:ext>
+            </a:extLst>
+          </p:cNvPr>
+          <p:cNvPicPr>
+            <a:picLocks noChangeAspect="1" noChangeArrowheads="1"/>
+          </p:cNvPicPr>
+          <p:nvPr/>
+        </p:nvPicPr>
+        <p:blipFill>
+          <a:blip r:embed="rId11" cstate="email">
+            <a:extLst>
+              <a:ext uri="{28A0092B-C50C-407E-A947-70E740481C1C}">
+                <a14:useLocalDpi xmlns:a14="http://schemas.microsoft.com/office/drawing/2010/main"/>
+              </a:ext>
+            </a:extLst>
+          </a:blip>
+          <a:srcRect/>
+          <a:stretch>
+            <a:fillRect/>
+          </a:stretch>
+        </p:blipFill>
+        <p:spPr bwMode="auto">
+          <a:xfrm>
+            <a:off x="1668162" y="3793701"/>
+            <a:ext cx="727885" cy="617662"/>
+          </a:xfrm>
+          <a:prstGeom prst="rect">
+            <a:avLst/>
+          </a:prstGeom>
+          <a:noFill/>
+          <a:extLst>
+            <a:ext uri="{909E8E84-426E-40DD-AFC4-6F175D3DCCD1}">
+              <a14:hiddenFill xmlns:a14="http://schemas.microsoft.com/office/drawing/2010/main">
+                <a:solidFill>
+                  <a:srgbClr val="FFFFFF"/>
+                </a:solidFill>
+              </a14:hiddenFill>
+            </a:ext>
+          </a:extLst>
+        </p:spPr>
+      </p:pic>
+      <p:pic>
+        <p:nvPicPr>
+          <p:cNvPr id="1030" name="Picture 6">
+            <a:extLst>
+              <a:ext uri="{FF2B5EF4-FFF2-40B4-BE49-F238E27FC236}">
+                <a16:creationId xmlns:a16="http://schemas.microsoft.com/office/drawing/2014/main" id="{C948C60E-514C-CC40-B888-A4369EDDF5AB}"/>
+              </a:ext>
+            </a:extLst>
+          </p:cNvPr>
+          <p:cNvPicPr>
+            <a:picLocks noChangeAspect="1" noChangeArrowheads="1"/>
+          </p:cNvPicPr>
+          <p:nvPr/>
+        </p:nvPicPr>
+        <p:blipFill rotWithShape="1">
+          <a:blip r:embed="rId12" cstate="email">
+            <a:extLst>
+              <a:ext uri="{28A0092B-C50C-407E-A947-70E740481C1C}">
+                <a14:useLocalDpi xmlns:a14="http://schemas.microsoft.com/office/drawing/2010/main"/>
+              </a:ext>
+            </a:extLst>
+          </a:blip>
+          <a:srcRect r="-179"/>
+          <a:stretch/>
+        </p:blipFill>
+        <p:spPr bwMode="auto">
+          <a:xfrm>
+            <a:off x="352876" y="2918209"/>
+            <a:ext cx="2324093" cy="767487"/>
+          </a:xfrm>
+          <a:prstGeom prst="rect">
+            <a:avLst/>
+          </a:prstGeom>
+          <a:noFill/>
+          <a:extLst>
+            <a:ext uri="{909E8E84-426E-40DD-AFC4-6F175D3DCCD1}">
+              <a14:hiddenFill xmlns:a14="http://schemas.microsoft.com/office/drawing/2010/main">
+                <a:solidFill>
+                  <a:srgbClr val="FFFFFF"/>
+                </a:solidFill>
+              </a14:hiddenFill>
+            </a:ext>
+          </a:extLst>
+        </p:spPr>
+      </p:pic>
+      <p:sp>
+        <p:nvSpPr>
+          <p:cNvPr id="6" name="AutoShape 12" descr="PyStan 使用入门| R bloggers">
+            <a:extLst>
+              <a:ext uri="{FF2B5EF4-FFF2-40B4-BE49-F238E27FC236}">
+                <a16:creationId xmlns:a16="http://schemas.microsoft.com/office/drawing/2014/main" id="{6650C9E9-BDF7-A744-A22E-893BB1917E8D}"/>
+              </a:ext>
+            </a:extLst>
+          </p:cNvPr>
+          <p:cNvSpPr>
+            <a:spLocks noChangeAspect="1" noChangeArrowheads="1"/>
+          </p:cNvSpPr>
+          <p:nvPr/>
+        </p:nvSpPr>
+        <p:spPr bwMode="auto">
+          <a:xfrm>
+            <a:off x="5943600" y="3276600"/>
+            <a:ext cx="304800" cy="304800"/>
+          </a:xfrm>
+          <a:prstGeom prst="rect">
+            <a:avLst/>
+          </a:prstGeom>
+          <a:noFill/>
+          <a:extLst>
+            <a:ext uri="{909E8E84-426E-40DD-AFC4-6F175D3DCCD1}">
+              <a14:hiddenFill xmlns:a14="http://schemas.microsoft.com/office/drawing/2010/main">
+                <a:solidFill>
+                  <a:srgbClr val="FFFFFF"/>
+                </a:solidFill>
+              </a14:hiddenFill>
+            </a:ext>
+          </a:extLst>
+        </p:spPr>
+        <p:txBody>
+          <a:bodyPr vert="horz" wrap="square" lIns="91440" tIns="45720" rIns="91440" bIns="45720" numCol="1" anchor="t" anchorCtr="0" compatLnSpc="1">
+            <a:prstTxWarp prst="textNoShape">
+              <a:avLst/>
+            </a:prstTxWarp>
+          </a:bodyPr>
+          <a:lstStyle/>
+          <a:p>
+            <a:endParaRPr lang="en-US"/>
+          </a:p>
+        </p:txBody>
+      </p:sp>
+      <p:pic>
+        <p:nvPicPr>
+          <p:cNvPr id="7" name="Picture 6">
+            <a:extLst>
+              <a:ext uri="{FF2B5EF4-FFF2-40B4-BE49-F238E27FC236}">
+                <a16:creationId xmlns:a16="http://schemas.microsoft.com/office/drawing/2014/main" id="{D4318B43-9864-0C41-AC6B-0884C16E3A66}"/>
+              </a:ext>
+            </a:extLst>
+          </p:cNvPr>
+          <p:cNvPicPr>
+            <a:picLocks noChangeAspect="1"/>
+          </p:cNvPicPr>
+          <p:nvPr/>
+        </p:nvPicPr>
+        <p:blipFill>
+          <a:blip r:embed="rId13" cstate="email">
+            <a:extLst>
+              <a:ext uri="{28A0092B-C50C-407E-A947-70E740481C1C}">
+                <a14:useLocalDpi xmlns:a14="http://schemas.microsoft.com/office/drawing/2010/main"/>
+              </a:ext>
+            </a:extLst>
+          </a:blip>
+          <a:stretch>
+            <a:fillRect/>
+          </a:stretch>
+        </p:blipFill>
+        <p:spPr>
+          <a:xfrm>
+            <a:off x="1897244" y="1918094"/>
+            <a:ext cx="735275" cy="947469"/>
+          </a:xfrm>
+          <a:prstGeom prst="rect">
+            <a:avLst/>
+          </a:prstGeom>
+        </p:spPr>
+      </p:pic>
+      <p:pic>
+        <p:nvPicPr>
+          <p:cNvPr id="1038" name="Picture 14">
+            <a:extLst>
+              <a:ext uri="{FF2B5EF4-FFF2-40B4-BE49-F238E27FC236}">
+                <a16:creationId xmlns:a16="http://schemas.microsoft.com/office/drawing/2014/main" id="{0657378E-A893-504A-BF1E-D05E91804BDB}"/>
+              </a:ext>
+            </a:extLst>
+          </p:cNvPr>
+          <p:cNvPicPr>
+            <a:picLocks noChangeAspect="1" noChangeArrowheads="1"/>
+          </p:cNvPicPr>
+          <p:nvPr/>
+        </p:nvPicPr>
+        <p:blipFill>
+          <a:blip r:embed="rId14" cstate="email">
+            <a:extLst>
+              <a:ext uri="{28A0092B-C50C-407E-A947-70E740481C1C}">
+                <a14:useLocalDpi xmlns:a14="http://schemas.microsoft.com/office/drawing/2010/main"/>
+              </a:ext>
+            </a:extLst>
+          </a:blip>
+          <a:srcRect/>
+          <a:stretch>
+            <a:fillRect/>
+          </a:stretch>
+        </p:blipFill>
+        <p:spPr bwMode="auto">
+          <a:xfrm>
+            <a:off x="1102230" y="864563"/>
+            <a:ext cx="1470378" cy="791477"/>
+          </a:xfrm>
+          <a:prstGeom prst="rect">
+            <a:avLst/>
+          </a:prstGeom>
+          <a:noFill/>
+          <a:extLst>
+            <a:ext uri="{909E8E84-426E-40DD-AFC4-6F175D3DCCD1}">
+              <a14:hiddenFill xmlns:a14="http://schemas.microsoft.com/office/drawing/2010/main">
+                <a:solidFill>
+                  <a:srgbClr val="FFFFFF"/>
+                </a:solidFill>
+              </a14:hiddenFill>
+            </a:ext>
+          </a:extLst>
+        </p:spPr>
+      </p:pic>
+      <p:pic>
+        <p:nvPicPr>
+          <p:cNvPr id="1040" name="Picture 16" descr="TensorFlow Probability">
+            <a:extLst>
+              <a:ext uri="{FF2B5EF4-FFF2-40B4-BE49-F238E27FC236}">
+                <a16:creationId xmlns:a16="http://schemas.microsoft.com/office/drawing/2014/main" id="{5C1F8093-950C-2441-82AD-4753925096D2}"/>
+              </a:ext>
+            </a:extLst>
+          </p:cNvPr>
+          <p:cNvPicPr>
+            <a:picLocks noChangeAspect="1" noChangeArrowheads="1"/>
+          </p:cNvPicPr>
+          <p:nvPr/>
+        </p:nvPicPr>
+        <p:blipFill rotWithShape="1">
+          <a:blip r:embed="rId15" cstate="email">
+            <a:extLst>
+              <a:ext uri="{28A0092B-C50C-407E-A947-70E740481C1C}">
+                <a14:useLocalDpi xmlns:a14="http://schemas.microsoft.com/office/drawing/2010/main"/>
+              </a:ext>
+            </a:extLst>
+          </a:blip>
+          <a:srcRect/>
+          <a:stretch/>
+        </p:blipFill>
+        <p:spPr bwMode="auto">
+          <a:xfrm>
+            <a:off x="2116426" y="4519368"/>
+            <a:ext cx="582943" cy="648931"/>
+          </a:xfrm>
+          <a:prstGeom prst="rect">
+            <a:avLst/>
+          </a:prstGeom>
+          <a:noFill/>
+          <a:extLst>
+            <a:ext uri="{909E8E84-426E-40DD-AFC4-6F175D3DCCD1}">
+              <a14:hiddenFill xmlns:a14="http://schemas.microsoft.com/office/drawing/2010/main">
+                <a:solidFill>
+                  <a:srgbClr val="FFFFFF"/>
+                </a:solidFill>
+              </a14:hiddenFill>
+            </a:ext>
+          </a:extLst>
+        </p:spPr>
+      </p:pic>
+      <p:pic>
+        <p:nvPicPr>
+          <p:cNvPr id="1042" name="Picture 18" descr="Edward">
+            <a:extLst>
+              <a:ext uri="{FF2B5EF4-FFF2-40B4-BE49-F238E27FC236}">
+                <a16:creationId xmlns:a16="http://schemas.microsoft.com/office/drawing/2014/main" id="{662476BE-EE68-064C-B734-7CC4DA8CA0AA}"/>
+              </a:ext>
+            </a:extLst>
+          </p:cNvPr>
+          <p:cNvPicPr>
+            <a:picLocks noChangeAspect="1" noChangeArrowheads="1"/>
+          </p:cNvPicPr>
+          <p:nvPr/>
+        </p:nvPicPr>
+        <p:blipFill>
+          <a:blip r:embed="rId16" cstate="email">
+            <a:extLst>
+              <a:ext uri="{28A0092B-C50C-407E-A947-70E740481C1C}">
+                <a14:useLocalDpi xmlns:a14="http://schemas.microsoft.com/office/drawing/2010/main"/>
+              </a:ext>
+            </a:extLst>
+          </a:blip>
+          <a:srcRect/>
+          <a:stretch>
+            <a:fillRect/>
+          </a:stretch>
+        </p:blipFill>
+        <p:spPr bwMode="auto">
+          <a:xfrm>
+            <a:off x="1618153" y="5276304"/>
+            <a:ext cx="827902" cy="827902"/>
+          </a:xfrm>
+          <a:prstGeom prst="rect">
+            <a:avLst/>
+          </a:prstGeom>
+          <a:noFill/>
+          <a:extLst>
+            <a:ext uri="{909E8E84-426E-40DD-AFC4-6F175D3DCCD1}">
+              <a14:hiddenFill xmlns:a14="http://schemas.microsoft.com/office/drawing/2010/main">
+                <a:solidFill>
+                  <a:srgbClr val="FFFFFF"/>
+                </a:solidFill>
+              </a14:hiddenFill>
+            </a:ext>
+          </a:extLst>
+        </p:spPr>
+      </p:pic>
+    </p:spTree>
+    <p:extLst>
+      <p:ext uri="{BB962C8B-B14F-4D97-AF65-F5344CB8AC3E}">
+        <p14:creationId xmlns:p14="http://schemas.microsoft.com/office/powerpoint/2010/main" val="2864592274"/>
       </p:ext>
     </p:extLst>
   </p:cSld>
